--- a/docs/draftTwo.pptx
+++ b/docs/draftTwo.pptx
@@ -2,27 +2,27 @@
 <file path=ppt/presentation.xml><?xml version="1.0" encoding="utf-8"?>
 <p:presentation xmlns:p="http://schemas.openxmlformats.org/presentationml/2006/main">
   <p:sldMasterIdLst>
-    <p:sldMasterId xmlns:r="http://schemas.openxmlformats.org/officeDocument/2006/relationships" id="2147483648" r:id="Rbc2d93d079164b89"/>
+    <p:sldMasterId xmlns:r="http://schemas.openxmlformats.org/officeDocument/2006/relationships" id="2147483648" r:id="R4b5924d1c12b4d52"/>
   </p:sldMasterIdLst>
   <p:notesMasterIdLst>
-    <p:notesMasterId xmlns:r="http://schemas.openxmlformats.org/officeDocument/2006/relationships" r:id="Rd7407f85929140f9"/>
+    <p:notesMasterId xmlns:r="http://schemas.openxmlformats.org/officeDocument/2006/relationships" r:id="R3b98ecfa3a9c4c1e"/>
   </p:notesMasterIdLst>
   <p:sldIdLst>
-    <p:sldId xmlns:r="http://schemas.openxmlformats.org/officeDocument/2006/relationships" id="256" r:id="Rdc4308c9d39240fa"/>
-    <p:sldId xmlns:r="http://schemas.openxmlformats.org/officeDocument/2006/relationships" id="257" r:id="Rc8497ca04dc248ae"/>
-    <p:sldId xmlns:r="http://schemas.openxmlformats.org/officeDocument/2006/relationships" id="258" r:id="Rff6b4c5cb6804a84"/>
-    <p:sldId xmlns:r="http://schemas.openxmlformats.org/officeDocument/2006/relationships" id="259" r:id="R58e0ec71aacd42cd"/>
-    <p:sldId xmlns:r="http://schemas.openxmlformats.org/officeDocument/2006/relationships" id="260" r:id="R8e5c1d06c2eb492a"/>
-    <p:sldId xmlns:r="http://schemas.openxmlformats.org/officeDocument/2006/relationships" id="261" r:id="R32aff6c923c741c7"/>
-    <p:sldId xmlns:r="http://schemas.openxmlformats.org/officeDocument/2006/relationships" id="262" r:id="Rd42f12f7a2f343e7"/>
-    <p:sldId xmlns:r="http://schemas.openxmlformats.org/officeDocument/2006/relationships" id="263" r:id="R26b8f9050df54761"/>
-    <p:sldId xmlns:r="http://schemas.openxmlformats.org/officeDocument/2006/relationships" id="264" r:id="R29ac7b1f530f4675"/>
-    <p:sldId xmlns:r="http://schemas.openxmlformats.org/officeDocument/2006/relationships" id="265" r:id="R88a60f4e624d496f"/>
-    <p:sldId xmlns:r="http://schemas.openxmlformats.org/officeDocument/2006/relationships" id="266" r:id="R52dbf6a348204c1f"/>
-    <p:sldId xmlns:r="http://schemas.openxmlformats.org/officeDocument/2006/relationships" id="267" r:id="R9004880297e441de"/>
-    <p:sldId xmlns:r="http://schemas.openxmlformats.org/officeDocument/2006/relationships" id="268" r:id="Rd1b39e0037e646a4"/>
-    <p:sldId xmlns:r="http://schemas.openxmlformats.org/officeDocument/2006/relationships" id="269" r:id="R2f04a83356874fb1"/>
-    <p:sldId xmlns:r="http://schemas.openxmlformats.org/officeDocument/2006/relationships" id="270" r:id="R0ba44a4c4c7644b8"/>
+    <p:sldId xmlns:r="http://schemas.openxmlformats.org/officeDocument/2006/relationships" id="256" r:id="Ref4129fb73d94897"/>
+    <p:sldId xmlns:r="http://schemas.openxmlformats.org/officeDocument/2006/relationships" id="257" r:id="R3128d3659a5745d7"/>
+    <p:sldId xmlns:r="http://schemas.openxmlformats.org/officeDocument/2006/relationships" id="258" r:id="R033033c9cc3b4013"/>
+    <p:sldId xmlns:r="http://schemas.openxmlformats.org/officeDocument/2006/relationships" id="259" r:id="Rea3d89b9f2914007"/>
+    <p:sldId xmlns:r="http://schemas.openxmlformats.org/officeDocument/2006/relationships" id="260" r:id="R1ce6a3c6bfd84f0d"/>
+    <p:sldId xmlns:r="http://schemas.openxmlformats.org/officeDocument/2006/relationships" id="261" r:id="Rd9f6ca0ee73b41bd"/>
+    <p:sldId xmlns:r="http://schemas.openxmlformats.org/officeDocument/2006/relationships" id="262" r:id="R4af0671432514837"/>
+    <p:sldId xmlns:r="http://schemas.openxmlformats.org/officeDocument/2006/relationships" id="263" r:id="R282a1fe7d5a24470"/>
+    <p:sldId xmlns:r="http://schemas.openxmlformats.org/officeDocument/2006/relationships" id="264" r:id="Rf922168279a649e8"/>
+    <p:sldId xmlns:r="http://schemas.openxmlformats.org/officeDocument/2006/relationships" id="265" r:id="Re6bbb71a83c040b3"/>
+    <p:sldId xmlns:r="http://schemas.openxmlformats.org/officeDocument/2006/relationships" id="266" r:id="Rb52fffe598e1444a"/>
+    <p:sldId xmlns:r="http://schemas.openxmlformats.org/officeDocument/2006/relationships" id="267" r:id="R0343bf8ba0754acb"/>
+    <p:sldId xmlns:r="http://schemas.openxmlformats.org/officeDocument/2006/relationships" id="268" r:id="R9722192839af4da3"/>
+    <p:sldId xmlns:r="http://schemas.openxmlformats.org/officeDocument/2006/relationships" id="269" r:id="R9d79acb058ba4c72"/>
+    <p:sldId xmlns:r="http://schemas.openxmlformats.org/officeDocument/2006/relationships" id="270" r:id="R72bb9823f93e4358"/>
   </p:sldIdLst>
   <p:sldSz cx="12192000" cy="6858000"/>
   <p:notesSz cx="6858000" cy="9144000"/>
@@ -489,7 +489,71 @@
         <p:txBody>
           <a:bodyPr xmlns:a="http://schemas.openxmlformats.org/drawingml/2006/main"/>
           <a:lstStyle xmlns:a="http://schemas.openxmlformats.org/drawingml/2006/main"/>
-          <a:p xmlns:a="http://schemas.openxmlformats.org/drawingml/2006/main"/>
+          <a:p xmlns:a="http://schemas.openxmlformats.org/drawingml/2006/main">
+            <a:r>
+              <a:t>The biggest contribution of the NOW model is the idea of site categorization.</a:t>
+            </a:r>
+          </a:p>
+          <a:p xmlns:a="http://schemas.openxmlformats.org/drawingml/2006/main">
+            <a:r>
+              <a:t/>
+            </a:r>
+          </a:p>
+          <a:p xmlns:a="http://schemas.openxmlformats.org/drawingml/2006/main">
+            <a:r>
+              <a:t>We observed that not all monitoring locations behave the same way. Some sites consistently have low pollution levels. Others are heavily affected by traffic or urban activity. Others experience large fluctuations throughout the year.</a:t>
+            </a:r>
+          </a:p>
+          <a:p xmlns:a="http://schemas.openxmlformats.org/drawingml/2006/main">
+            <a:r>
+              <a:t/>
+            </a:r>
+          </a:p>
+          <a:p xmlns:a="http://schemas.openxmlformats.org/drawingml/2006/main">
+            <a:r>
+              <a:t>Instead of treating all sites identically, the project first groups sites into behavioral categories, or pollution regimes.</a:t>
+            </a:r>
+          </a:p>
+          <a:p xmlns:a="http://schemas.openxmlformats.org/drawingml/2006/main">
+            <a:r>
+              <a:t/>
+            </a:r>
+          </a:p>
+          <a:p xmlns:a="http://schemas.openxmlformats.org/drawingml/2006/main">
+            <a:r>
+              <a:t>To create these categories, the system analyzes characteristics such as average PM2.5 levels, pollution variability, seasonal behavior, and weather conditions.</a:t>
+            </a:r>
+          </a:p>
+          <a:p xmlns:a="http://schemas.openxmlformats.org/drawingml/2006/main">
+            <a:r>
+              <a:t/>
+            </a:r>
+          </a:p>
+          <a:p xmlns:a="http://schemas.openxmlformats.org/drawingml/2006/main">
+            <a:r>
+              <a:t>Initially, the project used four categories, known as k=4 categorization. During the improvement audit, we investigated a more detailed six-category approach, called k=6 categorization.</a:t>
+            </a:r>
+          </a:p>
+          <a:p xmlns:a="http://schemas.openxmlformats.org/drawingml/2006/main">
+            <a:r>
+              <a:t/>
+            </a:r>
+          </a:p>
+          <a:p xmlns:a="http://schemas.openxmlformats.org/drawingml/2006/main">
+            <a:r>
+              <a:t>The results showed that k=6 captured meaningful pollution regimes and sometimes achieved higher scores. However, it was also more fragile, with some categories containing only a few sites.</a:t>
+            </a:r>
+          </a:p>
+          <a:p xmlns:a="http://schemas.openxmlformats.org/drawingml/2006/main">
+            <a:r>
+              <a:t/>
+            </a:r>
+          </a:p>
+          <a:p xmlns:a="http://schemas.openxmlformats.org/drawingml/2006/main">
+            <a:r>
+              <a:t>Most importantly, the strongest k=6 results required information that would not be available for a truly new site. Therefore, although k=6 remains an interesting research direction, the accepted production model remains k=4.</a:t>
+            </a:r>
+          </a:p>
         </p:txBody>
       </p:sp>
       <p:sp>
@@ -555,7 +619,71 @@
         <p:txBody>
           <a:bodyPr xmlns:a="http://schemas.openxmlformats.org/drawingml/2006/main"/>
           <a:lstStyle xmlns:a="http://schemas.openxmlformats.org/drawingml/2006/main"/>
-          <a:p xmlns:a="http://schemas.openxmlformats.org/drawingml/2006/main"/>
+          <a:p xmlns:a="http://schemas.openxmlformats.org/drawingml/2006/main">
+            <a:r>
+              <a:t>Once a site category is assigned, the model combines that information with other features such as weather data, geographic location, calendar information, and external geospatial features.</a:t>
+            </a:r>
+          </a:p>
+          <a:p xmlns:a="http://schemas.openxmlformats.org/drawingml/2006/main">
+            <a:r>
+              <a:t/>
+            </a:r>
+          </a:p>
+          <a:p xmlns:a="http://schemas.openxmlformats.org/drawingml/2006/main">
+            <a:r>
+              <a:t>The project tested several modeling approaches, including XGBoost, Random Forest, LightGBM, and CatBoost.</a:t>
+            </a:r>
+          </a:p>
+          <a:p xmlns:a="http://schemas.openxmlformats.org/drawingml/2006/main">
+            <a:r>
+              <a:t/>
+            </a:r>
+          </a:p>
+          <a:p xmlns:a="http://schemas.openxmlformats.org/drawingml/2006/main">
+            <a:r>
+              <a:t>One important finding was that feature engineering and site categorization contributed more to performance than simply switching machine learning algorithms. In other words, understanding the behavior of locations was more important than choosing a different model.</a:t>
+            </a:r>
+          </a:p>
+          <a:p xmlns:a="http://schemas.openxmlformats.org/drawingml/2006/main">
+            <a:r>
+              <a:t/>
+            </a:r>
+          </a:p>
+          <a:p xmlns:a="http://schemas.openxmlformats.org/drawingml/2006/main">
+            <a:r>
+              <a:t>After predicting PM2.5, the system converts the prediction into a safety category. Instead of focusing only on an exact pollution value, the model also provides operational safety levels: Elevated, High, and Dangerous.</a:t>
+            </a:r>
+          </a:p>
+          <a:p xmlns:a="http://schemas.openxmlformats.org/drawingml/2006/main">
+            <a:r>
+              <a:t/>
+            </a:r>
+          </a:p>
+          <a:p xmlns:a="http://schemas.openxmlformats.org/drawingml/2006/main">
+            <a:r>
+              <a:t>This makes the output easier to interpret for planners and decision makers. The project also evaluated safety-tier accuracy and dangerous-day detection, since these are often more useful in practice than a small improvement in regression accuracy.</a:t>
+            </a:r>
+          </a:p>
+          <a:p xmlns:a="http://schemas.openxmlformats.org/drawingml/2006/main">
+            <a:r>
+              <a:t/>
+            </a:r>
+          </a:p>
+          <a:p xmlns:a="http://schemas.openxmlformats.org/drawingml/2006/main">
+            <a:r>
+              <a:t>To summarize, the NOW prediction task focuses on estimating pollution at locations without sensors. The project's main contribution is the introduction of site categorization, which allows the model to learn different pollution regimes across Kampala.</a:t>
+            </a:r>
+          </a:p>
+          <a:p xmlns:a="http://schemas.openxmlformats.org/drawingml/2006/main">
+            <a:r>
+              <a:t/>
+            </a:r>
+          </a:p>
+          <a:p xmlns:a="http://schemas.openxmlformats.org/drawingml/2006/main">
+            <a:r>
+              <a:t>Although more complex categorization strategies were explored, the final recommendation remains the k=4 approach because it provides the best balance between performance, robustness, and deployability.</a:t>
+            </a:r>
+          </a:p>
         </p:txBody>
       </p:sp>
       <p:sp>
@@ -1347,7 +1475,61 @@
         <p:txBody>
           <a:bodyPr xmlns:a="http://schemas.openxmlformats.org/drawingml/2006/main"/>
           <a:lstStyle xmlns:a="http://schemas.openxmlformats.org/drawingml/2006/main"/>
-          <a:p xmlns:a="http://schemas.openxmlformats.org/drawingml/2006/main"/>
+          <a:p xmlns:a="http://schemas.openxmlformats.org/drawingml/2006/main">
+            <a:r>
+              <a:t>Up until this point, we have discussed the problem, the data sources, and the feature engineering process.</a:t>
+            </a:r>
+          </a:p>
+          <a:p xmlns:a="http://schemas.openxmlformats.org/drawingml/2006/main">
+            <a:r>
+              <a:t/>
+            </a:r>
+          </a:p>
+          <a:p xmlns:a="http://schemas.openxmlformats.org/drawingml/2006/main">
+            <a:r>
+              <a:t>My part focuses on the first major prediction task in the project, which we call NOW prediction.</a:t>
+            </a:r>
+          </a:p>
+          <a:p xmlns:a="http://schemas.openxmlformats.org/drawingml/2006/main">
+            <a:r>
+              <a:t/>
+            </a:r>
+          </a:p>
+          <a:p xmlns:a="http://schemas.openxmlformats.org/drawingml/2006/main">
+            <a:r>
+              <a:t>The goal of NOW prediction is to estimate the current PM2.5 pollution level at a location where no air-quality sensor exists.</a:t>
+            </a:r>
+          </a:p>
+          <a:p xmlns:a="http://schemas.openxmlformats.org/drawingml/2006/main">
+            <a:r>
+              <a:t/>
+            </a:r>
+          </a:p>
+          <a:p xmlns:a="http://schemas.openxmlformats.org/drawingml/2006/main">
+            <a:r>
+              <a:t>At first glance, predicting pollution might seem straightforward. We have weather information, location information, and historical measurements. However, there is a major challenge.</a:t>
+            </a:r>
+          </a:p>
+          <a:p xmlns:a="http://schemas.openxmlformats.org/drawingml/2006/main">
+            <a:r>
+              <a:t/>
+            </a:r>
+          </a:p>
+          <a:p xmlns:a="http://schemas.openxmlformats.org/drawingml/2006/main">
+            <a:r>
+              <a:t>Most machine learning projects use a random train-test split. The problem is that a random split allows the model to train and test on data from the same monitoring sites. This can produce overly optimistic results.</a:t>
+            </a:r>
+          </a:p>
+          <a:p xmlns:a="http://schemas.openxmlformats.org/drawingml/2006/main">
+            <a:r>
+              <a:t/>
+            </a:r>
+          </a:p>
+          <a:p xmlns:a="http://schemas.openxmlformats.org/drawingml/2006/main">
+            <a:r>
+              <a:t>In reality, if we deploy the model, we want to predict pollution at a completely new location. To simulate this real-world scenario, the project uses a much stricter validation approach called Leave-Sites-Out validation. This means that entire monitoring sites are removed from training and only used for testing.</a:t>
+            </a:r>
+          </a:p>
         </p:txBody>
       </p:sp>
       <p:sp>
@@ -1392,7 +1574,7 @@
           <p:cNvPr id="1" name="Title 1">
             <a:extLst xmlns:a="http://schemas.openxmlformats.org/drawingml/2006/main">
               <a:ext uri="{FF2B5EF4-FFF2-40B4-BE49-F238E27FC236}">
-                <a16:creationId xmlns:a16="http://schemas.microsoft.com/office/drawing/2014/main" id="{DB2C110B-3E93-452B-99CD-AC30ED6E312C}"/>
+                <a16:creationId xmlns:a16="http://schemas.microsoft.com/office/drawing/2014/main" id="{82C2F163-2F2F-4A43-9D50-697B5C351AD7}"/>
               </a:ext>
             </a:extLst>
           </p:cNvPr>
@@ -1423,7 +1605,7 @@
           <p:cNvPr id="2" name="Subtitle 2">
             <a:extLst xmlns:a="http://schemas.openxmlformats.org/drawingml/2006/main">
               <a:ext uri="{FF2B5EF4-FFF2-40B4-BE49-F238E27FC236}">
-                <a16:creationId xmlns:a16="http://schemas.microsoft.com/office/drawing/2014/main" id="{E7316A26-1958-44E2-BFAB-315CAEAE97F3}"/>
+                <a16:creationId xmlns:a16="http://schemas.microsoft.com/office/drawing/2014/main" id="{5F6CE14D-A42F-4FD3-AA87-81CB9EA81241}"/>
               </a:ext>
             </a:extLst>
           </p:cNvPr>
@@ -1486,7 +1668,7 @@
           <p:cNvPr id="3" name="Date Placeholder 3">
             <a:extLst xmlns:a="http://schemas.openxmlformats.org/drawingml/2006/main">
               <a:ext uri="{FF2B5EF4-FFF2-40B4-BE49-F238E27FC236}">
-                <a16:creationId xmlns:a16="http://schemas.microsoft.com/office/drawing/2014/main" id="{B2E0421B-7A11-4A0C-9024-EA7941A9BC30}"/>
+                <a16:creationId xmlns:a16="http://schemas.microsoft.com/office/drawing/2014/main" id="{C205492E-FEE6-40CC-9468-5D5B7A7F72CD}"/>
               </a:ext>
             </a:extLst>
           </p:cNvPr>
@@ -1507,7 +1689,7 @@
           <p:cNvPr id="4" name="Footer Placeholder 4">
             <a:extLst xmlns:a="http://schemas.openxmlformats.org/drawingml/2006/main">
               <a:ext uri="{FF2B5EF4-FFF2-40B4-BE49-F238E27FC236}">
-                <a16:creationId xmlns:a16="http://schemas.microsoft.com/office/drawing/2014/main" id="{951E1FAE-7ABA-4E09-B28F-CBBBC6ADDD97}"/>
+                <a16:creationId xmlns:a16="http://schemas.microsoft.com/office/drawing/2014/main" id="{48F930C6-2C57-4B72-A9CA-D95892532720}"/>
               </a:ext>
             </a:extLst>
           </p:cNvPr>
@@ -1528,7 +1710,7 @@
           <p:cNvPr id="5" name="Slide Number Placeholder 5">
             <a:extLst xmlns:a="http://schemas.openxmlformats.org/drawingml/2006/main">
               <a:ext uri="{FF2B5EF4-FFF2-40B4-BE49-F238E27FC236}">
-                <a16:creationId xmlns:a16="http://schemas.microsoft.com/office/drawing/2014/main" id="{78525AE3-55D2-40B0-AF73-4A4A22CB3723}"/>
+                <a16:creationId xmlns:a16="http://schemas.microsoft.com/office/drawing/2014/main" id="{C918E388-860F-4F82-9374-E82070A9017C}"/>
               </a:ext>
             </a:extLst>
           </p:cNvPr>
@@ -1571,7 +1753,7 @@
           <p:cNvPr id="1" name="Slide Number Placeholder 5">
             <a:extLst xmlns:a="http://schemas.openxmlformats.org/drawingml/2006/main">
               <a:ext uri="{FF2B5EF4-FFF2-40B4-BE49-F238E27FC236}">
-                <a16:creationId xmlns:a16="http://schemas.microsoft.com/office/drawing/2014/main" id="{E250FD49-5705-471E-935F-B4383DF62AB0}"/>
+                <a16:creationId xmlns:a16="http://schemas.microsoft.com/office/drawing/2014/main" id="{D0CF0D7C-8466-432F-8BD5-C831E4084686}"/>
               </a:ext>
             </a:extLst>
           </p:cNvPr>
@@ -1610,7 +1792,7 @@
   </p:cSld>
   <p:clrMap bg1="lt1" tx1="dk1" bg2="lt2" tx2="dk2" accent1="accent1" accent2="accent2" accent3="accent3" accent4="accent4" accent5="accent5" accent6="accent6" hlink="hlink" folHlink="folHlink"/>
   <p:sldLayoutIdLst>
-    <p:sldLayoutId xmlns:r="http://schemas.openxmlformats.org/officeDocument/2006/relationships" id="2147483649" r:id="R15770e20f4d04d6c"/>
+    <p:sldLayoutId xmlns:r="http://schemas.openxmlformats.org/officeDocument/2006/relationships" id="2147483649" r:id="Rb38d12d2b0f04b80"/>
   </p:sldLayoutIdLst>
   <p:txStyles>
     <p:titleStyle>
@@ -1916,7 +2098,7 @@
           <p:cNvPr id="1" name="Slide Number Placeholder 5">
             <a:extLst xmlns:a="http://schemas.openxmlformats.org/drawingml/2006/main">
               <a:ext uri="{FF2B5EF4-FFF2-40B4-BE49-F238E27FC236}">
-                <a16:creationId xmlns:a16="http://schemas.microsoft.com/office/drawing/2014/main" id="{78525AE3-55D2-40B0-AF73-4A4A22CB3723}"/>
+                <a16:creationId xmlns:a16="http://schemas.microsoft.com/office/drawing/2014/main" id="{C918E388-860F-4F82-9374-E82070A9017C}"/>
               </a:ext>
             </a:extLst>
           </p:cNvPr>
@@ -1948,7 +2130,7 @@
           <p:cNvPr id="2" name="">
             <a:extLst xmlns:a="http://schemas.openxmlformats.org/drawingml/2006/main">
               <a:ext uri="{FF2B5EF4-FFF2-40B4-BE49-F238E27FC236}">
-                <a16:creationId xmlns:a16="http://schemas.microsoft.com/office/drawing/2014/main" id="{DAF66EDC-F0B9-4839-97CC-414C564BA84D}"/>
+                <a16:creationId xmlns:a16="http://schemas.microsoft.com/office/drawing/2014/main" id="{BCC17F91-30DF-4923-9305-C54670CBC94A}"/>
               </a:ext>
             </a:extLst>
           </p:cNvPr>
@@ -1980,7 +2162,7 @@
           <p:cNvPr id="3" name="">
             <a:extLst xmlns:a="http://schemas.openxmlformats.org/drawingml/2006/main">
               <a:ext uri="{FF2B5EF4-FFF2-40B4-BE49-F238E27FC236}">
-                <a16:creationId xmlns:a16="http://schemas.microsoft.com/office/drawing/2014/main" id="{6AD7E17C-03E7-47C7-8A7D-F508C7F0AA65}"/>
+                <a16:creationId xmlns:a16="http://schemas.microsoft.com/office/drawing/2014/main" id="{DFE08162-30A6-4B88-BE0B-83C0ED00CF5D}"/>
               </a:ext>
             </a:extLst>
           </p:cNvPr>
@@ -2012,7 +2194,7 @@
           <p:cNvPr id="4" name="">
             <a:extLst xmlns:a="http://schemas.openxmlformats.org/drawingml/2006/main">
               <a:ext uri="{FF2B5EF4-FFF2-40B4-BE49-F238E27FC236}">
-                <a16:creationId xmlns:a16="http://schemas.microsoft.com/office/drawing/2014/main" id="{47EE2C15-8384-452B-A20A-BE103FD87856}"/>
+                <a16:creationId xmlns:a16="http://schemas.microsoft.com/office/drawing/2014/main" id="{B45FB60D-A371-4EBD-BB13-90BD7D875154}"/>
               </a:ext>
             </a:extLst>
           </p:cNvPr>
@@ -2071,7 +2253,7 @@
           <p:cNvPr id="5" name="">
             <a:extLst xmlns:a="http://schemas.openxmlformats.org/drawingml/2006/main">
               <a:ext uri="{FF2B5EF4-FFF2-40B4-BE49-F238E27FC236}">
-                <a16:creationId xmlns:a16="http://schemas.microsoft.com/office/drawing/2014/main" id="{0F5BA2D3-B6DE-4C5A-8B7F-FC4C527C858E}"/>
+                <a16:creationId xmlns:a16="http://schemas.microsoft.com/office/drawing/2014/main" id="{7A44F986-2544-400A-B5AB-2607F17BB7E9}"/>
               </a:ext>
             </a:extLst>
           </p:cNvPr>
@@ -2130,7 +2312,7 @@
           <p:cNvPr id="6" name="">
             <a:extLst xmlns:a="http://schemas.openxmlformats.org/drawingml/2006/main">
               <a:ext uri="{FF2B5EF4-FFF2-40B4-BE49-F238E27FC236}">
-                <a16:creationId xmlns:a16="http://schemas.microsoft.com/office/drawing/2014/main" id="{EDD2D475-6BBA-41AA-A82B-7273F866C338}"/>
+                <a16:creationId xmlns:a16="http://schemas.microsoft.com/office/drawing/2014/main" id="{7A3DC7A8-E3F3-46BA-9AB3-061A3A461F58}"/>
               </a:ext>
             </a:extLst>
           </p:cNvPr>
@@ -2189,7 +2371,7 @@
           <p:cNvPr id="7" name="">
             <a:extLst xmlns:a="http://schemas.openxmlformats.org/drawingml/2006/main">
               <a:ext uri="{FF2B5EF4-FFF2-40B4-BE49-F238E27FC236}">
-                <a16:creationId xmlns:a16="http://schemas.microsoft.com/office/drawing/2014/main" id="{0DE4E5EB-E447-455B-9A5B-F2F3D659AA8B}"/>
+                <a16:creationId xmlns:a16="http://schemas.microsoft.com/office/drawing/2014/main" id="{3E7D6D54-5B40-473E-9C13-BAD0D0FA4889}"/>
               </a:ext>
             </a:extLst>
           </p:cNvPr>
@@ -2248,7 +2430,7 @@
           <p:cNvPr id="8" name="">
             <a:extLst xmlns:a="http://schemas.openxmlformats.org/drawingml/2006/main">
               <a:ext uri="{FF2B5EF4-FFF2-40B4-BE49-F238E27FC236}">
-                <a16:creationId xmlns:a16="http://schemas.microsoft.com/office/drawing/2014/main" id="{6F5D5542-C345-49B7-A3F7-4FAD3CA4B9A8}"/>
+                <a16:creationId xmlns:a16="http://schemas.microsoft.com/office/drawing/2014/main" id="{92601AD0-72A0-4B6D-9409-E4B41BCC856B}"/>
               </a:ext>
             </a:extLst>
           </p:cNvPr>
@@ -2303,7 +2485,7 @@
           <p:cNvPr id="9" name="">
             <a:extLst xmlns:a="http://schemas.openxmlformats.org/drawingml/2006/main">
               <a:ext uri="{FF2B5EF4-FFF2-40B4-BE49-F238E27FC236}">
-                <a16:creationId xmlns:a16="http://schemas.microsoft.com/office/drawing/2014/main" id="{C4A6AD3E-72A1-44DD-B546-D2A034A16E51}"/>
+                <a16:creationId xmlns:a16="http://schemas.microsoft.com/office/drawing/2014/main" id="{68F70A41-C073-48D3-A701-2CF7A2C49E4E}"/>
               </a:ext>
             </a:extLst>
           </p:cNvPr>
@@ -2337,7 +2519,7 @@
           <p:cNvPr id="10" name="">
             <a:extLst xmlns:a="http://schemas.openxmlformats.org/drawingml/2006/main">
               <a:ext uri="{FF2B5EF4-FFF2-40B4-BE49-F238E27FC236}">
-                <a16:creationId xmlns:a16="http://schemas.microsoft.com/office/drawing/2014/main" id="{F4737E94-24C1-4379-B68B-06EA3CCF0175}"/>
+                <a16:creationId xmlns:a16="http://schemas.microsoft.com/office/drawing/2014/main" id="{6DAA24AC-F05B-42A6-8408-610F38B5EAE1}"/>
               </a:ext>
             </a:extLst>
           </p:cNvPr>
@@ -2396,7 +2578,7 @@
           <p:cNvPr id="11" name="">
             <a:extLst xmlns:a="http://schemas.openxmlformats.org/drawingml/2006/main">
               <a:ext uri="{FF2B5EF4-FFF2-40B4-BE49-F238E27FC236}">
-                <a16:creationId xmlns:a16="http://schemas.microsoft.com/office/drawing/2014/main" id="{DB3F8420-94D4-4F44-9964-EF32F83353AA}"/>
+                <a16:creationId xmlns:a16="http://schemas.microsoft.com/office/drawing/2014/main" id="{69EBFC7E-A386-49E5-A73E-CCF57DA0465C}"/>
               </a:ext>
             </a:extLst>
           </p:cNvPr>
@@ -2455,7 +2637,7 @@
           <p:cNvPr id="12" name="">
             <a:extLst xmlns:a="http://schemas.openxmlformats.org/drawingml/2006/main">
               <a:ext uri="{FF2B5EF4-FFF2-40B4-BE49-F238E27FC236}">
-                <a16:creationId xmlns:a16="http://schemas.microsoft.com/office/drawing/2014/main" id="{214EC079-3C87-4D40-BDBB-80B002EE8DC2}"/>
+                <a16:creationId xmlns:a16="http://schemas.microsoft.com/office/drawing/2014/main" id="{CA678F25-DB18-410A-8EC5-49D15A11740F}"/>
               </a:ext>
             </a:extLst>
           </p:cNvPr>
@@ -2489,7 +2671,7 @@
           <p:cNvPr id="13" name="">
             <a:extLst xmlns:a="http://schemas.openxmlformats.org/drawingml/2006/main">
               <a:ext uri="{FF2B5EF4-FFF2-40B4-BE49-F238E27FC236}">
-                <a16:creationId xmlns:a16="http://schemas.microsoft.com/office/drawing/2014/main" id="{18CCD4D1-23F7-42CA-A0A0-E186C3672392}"/>
+                <a16:creationId xmlns:a16="http://schemas.microsoft.com/office/drawing/2014/main" id="{7BCD97F3-A13F-4F1E-8456-8AAC6348651F}"/>
               </a:ext>
             </a:extLst>
           </p:cNvPr>
@@ -2548,7 +2730,7 @@
           <p:cNvPr id="14" name="">
             <a:extLst xmlns:a="http://schemas.openxmlformats.org/drawingml/2006/main">
               <a:ext uri="{FF2B5EF4-FFF2-40B4-BE49-F238E27FC236}">
-                <a16:creationId xmlns:a16="http://schemas.microsoft.com/office/drawing/2014/main" id="{2E655093-AAD8-45F3-B7DF-CADEEE6743C3}"/>
+                <a16:creationId xmlns:a16="http://schemas.microsoft.com/office/drawing/2014/main" id="{67EA0EDB-C2D5-4CC3-9653-55E1B0DE4B3C}"/>
               </a:ext>
             </a:extLst>
           </p:cNvPr>
@@ -2607,7 +2789,7 @@
           <p:cNvPr id="15" name="">
             <a:extLst xmlns:a="http://schemas.openxmlformats.org/drawingml/2006/main">
               <a:ext uri="{FF2B5EF4-FFF2-40B4-BE49-F238E27FC236}">
-                <a16:creationId xmlns:a16="http://schemas.microsoft.com/office/drawing/2014/main" id="{DF2112C3-9869-4948-ABEE-5086C99B0E89}"/>
+                <a16:creationId xmlns:a16="http://schemas.microsoft.com/office/drawing/2014/main" id="{65FCE47E-03DF-41AC-BA91-6764E86E8269}"/>
               </a:ext>
             </a:extLst>
           </p:cNvPr>
@@ -2641,7 +2823,7 @@
           <p:cNvPr id="16" name="">
             <a:extLst xmlns:a="http://schemas.openxmlformats.org/drawingml/2006/main">
               <a:ext uri="{FF2B5EF4-FFF2-40B4-BE49-F238E27FC236}">
-                <a16:creationId xmlns:a16="http://schemas.microsoft.com/office/drawing/2014/main" id="{FD829BDE-C7AF-4D8C-9D17-CC0DD6682AF3}"/>
+                <a16:creationId xmlns:a16="http://schemas.microsoft.com/office/drawing/2014/main" id="{DE25C580-76B9-476F-B854-82B613A78EE8}"/>
               </a:ext>
             </a:extLst>
           </p:cNvPr>
@@ -2700,7 +2882,7 @@
           <p:cNvPr id="17" name="">
             <a:extLst xmlns:a="http://schemas.openxmlformats.org/drawingml/2006/main">
               <a:ext uri="{FF2B5EF4-FFF2-40B4-BE49-F238E27FC236}">
-                <a16:creationId xmlns:a16="http://schemas.microsoft.com/office/drawing/2014/main" id="{71352763-417F-4E08-9830-36F6AFEFB081}"/>
+                <a16:creationId xmlns:a16="http://schemas.microsoft.com/office/drawing/2014/main" id="{E5DBFB8F-D280-403A-BE13-8B2FB46C0C88}"/>
               </a:ext>
             </a:extLst>
           </p:cNvPr>
@@ -2759,7 +2941,7 @@
           <p:cNvPr id="18" name="">
             <a:extLst xmlns:a="http://schemas.openxmlformats.org/drawingml/2006/main">
               <a:ext uri="{FF2B5EF4-FFF2-40B4-BE49-F238E27FC236}">
-                <a16:creationId xmlns:a16="http://schemas.microsoft.com/office/drawing/2014/main" id="{AF9F775B-A851-4DDA-9F57-6A0CD4AD6DA2}"/>
+                <a16:creationId xmlns:a16="http://schemas.microsoft.com/office/drawing/2014/main" id="{C807D17F-7167-4F7F-B46A-5C906151DB8A}"/>
               </a:ext>
             </a:extLst>
           </p:cNvPr>
@@ -2793,7 +2975,7 @@
           <p:cNvPr id="19" name="">
             <a:extLst xmlns:a="http://schemas.openxmlformats.org/drawingml/2006/main">
               <a:ext uri="{FF2B5EF4-FFF2-40B4-BE49-F238E27FC236}">
-                <a16:creationId xmlns:a16="http://schemas.microsoft.com/office/drawing/2014/main" id="{2FFF65E1-A449-4967-8A1C-EA89FE018168}"/>
+                <a16:creationId xmlns:a16="http://schemas.microsoft.com/office/drawing/2014/main" id="{2955F725-5A40-4023-8726-7396E484FF2B}"/>
               </a:ext>
             </a:extLst>
           </p:cNvPr>
@@ -2852,7 +3034,7 @@
           <p:cNvPr id="20" name="">
             <a:extLst xmlns:a="http://schemas.openxmlformats.org/drawingml/2006/main">
               <a:ext uri="{FF2B5EF4-FFF2-40B4-BE49-F238E27FC236}">
-                <a16:creationId xmlns:a16="http://schemas.microsoft.com/office/drawing/2014/main" id="{7880BB55-DE07-4298-BBA5-D585463AD6D9}"/>
+                <a16:creationId xmlns:a16="http://schemas.microsoft.com/office/drawing/2014/main" id="{B9C55ECD-7DB0-43EA-A0A4-0EC92051BCBC}"/>
               </a:ext>
             </a:extLst>
           </p:cNvPr>
@@ -2911,7 +3093,7 @@
           <p:cNvPr id="21" name="">
             <a:extLst xmlns:a="http://schemas.openxmlformats.org/drawingml/2006/main">
               <a:ext uri="{FF2B5EF4-FFF2-40B4-BE49-F238E27FC236}">
-                <a16:creationId xmlns:a16="http://schemas.microsoft.com/office/drawing/2014/main" id="{BFF998CD-541D-49D9-906D-63707079FA12}"/>
+                <a16:creationId xmlns:a16="http://schemas.microsoft.com/office/drawing/2014/main" id="{18CB7CBF-B5AA-4F34-809D-8C517C6A5DE8}"/>
               </a:ext>
             </a:extLst>
           </p:cNvPr>
@@ -2945,7 +3127,7 @@
           <p:cNvPr id="22" name="">
             <a:extLst xmlns:a="http://schemas.openxmlformats.org/drawingml/2006/main">
               <a:ext uri="{FF2B5EF4-FFF2-40B4-BE49-F238E27FC236}">
-                <a16:creationId xmlns:a16="http://schemas.microsoft.com/office/drawing/2014/main" id="{560F87E3-DED3-4BAA-96C0-3A931A4ED75E}"/>
+                <a16:creationId xmlns:a16="http://schemas.microsoft.com/office/drawing/2014/main" id="{AB7104E9-E33D-4F94-B63F-C8EA25BA3603}"/>
               </a:ext>
             </a:extLst>
           </p:cNvPr>
@@ -2977,7 +3159,7 @@
           <p:cNvPr id="23" name="">
             <a:extLst xmlns:a="http://schemas.openxmlformats.org/drawingml/2006/main">
               <a:ext uri="{FF2B5EF4-FFF2-40B4-BE49-F238E27FC236}">
-                <a16:creationId xmlns:a16="http://schemas.microsoft.com/office/drawing/2014/main" id="{AD97D232-1E26-465A-BBFF-CFC37F77D710}"/>
+                <a16:creationId xmlns:a16="http://schemas.microsoft.com/office/drawing/2014/main" id="{D57A3DF4-F4A7-43C6-825D-62544827B3EB}"/>
               </a:ext>
             </a:extLst>
           </p:cNvPr>
@@ -3036,7 +3218,7 @@
           <p:cNvPr id="24" name="">
             <a:extLst xmlns:a="http://schemas.openxmlformats.org/drawingml/2006/main">
               <a:ext uri="{FF2B5EF4-FFF2-40B4-BE49-F238E27FC236}">
-                <a16:creationId xmlns:a16="http://schemas.microsoft.com/office/drawing/2014/main" id="{D376D299-9BC3-4F04-8C41-9955B937BFC4}"/>
+                <a16:creationId xmlns:a16="http://schemas.microsoft.com/office/drawing/2014/main" id="{1AD4E698-AC7A-49E7-8906-FE13B5DBDA33}"/>
               </a:ext>
             </a:extLst>
           </p:cNvPr>
@@ -3093,7 +3275,7 @@
     </p:spTree>
     <p:extLst>
       <p:ext uri="{BB962C8B-B14F-4D97-AF65-F5344CB8AC3E}">
-        <p14:creationId xmlns:p14="http://schemas.microsoft.com/office/powerpoint/2010/main" val="755537320"/>
+        <p14:creationId xmlns:p14="http://schemas.microsoft.com/office/powerpoint/2010/main" val="115119116"/>
       </p:ext>
     </p:extLst>
   </p:cSld>
@@ -3124,7 +3306,7 @@
           <p:cNvPr id="1" name="Slide Number Placeholder 5">
             <a:extLst xmlns:a="http://schemas.openxmlformats.org/drawingml/2006/main">
               <a:ext uri="{FF2B5EF4-FFF2-40B4-BE49-F238E27FC236}">
-                <a16:creationId xmlns:a16="http://schemas.microsoft.com/office/drawing/2014/main" id="{78525AE3-55D2-40B0-AF73-4A4A22CB3723}"/>
+                <a16:creationId xmlns:a16="http://schemas.microsoft.com/office/drawing/2014/main" id="{C918E388-860F-4F82-9374-E82070A9017C}"/>
               </a:ext>
             </a:extLst>
           </p:cNvPr>
@@ -3156,7 +3338,7 @@
           <p:cNvPr id="2" name="">
             <a:extLst xmlns:a="http://schemas.openxmlformats.org/drawingml/2006/main">
               <a:ext uri="{FF2B5EF4-FFF2-40B4-BE49-F238E27FC236}">
-                <a16:creationId xmlns:a16="http://schemas.microsoft.com/office/drawing/2014/main" id="{0AA3B9B9-D99C-4E7E-83F9-3FBF53AA6F47}"/>
+                <a16:creationId xmlns:a16="http://schemas.microsoft.com/office/drawing/2014/main" id="{5EB23AB8-F417-40E7-99B8-4FE2A3022F5C}"/>
               </a:ext>
             </a:extLst>
           </p:cNvPr>
@@ -3188,7 +3370,7 @@
           <p:cNvPr id="3" name="">
             <a:extLst xmlns:a="http://schemas.openxmlformats.org/drawingml/2006/main">
               <a:ext uri="{FF2B5EF4-FFF2-40B4-BE49-F238E27FC236}">
-                <a16:creationId xmlns:a16="http://schemas.microsoft.com/office/drawing/2014/main" id="{94C9FE04-B540-4E3C-8964-64EC52E509A0}"/>
+                <a16:creationId xmlns:a16="http://schemas.microsoft.com/office/drawing/2014/main" id="{96309EEA-9EAE-46F2-90AD-71468CBDB003}"/>
               </a:ext>
             </a:extLst>
           </p:cNvPr>
@@ -3220,7 +3402,7 @@
           <p:cNvPr id="4" name="">
             <a:extLst xmlns:a="http://schemas.openxmlformats.org/drawingml/2006/main">
               <a:ext uri="{FF2B5EF4-FFF2-40B4-BE49-F238E27FC236}">
-                <a16:creationId xmlns:a16="http://schemas.microsoft.com/office/drawing/2014/main" id="{2211F7B5-AF53-468E-B179-7A1029F8D94A}"/>
+                <a16:creationId xmlns:a16="http://schemas.microsoft.com/office/drawing/2014/main" id="{5B3C1555-5930-443B-847C-1D39389CA8FB}"/>
               </a:ext>
             </a:extLst>
           </p:cNvPr>
@@ -3279,7 +3461,7 @@
           <p:cNvPr id="5" name="">
             <a:extLst xmlns:a="http://schemas.openxmlformats.org/drawingml/2006/main">
               <a:ext uri="{FF2B5EF4-FFF2-40B4-BE49-F238E27FC236}">
-                <a16:creationId xmlns:a16="http://schemas.microsoft.com/office/drawing/2014/main" id="{1ADB3493-18EF-4570-A263-6C997E8CF591}"/>
+                <a16:creationId xmlns:a16="http://schemas.microsoft.com/office/drawing/2014/main" id="{EC9FA737-8B06-44A5-91C2-CB6226DCBDC5}"/>
               </a:ext>
             </a:extLst>
           </p:cNvPr>
@@ -3338,7 +3520,7 @@
           <p:cNvPr id="6" name="">
             <a:extLst xmlns:a="http://schemas.openxmlformats.org/drawingml/2006/main">
               <a:ext uri="{FF2B5EF4-FFF2-40B4-BE49-F238E27FC236}">
-                <a16:creationId xmlns:a16="http://schemas.microsoft.com/office/drawing/2014/main" id="{E911F527-B2F4-4C5C-AA01-21900D7825AE}"/>
+                <a16:creationId xmlns:a16="http://schemas.microsoft.com/office/drawing/2014/main" id="{18FF5B67-EA7C-4065-99A7-920CA06C74D7}"/>
               </a:ext>
             </a:extLst>
           </p:cNvPr>
@@ -3387,7 +3569,7 @@
                   <a:srgbClr val="E8F0EE"/>
                 </a:solidFill>
               </a:rPr>
-              <a:t>Site Categories: k=3 → k=4, Not k=6 Production</a:t>
+              <a:t>Key Insight: Group Sites by Pollution Regime</a:t>
             </a:r>
           </a:p>
         </p:txBody>
@@ -3397,7 +3579,7 @@
           <p:cNvPr id="7" name="">
             <a:extLst xmlns:a="http://schemas.openxmlformats.org/drawingml/2006/main">
               <a:ext uri="{FF2B5EF4-FFF2-40B4-BE49-F238E27FC236}">
-                <a16:creationId xmlns:a16="http://schemas.microsoft.com/office/drawing/2014/main" id="{7155812E-F4CB-4244-98AB-60CB1A3F18B6}"/>
+                <a16:creationId xmlns:a16="http://schemas.microsoft.com/office/drawing/2014/main" id="{BB1354CE-4076-4EC7-BAE0-B4664EFE94AE}"/>
               </a:ext>
             </a:extLst>
           </p:cNvPr>
@@ -3446,7 +3628,7 @@
                   <a:srgbClr val="9FB3BE"/>
                 </a:solidFill>
               </a:rPr>
-              <a:t>The final accepted NOW model balances performance and stability.</a:t>
+              <a:t>The model improves when it learns that different locations behave differently.</a:t>
             </a:r>
           </a:p>
         </p:txBody>
@@ -3460,13 +3642,13 @@
           <p:nvPr/>
         </p:nvPicPr>
         <p:blipFill>
-          <a:blip xmlns:r="http://schemas.openxmlformats.org/officeDocument/2006/relationships" xmlns:a="http://schemas.openxmlformats.org/drawingml/2006/main" r:embed="R0f1ba9104fa24c0f"/>
+          <a:blip xmlns:r="http://schemas.openxmlformats.org/officeDocument/2006/relationships" xmlns:a="http://schemas.openxmlformats.org/drawingml/2006/main" r:embed="Rba2aca5719ff47d6"/>
           <a:stretch xmlns:a="http://schemas.openxmlformats.org/drawingml/2006/main"/>
         </p:blipFill>
         <p:spPr>
           <a:xfrm xmlns:a="http://schemas.openxmlformats.org/drawingml/2006/main">
-            <a:off x="809625" y="1857375"/>
-            <a:ext cx="4333875" cy="3714750"/>
+            <a:off x="742156" y="1952625"/>
+            <a:ext cx="3944938" cy="3381375"/>
           </a:xfrm>
           <a:prstGeom xmlns:a="http://schemas.openxmlformats.org/drawingml/2006/main" prst="rect">
             <a:avLst/>
@@ -3478,19 +3660,19 @@
           <p:cNvPr id="9" name="">
             <a:extLst xmlns:a="http://schemas.openxmlformats.org/drawingml/2006/main">
               <a:ext uri="{FF2B5EF4-FFF2-40B4-BE49-F238E27FC236}">
-                <a16:creationId xmlns:a16="http://schemas.microsoft.com/office/drawing/2014/main" id="{952A0947-B290-4A94-B8B5-EA0381584FD2}"/>
-              </a:ext>
-            </a:extLst>
-          </p:cNvPr>
-          <p:cNvSpPr>
-            <a:spLocks xmlns:a="http://schemas.openxmlformats.org/drawingml/2006/main" noGrp="1"/>
-          </p:cNvSpPr>
-          <p:nvPr/>
-        </p:nvSpPr>
-        <p:spPr>
-          <a:xfrm xmlns:a="http://schemas.openxmlformats.org/drawingml/2006/main">
-            <a:off x="5715000" y="2000250"/>
-            <a:ext cx="2286000" cy="1190625"/>
+                <a16:creationId xmlns:a16="http://schemas.microsoft.com/office/drawing/2014/main" id="{CB9846B0-E52D-4D29-A794-5668FFF9D2D0}"/>
+              </a:ext>
+            </a:extLst>
+          </p:cNvPr>
+          <p:cNvSpPr>
+            <a:spLocks xmlns:a="http://schemas.openxmlformats.org/drawingml/2006/main" noGrp="1"/>
+          </p:cNvSpPr>
+          <p:nvPr/>
+        </p:nvSpPr>
+        <p:spPr>
+          <a:xfrm xmlns:a="http://schemas.openxmlformats.org/drawingml/2006/main">
+            <a:off x="5143500" y="1952625"/>
+            <a:ext cx="2714625" cy="1257300"/>
           </a:xfrm>
           <a:prstGeom xmlns:a="http://schemas.openxmlformats.org/drawingml/2006/main" prst="roundRect">
             <a:avLst>
@@ -3512,29 +3694,29 @@
           <p:cNvPr id="10" name="">
             <a:extLst xmlns:a="http://schemas.openxmlformats.org/drawingml/2006/main">
               <a:ext uri="{FF2B5EF4-FFF2-40B4-BE49-F238E27FC236}">
-                <a16:creationId xmlns:a16="http://schemas.microsoft.com/office/drawing/2014/main" id="{F9094BA9-7748-41B1-A633-9A9B0E7DD963}"/>
-              </a:ext>
-            </a:extLst>
-          </p:cNvPr>
-          <p:cNvSpPr>
-            <a:spLocks xmlns:a="http://schemas.openxmlformats.org/drawingml/2006/main" noGrp="1"/>
-          </p:cNvSpPr>
-          <p:nvPr/>
-        </p:nvSpPr>
-        <p:spPr>
-          <a:xfrm xmlns:a="http://schemas.openxmlformats.org/drawingml/2006/main">
-            <a:off x="5715000" y="2000250"/>
-            <a:ext cx="47625" cy="1190625"/>
-          </a:xfrm>
-          <a:prstGeom xmlns:a="http://schemas.openxmlformats.org/drawingml/2006/main" prst="rect">
-            <a:avLst/>
-          </a:prstGeom>
-          <a:solidFill xmlns:a="http://schemas.openxmlformats.org/drawingml/2006/main">
-            <a:srgbClr val="9FB3BE"/>
-          </a:solidFill>
-          <a:ln xmlns:a="http://schemas.openxmlformats.org/drawingml/2006/main" w="0">
-            <a:solidFill>
-              <a:srgbClr val="9FB3BE"/>
+                <a16:creationId xmlns:a16="http://schemas.microsoft.com/office/drawing/2014/main" id="{5D94D400-D2C6-403E-A007-C1E5A3469926}"/>
+              </a:ext>
+            </a:extLst>
+          </p:cNvPr>
+          <p:cNvSpPr>
+            <a:spLocks xmlns:a="http://schemas.openxmlformats.org/drawingml/2006/main" noGrp="1"/>
+          </p:cNvSpPr>
+          <p:nvPr/>
+        </p:nvSpPr>
+        <p:spPr>
+          <a:xfrm xmlns:a="http://schemas.openxmlformats.org/drawingml/2006/main">
+            <a:off x="5143500" y="1952625"/>
+            <a:ext cx="47625" cy="1257300"/>
+          </a:xfrm>
+          <a:prstGeom xmlns:a="http://schemas.openxmlformats.org/drawingml/2006/main" prst="rect">
+            <a:avLst/>
+          </a:prstGeom>
+          <a:solidFill xmlns:a="http://schemas.openxmlformats.org/drawingml/2006/main">
+            <a:srgbClr val="14A38B"/>
+          </a:solidFill>
+          <a:ln xmlns:a="http://schemas.openxmlformats.org/drawingml/2006/main" w="0">
+            <a:solidFill>
+              <a:srgbClr val="14A38B"/>
             </a:solidFill>
           </a:ln>
         </p:spPr>
@@ -3544,19 +3726,19 @@
           <p:cNvPr id="11" name="">
             <a:extLst xmlns:a="http://schemas.openxmlformats.org/drawingml/2006/main">
               <a:ext uri="{FF2B5EF4-FFF2-40B4-BE49-F238E27FC236}">
-                <a16:creationId xmlns:a16="http://schemas.microsoft.com/office/drawing/2014/main" id="{27487A8D-A405-42FF-9D48-98CA4515C36E}"/>
-              </a:ext>
-            </a:extLst>
-          </p:cNvPr>
-          <p:cNvSpPr>
-            <a:spLocks xmlns:a="http://schemas.openxmlformats.org/drawingml/2006/main" noGrp="1"/>
-          </p:cNvSpPr>
-          <p:nvPr/>
-        </p:nvSpPr>
-        <p:spPr>
-          <a:xfrm xmlns:a="http://schemas.openxmlformats.org/drawingml/2006/main">
-            <a:off x="5924550" y="2133600"/>
-            <a:ext cx="1866900" cy="266700"/>
+                <a16:creationId xmlns:a16="http://schemas.microsoft.com/office/drawing/2014/main" id="{164BCC79-03F3-4362-9D4E-0626B96601BD}"/>
+              </a:ext>
+            </a:extLst>
+          </p:cNvPr>
+          <p:cNvSpPr>
+            <a:spLocks xmlns:a="http://schemas.openxmlformats.org/drawingml/2006/main" noGrp="1"/>
+          </p:cNvSpPr>
+          <p:nvPr/>
+        </p:nvSpPr>
+        <p:spPr>
+          <a:xfrm xmlns:a="http://schemas.openxmlformats.org/drawingml/2006/main">
+            <a:off x="5353050" y="2085975"/>
+            <a:ext cx="2295525" cy="266700"/>
           </a:xfrm>
           <a:prstGeom xmlns:a="http://schemas.openxmlformats.org/drawingml/2006/main" prst="rect">
             <a:avLst/>
@@ -3593,7 +3775,7 @@
                   <a:srgbClr val="E8F0EE"/>
                 </a:solidFill>
               </a:rPr>
-              <a:t>k=3</a:t>
+              <a:t>Behavioral signature</a:t>
             </a:r>
           </a:p>
         </p:txBody>
@@ -3603,19 +3785,19 @@
           <p:cNvPr id="12" name="">
             <a:extLst xmlns:a="http://schemas.openxmlformats.org/drawingml/2006/main">
               <a:ext uri="{FF2B5EF4-FFF2-40B4-BE49-F238E27FC236}">
-                <a16:creationId xmlns:a16="http://schemas.microsoft.com/office/drawing/2014/main" id="{7B6908C4-93C4-462D-9BAD-561777F2361C}"/>
-              </a:ext>
-            </a:extLst>
-          </p:cNvPr>
-          <p:cNvSpPr>
-            <a:spLocks xmlns:a="http://schemas.openxmlformats.org/drawingml/2006/main" noGrp="1"/>
-          </p:cNvSpPr>
-          <p:nvPr/>
-        </p:nvSpPr>
-        <p:spPr>
-          <a:xfrm xmlns:a="http://schemas.openxmlformats.org/drawingml/2006/main">
-            <a:off x="5924550" y="2457450"/>
-            <a:ext cx="1866900" cy="657225"/>
+                <a16:creationId xmlns:a16="http://schemas.microsoft.com/office/drawing/2014/main" id="{492F9F78-A4AD-4E2A-BDD2-6664428C4A16}"/>
+              </a:ext>
+            </a:extLst>
+          </p:cNvPr>
+          <p:cNvSpPr>
+            <a:spLocks xmlns:a="http://schemas.openxmlformats.org/drawingml/2006/main" noGrp="1"/>
+          </p:cNvSpPr>
+          <p:nvPr/>
+        </p:nvSpPr>
+        <p:spPr>
+          <a:xfrm xmlns:a="http://schemas.openxmlformats.org/drawingml/2006/main">
+            <a:off x="5353050" y="2409825"/>
+            <a:ext cx="2295525" cy="723900"/>
           </a:xfrm>
           <a:prstGeom xmlns:a="http://schemas.openxmlformats.org/drawingml/2006/main" prst="rect">
             <a:avLst/>
@@ -3652,7 +3834,7 @@
                   <a:srgbClr val="9FB3BE"/>
                 </a:solidFill>
               </a:rPr>
-              <a:t>Original silhouette-driven categories: low, high, and stagnant micro-regime.</a:t>
+              <a:t>Average PM2.5, variability, seasonal behavior, and weather conditions describe each site.</a:t>
             </a:r>
           </a:p>
         </p:txBody>
@@ -3662,19 +3844,19 @@
           <p:cNvPr id="13" name="">
             <a:extLst xmlns:a="http://schemas.openxmlformats.org/drawingml/2006/main">
               <a:ext uri="{FF2B5EF4-FFF2-40B4-BE49-F238E27FC236}">
-                <a16:creationId xmlns:a16="http://schemas.microsoft.com/office/drawing/2014/main" id="{95FB481B-EEE9-43E7-8DEF-E6D040636967}"/>
-              </a:ext>
-            </a:extLst>
-          </p:cNvPr>
-          <p:cNvSpPr>
-            <a:spLocks xmlns:a="http://schemas.openxmlformats.org/drawingml/2006/main" noGrp="1"/>
-          </p:cNvSpPr>
-          <p:nvPr/>
-        </p:nvSpPr>
-        <p:spPr>
-          <a:xfrm xmlns:a="http://schemas.openxmlformats.org/drawingml/2006/main">
-            <a:off x="8334375" y="2000250"/>
-            <a:ext cx="2286000" cy="1190625"/>
+                <a16:creationId xmlns:a16="http://schemas.microsoft.com/office/drawing/2014/main" id="{D56F05B6-53D7-4E65-972A-B43FE32910DD}"/>
+              </a:ext>
+            </a:extLst>
+          </p:cNvPr>
+          <p:cNvSpPr>
+            <a:spLocks xmlns:a="http://schemas.openxmlformats.org/drawingml/2006/main" noGrp="1"/>
+          </p:cNvSpPr>
+          <p:nvPr/>
+        </p:nvSpPr>
+        <p:spPr>
+          <a:xfrm xmlns:a="http://schemas.openxmlformats.org/drawingml/2006/main">
+            <a:off x="8143875" y="1952625"/>
+            <a:ext cx="2714625" cy="1257300"/>
           </a:xfrm>
           <a:prstGeom xmlns:a="http://schemas.openxmlformats.org/drawingml/2006/main" prst="roundRect">
             <a:avLst>
@@ -3696,29 +3878,29 @@
           <p:cNvPr id="14" name="">
             <a:extLst xmlns:a="http://schemas.openxmlformats.org/drawingml/2006/main">
               <a:ext uri="{FF2B5EF4-FFF2-40B4-BE49-F238E27FC236}">
-                <a16:creationId xmlns:a16="http://schemas.microsoft.com/office/drawing/2014/main" id="{DF1AC995-A4E2-46FE-83B6-77CBD8177B77}"/>
-              </a:ext>
-            </a:extLst>
-          </p:cNvPr>
-          <p:cNvSpPr>
-            <a:spLocks xmlns:a="http://schemas.openxmlformats.org/drawingml/2006/main" noGrp="1"/>
-          </p:cNvSpPr>
-          <p:nvPr/>
-        </p:nvSpPr>
-        <p:spPr>
-          <a:xfrm xmlns:a="http://schemas.openxmlformats.org/drawingml/2006/main">
-            <a:off x="8334375" y="2000250"/>
-            <a:ext cx="47625" cy="1190625"/>
-          </a:xfrm>
-          <a:prstGeom xmlns:a="http://schemas.openxmlformats.org/drawingml/2006/main" prst="rect">
-            <a:avLst/>
-          </a:prstGeom>
-          <a:solidFill xmlns:a="http://schemas.openxmlformats.org/drawingml/2006/main">
-            <a:srgbClr val="46C98A"/>
-          </a:solidFill>
-          <a:ln xmlns:a="http://schemas.openxmlformats.org/drawingml/2006/main" w="0">
-            <a:solidFill>
-              <a:srgbClr val="46C98A"/>
+                <a16:creationId xmlns:a16="http://schemas.microsoft.com/office/drawing/2014/main" id="{21362576-7670-406C-8D30-027145A97FBC}"/>
+              </a:ext>
+            </a:extLst>
+          </p:cNvPr>
+          <p:cNvSpPr>
+            <a:spLocks xmlns:a="http://schemas.openxmlformats.org/drawingml/2006/main" noGrp="1"/>
+          </p:cNvSpPr>
+          <p:nvPr/>
+        </p:nvSpPr>
+        <p:spPr>
+          <a:xfrm xmlns:a="http://schemas.openxmlformats.org/drawingml/2006/main">
+            <a:off x="8143875" y="1952625"/>
+            <a:ext cx="47625" cy="1257300"/>
+          </a:xfrm>
+          <a:prstGeom xmlns:a="http://schemas.openxmlformats.org/drawingml/2006/main" prst="rect">
+            <a:avLst/>
+          </a:prstGeom>
+          <a:solidFill xmlns:a="http://schemas.openxmlformats.org/drawingml/2006/main">
+            <a:srgbClr val="E8A020"/>
+          </a:solidFill>
+          <a:ln xmlns:a="http://schemas.openxmlformats.org/drawingml/2006/main" w="0">
+            <a:solidFill>
+              <a:srgbClr val="E8A020"/>
             </a:solidFill>
           </a:ln>
         </p:spPr>
@@ -3728,19 +3910,19 @@
           <p:cNvPr id="15" name="">
             <a:extLst xmlns:a="http://schemas.openxmlformats.org/drawingml/2006/main">
               <a:ext uri="{FF2B5EF4-FFF2-40B4-BE49-F238E27FC236}">
-                <a16:creationId xmlns:a16="http://schemas.microsoft.com/office/drawing/2014/main" id="{0A319F44-D53C-4FF5-BFBE-3F22B0F9D423}"/>
-              </a:ext>
-            </a:extLst>
-          </p:cNvPr>
-          <p:cNvSpPr>
-            <a:spLocks xmlns:a="http://schemas.openxmlformats.org/drawingml/2006/main" noGrp="1"/>
-          </p:cNvSpPr>
-          <p:nvPr/>
-        </p:nvSpPr>
-        <p:spPr>
-          <a:xfrm xmlns:a="http://schemas.openxmlformats.org/drawingml/2006/main">
-            <a:off x="8543925" y="2133600"/>
-            <a:ext cx="1866900" cy="266700"/>
+                <a16:creationId xmlns:a16="http://schemas.microsoft.com/office/drawing/2014/main" id="{AF8DCA52-40F4-4A6D-8F56-F0B2CD5E4AE1}"/>
+              </a:ext>
+            </a:extLst>
+          </p:cNvPr>
+          <p:cNvSpPr>
+            <a:spLocks xmlns:a="http://schemas.openxmlformats.org/drawingml/2006/main" noGrp="1"/>
+          </p:cNvSpPr>
+          <p:nvPr/>
+        </p:nvSpPr>
+        <p:spPr>
+          <a:xfrm xmlns:a="http://schemas.openxmlformats.org/drawingml/2006/main">
+            <a:off x="8353425" y="2085975"/>
+            <a:ext cx="2295525" cy="266700"/>
           </a:xfrm>
           <a:prstGeom xmlns:a="http://schemas.openxmlformats.org/drawingml/2006/main" prst="rect">
             <a:avLst/>
@@ -3777,7 +3959,7 @@
                   <a:srgbClr val="E8F0EE"/>
                 </a:solidFill>
               </a:rPr>
-              <a:t>k=4 accepted</a:t>
+              <a:t>Pollution regimes</a:t>
             </a:r>
           </a:p>
         </p:txBody>
@@ -3787,39 +3969,39 @@
           <p:cNvPr id="16" name="">
             <a:extLst xmlns:a="http://schemas.openxmlformats.org/drawingml/2006/main">
               <a:ext uri="{FF2B5EF4-FFF2-40B4-BE49-F238E27FC236}">
-                <a16:creationId xmlns:a16="http://schemas.microsoft.com/office/drawing/2014/main" id="{7F86D047-CE82-49A0-AE8E-52D3A76B28B5}"/>
-              </a:ext>
-            </a:extLst>
-          </p:cNvPr>
-          <p:cNvSpPr>
-            <a:spLocks xmlns:a="http://schemas.openxmlformats.org/drawingml/2006/main" noGrp="1"/>
-          </p:cNvSpPr>
-          <p:nvPr/>
-        </p:nvSpPr>
-        <p:spPr>
-          <a:xfrm xmlns:a="http://schemas.openxmlformats.org/drawingml/2006/main">
-            <a:off x="8543925" y="2457450"/>
-            <a:ext cx="1866900" cy="657225"/>
-          </a:xfrm>
-          <a:prstGeom xmlns:a="http://schemas.openxmlformats.org/drawingml/2006/main" prst="rect">
-            <a:avLst/>
-          </a:prstGeom>
-          <a:solidFill xmlns:a="http://schemas.openxmlformats.org/drawingml/2006/main">
-            <a:srgbClr val="000000">
-              <a:alpha val="0"/>
-            </a:srgbClr>
-          </a:solidFill>
-          <a:ln xmlns:a="http://schemas.openxmlformats.org/drawingml/2006/main" w="0">
-            <a:solidFill>
-              <a:srgbClr val="000000">
-                <a:alpha val="0"/>
-              </a:srgbClr>
-            </a:solidFill>
-          </a:ln>
-        </p:spPr>
-        <p:txBody>
-          <a:bodyPr xmlns:a="http://schemas.openxmlformats.org/drawingml/2006/main" lIns="0" tIns="0" rIns="0" bIns="0" anchor="ctr">
-            <a:normAutofit fontScale="90371"/>
+                <a16:creationId xmlns:a16="http://schemas.microsoft.com/office/drawing/2014/main" id="{FD392118-4339-437F-A1F9-389A6069585E}"/>
+              </a:ext>
+            </a:extLst>
+          </p:cNvPr>
+          <p:cNvSpPr>
+            <a:spLocks xmlns:a="http://schemas.openxmlformats.org/drawingml/2006/main" noGrp="1"/>
+          </p:cNvSpPr>
+          <p:nvPr/>
+        </p:nvSpPr>
+        <p:spPr>
+          <a:xfrm xmlns:a="http://schemas.openxmlformats.org/drawingml/2006/main">
+            <a:off x="8353425" y="2409825"/>
+            <a:ext cx="2295525" cy="723900"/>
+          </a:xfrm>
+          <a:prstGeom xmlns:a="http://schemas.openxmlformats.org/drawingml/2006/main" prst="rect">
+            <a:avLst/>
+          </a:prstGeom>
+          <a:solidFill xmlns:a="http://schemas.openxmlformats.org/drawingml/2006/main">
+            <a:srgbClr val="000000">
+              <a:alpha val="0"/>
+            </a:srgbClr>
+          </a:solidFill>
+          <a:ln xmlns:a="http://schemas.openxmlformats.org/drawingml/2006/main" w="0">
+            <a:solidFill>
+              <a:srgbClr val="000000">
+                <a:alpha val="0"/>
+              </a:srgbClr>
+            </a:solidFill>
+          </a:ln>
+        </p:spPr>
+        <p:txBody>
+          <a:bodyPr xmlns:a="http://schemas.openxmlformats.org/drawingml/2006/main" lIns="0" tIns="0" rIns="0" bIns="0" anchor="ctr">
+            <a:normAutofit fontScale="100000"/>
           </a:bodyPr>
           <a:lstStyle xmlns:a="http://schemas.openxmlformats.org/drawingml/2006/main"/>
           <a:p xmlns:a="http://schemas.openxmlformats.org/drawingml/2006/main">
@@ -3836,7 +4018,7 @@
                   <a:srgbClr val="9FB3BE"/>
                 </a:solidFill>
               </a:rPr>
-              <a:t>Better honest new-site performance and stable enough for the capstone recommendation.</a:t>
+              <a:t>Some sites are consistently low, some are traffic/urban hotspots, and some fluctuate strongly.</a:t>
             </a:r>
           </a:p>
         </p:txBody>
@@ -3846,19 +4028,19 @@
           <p:cNvPr id="17" name="">
             <a:extLst xmlns:a="http://schemas.openxmlformats.org/drawingml/2006/main">
               <a:ext uri="{FF2B5EF4-FFF2-40B4-BE49-F238E27FC236}">
-                <a16:creationId xmlns:a16="http://schemas.microsoft.com/office/drawing/2014/main" id="{672E329A-32C1-43BA-A92C-F77B0BCC15CF}"/>
-              </a:ext>
-            </a:extLst>
-          </p:cNvPr>
-          <p:cNvSpPr>
-            <a:spLocks xmlns:a="http://schemas.openxmlformats.org/drawingml/2006/main" noGrp="1"/>
-          </p:cNvSpPr>
-          <p:nvPr/>
-        </p:nvSpPr>
-        <p:spPr>
-          <a:xfrm xmlns:a="http://schemas.openxmlformats.org/drawingml/2006/main">
-            <a:off x="5715000" y="3619500"/>
-            <a:ext cx="4905375" cy="1381125"/>
+                <a16:creationId xmlns:a16="http://schemas.microsoft.com/office/drawing/2014/main" id="{EC2361DC-6007-4639-96B7-FDAE6AFAA1E5}"/>
+              </a:ext>
+            </a:extLst>
+          </p:cNvPr>
+          <p:cNvSpPr>
+            <a:spLocks xmlns:a="http://schemas.openxmlformats.org/drawingml/2006/main" noGrp="1"/>
+          </p:cNvSpPr>
+          <p:nvPr/>
+        </p:nvSpPr>
+        <p:spPr>
+          <a:xfrm xmlns:a="http://schemas.openxmlformats.org/drawingml/2006/main">
+            <a:off x="5143500" y="3571875"/>
+            <a:ext cx="2714625" cy="1257300"/>
           </a:xfrm>
           <a:prstGeom xmlns:a="http://schemas.openxmlformats.org/drawingml/2006/main" prst="roundRect">
             <a:avLst>
@@ -3880,29 +4062,29 @@
           <p:cNvPr id="18" name="">
             <a:extLst xmlns:a="http://schemas.openxmlformats.org/drawingml/2006/main">
               <a:ext uri="{FF2B5EF4-FFF2-40B4-BE49-F238E27FC236}">
-                <a16:creationId xmlns:a16="http://schemas.microsoft.com/office/drawing/2014/main" id="{F5AE759E-4E6E-44B0-BF6B-54F8F2F1A2AF}"/>
-              </a:ext>
-            </a:extLst>
-          </p:cNvPr>
-          <p:cNvSpPr>
-            <a:spLocks xmlns:a="http://schemas.openxmlformats.org/drawingml/2006/main" noGrp="1"/>
-          </p:cNvSpPr>
-          <p:nvPr/>
-        </p:nvSpPr>
-        <p:spPr>
-          <a:xfrm xmlns:a="http://schemas.openxmlformats.org/drawingml/2006/main">
-            <a:off x="5715000" y="3619500"/>
-            <a:ext cx="47625" cy="1381125"/>
-          </a:xfrm>
-          <a:prstGeom xmlns:a="http://schemas.openxmlformats.org/drawingml/2006/main" prst="rect">
-            <a:avLst/>
-          </a:prstGeom>
-          <a:solidFill xmlns:a="http://schemas.openxmlformats.org/drawingml/2006/main">
-            <a:srgbClr val="EC5A4C"/>
-          </a:solidFill>
-          <a:ln xmlns:a="http://schemas.openxmlformats.org/drawingml/2006/main" w="0">
-            <a:solidFill>
-              <a:srgbClr val="EC5A4C"/>
+                <a16:creationId xmlns:a16="http://schemas.microsoft.com/office/drawing/2014/main" id="{E08E05AF-4BC0-4A91-BFED-28263E7DB198}"/>
+              </a:ext>
+            </a:extLst>
+          </p:cNvPr>
+          <p:cNvSpPr>
+            <a:spLocks xmlns:a="http://schemas.openxmlformats.org/drawingml/2006/main" noGrp="1"/>
+          </p:cNvSpPr>
+          <p:nvPr/>
+        </p:nvSpPr>
+        <p:spPr>
+          <a:xfrm xmlns:a="http://schemas.openxmlformats.org/drawingml/2006/main">
+            <a:off x="5143500" y="3571875"/>
+            <a:ext cx="47625" cy="1257300"/>
+          </a:xfrm>
+          <a:prstGeom xmlns:a="http://schemas.openxmlformats.org/drawingml/2006/main" prst="rect">
+            <a:avLst/>
+          </a:prstGeom>
+          <a:solidFill xmlns:a="http://schemas.openxmlformats.org/drawingml/2006/main">
+            <a:srgbClr val="46C98A"/>
+          </a:solidFill>
+          <a:ln xmlns:a="http://schemas.openxmlformats.org/drawingml/2006/main" w="0">
+            <a:solidFill>
+              <a:srgbClr val="46C98A"/>
             </a:solidFill>
           </a:ln>
         </p:spPr>
@@ -3912,19 +4094,19 @@
           <p:cNvPr id="19" name="">
             <a:extLst xmlns:a="http://schemas.openxmlformats.org/drawingml/2006/main">
               <a:ext uri="{FF2B5EF4-FFF2-40B4-BE49-F238E27FC236}">
-                <a16:creationId xmlns:a16="http://schemas.microsoft.com/office/drawing/2014/main" id="{1AAF6889-87DE-40BE-814D-4F809119B67A}"/>
-              </a:ext>
-            </a:extLst>
-          </p:cNvPr>
-          <p:cNvSpPr>
-            <a:spLocks xmlns:a="http://schemas.openxmlformats.org/drawingml/2006/main" noGrp="1"/>
-          </p:cNvSpPr>
-          <p:nvPr/>
-        </p:nvSpPr>
-        <p:spPr>
-          <a:xfrm xmlns:a="http://schemas.openxmlformats.org/drawingml/2006/main">
-            <a:off x="5924550" y="3752850"/>
-            <a:ext cx="4486275" cy="266700"/>
+                <a16:creationId xmlns:a16="http://schemas.microsoft.com/office/drawing/2014/main" id="{A356DB68-0787-4410-9D67-E4D09E5886A0}"/>
+              </a:ext>
+            </a:extLst>
+          </p:cNvPr>
+          <p:cNvSpPr>
+            <a:spLocks xmlns:a="http://schemas.openxmlformats.org/drawingml/2006/main" noGrp="1"/>
+          </p:cNvSpPr>
+          <p:nvPr/>
+        </p:nvSpPr>
+        <p:spPr>
+          <a:xfrm xmlns:a="http://schemas.openxmlformats.org/drawingml/2006/main">
+            <a:off x="5353050" y="3705225"/>
+            <a:ext cx="2295525" cy="266700"/>
           </a:xfrm>
           <a:prstGeom xmlns:a="http://schemas.openxmlformats.org/drawingml/2006/main" prst="rect">
             <a:avLst/>
@@ -3961,7 +4143,7 @@
                   <a:srgbClr val="E8F0EE"/>
                 </a:solidFill>
               </a:rPr>
-              <a:t>k=6 audit result</a:t>
+              <a:t>Accepted model: k=4</a:t>
             </a:r>
           </a:p>
         </p:txBody>
@@ -3971,19 +4153,19 @@
           <p:cNvPr id="20" name="">
             <a:extLst xmlns:a="http://schemas.openxmlformats.org/drawingml/2006/main">
               <a:ext uri="{FF2B5EF4-FFF2-40B4-BE49-F238E27FC236}">
-                <a16:creationId xmlns:a16="http://schemas.microsoft.com/office/drawing/2014/main" id="{280B86C8-5AED-4619-9C01-0B4611466A13}"/>
-              </a:ext>
-            </a:extLst>
-          </p:cNvPr>
-          <p:cNvSpPr>
-            <a:spLocks xmlns:a="http://schemas.openxmlformats.org/drawingml/2006/main" noGrp="1"/>
-          </p:cNvSpPr>
-          <p:nvPr/>
-        </p:nvSpPr>
-        <p:spPr>
-          <a:xfrm xmlns:a="http://schemas.openxmlformats.org/drawingml/2006/main">
-            <a:off x="5924550" y="4076700"/>
-            <a:ext cx="4486275" cy="847725"/>
+                <a16:creationId xmlns:a16="http://schemas.microsoft.com/office/drawing/2014/main" id="{CE4A7E90-0F52-4F39-92F0-ABDF80FD5997}"/>
+              </a:ext>
+            </a:extLst>
+          </p:cNvPr>
+          <p:cNvSpPr>
+            <a:spLocks xmlns:a="http://schemas.openxmlformats.org/drawingml/2006/main" noGrp="1"/>
+          </p:cNvSpPr>
+          <p:nvPr/>
+        </p:nvSpPr>
+        <p:spPr>
+          <a:xfrm xmlns:a="http://schemas.openxmlformats.org/drawingml/2006/main">
+            <a:off x="5353050" y="4029075"/>
+            <a:ext cx="2295525" cy="723900"/>
           </a:xfrm>
           <a:prstGeom xmlns:a="http://schemas.openxmlformats.org/drawingml/2006/main" prst="rect">
             <a:avLst/>
@@ -4020,7 +4202,7 @@
                   <a:srgbClr val="9FB3BE"/>
                 </a:solidFill>
               </a:rPr>
-              <a:t>Meaningful finer regimes, but small clusters make it fragile. Full-history k=6 is a non-deployable upper bound.</a:t>
+              <a:t>k=4 gives the best balance between performance, robustness, and deployability.</a:t>
             </a:r>
           </a:p>
         </p:txBody>
@@ -4030,19 +4212,85 @@
           <p:cNvPr id="21" name="">
             <a:extLst xmlns:a="http://schemas.openxmlformats.org/drawingml/2006/main">
               <a:ext uri="{FF2B5EF4-FFF2-40B4-BE49-F238E27FC236}">
-                <a16:creationId xmlns:a16="http://schemas.microsoft.com/office/drawing/2014/main" id="{33844E9D-82D1-4871-ADCF-7C906699B337}"/>
-              </a:ext>
-            </a:extLst>
-          </p:cNvPr>
-          <p:cNvSpPr>
-            <a:spLocks xmlns:a="http://schemas.openxmlformats.org/drawingml/2006/main" noGrp="1"/>
-          </p:cNvSpPr>
-          <p:nvPr/>
-        </p:nvSpPr>
-        <p:spPr>
-          <a:xfrm xmlns:a="http://schemas.openxmlformats.org/drawingml/2006/main">
-            <a:off x="5715000" y="5476875"/>
-            <a:ext cx="4953000" cy="457200"/>
+                <a16:creationId xmlns:a16="http://schemas.microsoft.com/office/drawing/2014/main" id="{C78B8730-7E34-4E4B-864A-FA98FDAD8D62}"/>
+              </a:ext>
+            </a:extLst>
+          </p:cNvPr>
+          <p:cNvSpPr>
+            <a:spLocks xmlns:a="http://schemas.openxmlformats.org/drawingml/2006/main" noGrp="1"/>
+          </p:cNvSpPr>
+          <p:nvPr/>
+        </p:nvSpPr>
+        <p:spPr>
+          <a:xfrm xmlns:a="http://schemas.openxmlformats.org/drawingml/2006/main">
+            <a:off x="8143875" y="3571875"/>
+            <a:ext cx="2714625" cy="1257300"/>
+          </a:xfrm>
+          <a:prstGeom xmlns:a="http://schemas.openxmlformats.org/drawingml/2006/main" prst="roundRect">
+            <a:avLst>
+              <a:gd name="adj" fmla="val 9000"/>
+            </a:avLst>
+          </a:prstGeom>
+          <a:solidFill xmlns:a="http://schemas.openxmlformats.org/drawingml/2006/main">
+            <a:srgbClr val="122030"/>
+          </a:solidFill>
+          <a:ln xmlns:a="http://schemas.openxmlformats.org/drawingml/2006/main" w="9525">
+            <a:solidFill>
+              <a:srgbClr val="243244"/>
+            </a:solidFill>
+          </a:ln>
+        </p:spPr>
+      </p:sp>
+      <p:sp>
+        <p:nvSpPr>
+          <p:cNvPr id="22" name="">
+            <a:extLst xmlns:a="http://schemas.openxmlformats.org/drawingml/2006/main">
+              <a:ext uri="{FF2B5EF4-FFF2-40B4-BE49-F238E27FC236}">
+                <a16:creationId xmlns:a16="http://schemas.microsoft.com/office/drawing/2014/main" id="{63082D37-A6AA-44B4-AE5C-8C3E5E88B950}"/>
+              </a:ext>
+            </a:extLst>
+          </p:cNvPr>
+          <p:cNvSpPr>
+            <a:spLocks xmlns:a="http://schemas.openxmlformats.org/drawingml/2006/main" noGrp="1"/>
+          </p:cNvSpPr>
+          <p:nvPr/>
+        </p:nvSpPr>
+        <p:spPr>
+          <a:xfrm xmlns:a="http://schemas.openxmlformats.org/drawingml/2006/main">
+            <a:off x="8143875" y="3571875"/>
+            <a:ext cx="47625" cy="1257300"/>
+          </a:xfrm>
+          <a:prstGeom xmlns:a="http://schemas.openxmlformats.org/drawingml/2006/main" prst="rect">
+            <a:avLst/>
+          </a:prstGeom>
+          <a:solidFill xmlns:a="http://schemas.openxmlformats.org/drawingml/2006/main">
+            <a:srgbClr val="EC5A4C"/>
+          </a:solidFill>
+          <a:ln xmlns:a="http://schemas.openxmlformats.org/drawingml/2006/main" w="0">
+            <a:solidFill>
+              <a:srgbClr val="EC5A4C"/>
+            </a:solidFill>
+          </a:ln>
+        </p:spPr>
+      </p:sp>
+      <p:sp>
+        <p:nvSpPr>
+          <p:cNvPr id="23" name="">
+            <a:extLst xmlns:a="http://schemas.openxmlformats.org/drawingml/2006/main">
+              <a:ext uri="{FF2B5EF4-FFF2-40B4-BE49-F238E27FC236}">
+                <a16:creationId xmlns:a16="http://schemas.microsoft.com/office/drawing/2014/main" id="{4D371E7F-960D-4C66-A38D-F7706340F63C}"/>
+              </a:ext>
+            </a:extLst>
+          </p:cNvPr>
+          <p:cNvSpPr>
+            <a:spLocks xmlns:a="http://schemas.openxmlformats.org/drawingml/2006/main" noGrp="1"/>
+          </p:cNvSpPr>
+          <p:nvPr/>
+        </p:nvSpPr>
+        <p:spPr>
+          <a:xfrm xmlns:a="http://schemas.openxmlformats.org/drawingml/2006/main">
+            <a:off x="8353425" y="3705225"/>
+            <a:ext cx="2295525" cy="266700"/>
           </a:xfrm>
           <a:prstGeom xmlns:a="http://schemas.openxmlformats.org/drawingml/2006/main" prst="rect">
             <a:avLst/>
@@ -4066,20 +4314,138 @@
           </a:bodyPr>
           <a:lstStyle xmlns:a="http://schemas.openxmlformats.org/drawingml/2006/main"/>
           <a:p xmlns:a="http://schemas.openxmlformats.org/drawingml/2006/main">
+            <a:pPr algn="l">
+              <a:defRPr sz="1350" b="1">
+                <a:solidFill>
+                  <a:srgbClr val="E8F0EE"/>
+                </a:solidFill>
+              </a:defRPr>
+            </a:pPr>
+            <a:r>
+              <a:rPr sz="1350" b="1">
+                <a:solidFill>
+                  <a:srgbClr val="E8F0EE"/>
+                </a:solidFill>
+              </a:rPr>
+              <a:t>Audit result: k=6</a:t>
+            </a:r>
+          </a:p>
+        </p:txBody>
+      </p:sp>
+      <p:sp>
+        <p:nvSpPr>
+          <p:cNvPr id="24" name="">
+            <a:extLst xmlns:a="http://schemas.openxmlformats.org/drawingml/2006/main">
+              <a:ext uri="{FF2B5EF4-FFF2-40B4-BE49-F238E27FC236}">
+                <a16:creationId xmlns:a16="http://schemas.microsoft.com/office/drawing/2014/main" id="{BA3EB879-054B-4907-975F-390345A1707D}"/>
+              </a:ext>
+            </a:extLst>
+          </p:cNvPr>
+          <p:cNvSpPr>
+            <a:spLocks xmlns:a="http://schemas.openxmlformats.org/drawingml/2006/main" noGrp="1"/>
+          </p:cNvSpPr>
+          <p:nvPr/>
+        </p:nvSpPr>
+        <p:spPr>
+          <a:xfrm xmlns:a="http://schemas.openxmlformats.org/drawingml/2006/main">
+            <a:off x="8353425" y="4029075"/>
+            <a:ext cx="2295525" cy="723900"/>
+          </a:xfrm>
+          <a:prstGeom xmlns:a="http://schemas.openxmlformats.org/drawingml/2006/main" prst="rect">
+            <a:avLst/>
+          </a:prstGeom>
+          <a:solidFill xmlns:a="http://schemas.openxmlformats.org/drawingml/2006/main">
+            <a:srgbClr val="000000">
+              <a:alpha val="0"/>
+            </a:srgbClr>
+          </a:solidFill>
+          <a:ln xmlns:a="http://schemas.openxmlformats.org/drawingml/2006/main" w="0">
+            <a:solidFill>
+              <a:srgbClr val="000000">
+                <a:alpha val="0"/>
+              </a:srgbClr>
+            </a:solidFill>
+          </a:ln>
+        </p:spPr>
+        <p:txBody>
+          <a:bodyPr xmlns:a="http://schemas.openxmlformats.org/drawingml/2006/main" lIns="0" tIns="0" rIns="0" bIns="0" anchor="ctr">
+            <a:normAutofit fontScale="99540"/>
+          </a:bodyPr>
+          <a:lstStyle xmlns:a="http://schemas.openxmlformats.org/drawingml/2006/main"/>
+          <a:p xmlns:a="http://schemas.openxmlformats.org/drawingml/2006/main">
+            <a:pPr algn="l">
+              <a:defRPr sz="1200" b="0">
+                <a:solidFill>
+                  <a:srgbClr val="9FB3BE"/>
+                </a:solidFill>
+              </a:defRPr>
+            </a:pPr>
+            <a:r>
+              <a:rPr sz="1200" b="0">
+                <a:solidFill>
+                  <a:srgbClr val="9FB3BE"/>
+                </a:solidFill>
+              </a:rPr>
+              <a:t>k=6 captures meaningful finer regimes, but small groups and full-history assignment make it fragile.</a:t>
+            </a:r>
+          </a:p>
+        </p:txBody>
+      </p:sp>
+      <p:sp>
+        <p:nvSpPr>
+          <p:cNvPr id="25" name="">
+            <a:extLst xmlns:a="http://schemas.openxmlformats.org/drawingml/2006/main">
+              <a:ext uri="{FF2B5EF4-FFF2-40B4-BE49-F238E27FC236}">
+                <a16:creationId xmlns:a16="http://schemas.microsoft.com/office/drawing/2014/main" id="{5EC77376-4159-475D-ADEB-E6EFFBE17D47}"/>
+              </a:ext>
+            </a:extLst>
+          </p:cNvPr>
+          <p:cNvSpPr>
+            <a:spLocks xmlns:a="http://schemas.openxmlformats.org/drawingml/2006/main" noGrp="1"/>
+          </p:cNvSpPr>
+          <p:nvPr/>
+        </p:nvSpPr>
+        <p:spPr>
+          <a:xfrm xmlns:a="http://schemas.openxmlformats.org/drawingml/2006/main">
+            <a:off x="5143500" y="5476875"/>
+            <a:ext cx="5715000" cy="419100"/>
+          </a:xfrm>
+          <a:prstGeom xmlns:a="http://schemas.openxmlformats.org/drawingml/2006/main" prst="rect">
+            <a:avLst/>
+          </a:prstGeom>
+          <a:solidFill xmlns:a="http://schemas.openxmlformats.org/drawingml/2006/main">
+            <a:srgbClr val="000000">
+              <a:alpha val="0"/>
+            </a:srgbClr>
+          </a:solidFill>
+          <a:ln xmlns:a="http://schemas.openxmlformats.org/drawingml/2006/main" w="0">
+            <a:solidFill>
+              <a:srgbClr val="000000">
+                <a:alpha val="0"/>
+              </a:srgbClr>
+            </a:solidFill>
+          </a:ln>
+        </p:spPr>
+        <p:txBody>
+          <a:bodyPr xmlns:a="http://schemas.openxmlformats.org/drawingml/2006/main" lIns="0" tIns="0" rIns="0" bIns="0" anchor="ctr">
+            <a:normAutofit fontScale="81900"/>
+          </a:bodyPr>
+          <a:lstStyle xmlns:a="http://schemas.openxmlformats.org/drawingml/2006/main"/>
+          <a:p xmlns:a="http://schemas.openxmlformats.org/drawingml/2006/main">
             <a:pPr algn="ctr">
-              <a:defRPr sz="1350" b="1">
+              <a:defRPr sz="1650" b="1">
                 <a:solidFill>
                   <a:srgbClr val="E8F0EE"/>
                 </a:solidFill>
               </a:defRPr>
             </a:pPr>
             <a:r>
-              <a:rPr sz="1350" b="1">
+              <a:rPr sz="1650" b="1">
                 <a:solidFill>
                   <a:srgbClr val="E8F0EE"/>
                 </a:solidFill>
               </a:rPr>
-              <a:t>Presenter line: “We choose k=4 not because k=6 is meaningless, but because k=4 generalizes more defensibly.”</a:t>
+              <a:t>Bottom line: k=6 remains a research direction; accepted production remains k=4.</a:t>
             </a:r>
           </a:p>
         </p:txBody>
@@ -4087,7 +4453,7 @@
     </p:spTree>
     <p:extLst>
       <p:ext uri="{BB962C8B-B14F-4D97-AF65-F5344CB8AC3E}">
-        <p14:creationId xmlns:p14="http://schemas.microsoft.com/office/powerpoint/2010/main" val="79008126"/>
+        <p14:creationId xmlns:p14="http://schemas.microsoft.com/office/powerpoint/2010/main" val="1053768446"/>
       </p:ext>
     </p:extLst>
   </p:cSld>
@@ -4118,7 +4484,7 @@
           <p:cNvPr id="1" name="Slide Number Placeholder 5">
             <a:extLst xmlns:a="http://schemas.openxmlformats.org/drawingml/2006/main">
               <a:ext uri="{FF2B5EF4-FFF2-40B4-BE49-F238E27FC236}">
-                <a16:creationId xmlns:a16="http://schemas.microsoft.com/office/drawing/2014/main" id="{78525AE3-55D2-40B0-AF73-4A4A22CB3723}"/>
+                <a16:creationId xmlns:a16="http://schemas.microsoft.com/office/drawing/2014/main" id="{C918E388-860F-4F82-9374-E82070A9017C}"/>
               </a:ext>
             </a:extLst>
           </p:cNvPr>
@@ -4150,7 +4516,7 @@
           <p:cNvPr id="2" name="">
             <a:extLst xmlns:a="http://schemas.openxmlformats.org/drawingml/2006/main">
               <a:ext uri="{FF2B5EF4-FFF2-40B4-BE49-F238E27FC236}">
-                <a16:creationId xmlns:a16="http://schemas.microsoft.com/office/drawing/2014/main" id="{01F4EF73-3D3C-44A6-A056-E733005AA199}"/>
+                <a16:creationId xmlns:a16="http://schemas.microsoft.com/office/drawing/2014/main" id="{94E454C5-CF8A-435E-9DF3-0FA817E12504}"/>
               </a:ext>
             </a:extLst>
           </p:cNvPr>
@@ -4182,7 +4548,7 @@
           <p:cNvPr id="3" name="">
             <a:extLst xmlns:a="http://schemas.openxmlformats.org/drawingml/2006/main">
               <a:ext uri="{FF2B5EF4-FFF2-40B4-BE49-F238E27FC236}">
-                <a16:creationId xmlns:a16="http://schemas.microsoft.com/office/drawing/2014/main" id="{17AF47C8-F263-4236-B2DF-950BE906229C}"/>
+                <a16:creationId xmlns:a16="http://schemas.microsoft.com/office/drawing/2014/main" id="{27DF5D86-0176-415A-B510-F74518A4AC63}"/>
               </a:ext>
             </a:extLst>
           </p:cNvPr>
@@ -4214,7 +4580,7 @@
           <p:cNvPr id="4" name="">
             <a:extLst xmlns:a="http://schemas.openxmlformats.org/drawingml/2006/main">
               <a:ext uri="{FF2B5EF4-FFF2-40B4-BE49-F238E27FC236}">
-                <a16:creationId xmlns:a16="http://schemas.microsoft.com/office/drawing/2014/main" id="{13CAE682-F528-4263-9FDB-A5D4B0CEA3DD}"/>
+                <a16:creationId xmlns:a16="http://schemas.microsoft.com/office/drawing/2014/main" id="{3DC88E5C-B40B-4281-8195-970F1731766B}"/>
               </a:ext>
             </a:extLst>
           </p:cNvPr>
@@ -4273,7 +4639,7 @@
           <p:cNvPr id="5" name="">
             <a:extLst xmlns:a="http://schemas.openxmlformats.org/drawingml/2006/main">
               <a:ext uri="{FF2B5EF4-FFF2-40B4-BE49-F238E27FC236}">
-                <a16:creationId xmlns:a16="http://schemas.microsoft.com/office/drawing/2014/main" id="{593826B7-59EC-4BDC-AFE3-F9502CBD7BBE}"/>
+                <a16:creationId xmlns:a16="http://schemas.microsoft.com/office/drawing/2014/main" id="{BC739F71-C69B-4916-AB3E-471FB7DB3176}"/>
               </a:ext>
             </a:extLst>
           </p:cNvPr>
@@ -4322,7 +4688,7 @@
                   <a:srgbClr val="14A38B"/>
                 </a:solidFill>
               </a:rPr>
-              <a:t>Person 3 · safety tiers</a:t>
+              <a:t>Person 3 · pipeline + safety</a:t>
             </a:r>
           </a:p>
         </p:txBody>
@@ -4332,7 +4698,7 @@
           <p:cNvPr id="6" name="">
             <a:extLst xmlns:a="http://schemas.openxmlformats.org/drawingml/2006/main">
               <a:ext uri="{FF2B5EF4-FFF2-40B4-BE49-F238E27FC236}">
-                <a16:creationId xmlns:a16="http://schemas.microsoft.com/office/drawing/2014/main" id="{21451176-5C7B-49A4-A373-29BD832150E7}"/>
+                <a16:creationId xmlns:a16="http://schemas.microsoft.com/office/drawing/2014/main" id="{6A357900-BA5B-4627-B479-AC1ADDB64D29}"/>
               </a:ext>
             </a:extLst>
           </p:cNvPr>
@@ -4381,7 +4747,7 @@
                   <a:srgbClr val="E8F0EE"/>
                 </a:solidFill>
               </a:rPr>
-              <a:t>Safety Tiers Turn Predictions into Decisions</a:t>
+              <a:t>Model Pipeline and Safety Tiers</a:t>
             </a:r>
           </a:p>
         </p:txBody>
@@ -4391,7 +4757,7 @@
           <p:cNvPr id="7" name="">
             <a:extLst xmlns:a="http://schemas.openxmlformats.org/drawingml/2006/main">
               <a:ext uri="{FF2B5EF4-FFF2-40B4-BE49-F238E27FC236}">
-                <a16:creationId xmlns:a16="http://schemas.microsoft.com/office/drawing/2014/main" id="{17A5809B-10EE-46B3-AB2B-611968F31411}"/>
+                <a16:creationId xmlns:a16="http://schemas.microsoft.com/office/drawing/2014/main" id="{5EA3142D-821A-461A-8B87-5C5585BD298B}"/>
               </a:ext>
             </a:extLst>
           </p:cNvPr>
@@ -4440,51 +4806,29 @@
                   <a:srgbClr val="9FB3BE"/>
                 </a:solidFill>
               </a:rPr>
-              <a:t>The planner does not act on R²; they act on risk categories.</a:t>
-            </a:r>
-          </a:p>
-        </p:txBody>
-      </p:sp>
-      <p:pic>
-        <p:nvPicPr>
-          <p:cNvPr id="8" name=""/>
-          <p:cNvPicPr>
-            <a:picLocks xmlns:a="http://schemas.openxmlformats.org/drawingml/2006/main" noChangeAspect="1"/>
-          </p:cNvPicPr>
-          <p:nvPr/>
-        </p:nvPicPr>
-        <p:blipFill>
-          <a:blip xmlns:r="http://schemas.openxmlformats.org/officeDocument/2006/relationships" xmlns:a="http://schemas.openxmlformats.org/drawingml/2006/main" r:embed="Ra55b023504e24d33"/>
-          <a:stretch xmlns:a="http://schemas.openxmlformats.org/drawingml/2006/main"/>
-        </p:blipFill>
-        <p:spPr>
-          <a:xfrm xmlns:a="http://schemas.openxmlformats.org/drawingml/2006/main">
-            <a:off x="666750" y="2821026"/>
-            <a:ext cx="5429250" cy="1549323"/>
-          </a:xfrm>
-          <a:prstGeom xmlns:a="http://schemas.openxmlformats.org/drawingml/2006/main" prst="rect">
-            <a:avLst/>
-          </a:prstGeom>
-        </p:spPr>
-      </p:pic>
-      <p:sp>
-        <p:nvSpPr>
-          <p:cNvPr id="9" name="">
-            <a:extLst xmlns:a="http://schemas.openxmlformats.org/drawingml/2006/main">
-              <a:ext uri="{FF2B5EF4-FFF2-40B4-BE49-F238E27FC236}">
-                <a16:creationId xmlns:a16="http://schemas.microsoft.com/office/drawing/2014/main" id="{E9BD14C9-ED1C-4BCE-B120-285A89D7C3F7}"/>
-              </a:ext>
-            </a:extLst>
-          </p:cNvPr>
-          <p:cNvSpPr>
-            <a:spLocks xmlns:a="http://schemas.openxmlformats.org/drawingml/2006/main" noGrp="1"/>
-          </p:cNvSpPr>
-          <p:nvPr/>
-        </p:nvSpPr>
-        <p:spPr>
-          <a:xfrm xmlns:a="http://schemas.openxmlformats.org/drawingml/2006/main">
-            <a:off x="6667500" y="1905000"/>
-            <a:ext cx="2190750" cy="1028700"/>
+              <a:t>After estimating PM2.5, the output becomes easier to act on.</a:t>
+            </a:r>
+          </a:p>
+        </p:txBody>
+      </p:sp>
+      <p:sp>
+        <p:nvSpPr>
+          <p:cNvPr id="8" name="">
+            <a:extLst xmlns:a="http://schemas.openxmlformats.org/drawingml/2006/main">
+              <a:ext uri="{FF2B5EF4-FFF2-40B4-BE49-F238E27FC236}">
+                <a16:creationId xmlns:a16="http://schemas.microsoft.com/office/drawing/2014/main" id="{17427128-4C3F-4EF7-B63A-CB04AD96DC98}"/>
+              </a:ext>
+            </a:extLst>
+          </p:cNvPr>
+          <p:cNvSpPr>
+            <a:spLocks xmlns:a="http://schemas.openxmlformats.org/drawingml/2006/main" noGrp="1"/>
+          </p:cNvSpPr>
+          <p:nvPr/>
+        </p:nvSpPr>
+        <p:spPr>
+          <a:xfrm xmlns:a="http://schemas.openxmlformats.org/drawingml/2006/main">
+            <a:off x="685800" y="1952625"/>
+            <a:ext cx="2333625" cy="1238250"/>
           </a:xfrm>
           <a:prstGeom xmlns:a="http://schemas.openxmlformats.org/drawingml/2006/main" prst="roundRect">
             <a:avLst>
@@ -4503,22 +4847,54 @@
       </p:sp>
       <p:sp>
         <p:nvSpPr>
+          <p:cNvPr id="9" name="">
+            <a:extLst xmlns:a="http://schemas.openxmlformats.org/drawingml/2006/main">
+              <a:ext uri="{FF2B5EF4-FFF2-40B4-BE49-F238E27FC236}">
+                <a16:creationId xmlns:a16="http://schemas.microsoft.com/office/drawing/2014/main" id="{FF7258B0-F75C-4167-9058-3EC230015E2E}"/>
+              </a:ext>
+            </a:extLst>
+          </p:cNvPr>
+          <p:cNvSpPr>
+            <a:spLocks xmlns:a="http://schemas.openxmlformats.org/drawingml/2006/main" noGrp="1"/>
+          </p:cNvSpPr>
+          <p:nvPr/>
+        </p:nvSpPr>
+        <p:spPr>
+          <a:xfrm xmlns:a="http://schemas.openxmlformats.org/drawingml/2006/main">
+            <a:off x="685800" y="1952625"/>
+            <a:ext cx="47625" cy="1238250"/>
+          </a:xfrm>
+          <a:prstGeom xmlns:a="http://schemas.openxmlformats.org/drawingml/2006/main" prst="rect">
+            <a:avLst/>
+          </a:prstGeom>
+          <a:solidFill xmlns:a="http://schemas.openxmlformats.org/drawingml/2006/main">
+            <a:srgbClr val="14A38B"/>
+          </a:solidFill>
+          <a:ln xmlns:a="http://schemas.openxmlformats.org/drawingml/2006/main" w="0">
+            <a:solidFill>
+              <a:srgbClr val="14A38B"/>
+            </a:solidFill>
+          </a:ln>
+        </p:spPr>
+      </p:sp>
+      <p:sp>
+        <p:nvSpPr>
           <p:cNvPr id="10" name="">
             <a:extLst xmlns:a="http://schemas.openxmlformats.org/drawingml/2006/main">
               <a:ext uri="{FF2B5EF4-FFF2-40B4-BE49-F238E27FC236}">
-                <a16:creationId xmlns:a16="http://schemas.microsoft.com/office/drawing/2014/main" id="{FFA4398F-1EB5-4982-A0AE-571F34703A5C}"/>
-              </a:ext>
-            </a:extLst>
-          </p:cNvPr>
-          <p:cNvSpPr>
-            <a:spLocks xmlns:a="http://schemas.openxmlformats.org/drawingml/2006/main" noGrp="1"/>
-          </p:cNvSpPr>
-          <p:nvPr/>
-        </p:nvSpPr>
-        <p:spPr>
-          <a:xfrm xmlns:a="http://schemas.openxmlformats.org/drawingml/2006/main">
-            <a:off x="6781800" y="2047875"/>
-            <a:ext cx="1962150" cy="381000"/>
+                <a16:creationId xmlns:a16="http://schemas.microsoft.com/office/drawing/2014/main" id="{E4686D1F-5D4A-4001-B7A2-E755C1385756}"/>
+              </a:ext>
+            </a:extLst>
+          </p:cNvPr>
+          <p:cNvSpPr>
+            <a:spLocks xmlns:a="http://schemas.openxmlformats.org/drawingml/2006/main" noGrp="1"/>
+          </p:cNvSpPr>
+          <p:nvPr/>
+        </p:nvSpPr>
+        <p:spPr>
+          <a:xfrm xmlns:a="http://schemas.openxmlformats.org/drawingml/2006/main">
+            <a:off x="895350" y="2085975"/>
+            <a:ext cx="1914525" cy="266700"/>
           </a:xfrm>
           <a:prstGeom xmlns:a="http://schemas.openxmlformats.org/drawingml/2006/main" prst="rect">
             <a:avLst/>
@@ -4542,20 +4918,20 @@
           </a:bodyPr>
           <a:lstStyle xmlns:a="http://schemas.openxmlformats.org/drawingml/2006/main"/>
           <a:p xmlns:a="http://schemas.openxmlformats.org/drawingml/2006/main">
-            <a:pPr algn="ctr">
-              <a:defRPr sz="2175" b="1">
-                <a:solidFill>
-                  <a:srgbClr val="46C98A"/>
-                </a:solidFill>
-              </a:defRPr>
-            </a:pPr>
-            <a:r>
-              <a:rPr sz="2175" b="1">
-                <a:solidFill>
-                  <a:srgbClr val="46C98A"/>
-                </a:solidFill>
-              </a:rPr>
-              <a:t>68%</a:t>
+            <a:pPr algn="l">
+              <a:defRPr sz="1350" b="1">
+                <a:solidFill>
+                  <a:srgbClr val="E8F0EE"/>
+                </a:solidFill>
+              </a:defRPr>
+            </a:pPr>
+            <a:r>
+              <a:rPr sz="1350" b="1">
+                <a:solidFill>
+                  <a:srgbClr val="E8F0EE"/>
+                </a:solidFill>
+              </a:rPr>
+              <a:t>1 · assign category</a:t>
             </a:r>
           </a:p>
         </p:txBody>
@@ -4565,19 +4941,19 @@
           <p:cNvPr id="11" name="">
             <a:extLst xmlns:a="http://schemas.openxmlformats.org/drawingml/2006/main">
               <a:ext uri="{FF2B5EF4-FFF2-40B4-BE49-F238E27FC236}">
-                <a16:creationId xmlns:a16="http://schemas.microsoft.com/office/drawing/2014/main" id="{16825772-B45F-4413-86D5-73C9191645E1}"/>
-              </a:ext>
-            </a:extLst>
-          </p:cNvPr>
-          <p:cNvSpPr>
-            <a:spLocks xmlns:a="http://schemas.openxmlformats.org/drawingml/2006/main" noGrp="1"/>
-          </p:cNvSpPr>
-          <p:nvPr/>
-        </p:nvSpPr>
-        <p:spPr>
-          <a:xfrm xmlns:a="http://schemas.openxmlformats.org/drawingml/2006/main">
-            <a:off x="6800850" y="2495550"/>
-            <a:ext cx="1924050" cy="304800"/>
+                <a16:creationId xmlns:a16="http://schemas.microsoft.com/office/drawing/2014/main" id="{BA88C9F5-A54D-4622-AB42-80E5E3F1AEA6}"/>
+              </a:ext>
+            </a:extLst>
+          </p:cNvPr>
+          <p:cNvSpPr>
+            <a:spLocks xmlns:a="http://schemas.openxmlformats.org/drawingml/2006/main" noGrp="1"/>
+          </p:cNvSpPr>
+          <p:nvPr/>
+        </p:nvSpPr>
+        <p:spPr>
+          <a:xfrm xmlns:a="http://schemas.openxmlformats.org/drawingml/2006/main">
+            <a:off x="895350" y="2409825"/>
+            <a:ext cx="1914525" cy="704850"/>
           </a:xfrm>
           <a:prstGeom xmlns:a="http://schemas.openxmlformats.org/drawingml/2006/main" prst="rect">
             <a:avLst/>
@@ -4601,20 +4977,20 @@
           </a:bodyPr>
           <a:lstStyle xmlns:a="http://schemas.openxmlformats.org/drawingml/2006/main"/>
           <a:p xmlns:a="http://schemas.openxmlformats.org/drawingml/2006/main">
-            <a:pPr algn="ctr">
-              <a:defRPr sz="1050" b="0">
+            <a:pPr algn="l">
+              <a:defRPr sz="1200" b="0">
                 <a:solidFill>
                   <a:srgbClr val="9FB3BE"/>
                 </a:solidFill>
               </a:defRPr>
             </a:pPr>
             <a:r>
-              <a:rPr sz="1050" b="0">
+              <a:rPr sz="1200" b="0">
                 <a:solidFill>
                   <a:srgbClr val="9FB3BE"/>
                 </a:solidFill>
               </a:rPr>
-              <a:t>exact NOW safety tier</a:t>
+              <a:t>Use the site’s pollution regime as a model feature.</a:t>
             </a:r>
           </a:p>
         </p:txBody>
@@ -4624,19 +5000,19 @@
           <p:cNvPr id="12" name="">
             <a:extLst xmlns:a="http://schemas.openxmlformats.org/drawingml/2006/main">
               <a:ext uri="{FF2B5EF4-FFF2-40B4-BE49-F238E27FC236}">
-                <a16:creationId xmlns:a16="http://schemas.microsoft.com/office/drawing/2014/main" id="{988A176F-2724-4C98-824B-B1375A1E4931}"/>
-              </a:ext>
-            </a:extLst>
-          </p:cNvPr>
-          <p:cNvSpPr>
-            <a:spLocks xmlns:a="http://schemas.openxmlformats.org/drawingml/2006/main" noGrp="1"/>
-          </p:cNvSpPr>
-          <p:nvPr/>
-        </p:nvSpPr>
-        <p:spPr>
-          <a:xfrm xmlns:a="http://schemas.openxmlformats.org/drawingml/2006/main">
-            <a:off x="9191625" y="1905000"/>
-            <a:ext cx="2095500" cy="1028700"/>
+                <a16:creationId xmlns:a16="http://schemas.microsoft.com/office/drawing/2014/main" id="{1DEF2A9B-F3AB-4A9D-A9A8-EE5941B9A6C8}"/>
+              </a:ext>
+            </a:extLst>
+          </p:cNvPr>
+          <p:cNvSpPr>
+            <a:spLocks xmlns:a="http://schemas.openxmlformats.org/drawingml/2006/main" noGrp="1"/>
+          </p:cNvSpPr>
+          <p:nvPr/>
+        </p:nvSpPr>
+        <p:spPr>
+          <a:xfrm xmlns:a="http://schemas.openxmlformats.org/drawingml/2006/main">
+            <a:off x="3305175" y="1952625"/>
+            <a:ext cx="2333625" cy="1238250"/>
           </a:xfrm>
           <a:prstGeom xmlns:a="http://schemas.openxmlformats.org/drawingml/2006/main" prst="roundRect">
             <a:avLst>
@@ -4658,19 +5034,51 @@
           <p:cNvPr id="13" name="">
             <a:extLst xmlns:a="http://schemas.openxmlformats.org/drawingml/2006/main">
               <a:ext uri="{FF2B5EF4-FFF2-40B4-BE49-F238E27FC236}">
-                <a16:creationId xmlns:a16="http://schemas.microsoft.com/office/drawing/2014/main" id="{9F73D0BB-DC5B-4013-B1B8-DB0F1C64526D}"/>
-              </a:ext>
-            </a:extLst>
-          </p:cNvPr>
-          <p:cNvSpPr>
-            <a:spLocks xmlns:a="http://schemas.openxmlformats.org/drawingml/2006/main" noGrp="1"/>
-          </p:cNvSpPr>
-          <p:nvPr/>
-        </p:nvSpPr>
-        <p:spPr>
-          <a:xfrm xmlns:a="http://schemas.openxmlformats.org/drawingml/2006/main">
-            <a:off x="9305925" y="2047875"/>
-            <a:ext cx="1866900" cy="381000"/>
+                <a16:creationId xmlns:a16="http://schemas.microsoft.com/office/drawing/2014/main" id="{07AE1261-730A-46E8-8ABB-10F6894DBC99}"/>
+              </a:ext>
+            </a:extLst>
+          </p:cNvPr>
+          <p:cNvSpPr>
+            <a:spLocks xmlns:a="http://schemas.openxmlformats.org/drawingml/2006/main" noGrp="1"/>
+          </p:cNvSpPr>
+          <p:nvPr/>
+        </p:nvSpPr>
+        <p:spPr>
+          <a:xfrm xmlns:a="http://schemas.openxmlformats.org/drawingml/2006/main">
+            <a:off x="3305175" y="1952625"/>
+            <a:ext cx="47625" cy="1238250"/>
+          </a:xfrm>
+          <a:prstGeom xmlns:a="http://schemas.openxmlformats.org/drawingml/2006/main" prst="rect">
+            <a:avLst/>
+          </a:prstGeom>
+          <a:solidFill xmlns:a="http://schemas.openxmlformats.org/drawingml/2006/main">
+            <a:srgbClr val="E8A020"/>
+          </a:solidFill>
+          <a:ln xmlns:a="http://schemas.openxmlformats.org/drawingml/2006/main" w="0">
+            <a:solidFill>
+              <a:srgbClr val="E8A020"/>
+            </a:solidFill>
+          </a:ln>
+        </p:spPr>
+      </p:sp>
+      <p:sp>
+        <p:nvSpPr>
+          <p:cNvPr id="14" name="">
+            <a:extLst xmlns:a="http://schemas.openxmlformats.org/drawingml/2006/main">
+              <a:ext uri="{FF2B5EF4-FFF2-40B4-BE49-F238E27FC236}">
+                <a16:creationId xmlns:a16="http://schemas.microsoft.com/office/drawing/2014/main" id="{53C1FD15-F3EF-4765-962A-53CA5FAD4606}"/>
+              </a:ext>
+            </a:extLst>
+          </p:cNvPr>
+          <p:cNvSpPr>
+            <a:spLocks xmlns:a="http://schemas.openxmlformats.org/drawingml/2006/main" noGrp="1"/>
+          </p:cNvSpPr>
+          <p:nvPr/>
+        </p:nvSpPr>
+        <p:spPr>
+          <a:xfrm xmlns:a="http://schemas.openxmlformats.org/drawingml/2006/main">
+            <a:off x="3514725" y="2085975"/>
+            <a:ext cx="1914525" cy="266700"/>
           </a:xfrm>
           <a:prstGeom xmlns:a="http://schemas.openxmlformats.org/drawingml/2006/main" prst="rect">
             <a:avLst/>
@@ -4694,42 +5102,42 @@
           </a:bodyPr>
           <a:lstStyle xmlns:a="http://schemas.openxmlformats.org/drawingml/2006/main"/>
           <a:p xmlns:a="http://schemas.openxmlformats.org/drawingml/2006/main">
-            <a:pPr algn="ctr">
-              <a:defRPr sz="2175" b="1">
-                <a:solidFill>
-                  <a:srgbClr val="46C98A"/>
-                </a:solidFill>
-              </a:defRPr>
-            </a:pPr>
-            <a:r>
-              <a:rPr sz="2175" b="1">
-                <a:solidFill>
-                  <a:srgbClr val="46C98A"/>
-                </a:solidFill>
-              </a:rPr>
-              <a:t>98.5%</a:t>
-            </a:r>
-          </a:p>
-        </p:txBody>
-      </p:sp>
-      <p:sp>
-        <p:nvSpPr>
-          <p:cNvPr id="14" name="">
-            <a:extLst xmlns:a="http://schemas.openxmlformats.org/drawingml/2006/main">
-              <a:ext uri="{FF2B5EF4-FFF2-40B4-BE49-F238E27FC236}">
-                <a16:creationId xmlns:a16="http://schemas.microsoft.com/office/drawing/2014/main" id="{940A6AF8-FF5D-4596-92EC-CB99B8F35E7F}"/>
-              </a:ext>
-            </a:extLst>
-          </p:cNvPr>
-          <p:cNvSpPr>
-            <a:spLocks xmlns:a="http://schemas.openxmlformats.org/drawingml/2006/main" noGrp="1"/>
-          </p:cNvSpPr>
-          <p:nvPr/>
-        </p:nvSpPr>
-        <p:spPr>
-          <a:xfrm xmlns:a="http://schemas.openxmlformats.org/drawingml/2006/main">
-            <a:off x="9324975" y="2495550"/>
-            <a:ext cx="1828800" cy="304800"/>
+            <a:pPr algn="l">
+              <a:defRPr sz="1350" b="1">
+                <a:solidFill>
+                  <a:srgbClr val="E8F0EE"/>
+                </a:solidFill>
+              </a:defRPr>
+            </a:pPr>
+            <a:r>
+              <a:rPr sz="1350" b="1">
+                <a:solidFill>
+                  <a:srgbClr val="E8F0EE"/>
+                </a:solidFill>
+              </a:rPr>
+              <a:t>2 · add features</a:t>
+            </a:r>
+          </a:p>
+        </p:txBody>
+      </p:sp>
+      <p:sp>
+        <p:nvSpPr>
+          <p:cNvPr id="15" name="">
+            <a:extLst xmlns:a="http://schemas.openxmlformats.org/drawingml/2006/main">
+              <a:ext uri="{FF2B5EF4-FFF2-40B4-BE49-F238E27FC236}">
+                <a16:creationId xmlns:a16="http://schemas.microsoft.com/office/drawing/2014/main" id="{60D7AA15-6CC4-418C-AD4A-942DA3E2A0CA}"/>
+              </a:ext>
+            </a:extLst>
+          </p:cNvPr>
+          <p:cNvSpPr>
+            <a:spLocks xmlns:a="http://schemas.openxmlformats.org/drawingml/2006/main" noGrp="1"/>
+          </p:cNvSpPr>
+          <p:nvPr/>
+        </p:nvSpPr>
+        <p:spPr>
+          <a:xfrm xmlns:a="http://schemas.openxmlformats.org/drawingml/2006/main">
+            <a:off x="3514725" y="2409825"/>
+            <a:ext cx="1914525" cy="704850"/>
           </a:xfrm>
           <a:prstGeom xmlns:a="http://schemas.openxmlformats.org/drawingml/2006/main" prst="rect">
             <a:avLst/>
@@ -4753,42 +5161,42 @@
           </a:bodyPr>
           <a:lstStyle xmlns:a="http://schemas.openxmlformats.org/drawingml/2006/main"/>
           <a:p xmlns:a="http://schemas.openxmlformats.org/drawingml/2006/main">
-            <a:pPr algn="ctr">
-              <a:defRPr sz="1050" b="0">
+            <a:pPr algn="l">
+              <a:defRPr sz="1200" b="0">
                 <a:solidFill>
                   <a:srgbClr val="9FB3BE"/>
                 </a:solidFill>
               </a:defRPr>
             </a:pPr>
             <a:r>
-              <a:rPr sz="1050" b="0">
+              <a:rPr sz="1200" b="0">
                 <a:solidFill>
                   <a:srgbClr val="9FB3BE"/>
                 </a:solidFill>
               </a:rPr>
-              <a:t>within one tier</a:t>
-            </a:r>
-          </a:p>
-        </p:txBody>
-      </p:sp>
-      <p:sp>
-        <p:nvSpPr>
-          <p:cNvPr id="15" name="">
-            <a:extLst xmlns:a="http://schemas.openxmlformats.org/drawingml/2006/main">
-              <a:ext uri="{FF2B5EF4-FFF2-40B4-BE49-F238E27FC236}">
-                <a16:creationId xmlns:a16="http://schemas.microsoft.com/office/drawing/2014/main" id="{39F557FD-3380-49B5-B54D-DF86134CF9F1}"/>
-              </a:ext>
-            </a:extLst>
-          </p:cNvPr>
-          <p:cNvSpPr>
-            <a:spLocks xmlns:a="http://schemas.openxmlformats.org/drawingml/2006/main" noGrp="1"/>
-          </p:cNvSpPr>
-          <p:nvPr/>
-        </p:nvSpPr>
-        <p:spPr>
-          <a:xfrm xmlns:a="http://schemas.openxmlformats.org/drawingml/2006/main">
-            <a:off x="6667500" y="3429000"/>
-            <a:ext cx="4619625" cy="1143000"/>
+              <a:t>Weather, location, calendar, and external geospatial features.</a:t>
+            </a:r>
+          </a:p>
+        </p:txBody>
+      </p:sp>
+      <p:sp>
+        <p:nvSpPr>
+          <p:cNvPr id="16" name="">
+            <a:extLst xmlns:a="http://schemas.openxmlformats.org/drawingml/2006/main">
+              <a:ext uri="{FF2B5EF4-FFF2-40B4-BE49-F238E27FC236}">
+                <a16:creationId xmlns:a16="http://schemas.microsoft.com/office/drawing/2014/main" id="{AB7B4253-E4EB-4234-A6F1-01B34BBE9887}"/>
+              </a:ext>
+            </a:extLst>
+          </p:cNvPr>
+          <p:cNvSpPr>
+            <a:spLocks xmlns:a="http://schemas.openxmlformats.org/drawingml/2006/main" noGrp="1"/>
+          </p:cNvSpPr>
+          <p:nvPr/>
+        </p:nvSpPr>
+        <p:spPr>
+          <a:xfrm xmlns:a="http://schemas.openxmlformats.org/drawingml/2006/main">
+            <a:off x="5924550" y="1952625"/>
+            <a:ext cx="2333625" cy="1238250"/>
           </a:xfrm>
           <a:prstGeom xmlns:a="http://schemas.openxmlformats.org/drawingml/2006/main" prst="roundRect">
             <a:avLst>
@@ -4807,54 +5215,54 @@
       </p:sp>
       <p:sp>
         <p:nvSpPr>
-          <p:cNvPr id="16" name="">
-            <a:extLst xmlns:a="http://schemas.openxmlformats.org/drawingml/2006/main">
-              <a:ext uri="{FF2B5EF4-FFF2-40B4-BE49-F238E27FC236}">
-                <a16:creationId xmlns:a16="http://schemas.microsoft.com/office/drawing/2014/main" id="{7AC7E832-67BB-46D3-ACE3-AA4D65AB77DD}"/>
-              </a:ext>
-            </a:extLst>
-          </p:cNvPr>
-          <p:cNvSpPr>
-            <a:spLocks xmlns:a="http://schemas.openxmlformats.org/drawingml/2006/main" noGrp="1"/>
-          </p:cNvSpPr>
-          <p:nvPr/>
-        </p:nvSpPr>
-        <p:spPr>
-          <a:xfrm xmlns:a="http://schemas.openxmlformats.org/drawingml/2006/main">
-            <a:off x="6667500" y="3429000"/>
-            <a:ext cx="47625" cy="1143000"/>
-          </a:xfrm>
-          <a:prstGeom xmlns:a="http://schemas.openxmlformats.org/drawingml/2006/main" prst="rect">
-            <a:avLst/>
-          </a:prstGeom>
-          <a:solidFill xmlns:a="http://schemas.openxmlformats.org/drawingml/2006/main">
-            <a:srgbClr val="14A38B"/>
-          </a:solidFill>
-          <a:ln xmlns:a="http://schemas.openxmlformats.org/drawingml/2006/main" w="0">
-            <a:solidFill>
-              <a:srgbClr val="14A38B"/>
-            </a:solidFill>
-          </a:ln>
-        </p:spPr>
-      </p:sp>
-      <p:sp>
-        <p:nvSpPr>
           <p:cNvPr id="17" name="">
             <a:extLst xmlns:a="http://schemas.openxmlformats.org/drawingml/2006/main">
               <a:ext uri="{FF2B5EF4-FFF2-40B4-BE49-F238E27FC236}">
-                <a16:creationId xmlns:a16="http://schemas.microsoft.com/office/drawing/2014/main" id="{1DEDA009-B833-428B-A72A-280E945CA8E7}"/>
-              </a:ext>
-            </a:extLst>
-          </p:cNvPr>
-          <p:cNvSpPr>
-            <a:spLocks xmlns:a="http://schemas.openxmlformats.org/drawingml/2006/main" noGrp="1"/>
-          </p:cNvSpPr>
-          <p:nvPr/>
-        </p:nvSpPr>
-        <p:spPr>
-          <a:xfrm xmlns:a="http://schemas.openxmlformats.org/drawingml/2006/main">
-            <a:off x="6877050" y="3562350"/>
-            <a:ext cx="4200525" cy="266700"/>
+                <a16:creationId xmlns:a16="http://schemas.microsoft.com/office/drawing/2014/main" id="{E3227969-6D1F-4ECF-847B-A82C2C93AFE6}"/>
+              </a:ext>
+            </a:extLst>
+          </p:cNvPr>
+          <p:cNvSpPr>
+            <a:spLocks xmlns:a="http://schemas.openxmlformats.org/drawingml/2006/main" noGrp="1"/>
+          </p:cNvSpPr>
+          <p:nvPr/>
+        </p:nvSpPr>
+        <p:spPr>
+          <a:xfrm xmlns:a="http://schemas.openxmlformats.org/drawingml/2006/main">
+            <a:off x="5924550" y="1952625"/>
+            <a:ext cx="47625" cy="1238250"/>
+          </a:xfrm>
+          <a:prstGeom xmlns:a="http://schemas.openxmlformats.org/drawingml/2006/main" prst="rect">
+            <a:avLst/>
+          </a:prstGeom>
+          <a:solidFill xmlns:a="http://schemas.openxmlformats.org/drawingml/2006/main">
+            <a:srgbClr val="46C98A"/>
+          </a:solidFill>
+          <a:ln xmlns:a="http://schemas.openxmlformats.org/drawingml/2006/main" w="0">
+            <a:solidFill>
+              <a:srgbClr val="46C98A"/>
+            </a:solidFill>
+          </a:ln>
+        </p:spPr>
+      </p:sp>
+      <p:sp>
+        <p:nvSpPr>
+          <p:cNvPr id="18" name="">
+            <a:extLst xmlns:a="http://schemas.openxmlformats.org/drawingml/2006/main">
+              <a:ext uri="{FF2B5EF4-FFF2-40B4-BE49-F238E27FC236}">
+                <a16:creationId xmlns:a16="http://schemas.microsoft.com/office/drawing/2014/main" id="{D48F148A-74E7-4636-B28F-FEA83C7A66EB}"/>
+              </a:ext>
+            </a:extLst>
+          </p:cNvPr>
+          <p:cNvSpPr>
+            <a:spLocks xmlns:a="http://schemas.openxmlformats.org/drawingml/2006/main" noGrp="1"/>
+          </p:cNvSpPr>
+          <p:nvPr/>
+        </p:nvSpPr>
+        <p:spPr>
+          <a:xfrm xmlns:a="http://schemas.openxmlformats.org/drawingml/2006/main">
+            <a:off x="6134100" y="2085975"/>
+            <a:ext cx="1914525" cy="266700"/>
           </a:xfrm>
           <a:prstGeom xmlns:a="http://schemas.openxmlformats.org/drawingml/2006/main" prst="rect">
             <a:avLst/>
@@ -4891,29 +5299,29 @@
                   <a:srgbClr val="E8F0EE"/>
                 </a:solidFill>
               </a:rPr>
-              <a:t>EPA bands</a:t>
-            </a:r>
-          </a:p>
-        </p:txBody>
-      </p:sp>
-      <p:sp>
-        <p:nvSpPr>
-          <p:cNvPr id="18" name="">
-            <a:extLst xmlns:a="http://schemas.openxmlformats.org/drawingml/2006/main">
-              <a:ext uri="{FF2B5EF4-FFF2-40B4-BE49-F238E27FC236}">
-                <a16:creationId xmlns:a16="http://schemas.microsoft.com/office/drawing/2014/main" id="{108FDF4D-119C-4C63-9F03-6E08D392129B}"/>
-              </a:ext>
-            </a:extLst>
-          </p:cNvPr>
-          <p:cNvSpPr>
-            <a:spLocks xmlns:a="http://schemas.openxmlformats.org/drawingml/2006/main" noGrp="1"/>
-          </p:cNvSpPr>
-          <p:nvPr/>
-        </p:nvSpPr>
-        <p:spPr>
-          <a:xfrm xmlns:a="http://schemas.openxmlformats.org/drawingml/2006/main">
-            <a:off x="6877050" y="3886200"/>
-            <a:ext cx="4200525" cy="609600"/>
+              <a:t>3 · predict PM2.5</a:t>
+            </a:r>
+          </a:p>
+        </p:txBody>
+      </p:sp>
+      <p:sp>
+        <p:nvSpPr>
+          <p:cNvPr id="19" name="">
+            <a:extLst xmlns:a="http://schemas.openxmlformats.org/drawingml/2006/main">
+              <a:ext uri="{FF2B5EF4-FFF2-40B4-BE49-F238E27FC236}">
+                <a16:creationId xmlns:a16="http://schemas.microsoft.com/office/drawing/2014/main" id="{6D8E7065-0A5E-46D2-99F0-BBC1FB5F64EC}"/>
+              </a:ext>
+            </a:extLst>
+          </p:cNvPr>
+          <p:cNvSpPr>
+            <a:spLocks xmlns:a="http://schemas.openxmlformats.org/drawingml/2006/main" noGrp="1"/>
+          </p:cNvSpPr>
+          <p:nvPr/>
+        </p:nvSpPr>
+        <p:spPr>
+          <a:xfrm xmlns:a="http://schemas.openxmlformats.org/drawingml/2006/main">
+            <a:off x="6134100" y="2409825"/>
+            <a:ext cx="1914525" cy="704850"/>
           </a:xfrm>
           <a:prstGeom xmlns:a="http://schemas.openxmlformats.org/drawingml/2006/main" prst="rect">
             <a:avLst/>
@@ -4950,29 +5358,29 @@
                   <a:srgbClr val="9FB3BE"/>
                 </a:solidFill>
               </a:rPr>
-              <a:t>Elevated ≤35.4 · High 35.5–55.4 · Dangerous &gt;55.4 µg/m³.</a:t>
-            </a:r>
-          </a:p>
-        </p:txBody>
-      </p:sp>
-      <p:sp>
-        <p:nvSpPr>
-          <p:cNvPr id="19" name="">
-            <a:extLst xmlns:a="http://schemas.openxmlformats.org/drawingml/2006/main">
-              <a:ext uri="{FF2B5EF4-FFF2-40B4-BE49-F238E27FC236}">
-                <a16:creationId xmlns:a16="http://schemas.microsoft.com/office/drawing/2014/main" id="{5E00E83E-90A4-48F2-9743-69D12F9FAEEA}"/>
-              </a:ext>
-            </a:extLst>
-          </p:cNvPr>
-          <p:cNvSpPr>
-            <a:spLocks xmlns:a="http://schemas.openxmlformats.org/drawingml/2006/main" noGrp="1"/>
-          </p:cNvSpPr>
-          <p:nvPr/>
-        </p:nvSpPr>
-        <p:spPr>
-          <a:xfrm xmlns:a="http://schemas.openxmlformats.org/drawingml/2006/main">
-            <a:off x="6667500" y="4857750"/>
-            <a:ext cx="4619625" cy="914400"/>
+              <a:t>Tested XGBoost, Random Forest, LightGBM, and CatBoost.</a:t>
+            </a:r>
+          </a:p>
+        </p:txBody>
+      </p:sp>
+      <p:sp>
+        <p:nvSpPr>
+          <p:cNvPr id="20" name="">
+            <a:extLst xmlns:a="http://schemas.openxmlformats.org/drawingml/2006/main">
+              <a:ext uri="{FF2B5EF4-FFF2-40B4-BE49-F238E27FC236}">
+                <a16:creationId xmlns:a16="http://schemas.microsoft.com/office/drawing/2014/main" id="{584148D8-20C4-4F64-81AB-E5C5C7986C45}"/>
+              </a:ext>
+            </a:extLst>
+          </p:cNvPr>
+          <p:cNvSpPr>
+            <a:spLocks xmlns:a="http://schemas.openxmlformats.org/drawingml/2006/main" noGrp="1"/>
+          </p:cNvSpPr>
+          <p:nvPr/>
+        </p:nvSpPr>
+        <p:spPr>
+          <a:xfrm xmlns:a="http://schemas.openxmlformats.org/drawingml/2006/main">
+            <a:off x="8543925" y="1952625"/>
+            <a:ext cx="2333625" cy="1238250"/>
           </a:xfrm>
           <a:prstGeom xmlns:a="http://schemas.openxmlformats.org/drawingml/2006/main" prst="roundRect">
             <a:avLst>
@@ -4991,54 +5399,54 @@
       </p:sp>
       <p:sp>
         <p:nvSpPr>
-          <p:cNvPr id="20" name="">
-            <a:extLst xmlns:a="http://schemas.openxmlformats.org/drawingml/2006/main">
-              <a:ext uri="{FF2B5EF4-FFF2-40B4-BE49-F238E27FC236}">
-                <a16:creationId xmlns:a16="http://schemas.microsoft.com/office/drawing/2014/main" id="{FDC5FB3D-F0C2-4DB4-8674-A61D7299D8F5}"/>
-              </a:ext>
-            </a:extLst>
-          </p:cNvPr>
-          <p:cNvSpPr>
-            <a:spLocks xmlns:a="http://schemas.openxmlformats.org/drawingml/2006/main" noGrp="1"/>
-          </p:cNvSpPr>
-          <p:nvPr/>
-        </p:nvSpPr>
-        <p:spPr>
-          <a:xfrm xmlns:a="http://schemas.openxmlformats.org/drawingml/2006/main">
-            <a:off x="6667500" y="4857750"/>
-            <a:ext cx="47625" cy="914400"/>
-          </a:xfrm>
-          <a:prstGeom xmlns:a="http://schemas.openxmlformats.org/drawingml/2006/main" prst="rect">
-            <a:avLst/>
-          </a:prstGeom>
-          <a:solidFill xmlns:a="http://schemas.openxmlformats.org/drawingml/2006/main">
-            <a:srgbClr val="E8A020"/>
-          </a:solidFill>
-          <a:ln xmlns:a="http://schemas.openxmlformats.org/drawingml/2006/main" w="0">
-            <a:solidFill>
-              <a:srgbClr val="E8A020"/>
-            </a:solidFill>
-          </a:ln>
-        </p:spPr>
-      </p:sp>
-      <p:sp>
-        <p:nvSpPr>
           <p:cNvPr id="21" name="">
             <a:extLst xmlns:a="http://schemas.openxmlformats.org/drawingml/2006/main">
               <a:ext uri="{FF2B5EF4-FFF2-40B4-BE49-F238E27FC236}">
-                <a16:creationId xmlns:a16="http://schemas.microsoft.com/office/drawing/2014/main" id="{24247F85-1E9B-43DC-901F-532AF14AFD90}"/>
-              </a:ext>
-            </a:extLst>
-          </p:cNvPr>
-          <p:cNvSpPr>
-            <a:spLocks xmlns:a="http://schemas.openxmlformats.org/drawingml/2006/main" noGrp="1"/>
-          </p:cNvSpPr>
-          <p:nvPr/>
-        </p:nvSpPr>
-        <p:spPr>
-          <a:xfrm xmlns:a="http://schemas.openxmlformats.org/drawingml/2006/main">
-            <a:off x="6877050" y="4991100"/>
-            <a:ext cx="4200525" cy="266700"/>
+                <a16:creationId xmlns:a16="http://schemas.microsoft.com/office/drawing/2014/main" id="{18B55FDC-2375-4ED3-ADE3-04A9AED8B6B6}"/>
+              </a:ext>
+            </a:extLst>
+          </p:cNvPr>
+          <p:cNvSpPr>
+            <a:spLocks xmlns:a="http://schemas.openxmlformats.org/drawingml/2006/main" noGrp="1"/>
+          </p:cNvSpPr>
+          <p:nvPr/>
+        </p:nvSpPr>
+        <p:spPr>
+          <a:xfrm xmlns:a="http://schemas.openxmlformats.org/drawingml/2006/main">
+            <a:off x="8543925" y="1952625"/>
+            <a:ext cx="47625" cy="1238250"/>
+          </a:xfrm>
+          <a:prstGeom xmlns:a="http://schemas.openxmlformats.org/drawingml/2006/main" prst="rect">
+            <a:avLst/>
+          </a:prstGeom>
+          <a:solidFill xmlns:a="http://schemas.openxmlformats.org/drawingml/2006/main">
+            <a:srgbClr val="8B7CF6"/>
+          </a:solidFill>
+          <a:ln xmlns:a="http://schemas.openxmlformats.org/drawingml/2006/main" w="0">
+            <a:solidFill>
+              <a:srgbClr val="8B7CF6"/>
+            </a:solidFill>
+          </a:ln>
+        </p:spPr>
+      </p:sp>
+      <p:sp>
+        <p:nvSpPr>
+          <p:cNvPr id="22" name="">
+            <a:extLst xmlns:a="http://schemas.openxmlformats.org/drawingml/2006/main">
+              <a:ext uri="{FF2B5EF4-FFF2-40B4-BE49-F238E27FC236}">
+                <a16:creationId xmlns:a16="http://schemas.microsoft.com/office/drawing/2014/main" id="{0F5E0D3A-1F7F-4208-9346-59B591BF050C}"/>
+              </a:ext>
+            </a:extLst>
+          </p:cNvPr>
+          <p:cNvSpPr>
+            <a:spLocks xmlns:a="http://schemas.openxmlformats.org/drawingml/2006/main" noGrp="1"/>
+          </p:cNvSpPr>
+          <p:nvPr/>
+        </p:nvSpPr>
+        <p:spPr>
+          <a:xfrm xmlns:a="http://schemas.openxmlformats.org/drawingml/2006/main">
+            <a:off x="8753475" y="2085975"/>
+            <a:ext cx="1914525" cy="266700"/>
           </a:xfrm>
           <a:prstGeom xmlns:a="http://schemas.openxmlformats.org/drawingml/2006/main" prst="rect">
             <a:avLst/>
@@ -5075,29 +5483,29 @@
                   <a:srgbClr val="E8F0EE"/>
                 </a:solidFill>
               </a:rPr>
-              <a:t>Tool connection</a:t>
-            </a:r>
-          </a:p>
-        </p:txBody>
-      </p:sp>
-      <p:sp>
-        <p:nvSpPr>
-          <p:cNvPr id="22" name="">
-            <a:extLst xmlns:a="http://schemas.openxmlformats.org/drawingml/2006/main">
-              <a:ext uri="{FF2B5EF4-FFF2-40B4-BE49-F238E27FC236}">
-                <a16:creationId xmlns:a16="http://schemas.microsoft.com/office/drawing/2014/main" id="{22FCCA7D-24AC-4180-A586-AA0D1643996C}"/>
-              </a:ext>
-            </a:extLst>
-          </p:cNvPr>
-          <p:cNvSpPr>
-            <a:spLocks xmlns:a="http://schemas.openxmlformats.org/drawingml/2006/main" noGrp="1"/>
-          </p:cNvSpPr>
-          <p:nvPr/>
-        </p:nvSpPr>
-        <p:spPr>
-          <a:xfrm xmlns:a="http://schemas.openxmlformats.org/drawingml/2006/main">
-            <a:off x="6877050" y="5314950"/>
-            <a:ext cx="4200525" cy="381000"/>
+              <a:t>4 · convert to tier</a:t>
+            </a:r>
+          </a:p>
+        </p:txBody>
+      </p:sp>
+      <p:sp>
+        <p:nvSpPr>
+          <p:cNvPr id="23" name="">
+            <a:extLst xmlns:a="http://schemas.openxmlformats.org/drawingml/2006/main">
+              <a:ext uri="{FF2B5EF4-FFF2-40B4-BE49-F238E27FC236}">
+                <a16:creationId xmlns:a16="http://schemas.microsoft.com/office/drawing/2014/main" id="{92801906-76EF-4C45-B9FD-80B10ADA4D19}"/>
+              </a:ext>
+            </a:extLst>
+          </p:cNvPr>
+          <p:cNvSpPr>
+            <a:spLocks xmlns:a="http://schemas.openxmlformats.org/drawingml/2006/main" noGrp="1"/>
+          </p:cNvSpPr>
+          <p:nvPr/>
+        </p:nvSpPr>
+        <p:spPr>
+          <a:xfrm xmlns:a="http://schemas.openxmlformats.org/drawingml/2006/main">
+            <a:off x="8753475" y="2409825"/>
+            <a:ext cx="1914525" cy="704850"/>
           </a:xfrm>
           <a:prstGeom xmlns:a="http://schemas.openxmlformats.org/drawingml/2006/main" prst="rect">
             <a:avLst/>
@@ -5134,7 +5542,831 @@
                   <a:srgbClr val="9FB3BE"/>
                 </a:solidFill>
               </a:rPr>
-              <a:t>The predictor page and prototype expose safety tier, uncertainty, and alert behavior.</a:t>
+              <a:t>Elevated, High, or Dangerous for planner decisions.</a:t>
+            </a:r>
+          </a:p>
+        </p:txBody>
+      </p:sp>
+      <p:sp>
+        <p:nvSpPr>
+          <p:cNvPr id="24" name="">
+            <a:extLst xmlns:a="http://schemas.openxmlformats.org/drawingml/2006/main">
+              <a:ext uri="{FF2B5EF4-FFF2-40B4-BE49-F238E27FC236}">
+                <a16:creationId xmlns:a16="http://schemas.microsoft.com/office/drawing/2014/main" id="{E5E0B3A2-E2B4-42BE-92AA-4AA55694401E}"/>
+              </a:ext>
+            </a:extLst>
+          </p:cNvPr>
+          <p:cNvSpPr>
+            <a:spLocks xmlns:a="http://schemas.openxmlformats.org/drawingml/2006/main" noGrp="1"/>
+          </p:cNvSpPr>
+          <p:nvPr/>
+        </p:nvSpPr>
+        <p:spPr>
+          <a:xfrm xmlns:a="http://schemas.openxmlformats.org/drawingml/2006/main">
+            <a:off x="876300" y="3857625"/>
+            <a:ext cx="2333625" cy="1028700"/>
+          </a:xfrm>
+          <a:prstGeom xmlns:a="http://schemas.openxmlformats.org/drawingml/2006/main" prst="roundRect">
+            <a:avLst>
+              <a:gd name="adj" fmla="val 9000"/>
+            </a:avLst>
+          </a:prstGeom>
+          <a:solidFill xmlns:a="http://schemas.openxmlformats.org/drawingml/2006/main">
+            <a:srgbClr val="122030"/>
+          </a:solidFill>
+          <a:ln xmlns:a="http://schemas.openxmlformats.org/drawingml/2006/main" w="9525">
+            <a:solidFill>
+              <a:srgbClr val="243244"/>
+            </a:solidFill>
+          </a:ln>
+        </p:spPr>
+      </p:sp>
+      <p:sp>
+        <p:nvSpPr>
+          <p:cNvPr id="25" name="">
+            <a:extLst xmlns:a="http://schemas.openxmlformats.org/drawingml/2006/main">
+              <a:ext uri="{FF2B5EF4-FFF2-40B4-BE49-F238E27FC236}">
+                <a16:creationId xmlns:a16="http://schemas.microsoft.com/office/drawing/2014/main" id="{18F9F867-1B44-446A-867A-8B8D394B6C81}"/>
+              </a:ext>
+            </a:extLst>
+          </p:cNvPr>
+          <p:cNvSpPr>
+            <a:spLocks xmlns:a="http://schemas.openxmlformats.org/drawingml/2006/main" noGrp="1"/>
+          </p:cNvSpPr>
+          <p:nvPr/>
+        </p:nvSpPr>
+        <p:spPr>
+          <a:xfrm xmlns:a="http://schemas.openxmlformats.org/drawingml/2006/main">
+            <a:off x="990600" y="4000500"/>
+            <a:ext cx="2105025" cy="381000"/>
+          </a:xfrm>
+          <a:prstGeom xmlns:a="http://schemas.openxmlformats.org/drawingml/2006/main" prst="rect">
+            <a:avLst/>
+          </a:prstGeom>
+          <a:solidFill xmlns:a="http://schemas.openxmlformats.org/drawingml/2006/main">
+            <a:srgbClr val="000000">
+              <a:alpha val="0"/>
+            </a:srgbClr>
+          </a:solidFill>
+          <a:ln xmlns:a="http://schemas.openxmlformats.org/drawingml/2006/main" w="0">
+            <a:solidFill>
+              <a:srgbClr val="000000">
+                <a:alpha val="0"/>
+              </a:srgbClr>
+            </a:solidFill>
+          </a:ln>
+        </p:spPr>
+        <p:txBody>
+          <a:bodyPr xmlns:a="http://schemas.openxmlformats.org/drawingml/2006/main" lIns="0" tIns="0" rIns="0" bIns="0" anchor="ctr">
+            <a:normAutofit fontScale="100000"/>
+          </a:bodyPr>
+          <a:lstStyle xmlns:a="http://schemas.openxmlformats.org/drawingml/2006/main"/>
+          <a:p xmlns:a="http://schemas.openxmlformats.org/drawingml/2006/main">
+            <a:pPr algn="ctr">
+              <a:defRPr sz="2175" b="1">
+                <a:solidFill>
+                  <a:srgbClr val="46C98A"/>
+                </a:solidFill>
+              </a:defRPr>
+            </a:pPr>
+            <a:r>
+              <a:rPr sz="2175" b="1">
+                <a:solidFill>
+                  <a:srgbClr val="46C98A"/>
+                </a:solidFill>
+              </a:rPr>
+              <a:t>~0.55</a:t>
+            </a:r>
+          </a:p>
+        </p:txBody>
+      </p:sp>
+      <p:sp>
+        <p:nvSpPr>
+          <p:cNvPr id="26" name="">
+            <a:extLst xmlns:a="http://schemas.openxmlformats.org/drawingml/2006/main">
+              <a:ext uri="{FF2B5EF4-FFF2-40B4-BE49-F238E27FC236}">
+                <a16:creationId xmlns:a16="http://schemas.microsoft.com/office/drawing/2014/main" id="{4C2C3F52-A4E8-457C-8C7A-8C0F31ED0643}"/>
+              </a:ext>
+            </a:extLst>
+          </p:cNvPr>
+          <p:cNvSpPr>
+            <a:spLocks xmlns:a="http://schemas.openxmlformats.org/drawingml/2006/main" noGrp="1"/>
+          </p:cNvSpPr>
+          <p:nvPr/>
+        </p:nvSpPr>
+        <p:spPr>
+          <a:xfrm xmlns:a="http://schemas.openxmlformats.org/drawingml/2006/main">
+            <a:off x="1009650" y="4448175"/>
+            <a:ext cx="2066925" cy="304800"/>
+          </a:xfrm>
+          <a:prstGeom xmlns:a="http://schemas.openxmlformats.org/drawingml/2006/main" prst="rect">
+            <a:avLst/>
+          </a:prstGeom>
+          <a:solidFill xmlns:a="http://schemas.openxmlformats.org/drawingml/2006/main">
+            <a:srgbClr val="000000">
+              <a:alpha val="0"/>
+            </a:srgbClr>
+          </a:solidFill>
+          <a:ln xmlns:a="http://schemas.openxmlformats.org/drawingml/2006/main" w="0">
+            <a:solidFill>
+              <a:srgbClr val="000000">
+                <a:alpha val="0"/>
+              </a:srgbClr>
+            </a:solidFill>
+          </a:ln>
+        </p:spPr>
+        <p:txBody>
+          <a:bodyPr xmlns:a="http://schemas.openxmlformats.org/drawingml/2006/main" lIns="0" tIns="0" rIns="0" bIns="0" anchor="ctr">
+            <a:normAutofit fontScale="100000"/>
+          </a:bodyPr>
+          <a:lstStyle xmlns:a="http://schemas.openxmlformats.org/drawingml/2006/main"/>
+          <a:p xmlns:a="http://schemas.openxmlformats.org/drawingml/2006/main">
+            <a:pPr algn="ctr">
+              <a:defRPr sz="1050" b="0">
+                <a:solidFill>
+                  <a:srgbClr val="9FB3BE"/>
+                </a:solidFill>
+              </a:defRPr>
+            </a:pPr>
+            <a:r>
+              <a:rPr sz="1050" b="0">
+                <a:solidFill>
+                  <a:srgbClr val="9FB3BE"/>
+                </a:solidFill>
+              </a:rPr>
+              <a:t>Category + Geodata R²</a:t>
+            </a:r>
+          </a:p>
+        </p:txBody>
+      </p:sp>
+      <p:sp>
+        <p:nvSpPr>
+          <p:cNvPr id="27" name="">
+            <a:extLst xmlns:a="http://schemas.openxmlformats.org/drawingml/2006/main">
+              <a:ext uri="{FF2B5EF4-FFF2-40B4-BE49-F238E27FC236}">
+                <a16:creationId xmlns:a16="http://schemas.microsoft.com/office/drawing/2014/main" id="{CA1C7419-5C38-4E9C-B880-A5C2C2A0C2FC}"/>
+              </a:ext>
+            </a:extLst>
+          </p:cNvPr>
+          <p:cNvSpPr>
+            <a:spLocks xmlns:a="http://schemas.openxmlformats.org/drawingml/2006/main" noGrp="1"/>
+          </p:cNvSpPr>
+          <p:nvPr/>
+        </p:nvSpPr>
+        <p:spPr>
+          <a:xfrm xmlns:a="http://schemas.openxmlformats.org/drawingml/2006/main">
+            <a:off x="3543300" y="3857625"/>
+            <a:ext cx="2095500" cy="1028700"/>
+          </a:xfrm>
+          <a:prstGeom xmlns:a="http://schemas.openxmlformats.org/drawingml/2006/main" prst="roundRect">
+            <a:avLst>
+              <a:gd name="adj" fmla="val 9000"/>
+            </a:avLst>
+          </a:prstGeom>
+          <a:solidFill xmlns:a="http://schemas.openxmlformats.org/drawingml/2006/main">
+            <a:srgbClr val="122030"/>
+          </a:solidFill>
+          <a:ln xmlns:a="http://schemas.openxmlformats.org/drawingml/2006/main" w="9525">
+            <a:solidFill>
+              <a:srgbClr val="243244"/>
+            </a:solidFill>
+          </a:ln>
+        </p:spPr>
+      </p:sp>
+      <p:sp>
+        <p:nvSpPr>
+          <p:cNvPr id="28" name="">
+            <a:extLst xmlns:a="http://schemas.openxmlformats.org/drawingml/2006/main">
+              <a:ext uri="{FF2B5EF4-FFF2-40B4-BE49-F238E27FC236}">
+                <a16:creationId xmlns:a16="http://schemas.microsoft.com/office/drawing/2014/main" id="{D80D9333-F6BF-48C3-A308-B87B7350F4EC}"/>
+              </a:ext>
+            </a:extLst>
+          </p:cNvPr>
+          <p:cNvSpPr>
+            <a:spLocks xmlns:a="http://schemas.openxmlformats.org/drawingml/2006/main" noGrp="1"/>
+          </p:cNvSpPr>
+          <p:nvPr/>
+        </p:nvSpPr>
+        <p:spPr>
+          <a:xfrm xmlns:a="http://schemas.openxmlformats.org/drawingml/2006/main">
+            <a:off x="3657600" y="4000500"/>
+            <a:ext cx="1866900" cy="381000"/>
+          </a:xfrm>
+          <a:prstGeom xmlns:a="http://schemas.openxmlformats.org/drawingml/2006/main" prst="rect">
+            <a:avLst/>
+          </a:prstGeom>
+          <a:solidFill xmlns:a="http://schemas.openxmlformats.org/drawingml/2006/main">
+            <a:srgbClr val="000000">
+              <a:alpha val="0"/>
+            </a:srgbClr>
+          </a:solidFill>
+          <a:ln xmlns:a="http://schemas.openxmlformats.org/drawingml/2006/main" w="0">
+            <a:solidFill>
+              <a:srgbClr val="000000">
+                <a:alpha val="0"/>
+              </a:srgbClr>
+            </a:solidFill>
+          </a:ln>
+        </p:spPr>
+        <p:txBody>
+          <a:bodyPr xmlns:a="http://schemas.openxmlformats.org/drawingml/2006/main" lIns="0" tIns="0" rIns="0" bIns="0" anchor="ctr">
+            <a:normAutofit fontScale="100000"/>
+          </a:bodyPr>
+          <a:lstStyle xmlns:a="http://schemas.openxmlformats.org/drawingml/2006/main"/>
+          <a:p xmlns:a="http://schemas.openxmlformats.org/drawingml/2006/main">
+            <a:pPr algn="ctr">
+              <a:defRPr sz="2175" b="1">
+                <a:solidFill>
+                  <a:srgbClr val="46C98A"/>
+                </a:solidFill>
+              </a:defRPr>
+            </a:pPr>
+            <a:r>
+              <a:rPr sz="2175" b="1">
+                <a:solidFill>
+                  <a:srgbClr val="46C98A"/>
+                </a:solidFill>
+              </a:rPr>
+              <a:t>68%</a:t>
+            </a:r>
+          </a:p>
+        </p:txBody>
+      </p:sp>
+      <p:sp>
+        <p:nvSpPr>
+          <p:cNvPr id="29" name="">
+            <a:extLst xmlns:a="http://schemas.openxmlformats.org/drawingml/2006/main">
+              <a:ext uri="{FF2B5EF4-FFF2-40B4-BE49-F238E27FC236}">
+                <a16:creationId xmlns:a16="http://schemas.microsoft.com/office/drawing/2014/main" id="{3A9C99D0-192E-4E49-955B-E3A5929DF78B}"/>
+              </a:ext>
+            </a:extLst>
+          </p:cNvPr>
+          <p:cNvSpPr>
+            <a:spLocks xmlns:a="http://schemas.openxmlformats.org/drawingml/2006/main" noGrp="1"/>
+          </p:cNvSpPr>
+          <p:nvPr/>
+        </p:nvSpPr>
+        <p:spPr>
+          <a:xfrm xmlns:a="http://schemas.openxmlformats.org/drawingml/2006/main">
+            <a:off x="3676650" y="4448175"/>
+            <a:ext cx="1828800" cy="304800"/>
+          </a:xfrm>
+          <a:prstGeom xmlns:a="http://schemas.openxmlformats.org/drawingml/2006/main" prst="rect">
+            <a:avLst/>
+          </a:prstGeom>
+          <a:solidFill xmlns:a="http://schemas.openxmlformats.org/drawingml/2006/main">
+            <a:srgbClr val="000000">
+              <a:alpha val="0"/>
+            </a:srgbClr>
+          </a:solidFill>
+          <a:ln xmlns:a="http://schemas.openxmlformats.org/drawingml/2006/main" w="0">
+            <a:solidFill>
+              <a:srgbClr val="000000">
+                <a:alpha val="0"/>
+              </a:srgbClr>
+            </a:solidFill>
+          </a:ln>
+        </p:spPr>
+        <p:txBody>
+          <a:bodyPr xmlns:a="http://schemas.openxmlformats.org/drawingml/2006/main" lIns="0" tIns="0" rIns="0" bIns="0" anchor="ctr">
+            <a:normAutofit fontScale="100000"/>
+          </a:bodyPr>
+          <a:lstStyle xmlns:a="http://schemas.openxmlformats.org/drawingml/2006/main"/>
+          <a:p xmlns:a="http://schemas.openxmlformats.org/drawingml/2006/main">
+            <a:pPr algn="ctr">
+              <a:defRPr sz="1050" b="0">
+                <a:solidFill>
+                  <a:srgbClr val="9FB3BE"/>
+                </a:solidFill>
+              </a:defRPr>
+            </a:pPr>
+            <a:r>
+              <a:rPr sz="1050" b="0">
+                <a:solidFill>
+                  <a:srgbClr val="9FB3BE"/>
+                </a:solidFill>
+              </a:rPr>
+              <a:t>exact safety tier</a:t>
+            </a:r>
+          </a:p>
+        </p:txBody>
+      </p:sp>
+      <p:sp>
+        <p:nvSpPr>
+          <p:cNvPr id="30" name="">
+            <a:extLst xmlns:a="http://schemas.openxmlformats.org/drawingml/2006/main">
+              <a:ext uri="{FF2B5EF4-FFF2-40B4-BE49-F238E27FC236}">
+                <a16:creationId xmlns:a16="http://schemas.microsoft.com/office/drawing/2014/main" id="{D3DD223D-426E-485F-90B7-7AA023C55691}"/>
+              </a:ext>
+            </a:extLst>
+          </p:cNvPr>
+          <p:cNvSpPr>
+            <a:spLocks xmlns:a="http://schemas.openxmlformats.org/drawingml/2006/main" noGrp="1"/>
+          </p:cNvSpPr>
+          <p:nvPr/>
+        </p:nvSpPr>
+        <p:spPr>
+          <a:xfrm xmlns:a="http://schemas.openxmlformats.org/drawingml/2006/main">
+            <a:off x="5924550" y="3857625"/>
+            <a:ext cx="2095500" cy="1028700"/>
+          </a:xfrm>
+          <a:prstGeom xmlns:a="http://schemas.openxmlformats.org/drawingml/2006/main" prst="roundRect">
+            <a:avLst>
+              <a:gd name="adj" fmla="val 9000"/>
+            </a:avLst>
+          </a:prstGeom>
+          <a:solidFill xmlns:a="http://schemas.openxmlformats.org/drawingml/2006/main">
+            <a:srgbClr val="122030"/>
+          </a:solidFill>
+          <a:ln xmlns:a="http://schemas.openxmlformats.org/drawingml/2006/main" w="9525">
+            <a:solidFill>
+              <a:srgbClr val="243244"/>
+            </a:solidFill>
+          </a:ln>
+        </p:spPr>
+      </p:sp>
+      <p:sp>
+        <p:nvSpPr>
+          <p:cNvPr id="31" name="">
+            <a:extLst xmlns:a="http://schemas.openxmlformats.org/drawingml/2006/main">
+              <a:ext uri="{FF2B5EF4-FFF2-40B4-BE49-F238E27FC236}">
+                <a16:creationId xmlns:a16="http://schemas.microsoft.com/office/drawing/2014/main" id="{146D3421-B8B9-4DAF-967D-A7AB62D6994D}"/>
+              </a:ext>
+            </a:extLst>
+          </p:cNvPr>
+          <p:cNvSpPr>
+            <a:spLocks xmlns:a="http://schemas.openxmlformats.org/drawingml/2006/main" noGrp="1"/>
+          </p:cNvSpPr>
+          <p:nvPr/>
+        </p:nvSpPr>
+        <p:spPr>
+          <a:xfrm xmlns:a="http://schemas.openxmlformats.org/drawingml/2006/main">
+            <a:off x="6038850" y="4000500"/>
+            <a:ext cx="1866900" cy="381000"/>
+          </a:xfrm>
+          <a:prstGeom xmlns:a="http://schemas.openxmlformats.org/drawingml/2006/main" prst="rect">
+            <a:avLst/>
+          </a:prstGeom>
+          <a:solidFill xmlns:a="http://schemas.openxmlformats.org/drawingml/2006/main">
+            <a:srgbClr val="000000">
+              <a:alpha val="0"/>
+            </a:srgbClr>
+          </a:solidFill>
+          <a:ln xmlns:a="http://schemas.openxmlformats.org/drawingml/2006/main" w="0">
+            <a:solidFill>
+              <a:srgbClr val="000000">
+                <a:alpha val="0"/>
+              </a:srgbClr>
+            </a:solidFill>
+          </a:ln>
+        </p:spPr>
+        <p:txBody>
+          <a:bodyPr xmlns:a="http://schemas.openxmlformats.org/drawingml/2006/main" lIns="0" tIns="0" rIns="0" bIns="0" anchor="ctr">
+            <a:normAutofit fontScale="100000"/>
+          </a:bodyPr>
+          <a:lstStyle xmlns:a="http://schemas.openxmlformats.org/drawingml/2006/main"/>
+          <a:p xmlns:a="http://schemas.openxmlformats.org/drawingml/2006/main">
+            <a:pPr algn="ctr">
+              <a:defRPr sz="2175" b="1">
+                <a:solidFill>
+                  <a:srgbClr val="46C98A"/>
+                </a:solidFill>
+              </a:defRPr>
+            </a:pPr>
+            <a:r>
+              <a:rPr sz="2175" b="1">
+                <a:solidFill>
+                  <a:srgbClr val="46C98A"/>
+                </a:solidFill>
+              </a:rPr>
+              <a:t>98.5%</a:t>
+            </a:r>
+          </a:p>
+        </p:txBody>
+      </p:sp>
+      <p:sp>
+        <p:nvSpPr>
+          <p:cNvPr id="32" name="">
+            <a:extLst xmlns:a="http://schemas.openxmlformats.org/drawingml/2006/main">
+              <a:ext uri="{FF2B5EF4-FFF2-40B4-BE49-F238E27FC236}">
+                <a16:creationId xmlns:a16="http://schemas.microsoft.com/office/drawing/2014/main" id="{CAF25A71-FA4B-4110-895D-B17E108C678E}"/>
+              </a:ext>
+            </a:extLst>
+          </p:cNvPr>
+          <p:cNvSpPr>
+            <a:spLocks xmlns:a="http://schemas.openxmlformats.org/drawingml/2006/main" noGrp="1"/>
+          </p:cNvSpPr>
+          <p:nvPr/>
+        </p:nvSpPr>
+        <p:spPr>
+          <a:xfrm xmlns:a="http://schemas.openxmlformats.org/drawingml/2006/main">
+            <a:off x="6057900" y="4448175"/>
+            <a:ext cx="1828800" cy="304800"/>
+          </a:xfrm>
+          <a:prstGeom xmlns:a="http://schemas.openxmlformats.org/drawingml/2006/main" prst="rect">
+            <a:avLst/>
+          </a:prstGeom>
+          <a:solidFill xmlns:a="http://schemas.openxmlformats.org/drawingml/2006/main">
+            <a:srgbClr val="000000">
+              <a:alpha val="0"/>
+            </a:srgbClr>
+          </a:solidFill>
+          <a:ln xmlns:a="http://schemas.openxmlformats.org/drawingml/2006/main" w="0">
+            <a:solidFill>
+              <a:srgbClr val="000000">
+                <a:alpha val="0"/>
+              </a:srgbClr>
+            </a:solidFill>
+          </a:ln>
+        </p:spPr>
+        <p:txBody>
+          <a:bodyPr xmlns:a="http://schemas.openxmlformats.org/drawingml/2006/main" lIns="0" tIns="0" rIns="0" bIns="0" anchor="ctr">
+            <a:normAutofit fontScale="100000"/>
+          </a:bodyPr>
+          <a:lstStyle xmlns:a="http://schemas.openxmlformats.org/drawingml/2006/main"/>
+          <a:p xmlns:a="http://schemas.openxmlformats.org/drawingml/2006/main">
+            <a:pPr algn="ctr">
+              <a:defRPr sz="1050" b="0">
+                <a:solidFill>
+                  <a:srgbClr val="9FB3BE"/>
+                </a:solidFill>
+              </a:defRPr>
+            </a:pPr>
+            <a:r>
+              <a:rPr sz="1050" b="0">
+                <a:solidFill>
+                  <a:srgbClr val="9FB3BE"/>
+                </a:solidFill>
+              </a:rPr>
+              <a:t>within one tier</a:t>
+            </a:r>
+          </a:p>
+        </p:txBody>
+      </p:sp>
+      <p:sp>
+        <p:nvSpPr>
+          <p:cNvPr id="33" name="">
+            <a:extLst xmlns:a="http://schemas.openxmlformats.org/drawingml/2006/main">
+              <a:ext uri="{FF2B5EF4-FFF2-40B4-BE49-F238E27FC236}">
+                <a16:creationId xmlns:a16="http://schemas.microsoft.com/office/drawing/2014/main" id="{FCBBDA29-32BB-49C4-9C10-639F63C14306}"/>
+              </a:ext>
+            </a:extLst>
+          </p:cNvPr>
+          <p:cNvSpPr>
+            <a:spLocks xmlns:a="http://schemas.openxmlformats.org/drawingml/2006/main" noGrp="1"/>
+          </p:cNvSpPr>
+          <p:nvPr/>
+        </p:nvSpPr>
+        <p:spPr>
+          <a:xfrm xmlns:a="http://schemas.openxmlformats.org/drawingml/2006/main">
+            <a:off x="8334375" y="3762375"/>
+            <a:ext cx="2571750" cy="1238250"/>
+          </a:xfrm>
+          <a:prstGeom xmlns:a="http://schemas.openxmlformats.org/drawingml/2006/main" prst="roundRect">
+            <a:avLst>
+              <a:gd name="adj" fmla="val 9000"/>
+            </a:avLst>
+          </a:prstGeom>
+          <a:solidFill xmlns:a="http://schemas.openxmlformats.org/drawingml/2006/main">
+            <a:srgbClr val="122030"/>
+          </a:solidFill>
+          <a:ln xmlns:a="http://schemas.openxmlformats.org/drawingml/2006/main" w="9525">
+            <a:solidFill>
+              <a:srgbClr val="243244"/>
+            </a:solidFill>
+          </a:ln>
+        </p:spPr>
+      </p:sp>
+      <p:sp>
+        <p:nvSpPr>
+          <p:cNvPr id="34" name="">
+            <a:extLst xmlns:a="http://schemas.openxmlformats.org/drawingml/2006/main">
+              <a:ext uri="{FF2B5EF4-FFF2-40B4-BE49-F238E27FC236}">
+                <a16:creationId xmlns:a16="http://schemas.microsoft.com/office/drawing/2014/main" id="{838D1097-F851-447E-968A-69695068C1A4}"/>
+              </a:ext>
+            </a:extLst>
+          </p:cNvPr>
+          <p:cNvSpPr>
+            <a:spLocks xmlns:a="http://schemas.openxmlformats.org/drawingml/2006/main" noGrp="1"/>
+          </p:cNvSpPr>
+          <p:nvPr/>
+        </p:nvSpPr>
+        <p:spPr>
+          <a:xfrm xmlns:a="http://schemas.openxmlformats.org/drawingml/2006/main">
+            <a:off x="8334375" y="3762375"/>
+            <a:ext cx="47625" cy="1238250"/>
+          </a:xfrm>
+          <a:prstGeom xmlns:a="http://schemas.openxmlformats.org/drawingml/2006/main" prst="rect">
+            <a:avLst/>
+          </a:prstGeom>
+          <a:solidFill xmlns:a="http://schemas.openxmlformats.org/drawingml/2006/main">
+            <a:srgbClr val="14A38B"/>
+          </a:solidFill>
+          <a:ln xmlns:a="http://schemas.openxmlformats.org/drawingml/2006/main" w="0">
+            <a:solidFill>
+              <a:srgbClr val="14A38B"/>
+            </a:solidFill>
+          </a:ln>
+        </p:spPr>
+      </p:sp>
+      <p:sp>
+        <p:nvSpPr>
+          <p:cNvPr id="35" name="">
+            <a:extLst xmlns:a="http://schemas.openxmlformats.org/drawingml/2006/main">
+              <a:ext uri="{FF2B5EF4-FFF2-40B4-BE49-F238E27FC236}">
+                <a16:creationId xmlns:a16="http://schemas.microsoft.com/office/drawing/2014/main" id="{42C661AE-B433-4C76-B815-A0A494DE67A3}"/>
+              </a:ext>
+            </a:extLst>
+          </p:cNvPr>
+          <p:cNvSpPr>
+            <a:spLocks xmlns:a="http://schemas.openxmlformats.org/drawingml/2006/main" noGrp="1"/>
+          </p:cNvSpPr>
+          <p:nvPr/>
+        </p:nvSpPr>
+        <p:spPr>
+          <a:xfrm xmlns:a="http://schemas.openxmlformats.org/drawingml/2006/main">
+            <a:off x="8543925" y="3895725"/>
+            <a:ext cx="2152650" cy="266700"/>
+          </a:xfrm>
+          <a:prstGeom xmlns:a="http://schemas.openxmlformats.org/drawingml/2006/main" prst="rect">
+            <a:avLst/>
+          </a:prstGeom>
+          <a:solidFill xmlns:a="http://schemas.openxmlformats.org/drawingml/2006/main">
+            <a:srgbClr val="000000">
+              <a:alpha val="0"/>
+            </a:srgbClr>
+          </a:solidFill>
+          <a:ln xmlns:a="http://schemas.openxmlformats.org/drawingml/2006/main" w="0">
+            <a:solidFill>
+              <a:srgbClr val="000000">
+                <a:alpha val="0"/>
+              </a:srgbClr>
+            </a:solidFill>
+          </a:ln>
+        </p:spPr>
+        <p:txBody>
+          <a:bodyPr xmlns:a="http://schemas.openxmlformats.org/drawingml/2006/main" lIns="0" tIns="0" rIns="0" bIns="0" anchor="ctr">
+            <a:normAutofit fontScale="100000"/>
+          </a:bodyPr>
+          <a:lstStyle xmlns:a="http://schemas.openxmlformats.org/drawingml/2006/main"/>
+          <a:p xmlns:a="http://schemas.openxmlformats.org/drawingml/2006/main">
+            <a:pPr algn="l">
+              <a:defRPr sz="1350" b="1">
+                <a:solidFill>
+                  <a:srgbClr val="E8F0EE"/>
+                </a:solidFill>
+              </a:defRPr>
+            </a:pPr>
+            <a:r>
+              <a:rPr sz="1350" b="1">
+                <a:solidFill>
+                  <a:srgbClr val="E8F0EE"/>
+                </a:solidFill>
+              </a:rPr>
+              <a:t>Core finding</a:t>
+            </a:r>
+          </a:p>
+        </p:txBody>
+      </p:sp>
+      <p:sp>
+        <p:nvSpPr>
+          <p:cNvPr id="36" name="">
+            <a:extLst xmlns:a="http://schemas.openxmlformats.org/drawingml/2006/main">
+              <a:ext uri="{FF2B5EF4-FFF2-40B4-BE49-F238E27FC236}">
+                <a16:creationId xmlns:a16="http://schemas.microsoft.com/office/drawing/2014/main" id="{11144963-235F-46BF-B3E2-434236071B29}"/>
+              </a:ext>
+            </a:extLst>
+          </p:cNvPr>
+          <p:cNvSpPr>
+            <a:spLocks xmlns:a="http://schemas.openxmlformats.org/drawingml/2006/main" noGrp="1"/>
+          </p:cNvSpPr>
+          <p:nvPr/>
+        </p:nvSpPr>
+        <p:spPr>
+          <a:xfrm xmlns:a="http://schemas.openxmlformats.org/drawingml/2006/main">
+            <a:off x="8543925" y="4219575"/>
+            <a:ext cx="2152650" cy="704850"/>
+          </a:xfrm>
+          <a:prstGeom xmlns:a="http://schemas.openxmlformats.org/drawingml/2006/main" prst="rect">
+            <a:avLst/>
+          </a:prstGeom>
+          <a:solidFill xmlns:a="http://schemas.openxmlformats.org/drawingml/2006/main">
+            <a:srgbClr val="000000">
+              <a:alpha val="0"/>
+            </a:srgbClr>
+          </a:solidFill>
+          <a:ln xmlns:a="http://schemas.openxmlformats.org/drawingml/2006/main" w="0">
+            <a:solidFill>
+              <a:srgbClr val="000000">
+                <a:alpha val="0"/>
+              </a:srgbClr>
+            </a:solidFill>
+          </a:ln>
+        </p:spPr>
+        <p:txBody>
+          <a:bodyPr xmlns:a="http://schemas.openxmlformats.org/drawingml/2006/main" lIns="0" tIns="0" rIns="0" bIns="0" anchor="ctr">
+            <a:normAutofit fontScale="96920"/>
+          </a:bodyPr>
+          <a:lstStyle xmlns:a="http://schemas.openxmlformats.org/drawingml/2006/main"/>
+          <a:p xmlns:a="http://schemas.openxmlformats.org/drawingml/2006/main">
+            <a:pPr algn="l">
+              <a:defRPr sz="1200" b="0">
+                <a:solidFill>
+                  <a:srgbClr val="9FB3BE"/>
+                </a:solidFill>
+              </a:defRPr>
+            </a:pPr>
+            <a:r>
+              <a:rPr sz="1200" b="0">
+                <a:solidFill>
+                  <a:srgbClr val="9FB3BE"/>
+                </a:solidFill>
+              </a:rPr>
+              <a:t>Feature engineering and site categorization mattered more than simply switching algorithms.</a:t>
+            </a:r>
+          </a:p>
+        </p:txBody>
+      </p:sp>
+      <p:sp>
+        <p:nvSpPr>
+          <p:cNvPr id="37" name="">
+            <a:extLst xmlns:a="http://schemas.openxmlformats.org/drawingml/2006/main">
+              <a:ext uri="{FF2B5EF4-FFF2-40B4-BE49-F238E27FC236}">
+                <a16:creationId xmlns:a16="http://schemas.microsoft.com/office/drawing/2014/main" id="{47B48005-ABA4-4AFB-8052-8A320C672F8A}"/>
+              </a:ext>
+            </a:extLst>
+          </p:cNvPr>
+          <p:cNvSpPr>
+            <a:spLocks xmlns:a="http://schemas.openxmlformats.org/drawingml/2006/main" noGrp="1"/>
+          </p:cNvSpPr>
+          <p:nvPr/>
+        </p:nvSpPr>
+        <p:spPr>
+          <a:xfrm xmlns:a="http://schemas.openxmlformats.org/drawingml/2006/main">
+            <a:off x="1200150" y="5476875"/>
+            <a:ext cx="8953500" cy="514350"/>
+          </a:xfrm>
+          <a:prstGeom xmlns:a="http://schemas.openxmlformats.org/drawingml/2006/main" prst="roundRect">
+            <a:avLst>
+              <a:gd name="adj" fmla="val 9000"/>
+            </a:avLst>
+          </a:prstGeom>
+          <a:solidFill xmlns:a="http://schemas.openxmlformats.org/drawingml/2006/main">
+            <a:srgbClr val="122030"/>
+          </a:solidFill>
+          <a:ln xmlns:a="http://schemas.openxmlformats.org/drawingml/2006/main" w="9525">
+            <a:solidFill>
+              <a:srgbClr val="243244"/>
+            </a:solidFill>
+          </a:ln>
+        </p:spPr>
+      </p:sp>
+      <p:sp>
+        <p:nvSpPr>
+          <p:cNvPr id="38" name="">
+            <a:extLst xmlns:a="http://schemas.openxmlformats.org/drawingml/2006/main">
+              <a:ext uri="{FF2B5EF4-FFF2-40B4-BE49-F238E27FC236}">
+                <a16:creationId xmlns:a16="http://schemas.microsoft.com/office/drawing/2014/main" id="{53592060-16B1-4902-8AD5-D9834E115C7C}"/>
+              </a:ext>
+            </a:extLst>
+          </p:cNvPr>
+          <p:cNvSpPr>
+            <a:spLocks xmlns:a="http://schemas.openxmlformats.org/drawingml/2006/main" noGrp="1"/>
+          </p:cNvSpPr>
+          <p:nvPr/>
+        </p:nvSpPr>
+        <p:spPr>
+          <a:xfrm xmlns:a="http://schemas.openxmlformats.org/drawingml/2006/main">
+            <a:off x="1200150" y="5476875"/>
+            <a:ext cx="47625" cy="514350"/>
+          </a:xfrm>
+          <a:prstGeom xmlns:a="http://schemas.openxmlformats.org/drawingml/2006/main" prst="rect">
+            <a:avLst/>
+          </a:prstGeom>
+          <a:solidFill xmlns:a="http://schemas.openxmlformats.org/drawingml/2006/main">
+            <a:srgbClr val="E8A020"/>
+          </a:solidFill>
+          <a:ln xmlns:a="http://schemas.openxmlformats.org/drawingml/2006/main" w="0">
+            <a:solidFill>
+              <a:srgbClr val="E8A020"/>
+            </a:solidFill>
+          </a:ln>
+        </p:spPr>
+      </p:sp>
+      <p:sp>
+        <p:nvSpPr>
+          <p:cNvPr id="39" name="">
+            <a:extLst xmlns:a="http://schemas.openxmlformats.org/drawingml/2006/main">
+              <a:ext uri="{FF2B5EF4-FFF2-40B4-BE49-F238E27FC236}">
+                <a16:creationId xmlns:a16="http://schemas.microsoft.com/office/drawing/2014/main" id="{F4092C37-DD9B-44F5-B10A-5EF2EAB6EC2F}"/>
+              </a:ext>
+            </a:extLst>
+          </p:cNvPr>
+          <p:cNvSpPr>
+            <a:spLocks xmlns:a="http://schemas.openxmlformats.org/drawingml/2006/main" noGrp="1"/>
+          </p:cNvSpPr>
+          <p:nvPr/>
+        </p:nvSpPr>
+        <p:spPr>
+          <a:xfrm xmlns:a="http://schemas.openxmlformats.org/drawingml/2006/main">
+            <a:off x="1409700" y="5610225"/>
+            <a:ext cx="8534400" cy="266700"/>
+          </a:xfrm>
+          <a:prstGeom xmlns:a="http://schemas.openxmlformats.org/drawingml/2006/main" prst="rect">
+            <a:avLst/>
+          </a:prstGeom>
+          <a:solidFill xmlns:a="http://schemas.openxmlformats.org/drawingml/2006/main">
+            <a:srgbClr val="000000">
+              <a:alpha val="0"/>
+            </a:srgbClr>
+          </a:solidFill>
+          <a:ln xmlns:a="http://schemas.openxmlformats.org/drawingml/2006/main" w="0">
+            <a:solidFill>
+              <a:srgbClr val="000000">
+                <a:alpha val="0"/>
+              </a:srgbClr>
+            </a:solidFill>
+          </a:ln>
+        </p:spPr>
+        <p:txBody>
+          <a:bodyPr xmlns:a="http://schemas.openxmlformats.org/drawingml/2006/main" lIns="0" tIns="0" rIns="0" bIns="0" anchor="ctr">
+            <a:normAutofit fontScale="100000"/>
+          </a:bodyPr>
+          <a:lstStyle xmlns:a="http://schemas.openxmlformats.org/drawingml/2006/main"/>
+          <a:p xmlns:a="http://schemas.openxmlformats.org/drawingml/2006/main">
+            <a:pPr algn="l">
+              <a:defRPr sz="1350" b="1">
+                <a:solidFill>
+                  <a:srgbClr val="E8F0EE"/>
+                </a:solidFill>
+              </a:defRPr>
+            </a:pPr>
+            <a:r>
+              <a:rPr sz="1350" b="1">
+                <a:solidFill>
+                  <a:srgbClr val="E8F0EE"/>
+                </a:solidFill>
+              </a:rPr>
+              <a:t>Conclusion</a:t>
+            </a:r>
+          </a:p>
+        </p:txBody>
+      </p:sp>
+      <p:sp>
+        <p:nvSpPr>
+          <p:cNvPr id="40" name="">
+            <a:extLst xmlns:a="http://schemas.openxmlformats.org/drawingml/2006/main">
+              <a:ext uri="{FF2B5EF4-FFF2-40B4-BE49-F238E27FC236}">
+                <a16:creationId xmlns:a16="http://schemas.microsoft.com/office/drawing/2014/main" id="{A6F7EE5D-E09B-4D3F-9D50-CD35E29BB645}"/>
+              </a:ext>
+            </a:extLst>
+          </p:cNvPr>
+          <p:cNvSpPr>
+            <a:spLocks xmlns:a="http://schemas.openxmlformats.org/drawingml/2006/main" noGrp="1"/>
+          </p:cNvSpPr>
+          <p:nvPr/>
+        </p:nvSpPr>
+        <p:spPr>
+          <a:xfrm xmlns:a="http://schemas.openxmlformats.org/drawingml/2006/main">
+            <a:off x="1409700" y="5934075"/>
+            <a:ext cx="8534400" cy="-19050"/>
+          </a:xfrm>
+          <a:prstGeom xmlns:a="http://schemas.openxmlformats.org/drawingml/2006/main" prst="rect">
+            <a:avLst/>
+          </a:prstGeom>
+          <a:solidFill xmlns:a="http://schemas.openxmlformats.org/drawingml/2006/main">
+            <a:srgbClr val="000000">
+              <a:alpha val="0"/>
+            </a:srgbClr>
+          </a:solidFill>
+          <a:ln xmlns:a="http://schemas.openxmlformats.org/drawingml/2006/main" w="0">
+            <a:solidFill>
+              <a:srgbClr val="000000">
+                <a:alpha val="0"/>
+              </a:srgbClr>
+            </a:solidFill>
+          </a:ln>
+        </p:spPr>
+        <p:txBody>
+          <a:bodyPr xmlns:a="http://schemas.openxmlformats.org/drawingml/2006/main" lIns="0" tIns="0" rIns="0" bIns="0" anchor="ctr">
+            <a:normAutofit fontScale="10000"/>
+          </a:bodyPr>
+          <a:lstStyle xmlns:a="http://schemas.openxmlformats.org/drawingml/2006/main"/>
+          <a:p xmlns:a="http://schemas.openxmlformats.org/drawingml/2006/main">
+            <a:pPr algn="l">
+              <a:defRPr sz="1200" b="0">
+                <a:solidFill>
+                  <a:srgbClr val="9FB3BE"/>
+                </a:solidFill>
+              </a:defRPr>
+            </a:pPr>
+            <a:r>
+              <a:rPr sz="1200" b="0">
+                <a:solidFill>
+                  <a:srgbClr val="9FB3BE"/>
+                </a:solidFill>
+              </a:rPr>
+              <a:t>NOW prediction estimates pollution at unsensed locations; k=4 categorization remains accepted because it balances performance, robustness, and deployability.</a:t>
             </a:r>
           </a:p>
         </p:txBody>
@@ -5142,7 +6374,7 @@
     </p:spTree>
     <p:extLst>
       <p:ext uri="{BB962C8B-B14F-4D97-AF65-F5344CB8AC3E}">
-        <p14:creationId xmlns:p14="http://schemas.microsoft.com/office/powerpoint/2010/main" val="134598572"/>
+        <p14:creationId xmlns:p14="http://schemas.microsoft.com/office/powerpoint/2010/main" val="559436633"/>
       </p:ext>
     </p:extLst>
   </p:cSld>
@@ -5173,7 +6405,7 @@
           <p:cNvPr id="1" name="Slide Number Placeholder 5">
             <a:extLst xmlns:a="http://schemas.openxmlformats.org/drawingml/2006/main">
               <a:ext uri="{FF2B5EF4-FFF2-40B4-BE49-F238E27FC236}">
-                <a16:creationId xmlns:a16="http://schemas.microsoft.com/office/drawing/2014/main" id="{78525AE3-55D2-40B0-AF73-4A4A22CB3723}"/>
+                <a16:creationId xmlns:a16="http://schemas.microsoft.com/office/drawing/2014/main" id="{C918E388-860F-4F82-9374-E82070A9017C}"/>
               </a:ext>
             </a:extLst>
           </p:cNvPr>
@@ -5205,7 +6437,7 @@
           <p:cNvPr id="2" name="">
             <a:extLst xmlns:a="http://schemas.openxmlformats.org/drawingml/2006/main">
               <a:ext uri="{FF2B5EF4-FFF2-40B4-BE49-F238E27FC236}">
-                <a16:creationId xmlns:a16="http://schemas.microsoft.com/office/drawing/2014/main" id="{ABCAD2B4-2EF2-4ECD-95E9-93E23DB6BCC6}"/>
+                <a16:creationId xmlns:a16="http://schemas.microsoft.com/office/drawing/2014/main" id="{B9B82057-66CF-45F6-8552-649082CAE71F}"/>
               </a:ext>
             </a:extLst>
           </p:cNvPr>
@@ -5237,7 +6469,7 @@
           <p:cNvPr id="3" name="">
             <a:extLst xmlns:a="http://schemas.openxmlformats.org/drawingml/2006/main">
               <a:ext uri="{FF2B5EF4-FFF2-40B4-BE49-F238E27FC236}">
-                <a16:creationId xmlns:a16="http://schemas.microsoft.com/office/drawing/2014/main" id="{56F8B85C-294C-4811-878E-DD29A949A56D}"/>
+                <a16:creationId xmlns:a16="http://schemas.microsoft.com/office/drawing/2014/main" id="{9C80F05A-857B-47DD-9435-F950E4B217B5}"/>
               </a:ext>
             </a:extLst>
           </p:cNvPr>
@@ -5269,7 +6501,7 @@
           <p:cNvPr id="4" name="">
             <a:extLst xmlns:a="http://schemas.openxmlformats.org/drawingml/2006/main">
               <a:ext uri="{FF2B5EF4-FFF2-40B4-BE49-F238E27FC236}">
-                <a16:creationId xmlns:a16="http://schemas.microsoft.com/office/drawing/2014/main" id="{7F3EB2CF-388A-433E-B816-550CFFB1D05D}"/>
+                <a16:creationId xmlns:a16="http://schemas.microsoft.com/office/drawing/2014/main" id="{F0568EFC-7266-4D86-AC51-B0D68BCFCD2E}"/>
               </a:ext>
             </a:extLst>
           </p:cNvPr>
@@ -5328,7 +6560,7 @@
           <p:cNvPr id="5" name="">
             <a:extLst xmlns:a="http://schemas.openxmlformats.org/drawingml/2006/main">
               <a:ext uri="{FF2B5EF4-FFF2-40B4-BE49-F238E27FC236}">
-                <a16:creationId xmlns:a16="http://schemas.microsoft.com/office/drawing/2014/main" id="{BA8C005C-4468-422B-94F5-34A28A6B804C}"/>
+                <a16:creationId xmlns:a16="http://schemas.microsoft.com/office/drawing/2014/main" id="{CC1CDFA9-0739-4060-969F-0E66056EF55D}"/>
               </a:ext>
             </a:extLst>
           </p:cNvPr>
@@ -5387,7 +6619,7 @@
           <p:cNvPr id="6" name="">
             <a:extLst xmlns:a="http://schemas.openxmlformats.org/drawingml/2006/main">
               <a:ext uri="{FF2B5EF4-FFF2-40B4-BE49-F238E27FC236}">
-                <a16:creationId xmlns:a16="http://schemas.microsoft.com/office/drawing/2014/main" id="{292C9568-C53A-470B-83A0-D18550F24ADA}"/>
+                <a16:creationId xmlns:a16="http://schemas.microsoft.com/office/drawing/2014/main" id="{C87A297B-EC2F-4DD0-9CA0-B67F13E6D9FD}"/>
               </a:ext>
             </a:extLst>
           </p:cNvPr>
@@ -5446,7 +6678,7 @@
           <p:cNvPr id="7" name="">
             <a:extLst xmlns:a="http://schemas.openxmlformats.org/drawingml/2006/main">
               <a:ext uri="{FF2B5EF4-FFF2-40B4-BE49-F238E27FC236}">
-                <a16:creationId xmlns:a16="http://schemas.microsoft.com/office/drawing/2014/main" id="{6C4F33F8-7B52-444C-9FC0-D35190727C45}"/>
+                <a16:creationId xmlns:a16="http://schemas.microsoft.com/office/drawing/2014/main" id="{8C836AB7-88CD-4B4A-9626-DB25237A9884}"/>
               </a:ext>
             </a:extLst>
           </p:cNvPr>
@@ -5505,7 +6737,7 @@
           <p:cNvPr id="8" name="">
             <a:extLst xmlns:a="http://schemas.openxmlformats.org/drawingml/2006/main">
               <a:ext uri="{FF2B5EF4-FFF2-40B4-BE49-F238E27FC236}">
-                <a16:creationId xmlns:a16="http://schemas.microsoft.com/office/drawing/2014/main" id="{2E1A6A94-AA31-4FE0-A1D9-873219C62208}"/>
+                <a16:creationId xmlns:a16="http://schemas.microsoft.com/office/drawing/2014/main" id="{9B817F0E-9CB6-4177-AB85-2732ABD07269}"/>
               </a:ext>
             </a:extLst>
           </p:cNvPr>
@@ -5539,7 +6771,7 @@
           <p:cNvPr id="9" name="">
             <a:extLst xmlns:a="http://schemas.openxmlformats.org/drawingml/2006/main">
               <a:ext uri="{FF2B5EF4-FFF2-40B4-BE49-F238E27FC236}">
-                <a16:creationId xmlns:a16="http://schemas.microsoft.com/office/drawing/2014/main" id="{EFF90D6D-18E3-4E02-BCEB-626C9F3440D5}"/>
+                <a16:creationId xmlns:a16="http://schemas.microsoft.com/office/drawing/2014/main" id="{4AAFD431-9801-497B-AEC5-514B4D6AD3E6}"/>
               </a:ext>
             </a:extLst>
           </p:cNvPr>
@@ -5571,7 +6803,7 @@
           <p:cNvPr id="10" name="">
             <a:extLst xmlns:a="http://schemas.openxmlformats.org/drawingml/2006/main">
               <a:ext uri="{FF2B5EF4-FFF2-40B4-BE49-F238E27FC236}">
-                <a16:creationId xmlns:a16="http://schemas.microsoft.com/office/drawing/2014/main" id="{6CFCA198-C855-42D6-80D6-A15945922393}"/>
+                <a16:creationId xmlns:a16="http://schemas.microsoft.com/office/drawing/2014/main" id="{77DE9882-85DF-4F2F-840B-F426BCB62D51}"/>
               </a:ext>
             </a:extLst>
           </p:cNvPr>
@@ -5630,7 +6862,7 @@
           <p:cNvPr id="11" name="">
             <a:extLst xmlns:a="http://schemas.openxmlformats.org/drawingml/2006/main">
               <a:ext uri="{FF2B5EF4-FFF2-40B4-BE49-F238E27FC236}">
-                <a16:creationId xmlns:a16="http://schemas.microsoft.com/office/drawing/2014/main" id="{C3FC768E-77E5-40AC-B031-A5C744106EA2}"/>
+                <a16:creationId xmlns:a16="http://schemas.microsoft.com/office/drawing/2014/main" id="{BF87F22E-BFFF-4CC9-AB49-B9E726BB0507}"/>
               </a:ext>
             </a:extLst>
           </p:cNvPr>
@@ -5689,7 +6921,7 @@
           <p:cNvPr id="12" name="">
             <a:extLst xmlns:a="http://schemas.openxmlformats.org/drawingml/2006/main">
               <a:ext uri="{FF2B5EF4-FFF2-40B4-BE49-F238E27FC236}">
-                <a16:creationId xmlns:a16="http://schemas.microsoft.com/office/drawing/2014/main" id="{5082FC67-92A7-45AF-95B6-3F2756278E7B}"/>
+                <a16:creationId xmlns:a16="http://schemas.microsoft.com/office/drawing/2014/main" id="{B44D389D-5316-47ED-A3F9-60956ADE17A0}"/>
               </a:ext>
             </a:extLst>
           </p:cNvPr>
@@ -5723,7 +6955,7 @@
           <p:cNvPr id="13" name="">
             <a:extLst xmlns:a="http://schemas.openxmlformats.org/drawingml/2006/main">
               <a:ext uri="{FF2B5EF4-FFF2-40B4-BE49-F238E27FC236}">
-                <a16:creationId xmlns:a16="http://schemas.microsoft.com/office/drawing/2014/main" id="{9D29F772-DF1E-4C27-B63A-E546BF316D24}"/>
+                <a16:creationId xmlns:a16="http://schemas.microsoft.com/office/drawing/2014/main" id="{1BB7C89C-89F4-4968-8BC5-0A787809301E}"/>
               </a:ext>
             </a:extLst>
           </p:cNvPr>
@@ -5755,7 +6987,7 @@
           <p:cNvPr id="14" name="">
             <a:extLst xmlns:a="http://schemas.openxmlformats.org/drawingml/2006/main">
               <a:ext uri="{FF2B5EF4-FFF2-40B4-BE49-F238E27FC236}">
-                <a16:creationId xmlns:a16="http://schemas.microsoft.com/office/drawing/2014/main" id="{C6662B7A-6D2B-4818-AF9C-2A3A8CFA4FC2}"/>
+                <a16:creationId xmlns:a16="http://schemas.microsoft.com/office/drawing/2014/main" id="{2647DBAF-7069-4327-8635-92255D30D83F}"/>
               </a:ext>
             </a:extLst>
           </p:cNvPr>
@@ -5814,7 +7046,7 @@
           <p:cNvPr id="15" name="">
             <a:extLst xmlns:a="http://schemas.openxmlformats.org/drawingml/2006/main">
               <a:ext uri="{FF2B5EF4-FFF2-40B4-BE49-F238E27FC236}">
-                <a16:creationId xmlns:a16="http://schemas.microsoft.com/office/drawing/2014/main" id="{976CA4EF-4E54-4C09-871B-14EAF139EDFE}"/>
+                <a16:creationId xmlns:a16="http://schemas.microsoft.com/office/drawing/2014/main" id="{C6F64B4F-81E1-4788-BADE-176A9CC4C8DB}"/>
               </a:ext>
             </a:extLst>
           </p:cNvPr>
@@ -5873,7 +7105,7 @@
           <p:cNvPr id="16" name="">
             <a:extLst xmlns:a="http://schemas.openxmlformats.org/drawingml/2006/main">
               <a:ext uri="{FF2B5EF4-FFF2-40B4-BE49-F238E27FC236}">
-                <a16:creationId xmlns:a16="http://schemas.microsoft.com/office/drawing/2014/main" id="{3E288DC6-98D9-491E-B98C-56D6550B0628}"/>
+                <a16:creationId xmlns:a16="http://schemas.microsoft.com/office/drawing/2014/main" id="{5C9E93E5-8556-4335-AFF4-4F4F0CA5FF0A}"/>
               </a:ext>
             </a:extLst>
           </p:cNvPr>
@@ -5907,7 +7139,7 @@
           <p:cNvPr id="17" name="">
             <a:extLst xmlns:a="http://schemas.openxmlformats.org/drawingml/2006/main">
               <a:ext uri="{FF2B5EF4-FFF2-40B4-BE49-F238E27FC236}">
-                <a16:creationId xmlns:a16="http://schemas.microsoft.com/office/drawing/2014/main" id="{9C9ADBFA-2753-474D-AFBA-B935E3B20FFD}"/>
+                <a16:creationId xmlns:a16="http://schemas.microsoft.com/office/drawing/2014/main" id="{F20D130D-7156-4878-A916-237F1B9C5007}"/>
               </a:ext>
             </a:extLst>
           </p:cNvPr>
@@ -5939,7 +7171,7 @@
           <p:cNvPr id="18" name="">
             <a:extLst xmlns:a="http://schemas.openxmlformats.org/drawingml/2006/main">
               <a:ext uri="{FF2B5EF4-FFF2-40B4-BE49-F238E27FC236}">
-                <a16:creationId xmlns:a16="http://schemas.microsoft.com/office/drawing/2014/main" id="{00D121EE-5809-46F7-93FD-FA8A9343CC84}"/>
+                <a16:creationId xmlns:a16="http://schemas.microsoft.com/office/drawing/2014/main" id="{8EEE93E0-4545-42EF-ACEA-489051A4719D}"/>
               </a:ext>
             </a:extLst>
           </p:cNvPr>
@@ -5998,7 +7230,7 @@
           <p:cNvPr id="19" name="">
             <a:extLst xmlns:a="http://schemas.openxmlformats.org/drawingml/2006/main">
               <a:ext uri="{FF2B5EF4-FFF2-40B4-BE49-F238E27FC236}">
-                <a16:creationId xmlns:a16="http://schemas.microsoft.com/office/drawing/2014/main" id="{DB6C4AEF-4DEF-4D53-8AD3-F031846D1E7B}"/>
+                <a16:creationId xmlns:a16="http://schemas.microsoft.com/office/drawing/2014/main" id="{DFE3C3E3-4ED4-4274-B3C7-B43826471C4E}"/>
               </a:ext>
             </a:extLst>
           </p:cNvPr>
@@ -6057,7 +7289,7 @@
           <p:cNvPr id="20" name="">
             <a:extLst xmlns:a="http://schemas.openxmlformats.org/drawingml/2006/main">
               <a:ext uri="{FF2B5EF4-FFF2-40B4-BE49-F238E27FC236}">
-                <a16:creationId xmlns:a16="http://schemas.microsoft.com/office/drawing/2014/main" id="{09496F67-B9C1-4485-9344-935F95C47E2C}"/>
+                <a16:creationId xmlns:a16="http://schemas.microsoft.com/office/drawing/2014/main" id="{198670D8-C9DF-4F79-882A-CB943C00C8C1}"/>
               </a:ext>
             </a:extLst>
           </p:cNvPr>
@@ -6091,7 +7323,7 @@
           <p:cNvPr id="21" name="">
             <a:extLst xmlns:a="http://schemas.openxmlformats.org/drawingml/2006/main">
               <a:ext uri="{FF2B5EF4-FFF2-40B4-BE49-F238E27FC236}">
-                <a16:creationId xmlns:a16="http://schemas.microsoft.com/office/drawing/2014/main" id="{8B219B0E-E2A5-4B5C-AA46-BCBF3F14E332}"/>
+                <a16:creationId xmlns:a16="http://schemas.microsoft.com/office/drawing/2014/main" id="{9FF44308-21CF-4E48-9137-133CFA820D3D}"/>
               </a:ext>
             </a:extLst>
           </p:cNvPr>
@@ -6123,7 +7355,7 @@
           <p:cNvPr id="22" name="">
             <a:extLst xmlns:a="http://schemas.openxmlformats.org/drawingml/2006/main">
               <a:ext uri="{FF2B5EF4-FFF2-40B4-BE49-F238E27FC236}">
-                <a16:creationId xmlns:a16="http://schemas.microsoft.com/office/drawing/2014/main" id="{B1E05A0F-9E15-4803-823A-87CA6FA962C3}"/>
+                <a16:creationId xmlns:a16="http://schemas.microsoft.com/office/drawing/2014/main" id="{6C0B54C3-5B81-4707-ADDC-CDA439574490}"/>
               </a:ext>
             </a:extLst>
           </p:cNvPr>
@@ -6182,7 +7414,7 @@
           <p:cNvPr id="23" name="">
             <a:extLst xmlns:a="http://schemas.openxmlformats.org/drawingml/2006/main">
               <a:ext uri="{FF2B5EF4-FFF2-40B4-BE49-F238E27FC236}">
-                <a16:creationId xmlns:a16="http://schemas.microsoft.com/office/drawing/2014/main" id="{EC0B64A9-69B2-44EE-AFED-5654CD771A4C}"/>
+                <a16:creationId xmlns:a16="http://schemas.microsoft.com/office/drawing/2014/main" id="{9381E2ED-D2AC-412A-B102-4E5668BA7265}"/>
               </a:ext>
             </a:extLst>
           </p:cNvPr>
@@ -6245,7 +7477,7 @@
           <p:nvPr/>
         </p:nvPicPr>
         <p:blipFill>
-          <a:blip xmlns:r="http://schemas.openxmlformats.org/officeDocument/2006/relationships" xmlns:a="http://schemas.openxmlformats.org/drawingml/2006/main" r:embed="Rdb61f98ce40e4d8e"/>
+          <a:blip xmlns:r="http://schemas.openxmlformats.org/officeDocument/2006/relationships" xmlns:a="http://schemas.openxmlformats.org/drawingml/2006/main" r:embed="R638460df61244fc7"/>
           <a:stretch xmlns:a="http://schemas.openxmlformats.org/drawingml/2006/main"/>
         </p:blipFill>
         <p:spPr>
@@ -6261,7 +7493,7 @@
     </p:spTree>
     <p:extLst>
       <p:ext uri="{BB962C8B-B14F-4D97-AF65-F5344CB8AC3E}">
-        <p14:creationId xmlns:p14="http://schemas.microsoft.com/office/powerpoint/2010/main" val="1188084116"/>
+        <p14:creationId xmlns:p14="http://schemas.microsoft.com/office/powerpoint/2010/main" val="2004815056"/>
       </p:ext>
     </p:extLst>
   </p:cSld>
@@ -6292,7 +7524,7 @@
           <p:cNvPr id="1" name="Slide Number Placeholder 5">
             <a:extLst xmlns:a="http://schemas.openxmlformats.org/drawingml/2006/main">
               <a:ext uri="{FF2B5EF4-FFF2-40B4-BE49-F238E27FC236}">
-                <a16:creationId xmlns:a16="http://schemas.microsoft.com/office/drawing/2014/main" id="{78525AE3-55D2-40B0-AF73-4A4A22CB3723}"/>
+                <a16:creationId xmlns:a16="http://schemas.microsoft.com/office/drawing/2014/main" id="{C918E388-860F-4F82-9374-E82070A9017C}"/>
               </a:ext>
             </a:extLst>
           </p:cNvPr>
@@ -6324,7 +7556,7 @@
           <p:cNvPr id="2" name="">
             <a:extLst xmlns:a="http://schemas.openxmlformats.org/drawingml/2006/main">
               <a:ext uri="{FF2B5EF4-FFF2-40B4-BE49-F238E27FC236}">
-                <a16:creationId xmlns:a16="http://schemas.microsoft.com/office/drawing/2014/main" id="{E202C6B2-3D5F-4E42-8F04-7FE746969558}"/>
+                <a16:creationId xmlns:a16="http://schemas.microsoft.com/office/drawing/2014/main" id="{A65D9590-916E-4D98-878C-7989A68BA3E6}"/>
               </a:ext>
             </a:extLst>
           </p:cNvPr>
@@ -6356,7 +7588,7 @@
           <p:cNvPr id="3" name="">
             <a:extLst xmlns:a="http://schemas.openxmlformats.org/drawingml/2006/main">
               <a:ext uri="{FF2B5EF4-FFF2-40B4-BE49-F238E27FC236}">
-                <a16:creationId xmlns:a16="http://schemas.microsoft.com/office/drawing/2014/main" id="{A9F976CA-1F82-4CE3-9F60-5A85B443ABC6}"/>
+                <a16:creationId xmlns:a16="http://schemas.microsoft.com/office/drawing/2014/main" id="{0E550A76-E641-43F1-9EC1-6DA9F9B003B2}"/>
               </a:ext>
             </a:extLst>
           </p:cNvPr>
@@ -6388,7 +7620,7 @@
           <p:cNvPr id="4" name="">
             <a:extLst xmlns:a="http://schemas.openxmlformats.org/drawingml/2006/main">
               <a:ext uri="{FF2B5EF4-FFF2-40B4-BE49-F238E27FC236}">
-                <a16:creationId xmlns:a16="http://schemas.microsoft.com/office/drawing/2014/main" id="{8111F00C-09C9-453B-A1A8-EE512B81F7DE}"/>
+                <a16:creationId xmlns:a16="http://schemas.microsoft.com/office/drawing/2014/main" id="{D4E11C48-5A7B-488C-9AC9-0AB99A6E8108}"/>
               </a:ext>
             </a:extLst>
           </p:cNvPr>
@@ -6447,7 +7679,7 @@
           <p:cNvPr id="5" name="">
             <a:extLst xmlns:a="http://schemas.openxmlformats.org/drawingml/2006/main">
               <a:ext uri="{FF2B5EF4-FFF2-40B4-BE49-F238E27FC236}">
-                <a16:creationId xmlns:a16="http://schemas.microsoft.com/office/drawing/2014/main" id="{3CDE9DC8-E7F7-4DC5-B604-749326F1764F}"/>
+                <a16:creationId xmlns:a16="http://schemas.microsoft.com/office/drawing/2014/main" id="{842A7E90-396D-42F6-B085-06AF38BE1647}"/>
               </a:ext>
             </a:extLst>
           </p:cNvPr>
@@ -6506,7 +7738,7 @@
           <p:cNvPr id="6" name="">
             <a:extLst xmlns:a="http://schemas.openxmlformats.org/drawingml/2006/main">
               <a:ext uri="{FF2B5EF4-FFF2-40B4-BE49-F238E27FC236}">
-                <a16:creationId xmlns:a16="http://schemas.microsoft.com/office/drawing/2014/main" id="{25C44ADD-8FB4-4C76-B4E4-88E89001BF3B}"/>
+                <a16:creationId xmlns:a16="http://schemas.microsoft.com/office/drawing/2014/main" id="{0D88A3FE-B23C-48BE-9BD5-FE35DC463594}"/>
               </a:ext>
             </a:extLst>
           </p:cNvPr>
@@ -6565,7 +7797,7 @@
           <p:cNvPr id="7" name="">
             <a:extLst xmlns:a="http://schemas.openxmlformats.org/drawingml/2006/main">
               <a:ext uri="{FF2B5EF4-FFF2-40B4-BE49-F238E27FC236}">
-                <a16:creationId xmlns:a16="http://schemas.microsoft.com/office/drawing/2014/main" id="{D83DD21B-5492-4A41-A48F-8221C71DB8B5}"/>
+                <a16:creationId xmlns:a16="http://schemas.microsoft.com/office/drawing/2014/main" id="{AD0A35A9-A223-4797-8361-0904A03ACEF5}"/>
               </a:ext>
             </a:extLst>
           </p:cNvPr>
@@ -6628,7 +7860,7 @@
           <p:nvPr/>
         </p:nvPicPr>
         <p:blipFill>
-          <a:blip xmlns:r="http://schemas.openxmlformats.org/officeDocument/2006/relationships" xmlns:a="http://schemas.openxmlformats.org/drawingml/2006/main" r:embed="R28a8106b56fd4c07"/>
+          <a:blip xmlns:r="http://schemas.openxmlformats.org/officeDocument/2006/relationships" xmlns:a="http://schemas.openxmlformats.org/drawingml/2006/main" r:embed="R7b104426905b4886"/>
           <a:stretch xmlns:a="http://schemas.openxmlformats.org/drawingml/2006/main"/>
         </p:blipFill>
         <p:spPr>
@@ -6646,7 +7878,7 @@
           <p:cNvPr id="9" name="">
             <a:extLst xmlns:a="http://schemas.openxmlformats.org/drawingml/2006/main">
               <a:ext uri="{FF2B5EF4-FFF2-40B4-BE49-F238E27FC236}">
-                <a16:creationId xmlns:a16="http://schemas.microsoft.com/office/drawing/2014/main" id="{9B5D0D4E-EB57-4B7E-87F0-4DF7AA2A0413}"/>
+                <a16:creationId xmlns:a16="http://schemas.microsoft.com/office/drawing/2014/main" id="{04CF52BE-26ED-4A0E-ADBA-BF8FD692BC51}"/>
               </a:ext>
             </a:extLst>
           </p:cNvPr>
@@ -6680,7 +7912,7 @@
           <p:cNvPr id="10" name="">
             <a:extLst xmlns:a="http://schemas.openxmlformats.org/drawingml/2006/main">
               <a:ext uri="{FF2B5EF4-FFF2-40B4-BE49-F238E27FC236}">
-                <a16:creationId xmlns:a16="http://schemas.microsoft.com/office/drawing/2014/main" id="{AFC28974-53E2-414D-8006-41A08CA844C3}"/>
+                <a16:creationId xmlns:a16="http://schemas.microsoft.com/office/drawing/2014/main" id="{16C551EA-FED9-4CDA-B9C3-E3755FEC2626}"/>
               </a:ext>
             </a:extLst>
           </p:cNvPr>
@@ -6712,7 +7944,7 @@
           <p:cNvPr id="11" name="">
             <a:extLst xmlns:a="http://schemas.openxmlformats.org/drawingml/2006/main">
               <a:ext uri="{FF2B5EF4-FFF2-40B4-BE49-F238E27FC236}">
-                <a16:creationId xmlns:a16="http://schemas.microsoft.com/office/drawing/2014/main" id="{4391A1C5-9242-4255-8250-6EFDE799AB72}"/>
+                <a16:creationId xmlns:a16="http://schemas.microsoft.com/office/drawing/2014/main" id="{3FE7C9A7-8725-4303-9C0C-0179FB62F304}"/>
               </a:ext>
             </a:extLst>
           </p:cNvPr>
@@ -6771,7 +8003,7 @@
           <p:cNvPr id="12" name="">
             <a:extLst xmlns:a="http://schemas.openxmlformats.org/drawingml/2006/main">
               <a:ext uri="{FF2B5EF4-FFF2-40B4-BE49-F238E27FC236}">
-                <a16:creationId xmlns:a16="http://schemas.microsoft.com/office/drawing/2014/main" id="{20FBC369-A2AD-44C7-AD22-2C6D729AFCA7}"/>
+                <a16:creationId xmlns:a16="http://schemas.microsoft.com/office/drawing/2014/main" id="{02A5ECB2-E583-4AB7-ABDB-A7BD815EFD4A}"/>
               </a:ext>
             </a:extLst>
           </p:cNvPr>
@@ -6830,7 +8062,7 @@
           <p:cNvPr id="13" name="">
             <a:extLst xmlns:a="http://schemas.openxmlformats.org/drawingml/2006/main">
               <a:ext uri="{FF2B5EF4-FFF2-40B4-BE49-F238E27FC236}">
-                <a16:creationId xmlns:a16="http://schemas.microsoft.com/office/drawing/2014/main" id="{1D2F7464-6B06-41F6-AFFC-6458F41C484B}"/>
+                <a16:creationId xmlns:a16="http://schemas.microsoft.com/office/drawing/2014/main" id="{19D47DF3-F33A-4E96-B329-35DE019396C9}"/>
               </a:ext>
             </a:extLst>
           </p:cNvPr>
@@ -6864,7 +8096,7 @@
           <p:cNvPr id="14" name="">
             <a:extLst xmlns:a="http://schemas.openxmlformats.org/drawingml/2006/main">
               <a:ext uri="{FF2B5EF4-FFF2-40B4-BE49-F238E27FC236}">
-                <a16:creationId xmlns:a16="http://schemas.microsoft.com/office/drawing/2014/main" id="{8BA1D901-5F51-443F-A566-96BEDAE8F4F9}"/>
+                <a16:creationId xmlns:a16="http://schemas.microsoft.com/office/drawing/2014/main" id="{407005E4-B3FE-4BBE-B831-172D5F8F8182}"/>
               </a:ext>
             </a:extLst>
           </p:cNvPr>
@@ -6896,7 +8128,7 @@
           <p:cNvPr id="15" name="">
             <a:extLst xmlns:a="http://schemas.openxmlformats.org/drawingml/2006/main">
               <a:ext uri="{FF2B5EF4-FFF2-40B4-BE49-F238E27FC236}">
-                <a16:creationId xmlns:a16="http://schemas.microsoft.com/office/drawing/2014/main" id="{71B69E51-65EF-41A6-878B-A2824FD25524}"/>
+                <a16:creationId xmlns:a16="http://schemas.microsoft.com/office/drawing/2014/main" id="{B645C9D8-F40A-4585-B6E7-D8487613EDA7}"/>
               </a:ext>
             </a:extLst>
           </p:cNvPr>
@@ -6955,7 +8187,7 @@
           <p:cNvPr id="16" name="">
             <a:extLst xmlns:a="http://schemas.openxmlformats.org/drawingml/2006/main">
               <a:ext uri="{FF2B5EF4-FFF2-40B4-BE49-F238E27FC236}">
-                <a16:creationId xmlns:a16="http://schemas.microsoft.com/office/drawing/2014/main" id="{48050E6E-B173-4ECF-90EB-0C52AB7E1E03}"/>
+                <a16:creationId xmlns:a16="http://schemas.microsoft.com/office/drawing/2014/main" id="{53DB1EED-1E68-4803-906E-C7CCD971B4F2}"/>
               </a:ext>
             </a:extLst>
           </p:cNvPr>
@@ -7014,7 +8246,7 @@
           <p:cNvPr id="17" name="">
             <a:extLst xmlns:a="http://schemas.openxmlformats.org/drawingml/2006/main">
               <a:ext uri="{FF2B5EF4-FFF2-40B4-BE49-F238E27FC236}">
-                <a16:creationId xmlns:a16="http://schemas.microsoft.com/office/drawing/2014/main" id="{5ECC0F10-48DC-4130-A1D4-EEADE9D36164}"/>
+                <a16:creationId xmlns:a16="http://schemas.microsoft.com/office/drawing/2014/main" id="{96920C88-5F71-4DFD-AE9D-B6419DFBC131}"/>
               </a:ext>
             </a:extLst>
           </p:cNvPr>
@@ -7048,7 +8280,7 @@
           <p:cNvPr id="18" name="">
             <a:extLst xmlns:a="http://schemas.openxmlformats.org/drawingml/2006/main">
               <a:ext uri="{FF2B5EF4-FFF2-40B4-BE49-F238E27FC236}">
-                <a16:creationId xmlns:a16="http://schemas.microsoft.com/office/drawing/2014/main" id="{C212F131-9FD9-4446-B27A-D3FB1D2FE411}"/>
+                <a16:creationId xmlns:a16="http://schemas.microsoft.com/office/drawing/2014/main" id="{D0997903-1359-43F5-B6E1-F38934831178}"/>
               </a:ext>
             </a:extLst>
           </p:cNvPr>
@@ -7080,7 +8312,7 @@
           <p:cNvPr id="19" name="">
             <a:extLst xmlns:a="http://schemas.openxmlformats.org/drawingml/2006/main">
               <a:ext uri="{FF2B5EF4-FFF2-40B4-BE49-F238E27FC236}">
-                <a16:creationId xmlns:a16="http://schemas.microsoft.com/office/drawing/2014/main" id="{CDE4FD3E-2214-409B-9370-08E0003B4419}"/>
+                <a16:creationId xmlns:a16="http://schemas.microsoft.com/office/drawing/2014/main" id="{77E64552-0F12-4872-A282-66ABFD53B849}"/>
               </a:ext>
             </a:extLst>
           </p:cNvPr>
@@ -7139,7 +8371,7 @@
           <p:cNvPr id="20" name="">
             <a:extLst xmlns:a="http://schemas.openxmlformats.org/drawingml/2006/main">
               <a:ext uri="{FF2B5EF4-FFF2-40B4-BE49-F238E27FC236}">
-                <a16:creationId xmlns:a16="http://schemas.microsoft.com/office/drawing/2014/main" id="{BAD0D406-6BD2-4019-A50E-D00514EAEDA3}"/>
+                <a16:creationId xmlns:a16="http://schemas.microsoft.com/office/drawing/2014/main" id="{AA561082-772D-456A-AD5B-C8D40DB50E54}"/>
               </a:ext>
             </a:extLst>
           </p:cNvPr>
@@ -7196,7 +8428,7 @@
     </p:spTree>
     <p:extLst>
       <p:ext uri="{BB962C8B-B14F-4D97-AF65-F5344CB8AC3E}">
-        <p14:creationId xmlns:p14="http://schemas.microsoft.com/office/powerpoint/2010/main" val="546974940"/>
+        <p14:creationId xmlns:p14="http://schemas.microsoft.com/office/powerpoint/2010/main" val="1210588219"/>
       </p:ext>
     </p:extLst>
   </p:cSld>
@@ -7227,7 +8459,7 @@
           <p:cNvPr id="1" name="Slide Number Placeholder 5">
             <a:extLst xmlns:a="http://schemas.openxmlformats.org/drawingml/2006/main">
               <a:ext uri="{FF2B5EF4-FFF2-40B4-BE49-F238E27FC236}">
-                <a16:creationId xmlns:a16="http://schemas.microsoft.com/office/drawing/2014/main" id="{78525AE3-55D2-40B0-AF73-4A4A22CB3723}"/>
+                <a16:creationId xmlns:a16="http://schemas.microsoft.com/office/drawing/2014/main" id="{C918E388-860F-4F82-9374-E82070A9017C}"/>
               </a:ext>
             </a:extLst>
           </p:cNvPr>
@@ -7259,7 +8491,7 @@
           <p:cNvPr id="2" name="">
             <a:extLst xmlns:a="http://schemas.openxmlformats.org/drawingml/2006/main">
               <a:ext uri="{FF2B5EF4-FFF2-40B4-BE49-F238E27FC236}">
-                <a16:creationId xmlns:a16="http://schemas.microsoft.com/office/drawing/2014/main" id="{FB03EE72-3924-4237-9F75-39582676B7E7}"/>
+                <a16:creationId xmlns:a16="http://schemas.microsoft.com/office/drawing/2014/main" id="{DD169748-0A27-42F3-BE93-A4E50D5A97E8}"/>
               </a:ext>
             </a:extLst>
           </p:cNvPr>
@@ -7291,7 +8523,7 @@
           <p:cNvPr id="3" name="">
             <a:extLst xmlns:a="http://schemas.openxmlformats.org/drawingml/2006/main">
               <a:ext uri="{FF2B5EF4-FFF2-40B4-BE49-F238E27FC236}">
-                <a16:creationId xmlns:a16="http://schemas.microsoft.com/office/drawing/2014/main" id="{F70D5BF4-311F-4933-9F13-33A590313244}"/>
+                <a16:creationId xmlns:a16="http://schemas.microsoft.com/office/drawing/2014/main" id="{B84ED101-75E8-4C7A-909E-BBF668F7FF80}"/>
               </a:ext>
             </a:extLst>
           </p:cNvPr>
@@ -7323,7 +8555,7 @@
           <p:cNvPr id="4" name="">
             <a:extLst xmlns:a="http://schemas.openxmlformats.org/drawingml/2006/main">
               <a:ext uri="{FF2B5EF4-FFF2-40B4-BE49-F238E27FC236}">
-                <a16:creationId xmlns:a16="http://schemas.microsoft.com/office/drawing/2014/main" id="{D4EFCC23-A050-486B-A0A1-241C338AF586}"/>
+                <a16:creationId xmlns:a16="http://schemas.microsoft.com/office/drawing/2014/main" id="{5889BC05-7A6B-4DDA-B847-F2A3028EFE17}"/>
               </a:ext>
             </a:extLst>
           </p:cNvPr>
@@ -7382,7 +8614,7 @@
           <p:cNvPr id="5" name="">
             <a:extLst xmlns:a="http://schemas.openxmlformats.org/drawingml/2006/main">
               <a:ext uri="{FF2B5EF4-FFF2-40B4-BE49-F238E27FC236}">
-                <a16:creationId xmlns:a16="http://schemas.microsoft.com/office/drawing/2014/main" id="{B4F7E8D7-7634-43FC-93D3-F99D396F50CA}"/>
+                <a16:creationId xmlns:a16="http://schemas.microsoft.com/office/drawing/2014/main" id="{4C8A8657-906C-4EBF-9F8A-16A61091D867}"/>
               </a:ext>
             </a:extLst>
           </p:cNvPr>
@@ -7441,7 +8673,7 @@
           <p:cNvPr id="6" name="">
             <a:extLst xmlns:a="http://schemas.openxmlformats.org/drawingml/2006/main">
               <a:ext uri="{FF2B5EF4-FFF2-40B4-BE49-F238E27FC236}">
-                <a16:creationId xmlns:a16="http://schemas.microsoft.com/office/drawing/2014/main" id="{5C960B35-14DB-4A91-A0ED-6516C25A3994}"/>
+                <a16:creationId xmlns:a16="http://schemas.microsoft.com/office/drawing/2014/main" id="{8C5231B4-69B1-4EDD-A9DA-D554A47BAC24}"/>
               </a:ext>
             </a:extLst>
           </p:cNvPr>
@@ -7500,7 +8732,7 @@
           <p:cNvPr id="7" name="">
             <a:extLst xmlns:a="http://schemas.openxmlformats.org/drawingml/2006/main">
               <a:ext uri="{FF2B5EF4-FFF2-40B4-BE49-F238E27FC236}">
-                <a16:creationId xmlns:a16="http://schemas.microsoft.com/office/drawing/2014/main" id="{9161C67A-1DEE-4AC1-991B-D0BDC9D0FC1D}"/>
+                <a16:creationId xmlns:a16="http://schemas.microsoft.com/office/drawing/2014/main" id="{FCECEAE6-1A20-4D50-B00D-217161C4E55B}"/>
               </a:ext>
             </a:extLst>
           </p:cNvPr>
@@ -7563,7 +8795,7 @@
           <p:nvPr/>
         </p:nvPicPr>
         <p:blipFill>
-          <a:blip xmlns:r="http://schemas.openxmlformats.org/officeDocument/2006/relationships" xmlns:a="http://schemas.openxmlformats.org/drawingml/2006/main" r:embed="R10922dcb0737472c"/>
+          <a:blip xmlns:r="http://schemas.openxmlformats.org/officeDocument/2006/relationships" xmlns:a="http://schemas.openxmlformats.org/drawingml/2006/main" r:embed="R0005938250bc4d39"/>
           <a:stretch xmlns:a="http://schemas.openxmlformats.org/drawingml/2006/main"/>
         </p:blipFill>
         <p:spPr>
@@ -7581,7 +8813,7 @@
           <p:cNvPr id="9" name="">
             <a:extLst xmlns:a="http://schemas.openxmlformats.org/drawingml/2006/main">
               <a:ext uri="{FF2B5EF4-FFF2-40B4-BE49-F238E27FC236}">
-                <a16:creationId xmlns:a16="http://schemas.microsoft.com/office/drawing/2014/main" id="{CF0F2844-6457-46B3-A706-FAA98054F353}"/>
+                <a16:creationId xmlns:a16="http://schemas.microsoft.com/office/drawing/2014/main" id="{57735863-E661-499E-A607-028BCB080C31}"/>
               </a:ext>
             </a:extLst>
           </p:cNvPr>
@@ -7615,7 +8847,7 @@
           <p:cNvPr id="10" name="">
             <a:extLst xmlns:a="http://schemas.openxmlformats.org/drawingml/2006/main">
               <a:ext uri="{FF2B5EF4-FFF2-40B4-BE49-F238E27FC236}">
-                <a16:creationId xmlns:a16="http://schemas.microsoft.com/office/drawing/2014/main" id="{2592811A-DDA3-4522-AC8B-4372C27EEA51}"/>
+                <a16:creationId xmlns:a16="http://schemas.microsoft.com/office/drawing/2014/main" id="{1469DDCF-CB90-4628-B6D1-6F074EBC3D87}"/>
               </a:ext>
             </a:extLst>
           </p:cNvPr>
@@ -7647,7 +8879,7 @@
           <p:cNvPr id="11" name="">
             <a:extLst xmlns:a="http://schemas.openxmlformats.org/drawingml/2006/main">
               <a:ext uri="{FF2B5EF4-FFF2-40B4-BE49-F238E27FC236}">
-                <a16:creationId xmlns:a16="http://schemas.microsoft.com/office/drawing/2014/main" id="{D0D8D91B-00DF-4B01-97FC-D917401068EF}"/>
+                <a16:creationId xmlns:a16="http://schemas.microsoft.com/office/drawing/2014/main" id="{77155CB5-0934-41C9-9536-81263DAB5AA5}"/>
               </a:ext>
             </a:extLst>
           </p:cNvPr>
@@ -7706,7 +8938,7 @@
           <p:cNvPr id="12" name="">
             <a:extLst xmlns:a="http://schemas.openxmlformats.org/drawingml/2006/main">
               <a:ext uri="{FF2B5EF4-FFF2-40B4-BE49-F238E27FC236}">
-                <a16:creationId xmlns:a16="http://schemas.microsoft.com/office/drawing/2014/main" id="{CE762103-AD3B-479E-A454-E112D7FD0A23}"/>
+                <a16:creationId xmlns:a16="http://schemas.microsoft.com/office/drawing/2014/main" id="{CAB2405C-2BE9-4536-BB70-D763493CDDBC}"/>
               </a:ext>
             </a:extLst>
           </p:cNvPr>
@@ -7765,7 +8997,7 @@
           <p:cNvPr id="13" name="">
             <a:extLst xmlns:a="http://schemas.openxmlformats.org/drawingml/2006/main">
               <a:ext uri="{FF2B5EF4-FFF2-40B4-BE49-F238E27FC236}">
-                <a16:creationId xmlns:a16="http://schemas.microsoft.com/office/drawing/2014/main" id="{E6BACC3D-AEA7-4E3C-9ED1-D91CA7E25E5B}"/>
+                <a16:creationId xmlns:a16="http://schemas.microsoft.com/office/drawing/2014/main" id="{156936CC-B6DC-41A6-8723-52CEC40230E7}"/>
               </a:ext>
             </a:extLst>
           </p:cNvPr>
@@ -7799,7 +9031,7 @@
           <p:cNvPr id="14" name="">
             <a:extLst xmlns:a="http://schemas.openxmlformats.org/drawingml/2006/main">
               <a:ext uri="{FF2B5EF4-FFF2-40B4-BE49-F238E27FC236}">
-                <a16:creationId xmlns:a16="http://schemas.microsoft.com/office/drawing/2014/main" id="{1B26AC01-5D91-4F46-BE5B-6053610C4E46}"/>
+                <a16:creationId xmlns:a16="http://schemas.microsoft.com/office/drawing/2014/main" id="{E1EB3BBF-61A2-4CD3-8992-7EA4EA460F47}"/>
               </a:ext>
             </a:extLst>
           </p:cNvPr>
@@ -7831,7 +9063,7 @@
           <p:cNvPr id="15" name="">
             <a:extLst xmlns:a="http://schemas.openxmlformats.org/drawingml/2006/main">
               <a:ext uri="{FF2B5EF4-FFF2-40B4-BE49-F238E27FC236}">
-                <a16:creationId xmlns:a16="http://schemas.microsoft.com/office/drawing/2014/main" id="{4DF4A585-06BF-4C5C-99D8-2012D05C97D2}"/>
+                <a16:creationId xmlns:a16="http://schemas.microsoft.com/office/drawing/2014/main" id="{8A27529C-26FE-4F11-95DD-0CA6185889BC}"/>
               </a:ext>
             </a:extLst>
           </p:cNvPr>
@@ -7890,7 +9122,7 @@
           <p:cNvPr id="16" name="">
             <a:extLst xmlns:a="http://schemas.openxmlformats.org/drawingml/2006/main">
               <a:ext uri="{FF2B5EF4-FFF2-40B4-BE49-F238E27FC236}">
-                <a16:creationId xmlns:a16="http://schemas.microsoft.com/office/drawing/2014/main" id="{47498AF8-E877-4ABD-AE82-F3485333CA07}"/>
+                <a16:creationId xmlns:a16="http://schemas.microsoft.com/office/drawing/2014/main" id="{7A3DA475-AD6C-4A92-94C8-38FD5FEF22C8}"/>
               </a:ext>
             </a:extLst>
           </p:cNvPr>
@@ -7949,7 +9181,7 @@
           <p:cNvPr id="17" name="">
             <a:extLst xmlns:a="http://schemas.openxmlformats.org/drawingml/2006/main">
               <a:ext uri="{FF2B5EF4-FFF2-40B4-BE49-F238E27FC236}">
-                <a16:creationId xmlns:a16="http://schemas.microsoft.com/office/drawing/2014/main" id="{10222293-31A6-4BEC-8F84-1F337892B1F0}"/>
+                <a16:creationId xmlns:a16="http://schemas.microsoft.com/office/drawing/2014/main" id="{47E66CDC-1B58-4376-BA0D-6B03413770A2}"/>
               </a:ext>
             </a:extLst>
           </p:cNvPr>
@@ -7983,7 +9215,7 @@
           <p:cNvPr id="18" name="">
             <a:extLst xmlns:a="http://schemas.openxmlformats.org/drawingml/2006/main">
               <a:ext uri="{FF2B5EF4-FFF2-40B4-BE49-F238E27FC236}">
-                <a16:creationId xmlns:a16="http://schemas.microsoft.com/office/drawing/2014/main" id="{4618A9D7-ACDB-4E87-97BF-711B7455248E}"/>
+                <a16:creationId xmlns:a16="http://schemas.microsoft.com/office/drawing/2014/main" id="{CB4CEBB3-5EF9-4C82-8E14-42D17351BBCC}"/>
               </a:ext>
             </a:extLst>
           </p:cNvPr>
@@ -8015,7 +9247,7 @@
           <p:cNvPr id="19" name="">
             <a:extLst xmlns:a="http://schemas.openxmlformats.org/drawingml/2006/main">
               <a:ext uri="{FF2B5EF4-FFF2-40B4-BE49-F238E27FC236}">
-                <a16:creationId xmlns:a16="http://schemas.microsoft.com/office/drawing/2014/main" id="{34E24E99-7441-4E6D-8D85-5611B4C5A023}"/>
+                <a16:creationId xmlns:a16="http://schemas.microsoft.com/office/drawing/2014/main" id="{2ED3FAA0-4BBB-4E46-88C4-DF892A32F814}"/>
               </a:ext>
             </a:extLst>
           </p:cNvPr>
@@ -8074,7 +9306,7 @@
           <p:cNvPr id="20" name="">
             <a:extLst xmlns:a="http://schemas.openxmlformats.org/drawingml/2006/main">
               <a:ext uri="{FF2B5EF4-FFF2-40B4-BE49-F238E27FC236}">
-                <a16:creationId xmlns:a16="http://schemas.microsoft.com/office/drawing/2014/main" id="{A7810D08-77B9-4D7E-B7A2-3678D7495E5E}"/>
+                <a16:creationId xmlns:a16="http://schemas.microsoft.com/office/drawing/2014/main" id="{4426CED9-8C42-4B49-9658-1FF78CDC6FDF}"/>
               </a:ext>
             </a:extLst>
           </p:cNvPr>
@@ -8133,7 +9365,7 @@
           <p:cNvPr id="21" name="">
             <a:extLst xmlns:a="http://schemas.openxmlformats.org/drawingml/2006/main">
               <a:ext uri="{FF2B5EF4-FFF2-40B4-BE49-F238E27FC236}">
-                <a16:creationId xmlns:a16="http://schemas.microsoft.com/office/drawing/2014/main" id="{5607A5B3-C2F4-4327-8F93-006722D27E6E}"/>
+                <a16:creationId xmlns:a16="http://schemas.microsoft.com/office/drawing/2014/main" id="{B1F1C650-80E8-4C80-977E-628EBA3352D2}"/>
               </a:ext>
             </a:extLst>
           </p:cNvPr>
@@ -8190,7 +9422,7 @@
     </p:spTree>
     <p:extLst>
       <p:ext uri="{BB962C8B-B14F-4D97-AF65-F5344CB8AC3E}">
-        <p14:creationId xmlns:p14="http://schemas.microsoft.com/office/powerpoint/2010/main" val="2111612470"/>
+        <p14:creationId xmlns:p14="http://schemas.microsoft.com/office/powerpoint/2010/main" val="1502190541"/>
       </p:ext>
     </p:extLst>
   </p:cSld>
@@ -8221,7 +9453,7 @@
           <p:cNvPr id="1" name="Slide Number Placeholder 5">
             <a:extLst xmlns:a="http://schemas.openxmlformats.org/drawingml/2006/main">
               <a:ext uri="{FF2B5EF4-FFF2-40B4-BE49-F238E27FC236}">
-                <a16:creationId xmlns:a16="http://schemas.microsoft.com/office/drawing/2014/main" id="{78525AE3-55D2-40B0-AF73-4A4A22CB3723}"/>
+                <a16:creationId xmlns:a16="http://schemas.microsoft.com/office/drawing/2014/main" id="{C918E388-860F-4F82-9374-E82070A9017C}"/>
               </a:ext>
             </a:extLst>
           </p:cNvPr>
@@ -8253,7 +9485,7 @@
           <p:cNvPr id="2" name="">
             <a:extLst xmlns:a="http://schemas.openxmlformats.org/drawingml/2006/main">
               <a:ext uri="{FF2B5EF4-FFF2-40B4-BE49-F238E27FC236}">
-                <a16:creationId xmlns:a16="http://schemas.microsoft.com/office/drawing/2014/main" id="{BDF61860-4BCB-4C04-9401-C2DAABF1333B}"/>
+                <a16:creationId xmlns:a16="http://schemas.microsoft.com/office/drawing/2014/main" id="{2AB0110F-79E4-4490-AFD8-AA8314D2801E}"/>
               </a:ext>
             </a:extLst>
           </p:cNvPr>
@@ -8285,7 +9517,7 @@
           <p:cNvPr id="3" name="">
             <a:extLst xmlns:a="http://schemas.openxmlformats.org/drawingml/2006/main">
               <a:ext uri="{FF2B5EF4-FFF2-40B4-BE49-F238E27FC236}">
-                <a16:creationId xmlns:a16="http://schemas.microsoft.com/office/drawing/2014/main" id="{7B50AD04-6F2E-4E59-B70D-1B8DF77ACF0B}"/>
+                <a16:creationId xmlns:a16="http://schemas.microsoft.com/office/drawing/2014/main" id="{A95E8FCD-1A61-47D6-98D6-729DE9DD0253}"/>
               </a:ext>
             </a:extLst>
           </p:cNvPr>
@@ -8317,7 +9549,7 @@
           <p:cNvPr id="4" name="">
             <a:extLst xmlns:a="http://schemas.openxmlformats.org/drawingml/2006/main">
               <a:ext uri="{FF2B5EF4-FFF2-40B4-BE49-F238E27FC236}">
-                <a16:creationId xmlns:a16="http://schemas.microsoft.com/office/drawing/2014/main" id="{59202AF2-8698-4105-A8D7-7F98AE72E52F}"/>
+                <a16:creationId xmlns:a16="http://schemas.microsoft.com/office/drawing/2014/main" id="{723CB5D2-06F5-4D0A-A08D-C06CF2954965}"/>
               </a:ext>
             </a:extLst>
           </p:cNvPr>
@@ -8376,7 +9608,7 @@
           <p:cNvPr id="5" name="">
             <a:extLst xmlns:a="http://schemas.openxmlformats.org/drawingml/2006/main">
               <a:ext uri="{FF2B5EF4-FFF2-40B4-BE49-F238E27FC236}">
-                <a16:creationId xmlns:a16="http://schemas.microsoft.com/office/drawing/2014/main" id="{69F23929-C56C-4584-9F29-19527DC02E0F}"/>
+                <a16:creationId xmlns:a16="http://schemas.microsoft.com/office/drawing/2014/main" id="{D258D66F-1C6C-403D-84B9-5210B5909E3A}"/>
               </a:ext>
             </a:extLst>
           </p:cNvPr>
@@ -8435,7 +9667,7 @@
           <p:cNvPr id="6" name="">
             <a:extLst xmlns:a="http://schemas.openxmlformats.org/drawingml/2006/main">
               <a:ext uri="{FF2B5EF4-FFF2-40B4-BE49-F238E27FC236}">
-                <a16:creationId xmlns:a16="http://schemas.microsoft.com/office/drawing/2014/main" id="{A795D274-EC40-43C7-9FF2-86CA42FA4267}"/>
+                <a16:creationId xmlns:a16="http://schemas.microsoft.com/office/drawing/2014/main" id="{12F02611-AC27-4DAB-92E0-1766E7931F15}"/>
               </a:ext>
             </a:extLst>
           </p:cNvPr>
@@ -8494,7 +9726,7 @@
           <p:cNvPr id="7" name="">
             <a:extLst xmlns:a="http://schemas.openxmlformats.org/drawingml/2006/main">
               <a:ext uri="{FF2B5EF4-FFF2-40B4-BE49-F238E27FC236}">
-                <a16:creationId xmlns:a16="http://schemas.microsoft.com/office/drawing/2014/main" id="{CECDEEB5-0F67-45F1-91F6-6732262583C1}"/>
+                <a16:creationId xmlns:a16="http://schemas.microsoft.com/office/drawing/2014/main" id="{47D783E9-98C4-4CE1-8A2D-AA570FDB1B09}"/>
               </a:ext>
             </a:extLst>
           </p:cNvPr>
@@ -8553,7 +9785,7 @@
           <p:cNvPr id="8" name="">
             <a:extLst xmlns:a="http://schemas.openxmlformats.org/drawingml/2006/main">
               <a:ext uri="{FF2B5EF4-FFF2-40B4-BE49-F238E27FC236}">
-                <a16:creationId xmlns:a16="http://schemas.microsoft.com/office/drawing/2014/main" id="{7E8BF210-E8DE-488B-9624-E5D96F0DA8D6}"/>
+                <a16:creationId xmlns:a16="http://schemas.microsoft.com/office/drawing/2014/main" id="{6C0118F5-0FF8-4C59-9D51-1E71F1135AD9}"/>
               </a:ext>
             </a:extLst>
           </p:cNvPr>
@@ -8587,7 +9819,7 @@
           <p:cNvPr id="9" name="">
             <a:extLst xmlns:a="http://schemas.openxmlformats.org/drawingml/2006/main">
               <a:ext uri="{FF2B5EF4-FFF2-40B4-BE49-F238E27FC236}">
-                <a16:creationId xmlns:a16="http://schemas.microsoft.com/office/drawing/2014/main" id="{F18CD045-8A05-4BF3-AFE5-C4D0514219BE}"/>
+                <a16:creationId xmlns:a16="http://schemas.microsoft.com/office/drawing/2014/main" id="{9F98AB0C-9F61-44C3-A149-1019CE0AE60E}"/>
               </a:ext>
             </a:extLst>
           </p:cNvPr>
@@ -8646,7 +9878,7 @@
           <p:cNvPr id="10" name="">
             <a:extLst xmlns:a="http://schemas.openxmlformats.org/drawingml/2006/main">
               <a:ext uri="{FF2B5EF4-FFF2-40B4-BE49-F238E27FC236}">
-                <a16:creationId xmlns:a16="http://schemas.microsoft.com/office/drawing/2014/main" id="{DEC0411F-92DA-4075-9119-16DA202E001D}"/>
+                <a16:creationId xmlns:a16="http://schemas.microsoft.com/office/drawing/2014/main" id="{92ACD8D4-97AE-4E4E-8E17-CCF284CF20D9}"/>
               </a:ext>
             </a:extLst>
           </p:cNvPr>
@@ -8705,7 +9937,7 @@
           <p:cNvPr id="11" name="">
             <a:extLst xmlns:a="http://schemas.openxmlformats.org/drawingml/2006/main">
               <a:ext uri="{FF2B5EF4-FFF2-40B4-BE49-F238E27FC236}">
-                <a16:creationId xmlns:a16="http://schemas.microsoft.com/office/drawing/2014/main" id="{2F455AC1-8B06-4024-90B1-304D3BECAB67}"/>
+                <a16:creationId xmlns:a16="http://schemas.microsoft.com/office/drawing/2014/main" id="{7A7141AD-DA79-4FC9-AF8F-E10AC85E918D}"/>
               </a:ext>
             </a:extLst>
           </p:cNvPr>
@@ -8739,7 +9971,7 @@
           <p:cNvPr id="12" name="">
             <a:extLst xmlns:a="http://schemas.openxmlformats.org/drawingml/2006/main">
               <a:ext uri="{FF2B5EF4-FFF2-40B4-BE49-F238E27FC236}">
-                <a16:creationId xmlns:a16="http://schemas.microsoft.com/office/drawing/2014/main" id="{BC9CAAC0-B9F0-4BF9-BEB0-44B3F72532F6}"/>
+                <a16:creationId xmlns:a16="http://schemas.microsoft.com/office/drawing/2014/main" id="{A46E9D87-3C8C-4C16-9929-527D63F76006}"/>
               </a:ext>
             </a:extLst>
           </p:cNvPr>
@@ -8798,7 +10030,7 @@
           <p:cNvPr id="13" name="">
             <a:extLst xmlns:a="http://schemas.openxmlformats.org/drawingml/2006/main">
               <a:ext uri="{FF2B5EF4-FFF2-40B4-BE49-F238E27FC236}">
-                <a16:creationId xmlns:a16="http://schemas.microsoft.com/office/drawing/2014/main" id="{D09DACB3-5385-4C40-99BF-AE8A578B42F6}"/>
+                <a16:creationId xmlns:a16="http://schemas.microsoft.com/office/drawing/2014/main" id="{744D1B68-CB4A-48D2-B62C-B1EEFCE5FC84}"/>
               </a:ext>
             </a:extLst>
           </p:cNvPr>
@@ -8857,7 +10089,7 @@
           <p:cNvPr id="14" name="">
             <a:extLst xmlns:a="http://schemas.openxmlformats.org/drawingml/2006/main">
               <a:ext uri="{FF2B5EF4-FFF2-40B4-BE49-F238E27FC236}">
-                <a16:creationId xmlns:a16="http://schemas.microsoft.com/office/drawing/2014/main" id="{966BF6B6-A184-4894-9C3F-2B28A1513D22}"/>
+                <a16:creationId xmlns:a16="http://schemas.microsoft.com/office/drawing/2014/main" id="{D4B52490-FCA1-4B63-97F0-3D2F4002F383}"/>
               </a:ext>
             </a:extLst>
           </p:cNvPr>
@@ -8891,7 +10123,7 @@
           <p:cNvPr id="15" name="">
             <a:extLst xmlns:a="http://schemas.openxmlformats.org/drawingml/2006/main">
               <a:ext uri="{FF2B5EF4-FFF2-40B4-BE49-F238E27FC236}">
-                <a16:creationId xmlns:a16="http://schemas.microsoft.com/office/drawing/2014/main" id="{52777594-1775-4D17-BA42-791AE7336DD6}"/>
+                <a16:creationId xmlns:a16="http://schemas.microsoft.com/office/drawing/2014/main" id="{D5631BA2-0CEA-4464-AA11-B1D0575BEAFB}"/>
               </a:ext>
             </a:extLst>
           </p:cNvPr>
@@ -8950,7 +10182,7 @@
           <p:cNvPr id="16" name="">
             <a:extLst xmlns:a="http://schemas.openxmlformats.org/drawingml/2006/main">
               <a:ext uri="{FF2B5EF4-FFF2-40B4-BE49-F238E27FC236}">
-                <a16:creationId xmlns:a16="http://schemas.microsoft.com/office/drawing/2014/main" id="{E43336DE-F298-4BB5-AE57-99B5360623E3}"/>
+                <a16:creationId xmlns:a16="http://schemas.microsoft.com/office/drawing/2014/main" id="{E9638552-5BA7-46D6-B9F7-029EB3EFEED2}"/>
               </a:ext>
             </a:extLst>
           </p:cNvPr>
@@ -9009,7 +10241,7 @@
           <p:cNvPr id="17" name="">
             <a:extLst xmlns:a="http://schemas.openxmlformats.org/drawingml/2006/main">
               <a:ext uri="{FF2B5EF4-FFF2-40B4-BE49-F238E27FC236}">
-                <a16:creationId xmlns:a16="http://schemas.microsoft.com/office/drawing/2014/main" id="{11A4E0CE-1AB4-4DEC-89EB-C44F16F263C2}"/>
+                <a16:creationId xmlns:a16="http://schemas.microsoft.com/office/drawing/2014/main" id="{342256A0-7A22-4D32-8CCC-F81C8369D47D}"/>
               </a:ext>
             </a:extLst>
           </p:cNvPr>
@@ -9043,7 +10275,7 @@
           <p:cNvPr id="18" name="">
             <a:extLst xmlns:a="http://schemas.openxmlformats.org/drawingml/2006/main">
               <a:ext uri="{FF2B5EF4-FFF2-40B4-BE49-F238E27FC236}">
-                <a16:creationId xmlns:a16="http://schemas.microsoft.com/office/drawing/2014/main" id="{5DFCA3DB-E48D-4E26-8E1E-A5C2929C9572}"/>
+                <a16:creationId xmlns:a16="http://schemas.microsoft.com/office/drawing/2014/main" id="{87B66229-89F3-4EEE-9431-D53FBB8C7F34}"/>
               </a:ext>
             </a:extLst>
           </p:cNvPr>
@@ -9102,7 +10334,7 @@
           <p:cNvPr id="19" name="">
             <a:extLst xmlns:a="http://schemas.openxmlformats.org/drawingml/2006/main">
               <a:ext uri="{FF2B5EF4-FFF2-40B4-BE49-F238E27FC236}">
-                <a16:creationId xmlns:a16="http://schemas.microsoft.com/office/drawing/2014/main" id="{42905613-F107-45DA-81C9-F8C584D7229F}"/>
+                <a16:creationId xmlns:a16="http://schemas.microsoft.com/office/drawing/2014/main" id="{AAC5916F-6218-4706-A2BC-19A30F7AD0D9}"/>
               </a:ext>
             </a:extLst>
           </p:cNvPr>
@@ -9161,7 +10393,7 @@
           <p:cNvPr id="20" name="">
             <a:extLst xmlns:a="http://schemas.openxmlformats.org/drawingml/2006/main">
               <a:ext uri="{FF2B5EF4-FFF2-40B4-BE49-F238E27FC236}">
-                <a16:creationId xmlns:a16="http://schemas.microsoft.com/office/drawing/2014/main" id="{123CD987-BF98-4FA2-861D-7BE5736722CE}"/>
+                <a16:creationId xmlns:a16="http://schemas.microsoft.com/office/drawing/2014/main" id="{9117365C-0E6D-4C96-8174-390A36259701}"/>
               </a:ext>
             </a:extLst>
           </p:cNvPr>
@@ -9195,7 +10427,7 @@
           <p:cNvPr id="21" name="">
             <a:extLst xmlns:a="http://schemas.openxmlformats.org/drawingml/2006/main">
               <a:ext uri="{FF2B5EF4-FFF2-40B4-BE49-F238E27FC236}">
-                <a16:creationId xmlns:a16="http://schemas.microsoft.com/office/drawing/2014/main" id="{66712BEC-E82C-492E-BC7F-9B9EA1D2D4D2}"/>
+                <a16:creationId xmlns:a16="http://schemas.microsoft.com/office/drawing/2014/main" id="{952A3AEB-E3DB-4A6D-8618-6D3AF13D251D}"/>
               </a:ext>
             </a:extLst>
           </p:cNvPr>
@@ -9227,7 +10459,7 @@
           <p:cNvPr id="22" name="">
             <a:extLst xmlns:a="http://schemas.openxmlformats.org/drawingml/2006/main">
               <a:ext uri="{FF2B5EF4-FFF2-40B4-BE49-F238E27FC236}">
-                <a16:creationId xmlns:a16="http://schemas.microsoft.com/office/drawing/2014/main" id="{BB1239D8-9720-4D60-A510-4B4BA87DABDC}"/>
+                <a16:creationId xmlns:a16="http://schemas.microsoft.com/office/drawing/2014/main" id="{D35C8CA1-EA6A-4E3C-B79A-966AB64875BE}"/>
               </a:ext>
             </a:extLst>
           </p:cNvPr>
@@ -9286,7 +10518,7 @@
           <p:cNvPr id="23" name="">
             <a:extLst xmlns:a="http://schemas.openxmlformats.org/drawingml/2006/main">
               <a:ext uri="{FF2B5EF4-FFF2-40B4-BE49-F238E27FC236}">
-                <a16:creationId xmlns:a16="http://schemas.microsoft.com/office/drawing/2014/main" id="{9558C7ED-CAEE-4E13-9D5A-7C6360DE3FB8}"/>
+                <a16:creationId xmlns:a16="http://schemas.microsoft.com/office/drawing/2014/main" id="{6087AEED-C115-4B48-B248-ABD479604316}"/>
               </a:ext>
             </a:extLst>
           </p:cNvPr>
@@ -9345,7 +10577,7 @@
           <p:cNvPr id="24" name="">
             <a:extLst xmlns:a="http://schemas.openxmlformats.org/drawingml/2006/main">
               <a:ext uri="{FF2B5EF4-FFF2-40B4-BE49-F238E27FC236}">
-                <a16:creationId xmlns:a16="http://schemas.microsoft.com/office/drawing/2014/main" id="{42624260-1E1C-41D0-B407-0EB4D7CEF641}"/>
+                <a16:creationId xmlns:a16="http://schemas.microsoft.com/office/drawing/2014/main" id="{2AFF32A7-A1DB-4F68-9DB3-7731C04172E7}"/>
               </a:ext>
             </a:extLst>
           </p:cNvPr>
@@ -9379,7 +10611,7 @@
           <p:cNvPr id="25" name="">
             <a:extLst xmlns:a="http://schemas.openxmlformats.org/drawingml/2006/main">
               <a:ext uri="{FF2B5EF4-FFF2-40B4-BE49-F238E27FC236}">
-                <a16:creationId xmlns:a16="http://schemas.microsoft.com/office/drawing/2014/main" id="{A6DCD7ED-58AF-4A42-AAAF-178F0BFF0D97}"/>
+                <a16:creationId xmlns:a16="http://schemas.microsoft.com/office/drawing/2014/main" id="{3EF16872-C20B-49C3-87BC-71884046B8A4}"/>
               </a:ext>
             </a:extLst>
           </p:cNvPr>
@@ -9411,7 +10643,7 @@
           <p:cNvPr id="26" name="">
             <a:extLst xmlns:a="http://schemas.openxmlformats.org/drawingml/2006/main">
               <a:ext uri="{FF2B5EF4-FFF2-40B4-BE49-F238E27FC236}">
-                <a16:creationId xmlns:a16="http://schemas.microsoft.com/office/drawing/2014/main" id="{F6E9C820-B5F4-49FF-AD1E-28A9788FE909}"/>
+                <a16:creationId xmlns:a16="http://schemas.microsoft.com/office/drawing/2014/main" id="{7D6EB36E-19F1-4218-BE91-E22743C30164}"/>
               </a:ext>
             </a:extLst>
           </p:cNvPr>
@@ -9470,7 +10702,7 @@
           <p:cNvPr id="27" name="">
             <a:extLst xmlns:a="http://schemas.openxmlformats.org/drawingml/2006/main">
               <a:ext uri="{FF2B5EF4-FFF2-40B4-BE49-F238E27FC236}">
-                <a16:creationId xmlns:a16="http://schemas.microsoft.com/office/drawing/2014/main" id="{6B211B2F-BB5F-4738-90CC-20578875B150}"/>
+                <a16:creationId xmlns:a16="http://schemas.microsoft.com/office/drawing/2014/main" id="{D979B049-AE1A-4BE7-9EB0-C1D59C512A67}"/>
               </a:ext>
             </a:extLst>
           </p:cNvPr>
@@ -9529,7 +10761,7 @@
           <p:cNvPr id="28" name="">
             <a:extLst xmlns:a="http://schemas.openxmlformats.org/drawingml/2006/main">
               <a:ext uri="{FF2B5EF4-FFF2-40B4-BE49-F238E27FC236}">
-                <a16:creationId xmlns:a16="http://schemas.microsoft.com/office/drawing/2014/main" id="{434F2958-01A5-4068-AA93-5555935A4BF1}"/>
+                <a16:creationId xmlns:a16="http://schemas.microsoft.com/office/drawing/2014/main" id="{C9B5309C-B319-4A42-9582-266823CEF7D3}"/>
               </a:ext>
             </a:extLst>
           </p:cNvPr>
@@ -9586,7 +10818,7 @@
     </p:spTree>
     <p:extLst>
       <p:ext uri="{BB962C8B-B14F-4D97-AF65-F5344CB8AC3E}">
-        <p14:creationId xmlns:p14="http://schemas.microsoft.com/office/powerpoint/2010/main" val="19224760"/>
+        <p14:creationId xmlns:p14="http://schemas.microsoft.com/office/powerpoint/2010/main" val="1203703211"/>
       </p:ext>
     </p:extLst>
   </p:cSld>
@@ -9617,7 +10849,7 @@
           <p:cNvPr id="1" name="Slide Number Placeholder 5">
             <a:extLst xmlns:a="http://schemas.openxmlformats.org/drawingml/2006/main">
               <a:ext uri="{FF2B5EF4-FFF2-40B4-BE49-F238E27FC236}">
-                <a16:creationId xmlns:a16="http://schemas.microsoft.com/office/drawing/2014/main" id="{78525AE3-55D2-40B0-AF73-4A4A22CB3723}"/>
+                <a16:creationId xmlns:a16="http://schemas.microsoft.com/office/drawing/2014/main" id="{C918E388-860F-4F82-9374-E82070A9017C}"/>
               </a:ext>
             </a:extLst>
           </p:cNvPr>
@@ -9649,7 +10881,7 @@
           <p:cNvPr id="2" name="">
             <a:extLst xmlns:a="http://schemas.openxmlformats.org/drawingml/2006/main">
               <a:ext uri="{FF2B5EF4-FFF2-40B4-BE49-F238E27FC236}">
-                <a16:creationId xmlns:a16="http://schemas.microsoft.com/office/drawing/2014/main" id="{7219866B-016A-45E9-AE73-6BFEA0F86C0A}"/>
+                <a16:creationId xmlns:a16="http://schemas.microsoft.com/office/drawing/2014/main" id="{56A70D3B-BA9D-438A-95B5-C6C2C51AD1D4}"/>
               </a:ext>
             </a:extLst>
           </p:cNvPr>
@@ -9681,7 +10913,7 @@
           <p:cNvPr id="3" name="">
             <a:extLst xmlns:a="http://schemas.openxmlformats.org/drawingml/2006/main">
               <a:ext uri="{FF2B5EF4-FFF2-40B4-BE49-F238E27FC236}">
-                <a16:creationId xmlns:a16="http://schemas.microsoft.com/office/drawing/2014/main" id="{4903BF9B-E7CA-4CF5-BB49-DF5860FE5D0A}"/>
+                <a16:creationId xmlns:a16="http://schemas.microsoft.com/office/drawing/2014/main" id="{C76C7C51-755C-4A9E-B64C-40A136897676}"/>
               </a:ext>
             </a:extLst>
           </p:cNvPr>
@@ -9713,7 +10945,7 @@
           <p:cNvPr id="4" name="">
             <a:extLst xmlns:a="http://schemas.openxmlformats.org/drawingml/2006/main">
               <a:ext uri="{FF2B5EF4-FFF2-40B4-BE49-F238E27FC236}">
-                <a16:creationId xmlns:a16="http://schemas.microsoft.com/office/drawing/2014/main" id="{5D60BDF2-BFE5-4B6F-A3CF-7F78913AD478}"/>
+                <a16:creationId xmlns:a16="http://schemas.microsoft.com/office/drawing/2014/main" id="{2345200D-F4EE-4791-BE94-E4B19A1654CC}"/>
               </a:ext>
             </a:extLst>
           </p:cNvPr>
@@ -9772,7 +11004,7 @@
           <p:cNvPr id="5" name="">
             <a:extLst xmlns:a="http://schemas.openxmlformats.org/drawingml/2006/main">
               <a:ext uri="{FF2B5EF4-FFF2-40B4-BE49-F238E27FC236}">
-                <a16:creationId xmlns:a16="http://schemas.microsoft.com/office/drawing/2014/main" id="{2E9EBE53-5A59-4C57-AB7E-E2C1A37BA8EC}"/>
+                <a16:creationId xmlns:a16="http://schemas.microsoft.com/office/drawing/2014/main" id="{B966FAC5-334F-4A35-A65B-6686F33AF740}"/>
               </a:ext>
             </a:extLst>
           </p:cNvPr>
@@ -9831,7 +11063,7 @@
           <p:cNvPr id="6" name="">
             <a:extLst xmlns:a="http://schemas.openxmlformats.org/drawingml/2006/main">
               <a:ext uri="{FF2B5EF4-FFF2-40B4-BE49-F238E27FC236}">
-                <a16:creationId xmlns:a16="http://schemas.microsoft.com/office/drawing/2014/main" id="{251EF485-3383-40DE-9314-7406C79E6032}"/>
+                <a16:creationId xmlns:a16="http://schemas.microsoft.com/office/drawing/2014/main" id="{4C27C258-6FAD-48C3-BAA7-2FD0385DF67B}"/>
               </a:ext>
             </a:extLst>
           </p:cNvPr>
@@ -9890,7 +11122,7 @@
           <p:cNvPr id="7" name="">
             <a:extLst xmlns:a="http://schemas.openxmlformats.org/drawingml/2006/main">
               <a:ext uri="{FF2B5EF4-FFF2-40B4-BE49-F238E27FC236}">
-                <a16:creationId xmlns:a16="http://schemas.microsoft.com/office/drawing/2014/main" id="{778E6FD5-82A5-4B1D-9024-7D0D0C18302D}"/>
+                <a16:creationId xmlns:a16="http://schemas.microsoft.com/office/drawing/2014/main" id="{7BEE6319-03CB-4D46-AD58-EB274C4D8F54}"/>
               </a:ext>
             </a:extLst>
           </p:cNvPr>
@@ -9949,7 +11181,7 @@
           <p:cNvPr id="8" name="">
             <a:extLst xmlns:a="http://schemas.openxmlformats.org/drawingml/2006/main">
               <a:ext uri="{FF2B5EF4-FFF2-40B4-BE49-F238E27FC236}">
-                <a16:creationId xmlns:a16="http://schemas.microsoft.com/office/drawing/2014/main" id="{9B76B742-6DA2-445D-959E-508C0215A255}"/>
+                <a16:creationId xmlns:a16="http://schemas.microsoft.com/office/drawing/2014/main" id="{CB82BB43-C4D3-409B-9B44-05BAEC91FACA}"/>
               </a:ext>
             </a:extLst>
           </p:cNvPr>
@@ -9983,7 +11215,7 @@
           <p:cNvPr id="9" name="">
             <a:extLst xmlns:a="http://schemas.openxmlformats.org/drawingml/2006/main">
               <a:ext uri="{FF2B5EF4-FFF2-40B4-BE49-F238E27FC236}">
-                <a16:creationId xmlns:a16="http://schemas.microsoft.com/office/drawing/2014/main" id="{95BF6715-8986-4278-ACA1-36D0BBA8C7A1}"/>
+                <a16:creationId xmlns:a16="http://schemas.microsoft.com/office/drawing/2014/main" id="{9196E9B5-5A72-4BE3-B7A9-FB730D9D374E}"/>
               </a:ext>
             </a:extLst>
           </p:cNvPr>
@@ -10015,7 +11247,7 @@
           <p:cNvPr id="10" name="">
             <a:extLst xmlns:a="http://schemas.openxmlformats.org/drawingml/2006/main">
               <a:ext uri="{FF2B5EF4-FFF2-40B4-BE49-F238E27FC236}">
-                <a16:creationId xmlns:a16="http://schemas.microsoft.com/office/drawing/2014/main" id="{FDC485E5-637B-4E58-BEEA-A68D985195AB}"/>
+                <a16:creationId xmlns:a16="http://schemas.microsoft.com/office/drawing/2014/main" id="{78BCFF7D-A278-4301-9159-E05C8FF09829}"/>
               </a:ext>
             </a:extLst>
           </p:cNvPr>
@@ -10074,7 +11306,7 @@
           <p:cNvPr id="11" name="">
             <a:extLst xmlns:a="http://schemas.openxmlformats.org/drawingml/2006/main">
               <a:ext uri="{FF2B5EF4-FFF2-40B4-BE49-F238E27FC236}">
-                <a16:creationId xmlns:a16="http://schemas.microsoft.com/office/drawing/2014/main" id="{AAA9F111-5D08-430E-A35C-550EF96E6660}"/>
+                <a16:creationId xmlns:a16="http://schemas.microsoft.com/office/drawing/2014/main" id="{55D5DFF7-B2BA-400F-B394-869A21151315}"/>
               </a:ext>
             </a:extLst>
           </p:cNvPr>
@@ -10155,7 +11387,7 @@
           <p:cNvPr id="12" name="">
             <a:extLst xmlns:a="http://schemas.openxmlformats.org/drawingml/2006/main">
               <a:ext uri="{FF2B5EF4-FFF2-40B4-BE49-F238E27FC236}">
-                <a16:creationId xmlns:a16="http://schemas.microsoft.com/office/drawing/2014/main" id="{8A615FDC-27FB-48DC-A29D-FC43299A4E94}"/>
+                <a16:creationId xmlns:a16="http://schemas.microsoft.com/office/drawing/2014/main" id="{E48224FD-76FC-4491-91D4-66DC8241CD18}"/>
               </a:ext>
             </a:extLst>
           </p:cNvPr>
@@ -10189,7 +11421,7 @@
           <p:cNvPr id="13" name="">
             <a:extLst xmlns:a="http://schemas.openxmlformats.org/drawingml/2006/main">
               <a:ext uri="{FF2B5EF4-FFF2-40B4-BE49-F238E27FC236}">
-                <a16:creationId xmlns:a16="http://schemas.microsoft.com/office/drawing/2014/main" id="{E8B4E486-CBD0-4EA7-8C3B-F23FE143F955}"/>
+                <a16:creationId xmlns:a16="http://schemas.microsoft.com/office/drawing/2014/main" id="{CDD02E3D-73B2-400A-98B8-7B0484ADD588}"/>
               </a:ext>
             </a:extLst>
           </p:cNvPr>
@@ -10221,7 +11453,7 @@
           <p:cNvPr id="14" name="">
             <a:extLst xmlns:a="http://schemas.openxmlformats.org/drawingml/2006/main">
               <a:ext uri="{FF2B5EF4-FFF2-40B4-BE49-F238E27FC236}">
-                <a16:creationId xmlns:a16="http://schemas.microsoft.com/office/drawing/2014/main" id="{972183FE-4195-4EE8-A199-0FDA1F2D7192}"/>
+                <a16:creationId xmlns:a16="http://schemas.microsoft.com/office/drawing/2014/main" id="{6078413E-82C7-4F62-BABF-CBC8522963EA}"/>
               </a:ext>
             </a:extLst>
           </p:cNvPr>
@@ -10280,7 +11512,7 @@
           <p:cNvPr id="15" name="">
             <a:extLst xmlns:a="http://schemas.openxmlformats.org/drawingml/2006/main">
               <a:ext uri="{FF2B5EF4-FFF2-40B4-BE49-F238E27FC236}">
-                <a16:creationId xmlns:a16="http://schemas.microsoft.com/office/drawing/2014/main" id="{945D98B9-7096-4715-8D52-661306D72AFC}"/>
+                <a16:creationId xmlns:a16="http://schemas.microsoft.com/office/drawing/2014/main" id="{C3A4F438-BF59-4EDA-995E-EBDF00695EB6}"/>
               </a:ext>
             </a:extLst>
           </p:cNvPr>
@@ -10361,7 +11593,7 @@
           <p:cNvPr id="16" name="">
             <a:extLst xmlns:a="http://schemas.openxmlformats.org/drawingml/2006/main">
               <a:ext uri="{FF2B5EF4-FFF2-40B4-BE49-F238E27FC236}">
-                <a16:creationId xmlns:a16="http://schemas.microsoft.com/office/drawing/2014/main" id="{1566DC30-3D45-4822-88C1-FD00327D33ED}"/>
+                <a16:creationId xmlns:a16="http://schemas.microsoft.com/office/drawing/2014/main" id="{5D776E82-9FC0-4D1E-BA73-444674A109B2}"/>
               </a:ext>
             </a:extLst>
           </p:cNvPr>
@@ -10395,7 +11627,7 @@
           <p:cNvPr id="17" name="">
             <a:extLst xmlns:a="http://schemas.openxmlformats.org/drawingml/2006/main">
               <a:ext uri="{FF2B5EF4-FFF2-40B4-BE49-F238E27FC236}">
-                <a16:creationId xmlns:a16="http://schemas.microsoft.com/office/drawing/2014/main" id="{999F07B0-DCEF-42D5-BA01-77D4CB5D43C4}"/>
+                <a16:creationId xmlns:a16="http://schemas.microsoft.com/office/drawing/2014/main" id="{1D40E711-F17B-44D5-AC80-5324CBB66424}"/>
               </a:ext>
             </a:extLst>
           </p:cNvPr>
@@ -10427,7 +11659,7 @@
           <p:cNvPr id="18" name="">
             <a:extLst xmlns:a="http://schemas.openxmlformats.org/drawingml/2006/main">
               <a:ext uri="{FF2B5EF4-FFF2-40B4-BE49-F238E27FC236}">
-                <a16:creationId xmlns:a16="http://schemas.microsoft.com/office/drawing/2014/main" id="{E3A07146-360B-47D7-8781-D610334F4F0E}"/>
+                <a16:creationId xmlns:a16="http://schemas.microsoft.com/office/drawing/2014/main" id="{C4B0E5FA-A6BA-43D9-B52E-D643294A88D3}"/>
               </a:ext>
             </a:extLst>
           </p:cNvPr>
@@ -10486,7 +11718,7 @@
           <p:cNvPr id="19" name="">
             <a:extLst xmlns:a="http://schemas.openxmlformats.org/drawingml/2006/main">
               <a:ext uri="{FF2B5EF4-FFF2-40B4-BE49-F238E27FC236}">
-                <a16:creationId xmlns:a16="http://schemas.microsoft.com/office/drawing/2014/main" id="{E0D13EFB-FDD9-43C7-B131-A2739152D501}"/>
+                <a16:creationId xmlns:a16="http://schemas.microsoft.com/office/drawing/2014/main" id="{9EFDE054-1E0D-4470-9A81-42ADC04B1A9B}"/>
               </a:ext>
             </a:extLst>
           </p:cNvPr>
@@ -10567,7 +11799,7 @@
           <p:cNvPr id="20" name="">
             <a:extLst xmlns:a="http://schemas.openxmlformats.org/drawingml/2006/main">
               <a:ext uri="{FF2B5EF4-FFF2-40B4-BE49-F238E27FC236}">
-                <a16:creationId xmlns:a16="http://schemas.microsoft.com/office/drawing/2014/main" id="{089B5F53-C6E4-4680-AB70-4DD97BD99750}"/>
+                <a16:creationId xmlns:a16="http://schemas.microsoft.com/office/drawing/2014/main" id="{51B91506-47EC-4B75-992F-08EE6F850802}"/>
               </a:ext>
             </a:extLst>
           </p:cNvPr>
@@ -10601,7 +11833,7 @@
           <p:cNvPr id="21" name="">
             <a:extLst xmlns:a="http://schemas.openxmlformats.org/drawingml/2006/main">
               <a:ext uri="{FF2B5EF4-FFF2-40B4-BE49-F238E27FC236}">
-                <a16:creationId xmlns:a16="http://schemas.microsoft.com/office/drawing/2014/main" id="{C365009C-BBED-462A-983F-11B351703939}"/>
+                <a16:creationId xmlns:a16="http://schemas.microsoft.com/office/drawing/2014/main" id="{7FA02284-F125-4BAF-996E-92EB678BE2CA}"/>
               </a:ext>
             </a:extLst>
           </p:cNvPr>
@@ -10633,7 +11865,7 @@
           <p:cNvPr id="22" name="">
             <a:extLst xmlns:a="http://schemas.openxmlformats.org/drawingml/2006/main">
               <a:ext uri="{FF2B5EF4-FFF2-40B4-BE49-F238E27FC236}">
-                <a16:creationId xmlns:a16="http://schemas.microsoft.com/office/drawing/2014/main" id="{A1CCEB65-AAA8-4611-9071-1B40F6C3C944}"/>
+                <a16:creationId xmlns:a16="http://schemas.microsoft.com/office/drawing/2014/main" id="{CAAFA925-3621-4979-BC4B-4BF2AFA799A4}"/>
               </a:ext>
             </a:extLst>
           </p:cNvPr>
@@ -10692,7 +11924,7 @@
           <p:cNvPr id="23" name="">
             <a:extLst xmlns:a="http://schemas.openxmlformats.org/drawingml/2006/main">
               <a:ext uri="{FF2B5EF4-FFF2-40B4-BE49-F238E27FC236}">
-                <a16:creationId xmlns:a16="http://schemas.microsoft.com/office/drawing/2014/main" id="{3F65FF9E-FB0B-4FB5-B3BA-62ED92FD260B}"/>
+                <a16:creationId xmlns:a16="http://schemas.microsoft.com/office/drawing/2014/main" id="{707B8E94-FE1C-42EB-B399-651AD4592FCF}"/>
               </a:ext>
             </a:extLst>
           </p:cNvPr>
@@ -10773,7 +12005,7 @@
           <p:cNvPr id="24" name="">
             <a:extLst xmlns:a="http://schemas.openxmlformats.org/drawingml/2006/main">
               <a:ext uri="{FF2B5EF4-FFF2-40B4-BE49-F238E27FC236}">
-                <a16:creationId xmlns:a16="http://schemas.microsoft.com/office/drawing/2014/main" id="{EBF49BC5-BA34-4C9F-A400-B517D95E2A98}"/>
+                <a16:creationId xmlns:a16="http://schemas.microsoft.com/office/drawing/2014/main" id="{39DFCF40-1836-4943-81B7-56F8BA59A084}"/>
               </a:ext>
             </a:extLst>
           </p:cNvPr>
@@ -10807,7 +12039,7 @@
           <p:cNvPr id="25" name="">
             <a:extLst xmlns:a="http://schemas.openxmlformats.org/drawingml/2006/main">
               <a:ext uri="{FF2B5EF4-FFF2-40B4-BE49-F238E27FC236}">
-                <a16:creationId xmlns:a16="http://schemas.microsoft.com/office/drawing/2014/main" id="{A9E77E4E-9EE3-4FC5-A6FE-2C688127EEE5}"/>
+                <a16:creationId xmlns:a16="http://schemas.microsoft.com/office/drawing/2014/main" id="{A0906DC1-0567-4BCC-825B-173AB5142E3B}"/>
               </a:ext>
             </a:extLst>
           </p:cNvPr>
@@ -10839,7 +12071,7 @@
           <p:cNvPr id="26" name="">
             <a:extLst xmlns:a="http://schemas.openxmlformats.org/drawingml/2006/main">
               <a:ext uri="{FF2B5EF4-FFF2-40B4-BE49-F238E27FC236}">
-                <a16:creationId xmlns:a16="http://schemas.microsoft.com/office/drawing/2014/main" id="{EA3FDBA8-64EE-400E-A88A-33C8F5072F80}"/>
+                <a16:creationId xmlns:a16="http://schemas.microsoft.com/office/drawing/2014/main" id="{F0ED693D-E20F-414A-B716-8219466ACDB2}"/>
               </a:ext>
             </a:extLst>
           </p:cNvPr>
@@ -10898,7 +12130,7 @@
           <p:cNvPr id="27" name="">
             <a:extLst xmlns:a="http://schemas.openxmlformats.org/drawingml/2006/main">
               <a:ext uri="{FF2B5EF4-FFF2-40B4-BE49-F238E27FC236}">
-                <a16:creationId xmlns:a16="http://schemas.microsoft.com/office/drawing/2014/main" id="{6D3A8BE2-BB64-4E7C-A46E-476B7C1D66F4}"/>
+                <a16:creationId xmlns:a16="http://schemas.microsoft.com/office/drawing/2014/main" id="{F25343AC-CDBA-41F8-8359-9A6DB0ADA784}"/>
               </a:ext>
             </a:extLst>
           </p:cNvPr>
@@ -10979,7 +12211,7 @@
           <p:cNvPr id="28" name="">
             <a:extLst xmlns:a="http://schemas.openxmlformats.org/drawingml/2006/main">
               <a:ext uri="{FF2B5EF4-FFF2-40B4-BE49-F238E27FC236}">
-                <a16:creationId xmlns:a16="http://schemas.microsoft.com/office/drawing/2014/main" id="{E22C82A1-50EA-4EB7-B8F4-B31D3EB82F2C}"/>
+                <a16:creationId xmlns:a16="http://schemas.microsoft.com/office/drawing/2014/main" id="{E60175F8-8D35-4C6D-953F-C041181BA431}"/>
               </a:ext>
             </a:extLst>
           </p:cNvPr>
@@ -11036,7 +12268,7 @@
     </p:spTree>
     <p:extLst>
       <p:ext uri="{BB962C8B-B14F-4D97-AF65-F5344CB8AC3E}">
-        <p14:creationId xmlns:p14="http://schemas.microsoft.com/office/powerpoint/2010/main" val="100563798"/>
+        <p14:creationId xmlns:p14="http://schemas.microsoft.com/office/powerpoint/2010/main" val="1757914542"/>
       </p:ext>
     </p:extLst>
   </p:cSld>
@@ -11067,7 +12299,7 @@
           <p:cNvPr id="1" name="Slide Number Placeholder 5">
             <a:extLst xmlns:a="http://schemas.openxmlformats.org/drawingml/2006/main">
               <a:ext uri="{FF2B5EF4-FFF2-40B4-BE49-F238E27FC236}">
-                <a16:creationId xmlns:a16="http://schemas.microsoft.com/office/drawing/2014/main" id="{78525AE3-55D2-40B0-AF73-4A4A22CB3723}"/>
+                <a16:creationId xmlns:a16="http://schemas.microsoft.com/office/drawing/2014/main" id="{C918E388-860F-4F82-9374-E82070A9017C}"/>
               </a:ext>
             </a:extLst>
           </p:cNvPr>
@@ -11099,7 +12331,7 @@
           <p:cNvPr id="2" name="">
             <a:extLst xmlns:a="http://schemas.openxmlformats.org/drawingml/2006/main">
               <a:ext uri="{FF2B5EF4-FFF2-40B4-BE49-F238E27FC236}">
-                <a16:creationId xmlns:a16="http://schemas.microsoft.com/office/drawing/2014/main" id="{E64DD9C9-4FE2-4D8A-AEB3-46FA2C15DE23}"/>
+                <a16:creationId xmlns:a16="http://schemas.microsoft.com/office/drawing/2014/main" id="{E7140F6E-9526-4F13-8CA1-98DF63DD782B}"/>
               </a:ext>
             </a:extLst>
           </p:cNvPr>
@@ -11131,7 +12363,7 @@
           <p:cNvPr id="3" name="">
             <a:extLst xmlns:a="http://schemas.openxmlformats.org/drawingml/2006/main">
               <a:ext uri="{FF2B5EF4-FFF2-40B4-BE49-F238E27FC236}">
-                <a16:creationId xmlns:a16="http://schemas.microsoft.com/office/drawing/2014/main" id="{B9A35CC3-572B-4C10-B52E-73B16AEB23EA}"/>
+                <a16:creationId xmlns:a16="http://schemas.microsoft.com/office/drawing/2014/main" id="{84657B07-4E7C-4377-9D3C-675964A2D781}"/>
               </a:ext>
             </a:extLst>
           </p:cNvPr>
@@ -11163,7 +12395,7 @@
           <p:cNvPr id="4" name="">
             <a:extLst xmlns:a="http://schemas.openxmlformats.org/drawingml/2006/main">
               <a:ext uri="{FF2B5EF4-FFF2-40B4-BE49-F238E27FC236}">
-                <a16:creationId xmlns:a16="http://schemas.microsoft.com/office/drawing/2014/main" id="{69F9EABE-CC89-4E3F-9A1F-4D7EA852F3A1}"/>
+                <a16:creationId xmlns:a16="http://schemas.microsoft.com/office/drawing/2014/main" id="{AA156511-1139-4402-B566-BBA0C0168E37}"/>
               </a:ext>
             </a:extLst>
           </p:cNvPr>
@@ -11222,7 +12454,7 @@
           <p:cNvPr id="5" name="">
             <a:extLst xmlns:a="http://schemas.openxmlformats.org/drawingml/2006/main">
               <a:ext uri="{FF2B5EF4-FFF2-40B4-BE49-F238E27FC236}">
-                <a16:creationId xmlns:a16="http://schemas.microsoft.com/office/drawing/2014/main" id="{AB13F26E-77E5-4E39-8F90-92810CDC5857}"/>
+                <a16:creationId xmlns:a16="http://schemas.microsoft.com/office/drawing/2014/main" id="{22FBE2ED-59D2-49CE-BB2C-D589F287FC52}"/>
               </a:ext>
             </a:extLst>
           </p:cNvPr>
@@ -11281,7 +12513,7 @@
           <p:cNvPr id="6" name="">
             <a:extLst xmlns:a="http://schemas.openxmlformats.org/drawingml/2006/main">
               <a:ext uri="{FF2B5EF4-FFF2-40B4-BE49-F238E27FC236}">
-                <a16:creationId xmlns:a16="http://schemas.microsoft.com/office/drawing/2014/main" id="{B9645D69-962E-4C55-9A20-00522783922C}"/>
+                <a16:creationId xmlns:a16="http://schemas.microsoft.com/office/drawing/2014/main" id="{3305F031-3379-4003-819A-8D293CC6F350}"/>
               </a:ext>
             </a:extLst>
           </p:cNvPr>
@@ -11340,7 +12572,7 @@
           <p:cNvPr id="7" name="">
             <a:extLst xmlns:a="http://schemas.openxmlformats.org/drawingml/2006/main">
               <a:ext uri="{FF2B5EF4-FFF2-40B4-BE49-F238E27FC236}">
-                <a16:creationId xmlns:a16="http://schemas.microsoft.com/office/drawing/2014/main" id="{A81AC1BF-1128-4A5E-9E90-B779C02E62FB}"/>
+                <a16:creationId xmlns:a16="http://schemas.microsoft.com/office/drawing/2014/main" id="{A0A31ABF-02FB-4E50-8011-18E1871AF25F}"/>
               </a:ext>
             </a:extLst>
           </p:cNvPr>
@@ -11399,7 +12631,7 @@
           <p:cNvPr id="8" name="">
             <a:extLst xmlns:a="http://schemas.openxmlformats.org/drawingml/2006/main">
               <a:ext uri="{FF2B5EF4-FFF2-40B4-BE49-F238E27FC236}">
-                <a16:creationId xmlns:a16="http://schemas.microsoft.com/office/drawing/2014/main" id="{BECE92E8-592E-4892-9F65-7D5198B29E04}"/>
+                <a16:creationId xmlns:a16="http://schemas.microsoft.com/office/drawing/2014/main" id="{66B248F2-3C2A-461C-9835-33394F816029}"/>
               </a:ext>
             </a:extLst>
           </p:cNvPr>
@@ -11433,7 +12665,7 @@
           <p:cNvPr id="9" name="">
             <a:extLst xmlns:a="http://schemas.openxmlformats.org/drawingml/2006/main">
               <a:ext uri="{FF2B5EF4-FFF2-40B4-BE49-F238E27FC236}">
-                <a16:creationId xmlns:a16="http://schemas.microsoft.com/office/drawing/2014/main" id="{81CDE51B-9925-4C5C-BFA3-FC68F10AAA2E}"/>
+                <a16:creationId xmlns:a16="http://schemas.microsoft.com/office/drawing/2014/main" id="{77E607B8-BC15-43DD-B491-30C09FFBA07F}"/>
               </a:ext>
             </a:extLst>
           </p:cNvPr>
@@ -11492,7 +12724,7 @@
           <p:cNvPr id="10" name="">
             <a:extLst xmlns:a="http://schemas.openxmlformats.org/drawingml/2006/main">
               <a:ext uri="{FF2B5EF4-FFF2-40B4-BE49-F238E27FC236}">
-                <a16:creationId xmlns:a16="http://schemas.microsoft.com/office/drawing/2014/main" id="{F81E7A5D-8E51-466A-93CC-F95B9A80BD71}"/>
+                <a16:creationId xmlns:a16="http://schemas.microsoft.com/office/drawing/2014/main" id="{9252EC84-00FD-4510-B7D1-CB649261DC25}"/>
               </a:ext>
             </a:extLst>
           </p:cNvPr>
@@ -11551,7 +12783,7 @@
           <p:cNvPr id="11" name="">
             <a:extLst xmlns:a="http://schemas.openxmlformats.org/drawingml/2006/main">
               <a:ext uri="{FF2B5EF4-FFF2-40B4-BE49-F238E27FC236}">
-                <a16:creationId xmlns:a16="http://schemas.microsoft.com/office/drawing/2014/main" id="{1F0009DE-F435-407C-B141-49D8A4A5F4B0}"/>
+                <a16:creationId xmlns:a16="http://schemas.microsoft.com/office/drawing/2014/main" id="{22BE6172-C092-43C6-B084-E2C8C7DD6BE7}"/>
               </a:ext>
             </a:extLst>
           </p:cNvPr>
@@ -11585,7 +12817,7 @@
           <p:cNvPr id="12" name="">
             <a:extLst xmlns:a="http://schemas.openxmlformats.org/drawingml/2006/main">
               <a:ext uri="{FF2B5EF4-FFF2-40B4-BE49-F238E27FC236}">
-                <a16:creationId xmlns:a16="http://schemas.microsoft.com/office/drawing/2014/main" id="{B283A4B9-5209-465D-9359-E15AB833D73A}"/>
+                <a16:creationId xmlns:a16="http://schemas.microsoft.com/office/drawing/2014/main" id="{B7E8AFDA-6926-4D9E-B19F-750F1AE8565A}"/>
               </a:ext>
             </a:extLst>
           </p:cNvPr>
@@ -11644,7 +12876,7 @@
           <p:cNvPr id="13" name="">
             <a:extLst xmlns:a="http://schemas.openxmlformats.org/drawingml/2006/main">
               <a:ext uri="{FF2B5EF4-FFF2-40B4-BE49-F238E27FC236}">
-                <a16:creationId xmlns:a16="http://schemas.microsoft.com/office/drawing/2014/main" id="{3883CB6E-7435-41BC-BF30-A27EDCDB7EB5}"/>
+                <a16:creationId xmlns:a16="http://schemas.microsoft.com/office/drawing/2014/main" id="{6C1F8ADC-8024-444D-AE26-993ECABFA601}"/>
               </a:ext>
             </a:extLst>
           </p:cNvPr>
@@ -11703,7 +12935,7 @@
           <p:cNvPr id="14" name="">
             <a:extLst xmlns:a="http://schemas.openxmlformats.org/drawingml/2006/main">
               <a:ext uri="{FF2B5EF4-FFF2-40B4-BE49-F238E27FC236}">
-                <a16:creationId xmlns:a16="http://schemas.microsoft.com/office/drawing/2014/main" id="{57FF3D24-2AEF-4BBB-9F6C-176231B73D9C}"/>
+                <a16:creationId xmlns:a16="http://schemas.microsoft.com/office/drawing/2014/main" id="{3435C366-C309-494A-ACD3-B7CEE031707B}"/>
               </a:ext>
             </a:extLst>
           </p:cNvPr>
@@ -11737,7 +12969,7 @@
           <p:cNvPr id="15" name="">
             <a:extLst xmlns:a="http://schemas.openxmlformats.org/drawingml/2006/main">
               <a:ext uri="{FF2B5EF4-FFF2-40B4-BE49-F238E27FC236}">
-                <a16:creationId xmlns:a16="http://schemas.microsoft.com/office/drawing/2014/main" id="{7E123672-4F4B-4ABE-BD79-0204A0D65AB7}"/>
+                <a16:creationId xmlns:a16="http://schemas.microsoft.com/office/drawing/2014/main" id="{C99D6B2B-52E6-4E09-8DC9-F0314CA3D31E}"/>
               </a:ext>
             </a:extLst>
           </p:cNvPr>
@@ -11796,7 +13028,7 @@
           <p:cNvPr id="16" name="">
             <a:extLst xmlns:a="http://schemas.openxmlformats.org/drawingml/2006/main">
               <a:ext uri="{FF2B5EF4-FFF2-40B4-BE49-F238E27FC236}">
-                <a16:creationId xmlns:a16="http://schemas.microsoft.com/office/drawing/2014/main" id="{41B3F764-C6F0-44C6-AC0D-47C28F7448C3}"/>
+                <a16:creationId xmlns:a16="http://schemas.microsoft.com/office/drawing/2014/main" id="{B73C2C03-E857-44E2-A785-828E21D2182C}"/>
               </a:ext>
             </a:extLst>
           </p:cNvPr>
@@ -11855,7 +13087,7 @@
           <p:cNvPr id="17" name="">
             <a:extLst xmlns:a="http://schemas.openxmlformats.org/drawingml/2006/main">
               <a:ext uri="{FF2B5EF4-FFF2-40B4-BE49-F238E27FC236}">
-                <a16:creationId xmlns:a16="http://schemas.microsoft.com/office/drawing/2014/main" id="{78FA450A-9E5D-4882-A548-4BA861B86474}"/>
+                <a16:creationId xmlns:a16="http://schemas.microsoft.com/office/drawing/2014/main" id="{3FB4211F-C355-4882-AE8C-3467F153C24B}"/>
               </a:ext>
             </a:extLst>
           </p:cNvPr>
@@ -11889,7 +13121,7 @@
           <p:cNvPr id="18" name="">
             <a:extLst xmlns:a="http://schemas.openxmlformats.org/drawingml/2006/main">
               <a:ext uri="{FF2B5EF4-FFF2-40B4-BE49-F238E27FC236}">
-                <a16:creationId xmlns:a16="http://schemas.microsoft.com/office/drawing/2014/main" id="{6FF87058-7400-4B46-918B-D3DB52657FB9}"/>
+                <a16:creationId xmlns:a16="http://schemas.microsoft.com/office/drawing/2014/main" id="{E2592E45-4428-4823-AC84-5774DD15186D}"/>
               </a:ext>
             </a:extLst>
           </p:cNvPr>
@@ -11921,7 +13153,7 @@
           <p:cNvPr id="19" name="">
             <a:extLst xmlns:a="http://schemas.openxmlformats.org/drawingml/2006/main">
               <a:ext uri="{FF2B5EF4-FFF2-40B4-BE49-F238E27FC236}">
-                <a16:creationId xmlns:a16="http://schemas.microsoft.com/office/drawing/2014/main" id="{8620F322-D3A8-402B-A456-1CBDF8C1DBCE}"/>
+                <a16:creationId xmlns:a16="http://schemas.microsoft.com/office/drawing/2014/main" id="{2ED5793A-2AEB-4551-9CF3-94307170EB41}"/>
               </a:ext>
             </a:extLst>
           </p:cNvPr>
@@ -11980,7 +13212,7 @@
           <p:cNvPr id="20" name="">
             <a:extLst xmlns:a="http://schemas.openxmlformats.org/drawingml/2006/main">
               <a:ext uri="{FF2B5EF4-FFF2-40B4-BE49-F238E27FC236}">
-                <a16:creationId xmlns:a16="http://schemas.microsoft.com/office/drawing/2014/main" id="{4486C627-EDD6-4CEF-B2CB-6FAEF870DC15}"/>
+                <a16:creationId xmlns:a16="http://schemas.microsoft.com/office/drawing/2014/main" id="{523D2B34-FE4F-4F81-9661-2662974B6B5F}"/>
               </a:ext>
             </a:extLst>
           </p:cNvPr>
@@ -12039,7 +13271,7 @@
           <p:cNvPr id="21" name="">
             <a:extLst xmlns:a="http://schemas.openxmlformats.org/drawingml/2006/main">
               <a:ext uri="{FF2B5EF4-FFF2-40B4-BE49-F238E27FC236}">
-                <a16:creationId xmlns:a16="http://schemas.microsoft.com/office/drawing/2014/main" id="{9A5B1C05-0523-4D17-AF6E-E97E4E3F083A}"/>
+                <a16:creationId xmlns:a16="http://schemas.microsoft.com/office/drawing/2014/main" id="{DB1F2AA9-46A9-4929-8FCA-6842294E7960}"/>
               </a:ext>
             </a:extLst>
           </p:cNvPr>
@@ -12071,7 +13303,7 @@
           <p:cNvPr id="22" name="">
             <a:extLst xmlns:a="http://schemas.openxmlformats.org/drawingml/2006/main">
               <a:ext uri="{FF2B5EF4-FFF2-40B4-BE49-F238E27FC236}">
-                <a16:creationId xmlns:a16="http://schemas.microsoft.com/office/drawing/2014/main" id="{F71EE0AC-A1BB-4706-812B-6E795DD7B9F7}"/>
+                <a16:creationId xmlns:a16="http://schemas.microsoft.com/office/drawing/2014/main" id="{8FFC9512-F06B-4043-917C-A7766479BEDF}"/>
               </a:ext>
             </a:extLst>
           </p:cNvPr>
@@ -12130,7 +13362,7 @@
           <p:cNvPr id="23" name="">
             <a:extLst xmlns:a="http://schemas.openxmlformats.org/drawingml/2006/main">
               <a:ext uri="{FF2B5EF4-FFF2-40B4-BE49-F238E27FC236}">
-                <a16:creationId xmlns:a16="http://schemas.microsoft.com/office/drawing/2014/main" id="{F55A6C59-BDE6-4822-824E-A1523D022B7D}"/>
+                <a16:creationId xmlns:a16="http://schemas.microsoft.com/office/drawing/2014/main" id="{A5DCD1C9-E61E-4F40-8441-3085FFA1339B}"/>
               </a:ext>
             </a:extLst>
           </p:cNvPr>
@@ -12162,7 +13394,7 @@
           <p:cNvPr id="24" name="">
             <a:extLst xmlns:a="http://schemas.openxmlformats.org/drawingml/2006/main">
               <a:ext uri="{FF2B5EF4-FFF2-40B4-BE49-F238E27FC236}">
-                <a16:creationId xmlns:a16="http://schemas.microsoft.com/office/drawing/2014/main" id="{777B98B5-790A-4C91-A59A-3BA7AFD7701E}"/>
+                <a16:creationId xmlns:a16="http://schemas.microsoft.com/office/drawing/2014/main" id="{D0C31153-6B63-4C34-8221-705C4B860E0D}"/>
               </a:ext>
             </a:extLst>
           </p:cNvPr>
@@ -12221,7 +13453,7 @@
           <p:cNvPr id="25" name="">
             <a:extLst xmlns:a="http://schemas.openxmlformats.org/drawingml/2006/main">
               <a:ext uri="{FF2B5EF4-FFF2-40B4-BE49-F238E27FC236}">
-                <a16:creationId xmlns:a16="http://schemas.microsoft.com/office/drawing/2014/main" id="{ADE9C521-ED28-47F4-9B19-E0A9ADBC00B2}"/>
+                <a16:creationId xmlns:a16="http://schemas.microsoft.com/office/drawing/2014/main" id="{E3934C68-5848-4556-AF94-8A72A9219A44}"/>
               </a:ext>
             </a:extLst>
           </p:cNvPr>
@@ -12253,7 +13485,7 @@
           <p:cNvPr id="26" name="">
             <a:extLst xmlns:a="http://schemas.openxmlformats.org/drawingml/2006/main">
               <a:ext uri="{FF2B5EF4-FFF2-40B4-BE49-F238E27FC236}">
-                <a16:creationId xmlns:a16="http://schemas.microsoft.com/office/drawing/2014/main" id="{2A4F60AB-CCA5-4B5B-B68B-4F2BD80E60FF}"/>
+                <a16:creationId xmlns:a16="http://schemas.microsoft.com/office/drawing/2014/main" id="{63EC17C0-EE81-49E3-B089-B2FFFA8B5B52}"/>
               </a:ext>
             </a:extLst>
           </p:cNvPr>
@@ -12310,7 +13542,7 @@
     </p:spTree>
     <p:extLst>
       <p:ext uri="{BB962C8B-B14F-4D97-AF65-F5344CB8AC3E}">
-        <p14:creationId xmlns:p14="http://schemas.microsoft.com/office/powerpoint/2010/main" val="302822005"/>
+        <p14:creationId xmlns:p14="http://schemas.microsoft.com/office/powerpoint/2010/main" val="1170524247"/>
       </p:ext>
     </p:extLst>
   </p:cSld>
@@ -12341,7 +13573,7 @@
           <p:cNvPr id="1" name="Slide Number Placeholder 5">
             <a:extLst xmlns:a="http://schemas.openxmlformats.org/drawingml/2006/main">
               <a:ext uri="{FF2B5EF4-FFF2-40B4-BE49-F238E27FC236}">
-                <a16:creationId xmlns:a16="http://schemas.microsoft.com/office/drawing/2014/main" id="{78525AE3-55D2-40B0-AF73-4A4A22CB3723}"/>
+                <a16:creationId xmlns:a16="http://schemas.microsoft.com/office/drawing/2014/main" id="{C918E388-860F-4F82-9374-E82070A9017C}"/>
               </a:ext>
             </a:extLst>
           </p:cNvPr>
@@ -12373,7 +13605,7 @@
           <p:cNvPr id="2" name="">
             <a:extLst xmlns:a="http://schemas.openxmlformats.org/drawingml/2006/main">
               <a:ext uri="{FF2B5EF4-FFF2-40B4-BE49-F238E27FC236}">
-                <a16:creationId xmlns:a16="http://schemas.microsoft.com/office/drawing/2014/main" id="{68E3A234-E1A1-4E56-B1C3-F592CB1681E2}"/>
+                <a16:creationId xmlns:a16="http://schemas.microsoft.com/office/drawing/2014/main" id="{B9F02034-C997-4B9A-8160-C6F0CDF20131}"/>
               </a:ext>
             </a:extLst>
           </p:cNvPr>
@@ -12405,7 +13637,7 @@
           <p:cNvPr id="3" name="">
             <a:extLst xmlns:a="http://schemas.openxmlformats.org/drawingml/2006/main">
               <a:ext uri="{FF2B5EF4-FFF2-40B4-BE49-F238E27FC236}">
-                <a16:creationId xmlns:a16="http://schemas.microsoft.com/office/drawing/2014/main" id="{8E8CA777-4DE6-430C-90EA-C9F0D6E7192A}"/>
+                <a16:creationId xmlns:a16="http://schemas.microsoft.com/office/drawing/2014/main" id="{568B1FC2-A906-45D7-BCE6-1194F947838F}"/>
               </a:ext>
             </a:extLst>
           </p:cNvPr>
@@ -12437,7 +13669,7 @@
           <p:cNvPr id="4" name="">
             <a:extLst xmlns:a="http://schemas.openxmlformats.org/drawingml/2006/main">
               <a:ext uri="{FF2B5EF4-FFF2-40B4-BE49-F238E27FC236}">
-                <a16:creationId xmlns:a16="http://schemas.microsoft.com/office/drawing/2014/main" id="{3755C535-AC6D-4194-A9AC-4945B940166C}"/>
+                <a16:creationId xmlns:a16="http://schemas.microsoft.com/office/drawing/2014/main" id="{78ACF961-5EF9-4143-8872-AAD23E8E99D7}"/>
               </a:ext>
             </a:extLst>
           </p:cNvPr>
@@ -12496,7 +13728,7 @@
           <p:cNvPr id="5" name="">
             <a:extLst xmlns:a="http://schemas.openxmlformats.org/drawingml/2006/main">
               <a:ext uri="{FF2B5EF4-FFF2-40B4-BE49-F238E27FC236}">
-                <a16:creationId xmlns:a16="http://schemas.microsoft.com/office/drawing/2014/main" id="{7EED066B-DC15-4C0A-8B2B-35E4C2E36F5B}"/>
+                <a16:creationId xmlns:a16="http://schemas.microsoft.com/office/drawing/2014/main" id="{AA3604A0-A667-4AE0-8B9C-251CA47C523A}"/>
               </a:ext>
             </a:extLst>
           </p:cNvPr>
@@ -12555,7 +13787,7 @@
           <p:cNvPr id="6" name="">
             <a:extLst xmlns:a="http://schemas.openxmlformats.org/drawingml/2006/main">
               <a:ext uri="{FF2B5EF4-FFF2-40B4-BE49-F238E27FC236}">
-                <a16:creationId xmlns:a16="http://schemas.microsoft.com/office/drawing/2014/main" id="{F30BAC15-9677-4EF7-BF7F-7E74849FD414}"/>
+                <a16:creationId xmlns:a16="http://schemas.microsoft.com/office/drawing/2014/main" id="{8DFDD6C7-23FB-4E2C-BD33-B9CD6EE734D4}"/>
               </a:ext>
             </a:extLst>
           </p:cNvPr>
@@ -12614,7 +13846,7 @@
           <p:cNvPr id="7" name="">
             <a:extLst xmlns:a="http://schemas.openxmlformats.org/drawingml/2006/main">
               <a:ext uri="{FF2B5EF4-FFF2-40B4-BE49-F238E27FC236}">
-                <a16:creationId xmlns:a16="http://schemas.microsoft.com/office/drawing/2014/main" id="{9991E32E-23F6-4E57-8FF1-E77FDB21F80B}"/>
+                <a16:creationId xmlns:a16="http://schemas.microsoft.com/office/drawing/2014/main" id="{C00C23D1-612D-432C-BE65-25969CC65EDD}"/>
               </a:ext>
             </a:extLst>
           </p:cNvPr>
@@ -12673,7 +13905,7 @@
           <p:cNvPr id="8" name="">
             <a:extLst xmlns:a="http://schemas.openxmlformats.org/drawingml/2006/main">
               <a:ext uri="{FF2B5EF4-FFF2-40B4-BE49-F238E27FC236}">
-                <a16:creationId xmlns:a16="http://schemas.microsoft.com/office/drawing/2014/main" id="{B7C5AFF5-4F90-48EE-AD58-134CE08AF4CF}"/>
+                <a16:creationId xmlns:a16="http://schemas.microsoft.com/office/drawing/2014/main" id="{3B2FB519-7E19-4EE7-8A29-EA4D65B7E7CC}"/>
               </a:ext>
             </a:extLst>
           </p:cNvPr>
@@ -12707,7 +13939,7 @@
           <p:cNvPr id="9" name="">
             <a:extLst xmlns:a="http://schemas.openxmlformats.org/drawingml/2006/main">
               <a:ext uri="{FF2B5EF4-FFF2-40B4-BE49-F238E27FC236}">
-                <a16:creationId xmlns:a16="http://schemas.microsoft.com/office/drawing/2014/main" id="{627BD8B4-BB42-4CB7-90EC-742CD17EE5CC}"/>
+                <a16:creationId xmlns:a16="http://schemas.microsoft.com/office/drawing/2014/main" id="{E8A4C137-71BF-45C8-A75A-2314BD2721D6}"/>
               </a:ext>
             </a:extLst>
           </p:cNvPr>
@@ -12766,7 +13998,7 @@
           <p:cNvPr id="10" name="">
             <a:extLst xmlns:a="http://schemas.openxmlformats.org/drawingml/2006/main">
               <a:ext uri="{FF2B5EF4-FFF2-40B4-BE49-F238E27FC236}">
-                <a16:creationId xmlns:a16="http://schemas.microsoft.com/office/drawing/2014/main" id="{309C2EDE-133E-499A-A6AE-06692FBBCC10}"/>
+                <a16:creationId xmlns:a16="http://schemas.microsoft.com/office/drawing/2014/main" id="{CA71EE0F-DE42-4D1E-801F-3F43CC929081}"/>
               </a:ext>
             </a:extLst>
           </p:cNvPr>
@@ -12825,7 +14057,7 @@
           <p:cNvPr id="11" name="">
             <a:extLst xmlns:a="http://schemas.openxmlformats.org/drawingml/2006/main">
               <a:ext uri="{FF2B5EF4-FFF2-40B4-BE49-F238E27FC236}">
-                <a16:creationId xmlns:a16="http://schemas.microsoft.com/office/drawing/2014/main" id="{E564F1BB-E6ED-4536-8E1A-E3E0ADBD8670}"/>
+                <a16:creationId xmlns:a16="http://schemas.microsoft.com/office/drawing/2014/main" id="{4E00F45A-1186-4FD4-AB55-3AD9B816F7B6}"/>
               </a:ext>
             </a:extLst>
           </p:cNvPr>
@@ -12859,7 +14091,7 @@
           <p:cNvPr id="12" name="">
             <a:extLst xmlns:a="http://schemas.openxmlformats.org/drawingml/2006/main">
               <a:ext uri="{FF2B5EF4-FFF2-40B4-BE49-F238E27FC236}">
-                <a16:creationId xmlns:a16="http://schemas.microsoft.com/office/drawing/2014/main" id="{D7C0634C-48BC-424F-B0CB-FE142DFFAE2F}"/>
+                <a16:creationId xmlns:a16="http://schemas.microsoft.com/office/drawing/2014/main" id="{DC7E21B4-6B94-4C71-B3ED-725A2C0AF1F7}"/>
               </a:ext>
             </a:extLst>
           </p:cNvPr>
@@ -12918,7 +14150,7 @@
           <p:cNvPr id="13" name="">
             <a:extLst xmlns:a="http://schemas.openxmlformats.org/drawingml/2006/main">
               <a:ext uri="{FF2B5EF4-FFF2-40B4-BE49-F238E27FC236}">
-                <a16:creationId xmlns:a16="http://schemas.microsoft.com/office/drawing/2014/main" id="{BED76BDE-C59D-4673-8D5E-F08274134C4F}"/>
+                <a16:creationId xmlns:a16="http://schemas.microsoft.com/office/drawing/2014/main" id="{4BB7CB54-0448-4B48-8EA0-86BE70EB849E}"/>
               </a:ext>
             </a:extLst>
           </p:cNvPr>
@@ -12977,7 +14209,7 @@
           <p:cNvPr id="14" name="">
             <a:extLst xmlns:a="http://schemas.openxmlformats.org/drawingml/2006/main">
               <a:ext uri="{FF2B5EF4-FFF2-40B4-BE49-F238E27FC236}">
-                <a16:creationId xmlns:a16="http://schemas.microsoft.com/office/drawing/2014/main" id="{7D9A23A5-FC0F-40F3-BE79-95E329CE2B10}"/>
+                <a16:creationId xmlns:a16="http://schemas.microsoft.com/office/drawing/2014/main" id="{832BEF68-7DE0-4DC4-AB61-E9DB3FAE74C7}"/>
               </a:ext>
             </a:extLst>
           </p:cNvPr>
@@ -13011,7 +14243,7 @@
           <p:cNvPr id="15" name="">
             <a:extLst xmlns:a="http://schemas.openxmlformats.org/drawingml/2006/main">
               <a:ext uri="{FF2B5EF4-FFF2-40B4-BE49-F238E27FC236}">
-                <a16:creationId xmlns:a16="http://schemas.microsoft.com/office/drawing/2014/main" id="{8BDA34CE-6F3E-4630-8B17-CE3E44F2DD3D}"/>
+                <a16:creationId xmlns:a16="http://schemas.microsoft.com/office/drawing/2014/main" id="{7CC1E9D8-415B-4FDE-AB0F-30C3A375721D}"/>
               </a:ext>
             </a:extLst>
           </p:cNvPr>
@@ -13070,7 +14302,7 @@
           <p:cNvPr id="16" name="">
             <a:extLst xmlns:a="http://schemas.openxmlformats.org/drawingml/2006/main">
               <a:ext uri="{FF2B5EF4-FFF2-40B4-BE49-F238E27FC236}">
-                <a16:creationId xmlns:a16="http://schemas.microsoft.com/office/drawing/2014/main" id="{04B93881-38D2-4AD3-8B57-2DCC41F21EF1}"/>
+                <a16:creationId xmlns:a16="http://schemas.microsoft.com/office/drawing/2014/main" id="{24491527-7BE2-4909-9384-1EDA3F5B9CC2}"/>
               </a:ext>
             </a:extLst>
           </p:cNvPr>
@@ -13129,7 +14361,7 @@
           <p:cNvPr id="17" name="">
             <a:extLst xmlns:a="http://schemas.openxmlformats.org/drawingml/2006/main">
               <a:ext uri="{FF2B5EF4-FFF2-40B4-BE49-F238E27FC236}">
-                <a16:creationId xmlns:a16="http://schemas.microsoft.com/office/drawing/2014/main" id="{F9DF43AC-12A7-4325-AE79-67A546135692}"/>
+                <a16:creationId xmlns:a16="http://schemas.microsoft.com/office/drawing/2014/main" id="{4FA01D01-8EB8-4996-BB63-438B75F05DAB}"/>
               </a:ext>
             </a:extLst>
           </p:cNvPr>
@@ -13163,7 +14395,7 @@
           <p:cNvPr id="18" name="">
             <a:extLst xmlns:a="http://schemas.openxmlformats.org/drawingml/2006/main">
               <a:ext uri="{FF2B5EF4-FFF2-40B4-BE49-F238E27FC236}">
-                <a16:creationId xmlns:a16="http://schemas.microsoft.com/office/drawing/2014/main" id="{9EB751B5-791A-41B8-BB95-E51421ED7E80}"/>
+                <a16:creationId xmlns:a16="http://schemas.microsoft.com/office/drawing/2014/main" id="{47315D78-79F8-4331-9AF1-0F24CC3CF0C1}"/>
               </a:ext>
             </a:extLst>
           </p:cNvPr>
@@ -13222,7 +14454,7 @@
           <p:cNvPr id="19" name="">
             <a:extLst xmlns:a="http://schemas.openxmlformats.org/drawingml/2006/main">
               <a:ext uri="{FF2B5EF4-FFF2-40B4-BE49-F238E27FC236}">
-                <a16:creationId xmlns:a16="http://schemas.microsoft.com/office/drawing/2014/main" id="{2F287CDE-C5B8-44B8-BEE5-FB6F0D2472CA}"/>
+                <a16:creationId xmlns:a16="http://schemas.microsoft.com/office/drawing/2014/main" id="{36C190D9-2483-42C0-8585-B0474F9FC665}"/>
               </a:ext>
             </a:extLst>
           </p:cNvPr>
@@ -13281,7 +14513,7 @@
           <p:cNvPr id="20" name="">
             <a:extLst xmlns:a="http://schemas.openxmlformats.org/drawingml/2006/main">
               <a:ext uri="{FF2B5EF4-FFF2-40B4-BE49-F238E27FC236}">
-                <a16:creationId xmlns:a16="http://schemas.microsoft.com/office/drawing/2014/main" id="{2F6C422D-BE75-467F-9805-B4995EDABF13}"/>
+                <a16:creationId xmlns:a16="http://schemas.microsoft.com/office/drawing/2014/main" id="{36941F30-F814-4366-83A9-7C194404FD55}"/>
               </a:ext>
             </a:extLst>
           </p:cNvPr>
@@ -13315,7 +14547,7 @@
           <p:cNvPr id="21" name="">
             <a:extLst xmlns:a="http://schemas.openxmlformats.org/drawingml/2006/main">
               <a:ext uri="{FF2B5EF4-FFF2-40B4-BE49-F238E27FC236}">
-                <a16:creationId xmlns:a16="http://schemas.microsoft.com/office/drawing/2014/main" id="{E14A58DA-853A-4E17-8039-ED24BE678317}"/>
+                <a16:creationId xmlns:a16="http://schemas.microsoft.com/office/drawing/2014/main" id="{96674694-82EE-4513-863F-A33AE7B0EC8D}"/>
               </a:ext>
             </a:extLst>
           </p:cNvPr>
@@ -13347,7 +14579,7 @@
           <p:cNvPr id="22" name="">
             <a:extLst xmlns:a="http://schemas.openxmlformats.org/drawingml/2006/main">
               <a:ext uri="{FF2B5EF4-FFF2-40B4-BE49-F238E27FC236}">
-                <a16:creationId xmlns:a16="http://schemas.microsoft.com/office/drawing/2014/main" id="{340E8E0D-962E-4EA0-AF3D-2815A763810B}"/>
+                <a16:creationId xmlns:a16="http://schemas.microsoft.com/office/drawing/2014/main" id="{F40713FC-ACB2-4933-BE3F-FA194D065621}"/>
               </a:ext>
             </a:extLst>
           </p:cNvPr>
@@ -13406,7 +14638,7 @@
           <p:cNvPr id="23" name="">
             <a:extLst xmlns:a="http://schemas.openxmlformats.org/drawingml/2006/main">
               <a:ext uri="{FF2B5EF4-FFF2-40B4-BE49-F238E27FC236}">
-                <a16:creationId xmlns:a16="http://schemas.microsoft.com/office/drawing/2014/main" id="{5F53E5E8-E9E3-4E1A-9E3F-BEBBBBB566B8}"/>
+                <a16:creationId xmlns:a16="http://schemas.microsoft.com/office/drawing/2014/main" id="{5F0CEA19-0D7F-4C0B-9D59-2396A43911BF}"/>
               </a:ext>
             </a:extLst>
           </p:cNvPr>
@@ -13465,7 +14697,7 @@
           <p:cNvPr id="24" name="">
             <a:extLst xmlns:a="http://schemas.openxmlformats.org/drawingml/2006/main">
               <a:ext uri="{FF2B5EF4-FFF2-40B4-BE49-F238E27FC236}">
-                <a16:creationId xmlns:a16="http://schemas.microsoft.com/office/drawing/2014/main" id="{201EAB3E-53A1-438C-8264-D2BE8C7489FD}"/>
+                <a16:creationId xmlns:a16="http://schemas.microsoft.com/office/drawing/2014/main" id="{023F6F6F-37AD-4238-977E-9E5C32D1FF8F}"/>
               </a:ext>
             </a:extLst>
           </p:cNvPr>
@@ -13499,7 +14731,7 @@
           <p:cNvPr id="25" name="">
             <a:extLst xmlns:a="http://schemas.openxmlformats.org/drawingml/2006/main">
               <a:ext uri="{FF2B5EF4-FFF2-40B4-BE49-F238E27FC236}">
-                <a16:creationId xmlns:a16="http://schemas.microsoft.com/office/drawing/2014/main" id="{F0E5A8C6-5AFA-48D7-B5EF-4CFA8205439B}"/>
+                <a16:creationId xmlns:a16="http://schemas.microsoft.com/office/drawing/2014/main" id="{D322D812-3137-4FA8-A309-D1AC4EED0C09}"/>
               </a:ext>
             </a:extLst>
           </p:cNvPr>
@@ -13531,7 +14763,7 @@
           <p:cNvPr id="26" name="">
             <a:extLst xmlns:a="http://schemas.openxmlformats.org/drawingml/2006/main">
               <a:ext uri="{FF2B5EF4-FFF2-40B4-BE49-F238E27FC236}">
-                <a16:creationId xmlns:a16="http://schemas.microsoft.com/office/drawing/2014/main" id="{86F6C88B-4929-4CD7-ABE5-AC09FC12E17C}"/>
+                <a16:creationId xmlns:a16="http://schemas.microsoft.com/office/drawing/2014/main" id="{863D0A46-AABF-4249-A6D4-6B55E96F03A4}"/>
               </a:ext>
             </a:extLst>
           </p:cNvPr>
@@ -13590,7 +14822,7 @@
           <p:cNvPr id="27" name="">
             <a:extLst xmlns:a="http://schemas.openxmlformats.org/drawingml/2006/main">
               <a:ext uri="{FF2B5EF4-FFF2-40B4-BE49-F238E27FC236}">
-                <a16:creationId xmlns:a16="http://schemas.microsoft.com/office/drawing/2014/main" id="{75AE2B68-312F-421C-BE37-346037121E42}"/>
+                <a16:creationId xmlns:a16="http://schemas.microsoft.com/office/drawing/2014/main" id="{43CA24F7-C04D-404C-A27F-5E8F71C4EA64}"/>
               </a:ext>
             </a:extLst>
           </p:cNvPr>
@@ -13649,7 +14881,7 @@
           <p:cNvPr id="28" name="">
             <a:extLst xmlns:a="http://schemas.openxmlformats.org/drawingml/2006/main">
               <a:ext uri="{FF2B5EF4-FFF2-40B4-BE49-F238E27FC236}">
-                <a16:creationId xmlns:a16="http://schemas.microsoft.com/office/drawing/2014/main" id="{DB496325-C4E9-42C3-847B-CDA7134FB6EE}"/>
+                <a16:creationId xmlns:a16="http://schemas.microsoft.com/office/drawing/2014/main" id="{981A347E-46D9-48A1-8A9F-BA5C0EFC5165}"/>
               </a:ext>
             </a:extLst>
           </p:cNvPr>
@@ -13683,7 +14915,7 @@
           <p:cNvPr id="29" name="">
             <a:extLst xmlns:a="http://schemas.openxmlformats.org/drawingml/2006/main">
               <a:ext uri="{FF2B5EF4-FFF2-40B4-BE49-F238E27FC236}">
-                <a16:creationId xmlns:a16="http://schemas.microsoft.com/office/drawing/2014/main" id="{00A6C232-2083-43AF-9732-D57EDF6B3879}"/>
+                <a16:creationId xmlns:a16="http://schemas.microsoft.com/office/drawing/2014/main" id="{B34E6167-5427-4D5A-BBB3-B0124EBA3D0C}"/>
               </a:ext>
             </a:extLst>
           </p:cNvPr>
@@ -13715,7 +14947,7 @@
           <p:cNvPr id="30" name="">
             <a:extLst xmlns:a="http://schemas.openxmlformats.org/drawingml/2006/main">
               <a:ext uri="{FF2B5EF4-FFF2-40B4-BE49-F238E27FC236}">
-                <a16:creationId xmlns:a16="http://schemas.microsoft.com/office/drawing/2014/main" id="{D2721551-B11F-478C-9C36-95FAC2542FCB}"/>
+                <a16:creationId xmlns:a16="http://schemas.microsoft.com/office/drawing/2014/main" id="{34035A03-5D19-450F-97C7-72C0881F74BE}"/>
               </a:ext>
             </a:extLst>
           </p:cNvPr>
@@ -13774,7 +15006,7 @@
           <p:cNvPr id="31" name="">
             <a:extLst xmlns:a="http://schemas.openxmlformats.org/drawingml/2006/main">
               <a:ext uri="{FF2B5EF4-FFF2-40B4-BE49-F238E27FC236}">
-                <a16:creationId xmlns:a16="http://schemas.microsoft.com/office/drawing/2014/main" id="{CCE04F10-387A-403D-919F-4BF4E2CD2B97}"/>
+                <a16:creationId xmlns:a16="http://schemas.microsoft.com/office/drawing/2014/main" id="{7FB4E320-8728-4EEF-9E3A-4DB671A9CB76}"/>
               </a:ext>
             </a:extLst>
           </p:cNvPr>
@@ -13833,7 +15065,7 @@
           <p:cNvPr id="32" name="">
             <a:extLst xmlns:a="http://schemas.openxmlformats.org/drawingml/2006/main">
               <a:ext uri="{FF2B5EF4-FFF2-40B4-BE49-F238E27FC236}">
-                <a16:creationId xmlns:a16="http://schemas.microsoft.com/office/drawing/2014/main" id="{0B67FADC-6600-454D-A6EF-98312BE3C41D}"/>
+                <a16:creationId xmlns:a16="http://schemas.microsoft.com/office/drawing/2014/main" id="{67421DF8-9FB8-4518-A1F4-F3588ECF0E72}"/>
               </a:ext>
             </a:extLst>
           </p:cNvPr>
@@ -13867,7 +15099,7 @@
           <p:cNvPr id="33" name="">
             <a:extLst xmlns:a="http://schemas.openxmlformats.org/drawingml/2006/main">
               <a:ext uri="{FF2B5EF4-FFF2-40B4-BE49-F238E27FC236}">
-                <a16:creationId xmlns:a16="http://schemas.microsoft.com/office/drawing/2014/main" id="{E6C3644D-9F89-4FA1-9EF6-4D5C31D4BDAB}"/>
+                <a16:creationId xmlns:a16="http://schemas.microsoft.com/office/drawing/2014/main" id="{3E5960BA-8935-454C-99BA-D093A8DD1529}"/>
               </a:ext>
             </a:extLst>
           </p:cNvPr>
@@ -13899,7 +15131,7 @@
           <p:cNvPr id="34" name="">
             <a:extLst xmlns:a="http://schemas.openxmlformats.org/drawingml/2006/main">
               <a:ext uri="{FF2B5EF4-FFF2-40B4-BE49-F238E27FC236}">
-                <a16:creationId xmlns:a16="http://schemas.microsoft.com/office/drawing/2014/main" id="{6C7C2218-BA41-4BF9-86FD-05FCBB6BC73A}"/>
+                <a16:creationId xmlns:a16="http://schemas.microsoft.com/office/drawing/2014/main" id="{A3403013-5881-43DB-ABB0-61E0A3F16BFD}"/>
               </a:ext>
             </a:extLst>
           </p:cNvPr>
@@ -13958,7 +15190,7 @@
           <p:cNvPr id="35" name="">
             <a:extLst xmlns:a="http://schemas.openxmlformats.org/drawingml/2006/main">
               <a:ext uri="{FF2B5EF4-FFF2-40B4-BE49-F238E27FC236}">
-                <a16:creationId xmlns:a16="http://schemas.microsoft.com/office/drawing/2014/main" id="{71D8AD1A-EC5B-4DA0-A094-80C78F01AC6D}"/>
+                <a16:creationId xmlns:a16="http://schemas.microsoft.com/office/drawing/2014/main" id="{22B927F3-5EA0-4D3C-910C-893A138EB33A}"/>
               </a:ext>
             </a:extLst>
           </p:cNvPr>
@@ -14015,7 +15247,7 @@
     </p:spTree>
     <p:extLst>
       <p:ext uri="{BB962C8B-B14F-4D97-AF65-F5344CB8AC3E}">
-        <p14:creationId xmlns:p14="http://schemas.microsoft.com/office/powerpoint/2010/main" val="1961185733"/>
+        <p14:creationId xmlns:p14="http://schemas.microsoft.com/office/powerpoint/2010/main" val="755092735"/>
       </p:ext>
     </p:extLst>
   </p:cSld>
@@ -14046,7 +15278,7 @@
           <p:cNvPr id="1" name="Slide Number Placeholder 5">
             <a:extLst xmlns:a="http://schemas.openxmlformats.org/drawingml/2006/main">
               <a:ext uri="{FF2B5EF4-FFF2-40B4-BE49-F238E27FC236}">
-                <a16:creationId xmlns:a16="http://schemas.microsoft.com/office/drawing/2014/main" id="{78525AE3-55D2-40B0-AF73-4A4A22CB3723}"/>
+                <a16:creationId xmlns:a16="http://schemas.microsoft.com/office/drawing/2014/main" id="{C918E388-860F-4F82-9374-E82070A9017C}"/>
               </a:ext>
             </a:extLst>
           </p:cNvPr>
@@ -14078,7 +15310,7 @@
           <p:cNvPr id="2" name="">
             <a:extLst xmlns:a="http://schemas.openxmlformats.org/drawingml/2006/main">
               <a:ext uri="{FF2B5EF4-FFF2-40B4-BE49-F238E27FC236}">
-                <a16:creationId xmlns:a16="http://schemas.microsoft.com/office/drawing/2014/main" id="{7763F8E2-4F07-4820-8961-5BC6AD9448B2}"/>
+                <a16:creationId xmlns:a16="http://schemas.microsoft.com/office/drawing/2014/main" id="{5C956266-E4DC-4B00-A783-D5A153E52B8B}"/>
               </a:ext>
             </a:extLst>
           </p:cNvPr>
@@ -14110,7 +15342,7 @@
           <p:cNvPr id="3" name="">
             <a:extLst xmlns:a="http://schemas.openxmlformats.org/drawingml/2006/main">
               <a:ext uri="{FF2B5EF4-FFF2-40B4-BE49-F238E27FC236}">
-                <a16:creationId xmlns:a16="http://schemas.microsoft.com/office/drawing/2014/main" id="{53D23249-FEC3-4625-9A3B-9CA85A4B52BE}"/>
+                <a16:creationId xmlns:a16="http://schemas.microsoft.com/office/drawing/2014/main" id="{61D826B3-6D27-4C48-B936-CAC0F8393655}"/>
               </a:ext>
             </a:extLst>
           </p:cNvPr>
@@ -14142,7 +15374,7 @@
           <p:cNvPr id="4" name="">
             <a:extLst xmlns:a="http://schemas.openxmlformats.org/drawingml/2006/main">
               <a:ext uri="{FF2B5EF4-FFF2-40B4-BE49-F238E27FC236}">
-                <a16:creationId xmlns:a16="http://schemas.microsoft.com/office/drawing/2014/main" id="{C41F2AC0-A0CB-4E01-A539-C28838381EEC}"/>
+                <a16:creationId xmlns:a16="http://schemas.microsoft.com/office/drawing/2014/main" id="{EF0436AA-D37B-4BF8-812D-82EA4C8E2893}"/>
               </a:ext>
             </a:extLst>
           </p:cNvPr>
@@ -14201,7 +15433,7 @@
           <p:cNvPr id="5" name="">
             <a:extLst xmlns:a="http://schemas.openxmlformats.org/drawingml/2006/main">
               <a:ext uri="{FF2B5EF4-FFF2-40B4-BE49-F238E27FC236}">
-                <a16:creationId xmlns:a16="http://schemas.microsoft.com/office/drawing/2014/main" id="{5E163DEB-A7E8-434F-8FC4-ADBBDC9C883C}"/>
+                <a16:creationId xmlns:a16="http://schemas.microsoft.com/office/drawing/2014/main" id="{D1190DDA-140F-4B1A-A6DC-779803A2275C}"/>
               </a:ext>
             </a:extLst>
           </p:cNvPr>
@@ -14260,7 +15492,7 @@
           <p:cNvPr id="6" name="">
             <a:extLst xmlns:a="http://schemas.openxmlformats.org/drawingml/2006/main">
               <a:ext uri="{FF2B5EF4-FFF2-40B4-BE49-F238E27FC236}">
-                <a16:creationId xmlns:a16="http://schemas.microsoft.com/office/drawing/2014/main" id="{D54B2F8F-5A12-48DF-9F34-B47B5EA346B6}"/>
+                <a16:creationId xmlns:a16="http://schemas.microsoft.com/office/drawing/2014/main" id="{2998E823-EC04-4F41-B9BE-273E494B3920}"/>
               </a:ext>
             </a:extLst>
           </p:cNvPr>
@@ -14319,7 +15551,7 @@
           <p:cNvPr id="7" name="">
             <a:extLst xmlns:a="http://schemas.openxmlformats.org/drawingml/2006/main">
               <a:ext uri="{FF2B5EF4-FFF2-40B4-BE49-F238E27FC236}">
-                <a16:creationId xmlns:a16="http://schemas.microsoft.com/office/drawing/2014/main" id="{4AB6DB02-78C5-45C2-B391-1E30362A526A}"/>
+                <a16:creationId xmlns:a16="http://schemas.microsoft.com/office/drawing/2014/main" id="{F5097B06-2D0A-4F95-BFE3-E0A50F983881}"/>
               </a:ext>
             </a:extLst>
           </p:cNvPr>
@@ -14378,7 +15610,7 @@
           <p:cNvPr id="8" name="">
             <a:extLst xmlns:a="http://schemas.openxmlformats.org/drawingml/2006/main">
               <a:ext uri="{FF2B5EF4-FFF2-40B4-BE49-F238E27FC236}">
-                <a16:creationId xmlns:a16="http://schemas.microsoft.com/office/drawing/2014/main" id="{2F0E64D1-5893-4C9C-BFE9-16C7CC4E22F0}"/>
+                <a16:creationId xmlns:a16="http://schemas.microsoft.com/office/drawing/2014/main" id="{065D2385-DAB5-4911-890A-A39F7A008027}"/>
               </a:ext>
             </a:extLst>
           </p:cNvPr>
@@ -14412,7 +15644,7 @@
           <p:cNvPr id="9" name="">
             <a:extLst xmlns:a="http://schemas.openxmlformats.org/drawingml/2006/main">
               <a:ext uri="{FF2B5EF4-FFF2-40B4-BE49-F238E27FC236}">
-                <a16:creationId xmlns:a16="http://schemas.microsoft.com/office/drawing/2014/main" id="{536F3272-9E19-4868-95BC-0B2F2F421785}"/>
+                <a16:creationId xmlns:a16="http://schemas.microsoft.com/office/drawing/2014/main" id="{D03D4AD7-7AE0-40E1-A892-C042A1C349CA}"/>
               </a:ext>
             </a:extLst>
           </p:cNvPr>
@@ -14471,7 +15703,7 @@
           <p:cNvPr id="10" name="">
             <a:extLst xmlns:a="http://schemas.openxmlformats.org/drawingml/2006/main">
               <a:ext uri="{FF2B5EF4-FFF2-40B4-BE49-F238E27FC236}">
-                <a16:creationId xmlns:a16="http://schemas.microsoft.com/office/drawing/2014/main" id="{4B425ABD-32F5-41E8-AB40-6F369313E6B0}"/>
+                <a16:creationId xmlns:a16="http://schemas.microsoft.com/office/drawing/2014/main" id="{86B7AB30-8310-4C23-9035-2DBBD5127C7D}"/>
               </a:ext>
             </a:extLst>
           </p:cNvPr>
@@ -14530,7 +15762,7 @@
           <p:cNvPr id="11" name="">
             <a:extLst xmlns:a="http://schemas.openxmlformats.org/drawingml/2006/main">
               <a:ext uri="{FF2B5EF4-FFF2-40B4-BE49-F238E27FC236}">
-                <a16:creationId xmlns:a16="http://schemas.microsoft.com/office/drawing/2014/main" id="{56EBF56C-0622-4723-9E25-5E14D34EF92D}"/>
+                <a16:creationId xmlns:a16="http://schemas.microsoft.com/office/drawing/2014/main" id="{08E3E7F2-9562-48FD-A44C-1E410A31A370}"/>
               </a:ext>
             </a:extLst>
           </p:cNvPr>
@@ -14564,7 +15796,7 @@
           <p:cNvPr id="12" name="">
             <a:extLst xmlns:a="http://schemas.openxmlformats.org/drawingml/2006/main">
               <a:ext uri="{FF2B5EF4-FFF2-40B4-BE49-F238E27FC236}">
-                <a16:creationId xmlns:a16="http://schemas.microsoft.com/office/drawing/2014/main" id="{CEB56331-C0D8-4A9C-8451-63AEEB83D25F}"/>
+                <a16:creationId xmlns:a16="http://schemas.microsoft.com/office/drawing/2014/main" id="{F0A9E139-7AD4-406E-8298-6C55B89D8C90}"/>
               </a:ext>
             </a:extLst>
           </p:cNvPr>
@@ -14623,7 +15855,7 @@
           <p:cNvPr id="13" name="">
             <a:extLst xmlns:a="http://schemas.openxmlformats.org/drawingml/2006/main">
               <a:ext uri="{FF2B5EF4-FFF2-40B4-BE49-F238E27FC236}">
-                <a16:creationId xmlns:a16="http://schemas.microsoft.com/office/drawing/2014/main" id="{37752B60-EF13-4A79-9200-445EFE41A6F2}"/>
+                <a16:creationId xmlns:a16="http://schemas.microsoft.com/office/drawing/2014/main" id="{3A74CBAF-9EB8-40BC-BA10-0984BA3A70D8}"/>
               </a:ext>
             </a:extLst>
           </p:cNvPr>
@@ -14682,7 +15914,7 @@
           <p:cNvPr id="14" name="">
             <a:extLst xmlns:a="http://schemas.openxmlformats.org/drawingml/2006/main">
               <a:ext uri="{FF2B5EF4-FFF2-40B4-BE49-F238E27FC236}">
-                <a16:creationId xmlns:a16="http://schemas.microsoft.com/office/drawing/2014/main" id="{3AC124C3-374E-4651-BA2F-22CC507915A6}"/>
+                <a16:creationId xmlns:a16="http://schemas.microsoft.com/office/drawing/2014/main" id="{594ADC44-E442-4F3D-9177-CB2F15FF0F39}"/>
               </a:ext>
             </a:extLst>
           </p:cNvPr>
@@ -14716,7 +15948,7 @@
           <p:cNvPr id="15" name="">
             <a:extLst xmlns:a="http://schemas.openxmlformats.org/drawingml/2006/main">
               <a:ext uri="{FF2B5EF4-FFF2-40B4-BE49-F238E27FC236}">
-                <a16:creationId xmlns:a16="http://schemas.microsoft.com/office/drawing/2014/main" id="{A7C03C49-75CA-4B96-8C4B-13424C41E307}"/>
+                <a16:creationId xmlns:a16="http://schemas.microsoft.com/office/drawing/2014/main" id="{FC0559A9-A0D5-4FDB-AE84-D5977157A478}"/>
               </a:ext>
             </a:extLst>
           </p:cNvPr>
@@ -14775,7 +16007,7 @@
           <p:cNvPr id="16" name="">
             <a:extLst xmlns:a="http://schemas.openxmlformats.org/drawingml/2006/main">
               <a:ext uri="{FF2B5EF4-FFF2-40B4-BE49-F238E27FC236}">
-                <a16:creationId xmlns:a16="http://schemas.microsoft.com/office/drawing/2014/main" id="{C1655881-80D5-476E-85C3-BB2C38EB8462}"/>
+                <a16:creationId xmlns:a16="http://schemas.microsoft.com/office/drawing/2014/main" id="{EBF4D341-0B4E-4FA2-BC7B-236B7CB1AF16}"/>
               </a:ext>
             </a:extLst>
           </p:cNvPr>
@@ -14834,7 +16066,7 @@
           <p:cNvPr id="17" name="">
             <a:extLst xmlns:a="http://schemas.openxmlformats.org/drawingml/2006/main">
               <a:ext uri="{FF2B5EF4-FFF2-40B4-BE49-F238E27FC236}">
-                <a16:creationId xmlns:a16="http://schemas.microsoft.com/office/drawing/2014/main" id="{CB6537E1-5BF8-4173-A98C-20E86B79F0C8}"/>
+                <a16:creationId xmlns:a16="http://schemas.microsoft.com/office/drawing/2014/main" id="{D5E728DD-7731-4B9F-8530-26952F0681AD}"/>
               </a:ext>
             </a:extLst>
           </p:cNvPr>
@@ -14868,7 +16100,7 @@
           <p:cNvPr id="18" name="">
             <a:extLst xmlns:a="http://schemas.openxmlformats.org/drawingml/2006/main">
               <a:ext uri="{FF2B5EF4-FFF2-40B4-BE49-F238E27FC236}">
-                <a16:creationId xmlns:a16="http://schemas.microsoft.com/office/drawing/2014/main" id="{1A0F6B01-6C3C-475E-A21D-E2333153EB55}"/>
+                <a16:creationId xmlns:a16="http://schemas.microsoft.com/office/drawing/2014/main" id="{FBE65A64-E8D2-4A51-8F54-1224C48D528B}"/>
               </a:ext>
             </a:extLst>
           </p:cNvPr>
@@ -14900,7 +16132,7 @@
           <p:cNvPr id="19" name="">
             <a:extLst xmlns:a="http://schemas.openxmlformats.org/drawingml/2006/main">
               <a:ext uri="{FF2B5EF4-FFF2-40B4-BE49-F238E27FC236}">
-                <a16:creationId xmlns:a16="http://schemas.microsoft.com/office/drawing/2014/main" id="{ED3BCB32-FB29-4864-BAD2-1695EC061B4F}"/>
+                <a16:creationId xmlns:a16="http://schemas.microsoft.com/office/drawing/2014/main" id="{E1E82B89-96B9-4EC2-A2A4-7B5968B5F56E}"/>
               </a:ext>
             </a:extLst>
           </p:cNvPr>
@@ -14959,7 +16191,7 @@
           <p:cNvPr id="20" name="">
             <a:extLst xmlns:a="http://schemas.openxmlformats.org/drawingml/2006/main">
               <a:ext uri="{FF2B5EF4-FFF2-40B4-BE49-F238E27FC236}">
-                <a16:creationId xmlns:a16="http://schemas.microsoft.com/office/drawing/2014/main" id="{CA1EE90E-3586-49F9-B081-91AD6CCF6D43}"/>
+                <a16:creationId xmlns:a16="http://schemas.microsoft.com/office/drawing/2014/main" id="{30435C52-4915-4216-9987-E1B19304190D}"/>
               </a:ext>
             </a:extLst>
           </p:cNvPr>
@@ -15018,7 +16250,7 @@
           <p:cNvPr id="21" name="">
             <a:extLst xmlns:a="http://schemas.openxmlformats.org/drawingml/2006/main">
               <a:ext uri="{FF2B5EF4-FFF2-40B4-BE49-F238E27FC236}">
-                <a16:creationId xmlns:a16="http://schemas.microsoft.com/office/drawing/2014/main" id="{7AA1DED3-501E-46BA-AF40-931194496055}"/>
+                <a16:creationId xmlns:a16="http://schemas.microsoft.com/office/drawing/2014/main" id="{57A6429E-0D7C-41E2-ACEE-BE83ECB2CBEA}"/>
               </a:ext>
             </a:extLst>
           </p:cNvPr>
@@ -15050,7 +16282,7 @@
           <p:cNvPr id="22" name="">
             <a:extLst xmlns:a="http://schemas.openxmlformats.org/drawingml/2006/main">
               <a:ext uri="{FF2B5EF4-FFF2-40B4-BE49-F238E27FC236}">
-                <a16:creationId xmlns:a16="http://schemas.microsoft.com/office/drawing/2014/main" id="{8C03E731-576C-4E8F-9742-71DC5F41CA95}"/>
+                <a16:creationId xmlns:a16="http://schemas.microsoft.com/office/drawing/2014/main" id="{82CF09D4-003B-49E0-8CE3-72681BF13A05}"/>
               </a:ext>
             </a:extLst>
           </p:cNvPr>
@@ -15109,7 +16341,7 @@
           <p:cNvPr id="23" name="">
             <a:extLst xmlns:a="http://schemas.openxmlformats.org/drawingml/2006/main">
               <a:ext uri="{FF2B5EF4-FFF2-40B4-BE49-F238E27FC236}">
-                <a16:creationId xmlns:a16="http://schemas.microsoft.com/office/drawing/2014/main" id="{85ED45D9-305A-457F-ACCA-61B8A7495DF0}"/>
+                <a16:creationId xmlns:a16="http://schemas.microsoft.com/office/drawing/2014/main" id="{761F51BB-1926-4116-AA67-6B3F6EE9B5F5}"/>
               </a:ext>
             </a:extLst>
           </p:cNvPr>
@@ -15141,7 +16373,7 @@
           <p:cNvPr id="24" name="">
             <a:extLst xmlns:a="http://schemas.openxmlformats.org/drawingml/2006/main">
               <a:ext uri="{FF2B5EF4-FFF2-40B4-BE49-F238E27FC236}">
-                <a16:creationId xmlns:a16="http://schemas.microsoft.com/office/drawing/2014/main" id="{1F0DEAEF-A05D-4BE0-A183-5DB19664F110}"/>
+                <a16:creationId xmlns:a16="http://schemas.microsoft.com/office/drawing/2014/main" id="{D697DDD9-B861-4784-8CC2-7FF943B305BB}"/>
               </a:ext>
             </a:extLst>
           </p:cNvPr>
@@ -15200,7 +16432,7 @@
           <p:cNvPr id="25" name="">
             <a:extLst xmlns:a="http://schemas.openxmlformats.org/drawingml/2006/main">
               <a:ext uri="{FF2B5EF4-FFF2-40B4-BE49-F238E27FC236}">
-                <a16:creationId xmlns:a16="http://schemas.microsoft.com/office/drawing/2014/main" id="{D23226FD-C5CE-468D-9CFC-F2509DAE13BE}"/>
+                <a16:creationId xmlns:a16="http://schemas.microsoft.com/office/drawing/2014/main" id="{3013BC0A-9AD7-482A-BF88-E99C0FC4CE8F}"/>
               </a:ext>
             </a:extLst>
           </p:cNvPr>
@@ -15232,7 +16464,7 @@
           <p:cNvPr id="26" name="">
             <a:extLst xmlns:a="http://schemas.openxmlformats.org/drawingml/2006/main">
               <a:ext uri="{FF2B5EF4-FFF2-40B4-BE49-F238E27FC236}">
-                <a16:creationId xmlns:a16="http://schemas.microsoft.com/office/drawing/2014/main" id="{12A37004-F692-4261-89A3-F8A7AA3EDE1C}"/>
+                <a16:creationId xmlns:a16="http://schemas.microsoft.com/office/drawing/2014/main" id="{08776FD9-9D95-4115-ACF6-91F16CA0F1DE}"/>
               </a:ext>
             </a:extLst>
           </p:cNvPr>
@@ -15291,7 +16523,7 @@
           <p:cNvPr id="27" name="">
             <a:extLst xmlns:a="http://schemas.openxmlformats.org/drawingml/2006/main">
               <a:ext uri="{FF2B5EF4-FFF2-40B4-BE49-F238E27FC236}">
-                <a16:creationId xmlns:a16="http://schemas.microsoft.com/office/drawing/2014/main" id="{EDCF561A-7E57-4FA9-8F39-7240DC08635C}"/>
+                <a16:creationId xmlns:a16="http://schemas.microsoft.com/office/drawing/2014/main" id="{BEBCDAEC-8863-4999-8828-58A78F98D8AC}"/>
               </a:ext>
             </a:extLst>
           </p:cNvPr>
@@ -15323,7 +16555,7 @@
           <p:cNvPr id="28" name="">
             <a:extLst xmlns:a="http://schemas.openxmlformats.org/drawingml/2006/main">
               <a:ext uri="{FF2B5EF4-FFF2-40B4-BE49-F238E27FC236}">
-                <a16:creationId xmlns:a16="http://schemas.microsoft.com/office/drawing/2014/main" id="{ED71C959-5166-4E70-A673-2E9249AB20C5}"/>
+                <a16:creationId xmlns:a16="http://schemas.microsoft.com/office/drawing/2014/main" id="{CA8D4EE0-1BF9-4C7B-900C-6D96C8BFDD9D}"/>
               </a:ext>
             </a:extLst>
           </p:cNvPr>
@@ -15382,7 +16614,7 @@
           <p:cNvPr id="29" name="">
             <a:extLst xmlns:a="http://schemas.openxmlformats.org/drawingml/2006/main">
               <a:ext uri="{FF2B5EF4-FFF2-40B4-BE49-F238E27FC236}">
-                <a16:creationId xmlns:a16="http://schemas.microsoft.com/office/drawing/2014/main" id="{933F5B86-052E-4790-8429-EB75CF7241CD}"/>
+                <a16:creationId xmlns:a16="http://schemas.microsoft.com/office/drawing/2014/main" id="{25841115-EF00-4293-B7F7-C980CA57B660}"/>
               </a:ext>
             </a:extLst>
           </p:cNvPr>
@@ -15416,7 +16648,7 @@
           <p:cNvPr id="30" name="">
             <a:extLst xmlns:a="http://schemas.openxmlformats.org/drawingml/2006/main">
               <a:ext uri="{FF2B5EF4-FFF2-40B4-BE49-F238E27FC236}">
-                <a16:creationId xmlns:a16="http://schemas.microsoft.com/office/drawing/2014/main" id="{A6EF2680-BC8A-44BA-91AD-31BA51D11198}"/>
+                <a16:creationId xmlns:a16="http://schemas.microsoft.com/office/drawing/2014/main" id="{FECF7F1E-CEF7-4A36-90C5-F2992F41B347}"/>
               </a:ext>
             </a:extLst>
           </p:cNvPr>
@@ -15448,7 +16680,7 @@
           <p:cNvPr id="31" name="">
             <a:extLst xmlns:a="http://schemas.openxmlformats.org/drawingml/2006/main">
               <a:ext uri="{FF2B5EF4-FFF2-40B4-BE49-F238E27FC236}">
-                <a16:creationId xmlns:a16="http://schemas.microsoft.com/office/drawing/2014/main" id="{F025F7C6-D0AB-4860-9AC3-ADFA101F35BD}"/>
+                <a16:creationId xmlns:a16="http://schemas.microsoft.com/office/drawing/2014/main" id="{472C89A0-AF4E-4E44-B0C9-F563FE87393E}"/>
               </a:ext>
             </a:extLst>
           </p:cNvPr>
@@ -15507,7 +16739,7 @@
           <p:cNvPr id="32" name="">
             <a:extLst xmlns:a="http://schemas.openxmlformats.org/drawingml/2006/main">
               <a:ext uri="{FF2B5EF4-FFF2-40B4-BE49-F238E27FC236}">
-                <a16:creationId xmlns:a16="http://schemas.microsoft.com/office/drawing/2014/main" id="{9582937C-8EBE-49CC-AB96-3736AE8B1B5D}"/>
+                <a16:creationId xmlns:a16="http://schemas.microsoft.com/office/drawing/2014/main" id="{5219E0F2-4C6F-4C15-9B9E-EDF620AD3FDC}"/>
               </a:ext>
             </a:extLst>
           </p:cNvPr>
@@ -15564,7 +16796,7 @@
     </p:spTree>
     <p:extLst>
       <p:ext uri="{BB962C8B-B14F-4D97-AF65-F5344CB8AC3E}">
-        <p14:creationId xmlns:p14="http://schemas.microsoft.com/office/powerpoint/2010/main" val="578795400"/>
+        <p14:creationId xmlns:p14="http://schemas.microsoft.com/office/powerpoint/2010/main" val="778166156"/>
       </p:ext>
     </p:extLst>
   </p:cSld>
@@ -15595,7 +16827,7 @@
           <p:cNvPr id="1" name="Slide Number Placeholder 5">
             <a:extLst xmlns:a="http://schemas.openxmlformats.org/drawingml/2006/main">
               <a:ext uri="{FF2B5EF4-FFF2-40B4-BE49-F238E27FC236}">
-                <a16:creationId xmlns:a16="http://schemas.microsoft.com/office/drawing/2014/main" id="{78525AE3-55D2-40B0-AF73-4A4A22CB3723}"/>
+                <a16:creationId xmlns:a16="http://schemas.microsoft.com/office/drawing/2014/main" id="{C918E388-860F-4F82-9374-E82070A9017C}"/>
               </a:ext>
             </a:extLst>
           </p:cNvPr>
@@ -15627,7 +16859,7 @@
           <p:cNvPr id="2" name="">
             <a:extLst xmlns:a="http://schemas.openxmlformats.org/drawingml/2006/main">
               <a:ext uri="{FF2B5EF4-FFF2-40B4-BE49-F238E27FC236}">
-                <a16:creationId xmlns:a16="http://schemas.microsoft.com/office/drawing/2014/main" id="{D8BB0367-138B-4EED-96A9-9171B1445094}"/>
+                <a16:creationId xmlns:a16="http://schemas.microsoft.com/office/drawing/2014/main" id="{B9847B51-D244-40B1-A13D-2573C47E3E2A}"/>
               </a:ext>
             </a:extLst>
           </p:cNvPr>
@@ -15659,7 +16891,7 @@
           <p:cNvPr id="3" name="">
             <a:extLst xmlns:a="http://schemas.openxmlformats.org/drawingml/2006/main">
               <a:ext uri="{FF2B5EF4-FFF2-40B4-BE49-F238E27FC236}">
-                <a16:creationId xmlns:a16="http://schemas.microsoft.com/office/drawing/2014/main" id="{70421A81-A9FD-46B8-B825-07BC77A77DD3}"/>
+                <a16:creationId xmlns:a16="http://schemas.microsoft.com/office/drawing/2014/main" id="{D7DDCFBD-5664-463D-BF1A-3F3DB4067053}"/>
               </a:ext>
             </a:extLst>
           </p:cNvPr>
@@ -15691,7 +16923,7 @@
           <p:cNvPr id="4" name="">
             <a:extLst xmlns:a="http://schemas.openxmlformats.org/drawingml/2006/main">
               <a:ext uri="{FF2B5EF4-FFF2-40B4-BE49-F238E27FC236}">
-                <a16:creationId xmlns:a16="http://schemas.microsoft.com/office/drawing/2014/main" id="{295E70A9-1BBC-4100-81FC-D1A4E1863C7B}"/>
+                <a16:creationId xmlns:a16="http://schemas.microsoft.com/office/drawing/2014/main" id="{A23C83CA-4236-4125-AA9C-BCC03D33BB35}"/>
               </a:ext>
             </a:extLst>
           </p:cNvPr>
@@ -15750,7 +16982,7 @@
           <p:cNvPr id="5" name="">
             <a:extLst xmlns:a="http://schemas.openxmlformats.org/drawingml/2006/main">
               <a:ext uri="{FF2B5EF4-FFF2-40B4-BE49-F238E27FC236}">
-                <a16:creationId xmlns:a16="http://schemas.microsoft.com/office/drawing/2014/main" id="{FCC9FE32-E1DE-4E06-B99C-099A8F4D6415}"/>
+                <a16:creationId xmlns:a16="http://schemas.microsoft.com/office/drawing/2014/main" id="{A139D4B9-33E9-461D-9A51-E9F66166393D}"/>
               </a:ext>
             </a:extLst>
           </p:cNvPr>
@@ -15809,7 +17041,7 @@
           <p:cNvPr id="6" name="">
             <a:extLst xmlns:a="http://schemas.openxmlformats.org/drawingml/2006/main">
               <a:ext uri="{FF2B5EF4-FFF2-40B4-BE49-F238E27FC236}">
-                <a16:creationId xmlns:a16="http://schemas.microsoft.com/office/drawing/2014/main" id="{BE71FD98-F3A8-4F9C-93B0-C8DF931DB888}"/>
+                <a16:creationId xmlns:a16="http://schemas.microsoft.com/office/drawing/2014/main" id="{BF2A392F-30EB-41F8-BB19-2C3F13CCB1B4}"/>
               </a:ext>
             </a:extLst>
           </p:cNvPr>
@@ -15868,7 +17100,7 @@
           <p:cNvPr id="7" name="">
             <a:extLst xmlns:a="http://schemas.openxmlformats.org/drawingml/2006/main">
               <a:ext uri="{FF2B5EF4-FFF2-40B4-BE49-F238E27FC236}">
-                <a16:creationId xmlns:a16="http://schemas.microsoft.com/office/drawing/2014/main" id="{82E73D0E-27C8-4F98-96DC-9A6BDEAFD51F}"/>
+                <a16:creationId xmlns:a16="http://schemas.microsoft.com/office/drawing/2014/main" id="{B50AEDD8-342A-4FF6-B256-7B5428B237E8}"/>
               </a:ext>
             </a:extLst>
           </p:cNvPr>
@@ -15927,7 +17159,7 @@
           <p:cNvPr id="8" name="">
             <a:extLst xmlns:a="http://schemas.openxmlformats.org/drawingml/2006/main">
               <a:ext uri="{FF2B5EF4-FFF2-40B4-BE49-F238E27FC236}">
-                <a16:creationId xmlns:a16="http://schemas.microsoft.com/office/drawing/2014/main" id="{CD374C08-E656-4FF7-BA7B-FA9B13CCBCBA}"/>
+                <a16:creationId xmlns:a16="http://schemas.microsoft.com/office/drawing/2014/main" id="{6C25070D-91B3-4BC4-A858-57287DCB5E09}"/>
               </a:ext>
             </a:extLst>
           </p:cNvPr>
@@ -15961,7 +17193,7 @@
           <p:cNvPr id="9" name="">
             <a:extLst xmlns:a="http://schemas.openxmlformats.org/drawingml/2006/main">
               <a:ext uri="{FF2B5EF4-FFF2-40B4-BE49-F238E27FC236}">
-                <a16:creationId xmlns:a16="http://schemas.microsoft.com/office/drawing/2014/main" id="{3CDBACD8-A078-43FE-B3F3-A6602287AFB9}"/>
+                <a16:creationId xmlns:a16="http://schemas.microsoft.com/office/drawing/2014/main" id="{A28652BA-AADB-41FC-A512-D85B1B91969D}"/>
               </a:ext>
             </a:extLst>
           </p:cNvPr>
@@ -15993,7 +17225,7 @@
           <p:cNvPr id="10" name="">
             <a:extLst xmlns:a="http://schemas.openxmlformats.org/drawingml/2006/main">
               <a:ext uri="{FF2B5EF4-FFF2-40B4-BE49-F238E27FC236}">
-                <a16:creationId xmlns:a16="http://schemas.microsoft.com/office/drawing/2014/main" id="{F35738BE-6FD3-4331-BF4A-FDC9E381CD89}"/>
+                <a16:creationId xmlns:a16="http://schemas.microsoft.com/office/drawing/2014/main" id="{198EA6C1-D3A5-4E11-B807-74E588CD063C}"/>
               </a:ext>
             </a:extLst>
           </p:cNvPr>
@@ -16052,7 +17284,7 @@
           <p:cNvPr id="11" name="">
             <a:extLst xmlns:a="http://schemas.openxmlformats.org/drawingml/2006/main">
               <a:ext uri="{FF2B5EF4-FFF2-40B4-BE49-F238E27FC236}">
-                <a16:creationId xmlns:a16="http://schemas.microsoft.com/office/drawing/2014/main" id="{E3988243-50BA-4851-8BD1-CF27DDF3C0AE}"/>
+                <a16:creationId xmlns:a16="http://schemas.microsoft.com/office/drawing/2014/main" id="{531871E9-B46A-4E33-AE0C-9D5387C10EFE}"/>
               </a:ext>
             </a:extLst>
           </p:cNvPr>
@@ -16111,7 +17343,7 @@
           <p:cNvPr id="12" name="">
             <a:extLst xmlns:a="http://schemas.openxmlformats.org/drawingml/2006/main">
               <a:ext uri="{FF2B5EF4-FFF2-40B4-BE49-F238E27FC236}">
-                <a16:creationId xmlns:a16="http://schemas.microsoft.com/office/drawing/2014/main" id="{68F19114-0212-41AC-A211-FBFE54F207D7}"/>
+                <a16:creationId xmlns:a16="http://schemas.microsoft.com/office/drawing/2014/main" id="{B6C503D2-FF87-4491-8CDD-6D00A01DB680}"/>
               </a:ext>
             </a:extLst>
           </p:cNvPr>
@@ -16145,7 +17377,7 @@
           <p:cNvPr id="13" name="">
             <a:extLst xmlns:a="http://schemas.openxmlformats.org/drawingml/2006/main">
               <a:ext uri="{FF2B5EF4-FFF2-40B4-BE49-F238E27FC236}">
-                <a16:creationId xmlns:a16="http://schemas.microsoft.com/office/drawing/2014/main" id="{4A3BB8D8-8B95-4691-9BA9-26D35C415ADF}"/>
+                <a16:creationId xmlns:a16="http://schemas.microsoft.com/office/drawing/2014/main" id="{C9E46E1E-F167-4286-92D0-9B5CCF96E54F}"/>
               </a:ext>
             </a:extLst>
           </p:cNvPr>
@@ -16177,7 +17409,7 @@
           <p:cNvPr id="14" name="">
             <a:extLst xmlns:a="http://schemas.openxmlformats.org/drawingml/2006/main">
               <a:ext uri="{FF2B5EF4-FFF2-40B4-BE49-F238E27FC236}">
-                <a16:creationId xmlns:a16="http://schemas.microsoft.com/office/drawing/2014/main" id="{7DDB97AD-F653-4948-920E-2EFF5047A6F4}"/>
+                <a16:creationId xmlns:a16="http://schemas.microsoft.com/office/drawing/2014/main" id="{7417FF40-B370-41C7-AE62-F74755EB69A8}"/>
               </a:ext>
             </a:extLst>
           </p:cNvPr>
@@ -16236,7 +17468,7 @@
           <p:cNvPr id="15" name="">
             <a:extLst xmlns:a="http://schemas.openxmlformats.org/drawingml/2006/main">
               <a:ext uri="{FF2B5EF4-FFF2-40B4-BE49-F238E27FC236}">
-                <a16:creationId xmlns:a16="http://schemas.microsoft.com/office/drawing/2014/main" id="{1358CBF0-C4A6-48A0-8EE8-C4D2DD0063F3}"/>
+                <a16:creationId xmlns:a16="http://schemas.microsoft.com/office/drawing/2014/main" id="{93FF61AB-6219-407F-86F4-ED9E15A28497}"/>
               </a:ext>
             </a:extLst>
           </p:cNvPr>
@@ -16295,7 +17527,7 @@
           <p:cNvPr id="16" name="">
             <a:extLst xmlns:a="http://schemas.openxmlformats.org/drawingml/2006/main">
               <a:ext uri="{FF2B5EF4-FFF2-40B4-BE49-F238E27FC236}">
-                <a16:creationId xmlns:a16="http://schemas.microsoft.com/office/drawing/2014/main" id="{E3773A32-74DF-443A-8696-727C8ECBC25D}"/>
+                <a16:creationId xmlns:a16="http://schemas.microsoft.com/office/drawing/2014/main" id="{D3A1EF32-A197-49A6-A9F1-82448F003A38}"/>
               </a:ext>
             </a:extLst>
           </p:cNvPr>
@@ -16329,7 +17561,7 @@
           <p:cNvPr id="17" name="">
             <a:extLst xmlns:a="http://schemas.openxmlformats.org/drawingml/2006/main">
               <a:ext uri="{FF2B5EF4-FFF2-40B4-BE49-F238E27FC236}">
-                <a16:creationId xmlns:a16="http://schemas.microsoft.com/office/drawing/2014/main" id="{878AA83B-7901-4A15-9B29-08998E5C086D}"/>
+                <a16:creationId xmlns:a16="http://schemas.microsoft.com/office/drawing/2014/main" id="{6B723541-8096-4BB0-88B4-341B609ACDA7}"/>
               </a:ext>
             </a:extLst>
           </p:cNvPr>
@@ -16361,7 +17593,7 @@
           <p:cNvPr id="18" name="">
             <a:extLst xmlns:a="http://schemas.openxmlformats.org/drawingml/2006/main">
               <a:ext uri="{FF2B5EF4-FFF2-40B4-BE49-F238E27FC236}">
-                <a16:creationId xmlns:a16="http://schemas.microsoft.com/office/drawing/2014/main" id="{22189A5D-5A75-498C-93ED-54734FAC953D}"/>
+                <a16:creationId xmlns:a16="http://schemas.microsoft.com/office/drawing/2014/main" id="{87E0391F-3803-42D6-8038-C18B3CC8413E}"/>
               </a:ext>
             </a:extLst>
           </p:cNvPr>
@@ -16420,7 +17652,7 @@
           <p:cNvPr id="19" name="">
             <a:extLst xmlns:a="http://schemas.openxmlformats.org/drawingml/2006/main">
               <a:ext uri="{FF2B5EF4-FFF2-40B4-BE49-F238E27FC236}">
-                <a16:creationId xmlns:a16="http://schemas.microsoft.com/office/drawing/2014/main" id="{AFBD61DD-FF3B-4F58-8E04-9D181F8D7531}"/>
+                <a16:creationId xmlns:a16="http://schemas.microsoft.com/office/drawing/2014/main" id="{5E24EA4D-A7BC-44A8-A52C-8A283F9ED222}"/>
               </a:ext>
             </a:extLst>
           </p:cNvPr>
@@ -16479,7 +17711,7 @@
           <p:cNvPr id="20" name="">
             <a:extLst xmlns:a="http://schemas.openxmlformats.org/drawingml/2006/main">
               <a:ext uri="{FF2B5EF4-FFF2-40B4-BE49-F238E27FC236}">
-                <a16:creationId xmlns:a16="http://schemas.microsoft.com/office/drawing/2014/main" id="{783AB761-942A-4995-8B11-584515714C67}"/>
+                <a16:creationId xmlns:a16="http://schemas.microsoft.com/office/drawing/2014/main" id="{0463E482-50FB-47E7-9026-D96391118C86}"/>
               </a:ext>
             </a:extLst>
           </p:cNvPr>
@@ -16511,7 +17743,7 @@
           <p:cNvPr id="21" name="">
             <a:extLst xmlns:a="http://schemas.openxmlformats.org/drawingml/2006/main">
               <a:ext uri="{FF2B5EF4-FFF2-40B4-BE49-F238E27FC236}">
-                <a16:creationId xmlns:a16="http://schemas.microsoft.com/office/drawing/2014/main" id="{016CDDB8-89F8-4423-90C6-17AE47934174}"/>
+                <a16:creationId xmlns:a16="http://schemas.microsoft.com/office/drawing/2014/main" id="{EA86320C-CC73-40D6-9C43-EA655494A81E}"/>
               </a:ext>
             </a:extLst>
           </p:cNvPr>
@@ -16570,7 +17802,7 @@
           <p:cNvPr id="22" name="">
             <a:extLst xmlns:a="http://schemas.openxmlformats.org/drawingml/2006/main">
               <a:ext uri="{FF2B5EF4-FFF2-40B4-BE49-F238E27FC236}">
-                <a16:creationId xmlns:a16="http://schemas.microsoft.com/office/drawing/2014/main" id="{1A5891D2-060C-4445-BE09-D1D61667F7CE}"/>
+                <a16:creationId xmlns:a16="http://schemas.microsoft.com/office/drawing/2014/main" id="{4C1B71BC-2AF4-4ABE-A768-B569D64A568A}"/>
               </a:ext>
             </a:extLst>
           </p:cNvPr>
@@ -16602,7 +17834,7 @@
           <p:cNvPr id="23" name="">
             <a:extLst xmlns:a="http://schemas.openxmlformats.org/drawingml/2006/main">
               <a:ext uri="{FF2B5EF4-FFF2-40B4-BE49-F238E27FC236}">
-                <a16:creationId xmlns:a16="http://schemas.microsoft.com/office/drawing/2014/main" id="{B5274652-46EC-4063-8793-80F86C58144E}"/>
+                <a16:creationId xmlns:a16="http://schemas.microsoft.com/office/drawing/2014/main" id="{CD645829-F623-4F5E-9028-4B3F3AB3406F}"/>
               </a:ext>
             </a:extLst>
           </p:cNvPr>
@@ -16661,7 +17893,7 @@
           <p:cNvPr id="24" name="">
             <a:extLst xmlns:a="http://schemas.openxmlformats.org/drawingml/2006/main">
               <a:ext uri="{FF2B5EF4-FFF2-40B4-BE49-F238E27FC236}">
-                <a16:creationId xmlns:a16="http://schemas.microsoft.com/office/drawing/2014/main" id="{51B8B43A-D5B5-4B87-9C8A-87EFA4E63666}"/>
+                <a16:creationId xmlns:a16="http://schemas.microsoft.com/office/drawing/2014/main" id="{0E2A73C7-E4F6-45DB-8D85-3001AE0D111A}"/>
               </a:ext>
             </a:extLst>
           </p:cNvPr>
@@ -16693,7 +17925,7 @@
           <p:cNvPr id="25" name="">
             <a:extLst xmlns:a="http://schemas.openxmlformats.org/drawingml/2006/main">
               <a:ext uri="{FF2B5EF4-FFF2-40B4-BE49-F238E27FC236}">
-                <a16:creationId xmlns:a16="http://schemas.microsoft.com/office/drawing/2014/main" id="{EAAE0507-57E9-4350-B302-4F0B2925A581}"/>
+                <a16:creationId xmlns:a16="http://schemas.microsoft.com/office/drawing/2014/main" id="{262035A1-D76C-450A-A15E-1DB914608768}"/>
               </a:ext>
             </a:extLst>
           </p:cNvPr>
@@ -16752,7 +17984,7 @@
           <p:cNvPr id="26" name="">
             <a:extLst xmlns:a="http://schemas.openxmlformats.org/drawingml/2006/main">
               <a:ext uri="{FF2B5EF4-FFF2-40B4-BE49-F238E27FC236}">
-                <a16:creationId xmlns:a16="http://schemas.microsoft.com/office/drawing/2014/main" id="{6BEB5A03-050E-4BAD-A07D-6051E223D5D6}"/>
+                <a16:creationId xmlns:a16="http://schemas.microsoft.com/office/drawing/2014/main" id="{AB5C19DD-A317-4A91-8526-4BEF6A88FAB1}"/>
               </a:ext>
             </a:extLst>
           </p:cNvPr>
@@ -16784,7 +18016,7 @@
           <p:cNvPr id="27" name="">
             <a:extLst xmlns:a="http://schemas.openxmlformats.org/drawingml/2006/main">
               <a:ext uri="{FF2B5EF4-FFF2-40B4-BE49-F238E27FC236}">
-                <a16:creationId xmlns:a16="http://schemas.microsoft.com/office/drawing/2014/main" id="{B988FF84-28B8-458A-9B3B-655FEF2402EB}"/>
+                <a16:creationId xmlns:a16="http://schemas.microsoft.com/office/drawing/2014/main" id="{664217E1-2F7E-40A5-92A7-3719340AAD18}"/>
               </a:ext>
             </a:extLst>
           </p:cNvPr>
@@ -16841,7 +18073,7 @@
     </p:spTree>
     <p:extLst>
       <p:ext uri="{BB962C8B-B14F-4D97-AF65-F5344CB8AC3E}">
-        <p14:creationId xmlns:p14="http://schemas.microsoft.com/office/powerpoint/2010/main" val="1374530830"/>
+        <p14:creationId xmlns:p14="http://schemas.microsoft.com/office/powerpoint/2010/main" val="1458126250"/>
       </p:ext>
     </p:extLst>
   </p:cSld>
@@ -16872,7 +18104,7 @@
           <p:cNvPr id="1" name="Slide Number Placeholder 5">
             <a:extLst xmlns:a="http://schemas.openxmlformats.org/drawingml/2006/main">
               <a:ext uri="{FF2B5EF4-FFF2-40B4-BE49-F238E27FC236}">
-                <a16:creationId xmlns:a16="http://schemas.microsoft.com/office/drawing/2014/main" id="{78525AE3-55D2-40B0-AF73-4A4A22CB3723}"/>
+                <a16:creationId xmlns:a16="http://schemas.microsoft.com/office/drawing/2014/main" id="{C918E388-860F-4F82-9374-E82070A9017C}"/>
               </a:ext>
             </a:extLst>
           </p:cNvPr>
@@ -16904,7 +18136,7 @@
           <p:cNvPr id="2" name="">
             <a:extLst xmlns:a="http://schemas.openxmlformats.org/drawingml/2006/main">
               <a:ext uri="{FF2B5EF4-FFF2-40B4-BE49-F238E27FC236}">
-                <a16:creationId xmlns:a16="http://schemas.microsoft.com/office/drawing/2014/main" id="{21697B80-CBAA-4C8D-BA7B-1081742AF6D8}"/>
+                <a16:creationId xmlns:a16="http://schemas.microsoft.com/office/drawing/2014/main" id="{8AFCA3B6-FB65-4650-B606-B86F01898537}"/>
               </a:ext>
             </a:extLst>
           </p:cNvPr>
@@ -16936,7 +18168,7 @@
           <p:cNvPr id="3" name="">
             <a:extLst xmlns:a="http://schemas.openxmlformats.org/drawingml/2006/main">
               <a:ext uri="{FF2B5EF4-FFF2-40B4-BE49-F238E27FC236}">
-                <a16:creationId xmlns:a16="http://schemas.microsoft.com/office/drawing/2014/main" id="{4720A2E1-195B-4D90-B6FA-4513C1054C49}"/>
+                <a16:creationId xmlns:a16="http://schemas.microsoft.com/office/drawing/2014/main" id="{10D5DA72-3393-4D86-8025-A8A07715F792}"/>
               </a:ext>
             </a:extLst>
           </p:cNvPr>
@@ -16968,7 +18200,7 @@
           <p:cNvPr id="4" name="">
             <a:extLst xmlns:a="http://schemas.openxmlformats.org/drawingml/2006/main">
               <a:ext uri="{FF2B5EF4-FFF2-40B4-BE49-F238E27FC236}">
-                <a16:creationId xmlns:a16="http://schemas.microsoft.com/office/drawing/2014/main" id="{715941AE-0F3F-4C19-9845-B19D72F83145}"/>
+                <a16:creationId xmlns:a16="http://schemas.microsoft.com/office/drawing/2014/main" id="{CA176927-7799-479D-9585-A51D1360DEE3}"/>
               </a:ext>
             </a:extLst>
           </p:cNvPr>
@@ -17027,7 +18259,7 @@
           <p:cNvPr id="5" name="">
             <a:extLst xmlns:a="http://schemas.openxmlformats.org/drawingml/2006/main">
               <a:ext uri="{FF2B5EF4-FFF2-40B4-BE49-F238E27FC236}">
-                <a16:creationId xmlns:a16="http://schemas.microsoft.com/office/drawing/2014/main" id="{89881EDE-5639-45D5-A2E7-C00863E44833}"/>
+                <a16:creationId xmlns:a16="http://schemas.microsoft.com/office/drawing/2014/main" id="{AB5A12BC-B10C-4042-922B-F0BD89A62A0D}"/>
               </a:ext>
             </a:extLst>
           </p:cNvPr>
@@ -17086,7 +18318,7 @@
           <p:cNvPr id="6" name="">
             <a:extLst xmlns:a="http://schemas.openxmlformats.org/drawingml/2006/main">
               <a:ext uri="{FF2B5EF4-FFF2-40B4-BE49-F238E27FC236}">
-                <a16:creationId xmlns:a16="http://schemas.microsoft.com/office/drawing/2014/main" id="{AB0D8BD8-D0BA-49C0-AD40-7E80DEC46111}"/>
+                <a16:creationId xmlns:a16="http://schemas.microsoft.com/office/drawing/2014/main" id="{7D4D4C88-E2EC-44DD-BE63-DDAD251BEF91}"/>
               </a:ext>
             </a:extLst>
           </p:cNvPr>
@@ -17145,7 +18377,7 @@
           <p:cNvPr id="7" name="">
             <a:extLst xmlns:a="http://schemas.openxmlformats.org/drawingml/2006/main">
               <a:ext uri="{FF2B5EF4-FFF2-40B4-BE49-F238E27FC236}">
-                <a16:creationId xmlns:a16="http://schemas.microsoft.com/office/drawing/2014/main" id="{0DA7D2CB-03E5-499C-BBB1-FD44F76851B2}"/>
+                <a16:creationId xmlns:a16="http://schemas.microsoft.com/office/drawing/2014/main" id="{329072E7-169A-487A-BC89-833CEF4C0169}"/>
               </a:ext>
             </a:extLst>
           </p:cNvPr>
@@ -17204,7 +18436,7 @@
           <p:cNvPr id="8" name="">
             <a:extLst xmlns:a="http://schemas.openxmlformats.org/drawingml/2006/main">
               <a:ext uri="{FF2B5EF4-FFF2-40B4-BE49-F238E27FC236}">
-                <a16:creationId xmlns:a16="http://schemas.microsoft.com/office/drawing/2014/main" id="{85ACCE41-895A-4B26-ABE5-6DD011665632}"/>
+                <a16:creationId xmlns:a16="http://schemas.microsoft.com/office/drawing/2014/main" id="{0E4D876C-8139-4BAD-ABE5-2885747048CA}"/>
               </a:ext>
             </a:extLst>
           </p:cNvPr>
@@ -17238,7 +18470,7 @@
           <p:cNvPr id="9" name="">
             <a:extLst xmlns:a="http://schemas.openxmlformats.org/drawingml/2006/main">
               <a:ext uri="{FF2B5EF4-FFF2-40B4-BE49-F238E27FC236}">
-                <a16:creationId xmlns:a16="http://schemas.microsoft.com/office/drawing/2014/main" id="{75272993-1AB8-4DA0-98F9-ED2AC064713D}"/>
+                <a16:creationId xmlns:a16="http://schemas.microsoft.com/office/drawing/2014/main" id="{B8858647-EC40-4429-9ED6-A158BF841DAD}"/>
               </a:ext>
             </a:extLst>
           </p:cNvPr>
@@ -17270,7 +18502,7 @@
           <p:cNvPr id="10" name="">
             <a:extLst xmlns:a="http://schemas.openxmlformats.org/drawingml/2006/main">
               <a:ext uri="{FF2B5EF4-FFF2-40B4-BE49-F238E27FC236}">
-                <a16:creationId xmlns:a16="http://schemas.microsoft.com/office/drawing/2014/main" id="{F26F4854-853A-4273-B7D7-493A3B914B1A}"/>
+                <a16:creationId xmlns:a16="http://schemas.microsoft.com/office/drawing/2014/main" id="{B10F79B4-ED5B-472D-867E-2B8700918724}"/>
               </a:ext>
             </a:extLst>
           </p:cNvPr>
@@ -17329,7 +18561,7 @@
           <p:cNvPr id="11" name="">
             <a:extLst xmlns:a="http://schemas.openxmlformats.org/drawingml/2006/main">
               <a:ext uri="{FF2B5EF4-FFF2-40B4-BE49-F238E27FC236}">
-                <a16:creationId xmlns:a16="http://schemas.microsoft.com/office/drawing/2014/main" id="{2346A06B-4AF1-453A-AD3A-BFF945CF4FA0}"/>
+                <a16:creationId xmlns:a16="http://schemas.microsoft.com/office/drawing/2014/main" id="{977AFB1A-BD9B-4053-8C4C-99741B814B8B}"/>
               </a:ext>
             </a:extLst>
           </p:cNvPr>
@@ -17388,7 +18620,7 @@
           <p:cNvPr id="12" name="">
             <a:extLst xmlns:a="http://schemas.openxmlformats.org/drawingml/2006/main">
               <a:ext uri="{FF2B5EF4-FFF2-40B4-BE49-F238E27FC236}">
-                <a16:creationId xmlns:a16="http://schemas.microsoft.com/office/drawing/2014/main" id="{43351A90-5906-4B75-9738-D305B1C48E8C}"/>
+                <a16:creationId xmlns:a16="http://schemas.microsoft.com/office/drawing/2014/main" id="{75A2875D-7619-44A1-A860-014725D6BBA4}"/>
               </a:ext>
             </a:extLst>
           </p:cNvPr>
@@ -17422,7 +18654,7 @@
           <p:cNvPr id="13" name="">
             <a:extLst xmlns:a="http://schemas.openxmlformats.org/drawingml/2006/main">
               <a:ext uri="{FF2B5EF4-FFF2-40B4-BE49-F238E27FC236}">
-                <a16:creationId xmlns:a16="http://schemas.microsoft.com/office/drawing/2014/main" id="{ED897249-C938-470E-ADC0-5306A9BC179B}"/>
+                <a16:creationId xmlns:a16="http://schemas.microsoft.com/office/drawing/2014/main" id="{83D7761E-1EBA-4D3F-A7C8-E61C5CADB0C5}"/>
               </a:ext>
             </a:extLst>
           </p:cNvPr>
@@ -17454,7 +18686,7 @@
           <p:cNvPr id="14" name="">
             <a:extLst xmlns:a="http://schemas.openxmlformats.org/drawingml/2006/main">
               <a:ext uri="{FF2B5EF4-FFF2-40B4-BE49-F238E27FC236}">
-                <a16:creationId xmlns:a16="http://schemas.microsoft.com/office/drawing/2014/main" id="{A2A44BCA-21C6-46F2-B8C6-BBC75A62DD30}"/>
+                <a16:creationId xmlns:a16="http://schemas.microsoft.com/office/drawing/2014/main" id="{6CB9E49A-60EA-4E77-8A90-D4CD2B6A4B5B}"/>
               </a:ext>
             </a:extLst>
           </p:cNvPr>
@@ -17513,7 +18745,7 @@
           <p:cNvPr id="15" name="">
             <a:extLst xmlns:a="http://schemas.openxmlformats.org/drawingml/2006/main">
               <a:ext uri="{FF2B5EF4-FFF2-40B4-BE49-F238E27FC236}">
-                <a16:creationId xmlns:a16="http://schemas.microsoft.com/office/drawing/2014/main" id="{DD61B353-F936-45C6-A30D-C7ADE178585E}"/>
+                <a16:creationId xmlns:a16="http://schemas.microsoft.com/office/drawing/2014/main" id="{6E0DCDC1-DDBF-4994-A85B-7D75A669C275}"/>
               </a:ext>
             </a:extLst>
           </p:cNvPr>
@@ -17572,7 +18804,7 @@
           <p:cNvPr id="16" name="">
             <a:extLst xmlns:a="http://schemas.openxmlformats.org/drawingml/2006/main">
               <a:ext uri="{FF2B5EF4-FFF2-40B4-BE49-F238E27FC236}">
-                <a16:creationId xmlns:a16="http://schemas.microsoft.com/office/drawing/2014/main" id="{E6F8274A-86A1-4693-BFF5-19BC04193E4C}"/>
+                <a16:creationId xmlns:a16="http://schemas.microsoft.com/office/drawing/2014/main" id="{7B4DAD96-F5E0-47A3-B494-A49DD682A5D6}"/>
               </a:ext>
             </a:extLst>
           </p:cNvPr>
@@ -17606,7 +18838,7 @@
           <p:cNvPr id="17" name="">
             <a:extLst xmlns:a="http://schemas.openxmlformats.org/drawingml/2006/main">
               <a:ext uri="{FF2B5EF4-FFF2-40B4-BE49-F238E27FC236}">
-                <a16:creationId xmlns:a16="http://schemas.microsoft.com/office/drawing/2014/main" id="{0A170605-C5ED-4E3D-9153-A88ED4B19C22}"/>
+                <a16:creationId xmlns:a16="http://schemas.microsoft.com/office/drawing/2014/main" id="{D13583B5-5999-4159-A112-61BC4B9F6FE8}"/>
               </a:ext>
             </a:extLst>
           </p:cNvPr>
@@ -17638,7 +18870,7 @@
           <p:cNvPr id="18" name="">
             <a:extLst xmlns:a="http://schemas.openxmlformats.org/drawingml/2006/main">
               <a:ext uri="{FF2B5EF4-FFF2-40B4-BE49-F238E27FC236}">
-                <a16:creationId xmlns:a16="http://schemas.microsoft.com/office/drawing/2014/main" id="{9332D120-774B-4463-A96D-E434290E00ED}"/>
+                <a16:creationId xmlns:a16="http://schemas.microsoft.com/office/drawing/2014/main" id="{1332E104-6531-468E-8CE5-1A29F8C7BCE2}"/>
               </a:ext>
             </a:extLst>
           </p:cNvPr>
@@ -17697,7 +18929,7 @@
           <p:cNvPr id="19" name="">
             <a:extLst xmlns:a="http://schemas.openxmlformats.org/drawingml/2006/main">
               <a:ext uri="{FF2B5EF4-FFF2-40B4-BE49-F238E27FC236}">
-                <a16:creationId xmlns:a16="http://schemas.microsoft.com/office/drawing/2014/main" id="{EF85B4B8-24B2-445C-9004-525F43E329BD}"/>
+                <a16:creationId xmlns:a16="http://schemas.microsoft.com/office/drawing/2014/main" id="{92EE3E05-785F-4295-870A-55B4672FDD84}"/>
               </a:ext>
             </a:extLst>
           </p:cNvPr>
@@ -17756,7 +18988,7 @@
           <p:cNvPr id="20" name="">
             <a:extLst xmlns:a="http://schemas.openxmlformats.org/drawingml/2006/main">
               <a:ext uri="{FF2B5EF4-FFF2-40B4-BE49-F238E27FC236}">
-                <a16:creationId xmlns:a16="http://schemas.microsoft.com/office/drawing/2014/main" id="{BEB63931-E9F7-4BCD-8BD5-70ECEEEF8DC7}"/>
+                <a16:creationId xmlns:a16="http://schemas.microsoft.com/office/drawing/2014/main" id="{F99A29B0-EDE5-4578-B076-C6ACFFA276CE}"/>
               </a:ext>
             </a:extLst>
           </p:cNvPr>
@@ -17790,7 +19022,7 @@
           <p:cNvPr id="21" name="">
             <a:extLst xmlns:a="http://schemas.openxmlformats.org/drawingml/2006/main">
               <a:ext uri="{FF2B5EF4-FFF2-40B4-BE49-F238E27FC236}">
-                <a16:creationId xmlns:a16="http://schemas.microsoft.com/office/drawing/2014/main" id="{E44B28C0-2CF0-4709-A232-A6294760D265}"/>
+                <a16:creationId xmlns:a16="http://schemas.microsoft.com/office/drawing/2014/main" id="{28C6E895-55AB-4648-8DF9-773BAB6186F5}"/>
               </a:ext>
             </a:extLst>
           </p:cNvPr>
@@ -17822,7 +19054,7 @@
           <p:cNvPr id="22" name="">
             <a:extLst xmlns:a="http://schemas.openxmlformats.org/drawingml/2006/main">
               <a:ext uri="{FF2B5EF4-FFF2-40B4-BE49-F238E27FC236}">
-                <a16:creationId xmlns:a16="http://schemas.microsoft.com/office/drawing/2014/main" id="{BAF2D62F-E113-45D8-BFA5-F305B340A4EA}"/>
+                <a16:creationId xmlns:a16="http://schemas.microsoft.com/office/drawing/2014/main" id="{E7F5B518-B058-43DB-9310-1FF669A49529}"/>
               </a:ext>
             </a:extLst>
           </p:cNvPr>
@@ -17881,7 +19113,7 @@
           <p:cNvPr id="23" name="">
             <a:extLst xmlns:a="http://schemas.openxmlformats.org/drawingml/2006/main">
               <a:ext uri="{FF2B5EF4-FFF2-40B4-BE49-F238E27FC236}">
-                <a16:creationId xmlns:a16="http://schemas.microsoft.com/office/drawing/2014/main" id="{2C450332-B790-4EFD-BA6B-6D149A7D0D39}"/>
+                <a16:creationId xmlns:a16="http://schemas.microsoft.com/office/drawing/2014/main" id="{7EA516B9-29BF-4487-B66A-B1DA9C6E4D24}"/>
               </a:ext>
             </a:extLst>
           </p:cNvPr>
@@ -17940,7 +19172,7 @@
           <p:cNvPr id="24" name="">
             <a:extLst xmlns:a="http://schemas.openxmlformats.org/drawingml/2006/main">
               <a:ext uri="{FF2B5EF4-FFF2-40B4-BE49-F238E27FC236}">
-                <a16:creationId xmlns:a16="http://schemas.microsoft.com/office/drawing/2014/main" id="{E1B78FAB-6430-4851-B771-04A07813E31F}"/>
+                <a16:creationId xmlns:a16="http://schemas.microsoft.com/office/drawing/2014/main" id="{7AA1D1F5-9794-4452-8913-CBE093508C68}"/>
               </a:ext>
             </a:extLst>
           </p:cNvPr>
@@ -17974,7 +19206,7 @@
           <p:cNvPr id="25" name="">
             <a:extLst xmlns:a="http://schemas.openxmlformats.org/drawingml/2006/main">
               <a:ext uri="{FF2B5EF4-FFF2-40B4-BE49-F238E27FC236}">
-                <a16:creationId xmlns:a16="http://schemas.microsoft.com/office/drawing/2014/main" id="{6D2A8D2D-65A9-4F02-9725-F30ECC6D96F9}"/>
+                <a16:creationId xmlns:a16="http://schemas.microsoft.com/office/drawing/2014/main" id="{C6F2E1A4-9379-4A7F-9B2F-94B4F48A4C3E}"/>
               </a:ext>
             </a:extLst>
           </p:cNvPr>
@@ -18006,7 +19238,7 @@
           <p:cNvPr id="26" name="">
             <a:extLst xmlns:a="http://schemas.openxmlformats.org/drawingml/2006/main">
               <a:ext uri="{FF2B5EF4-FFF2-40B4-BE49-F238E27FC236}">
-                <a16:creationId xmlns:a16="http://schemas.microsoft.com/office/drawing/2014/main" id="{5FD970E3-C12B-4892-B747-C855F1F27936}"/>
+                <a16:creationId xmlns:a16="http://schemas.microsoft.com/office/drawing/2014/main" id="{71C18140-2EC9-4134-B1FB-FD5628E17730}"/>
               </a:ext>
             </a:extLst>
           </p:cNvPr>
@@ -18065,7 +19297,7 @@
           <p:cNvPr id="27" name="">
             <a:extLst xmlns:a="http://schemas.openxmlformats.org/drawingml/2006/main">
               <a:ext uri="{FF2B5EF4-FFF2-40B4-BE49-F238E27FC236}">
-                <a16:creationId xmlns:a16="http://schemas.microsoft.com/office/drawing/2014/main" id="{9A1FE317-5DEF-4858-B2FF-DA828AF71495}"/>
+                <a16:creationId xmlns:a16="http://schemas.microsoft.com/office/drawing/2014/main" id="{AF74DED5-E332-46F7-9597-EE8FF54E8A28}"/>
               </a:ext>
             </a:extLst>
           </p:cNvPr>
@@ -18122,7 +19354,7 @@
     </p:spTree>
     <p:extLst>
       <p:ext uri="{BB962C8B-B14F-4D97-AF65-F5344CB8AC3E}">
-        <p14:creationId xmlns:p14="http://schemas.microsoft.com/office/powerpoint/2010/main" val="1890100997"/>
+        <p14:creationId xmlns:p14="http://schemas.microsoft.com/office/powerpoint/2010/main" val="2136105998"/>
       </p:ext>
     </p:extLst>
   </p:cSld>
@@ -18153,7 +19385,7 @@
           <p:cNvPr id="1" name="Slide Number Placeholder 5">
             <a:extLst xmlns:a="http://schemas.openxmlformats.org/drawingml/2006/main">
               <a:ext uri="{FF2B5EF4-FFF2-40B4-BE49-F238E27FC236}">
-                <a16:creationId xmlns:a16="http://schemas.microsoft.com/office/drawing/2014/main" id="{78525AE3-55D2-40B0-AF73-4A4A22CB3723}"/>
+                <a16:creationId xmlns:a16="http://schemas.microsoft.com/office/drawing/2014/main" id="{C918E388-860F-4F82-9374-E82070A9017C}"/>
               </a:ext>
             </a:extLst>
           </p:cNvPr>
@@ -18185,7 +19417,7 @@
           <p:cNvPr id="2" name="">
             <a:extLst xmlns:a="http://schemas.openxmlformats.org/drawingml/2006/main">
               <a:ext uri="{FF2B5EF4-FFF2-40B4-BE49-F238E27FC236}">
-                <a16:creationId xmlns:a16="http://schemas.microsoft.com/office/drawing/2014/main" id="{9ADAF969-FF00-45BD-8EBB-BE476080B8AC}"/>
+                <a16:creationId xmlns:a16="http://schemas.microsoft.com/office/drawing/2014/main" id="{4F2FC686-EDBF-4E46-AF4D-C8C7E9641757}"/>
               </a:ext>
             </a:extLst>
           </p:cNvPr>
@@ -18217,7 +19449,7 @@
           <p:cNvPr id="3" name="">
             <a:extLst xmlns:a="http://schemas.openxmlformats.org/drawingml/2006/main">
               <a:ext uri="{FF2B5EF4-FFF2-40B4-BE49-F238E27FC236}">
-                <a16:creationId xmlns:a16="http://schemas.microsoft.com/office/drawing/2014/main" id="{C614A304-6604-4A5E-898C-F314407C63EA}"/>
+                <a16:creationId xmlns:a16="http://schemas.microsoft.com/office/drawing/2014/main" id="{AB44BE8D-0E78-4140-845F-4FB8644D3474}"/>
               </a:ext>
             </a:extLst>
           </p:cNvPr>
@@ -18249,7 +19481,7 @@
           <p:cNvPr id="4" name="">
             <a:extLst xmlns:a="http://schemas.openxmlformats.org/drawingml/2006/main">
               <a:ext uri="{FF2B5EF4-FFF2-40B4-BE49-F238E27FC236}">
-                <a16:creationId xmlns:a16="http://schemas.microsoft.com/office/drawing/2014/main" id="{DA0B5798-9A0D-458E-B9D5-7F55AE70E124}"/>
+                <a16:creationId xmlns:a16="http://schemas.microsoft.com/office/drawing/2014/main" id="{DF9F3C14-CEB4-4CD8-8616-638F62ED0B39}"/>
               </a:ext>
             </a:extLst>
           </p:cNvPr>
@@ -18308,7 +19540,7 @@
           <p:cNvPr id="5" name="">
             <a:extLst xmlns:a="http://schemas.openxmlformats.org/drawingml/2006/main">
               <a:ext uri="{FF2B5EF4-FFF2-40B4-BE49-F238E27FC236}">
-                <a16:creationId xmlns:a16="http://schemas.microsoft.com/office/drawing/2014/main" id="{B975A539-6151-4000-B154-41D37340D24D}"/>
+                <a16:creationId xmlns:a16="http://schemas.microsoft.com/office/drawing/2014/main" id="{18EFCB51-FB41-49D5-A5D9-C56C4A41489C}"/>
               </a:ext>
             </a:extLst>
           </p:cNvPr>
@@ -18367,7 +19599,7 @@
           <p:cNvPr id="6" name="">
             <a:extLst xmlns:a="http://schemas.openxmlformats.org/drawingml/2006/main">
               <a:ext uri="{FF2B5EF4-FFF2-40B4-BE49-F238E27FC236}">
-                <a16:creationId xmlns:a16="http://schemas.microsoft.com/office/drawing/2014/main" id="{E6324E18-15BA-44C5-958A-E8D8D6C03DDC}"/>
+                <a16:creationId xmlns:a16="http://schemas.microsoft.com/office/drawing/2014/main" id="{B66FDCB6-9C9D-4225-89EC-3F5BDC5B34B0}"/>
               </a:ext>
             </a:extLst>
           </p:cNvPr>
@@ -18426,7 +19658,7 @@
           <p:cNvPr id="7" name="">
             <a:extLst xmlns:a="http://schemas.openxmlformats.org/drawingml/2006/main">
               <a:ext uri="{FF2B5EF4-FFF2-40B4-BE49-F238E27FC236}">
-                <a16:creationId xmlns:a16="http://schemas.microsoft.com/office/drawing/2014/main" id="{685C954C-BF00-4CE2-AC5A-6759F3D816C7}"/>
+                <a16:creationId xmlns:a16="http://schemas.microsoft.com/office/drawing/2014/main" id="{0FFE2A04-371B-483D-8BF5-AF55C91DBA27}"/>
               </a:ext>
             </a:extLst>
           </p:cNvPr>
@@ -18485,7 +19717,7 @@
           <p:cNvPr id="8" name="">
             <a:extLst xmlns:a="http://schemas.openxmlformats.org/drawingml/2006/main">
               <a:ext uri="{FF2B5EF4-FFF2-40B4-BE49-F238E27FC236}">
-                <a16:creationId xmlns:a16="http://schemas.microsoft.com/office/drawing/2014/main" id="{0F952005-B2F2-4CEB-95DF-47A360276666}"/>
+                <a16:creationId xmlns:a16="http://schemas.microsoft.com/office/drawing/2014/main" id="{023A9199-F338-419D-BA72-4B52BC89C47B}"/>
               </a:ext>
             </a:extLst>
           </p:cNvPr>
@@ -18519,7 +19751,7 @@
           <p:cNvPr id="9" name="">
             <a:extLst xmlns:a="http://schemas.openxmlformats.org/drawingml/2006/main">
               <a:ext uri="{FF2B5EF4-FFF2-40B4-BE49-F238E27FC236}">
-                <a16:creationId xmlns:a16="http://schemas.microsoft.com/office/drawing/2014/main" id="{29DEDAAA-61DF-4C85-848D-9A622BE3F041}"/>
+                <a16:creationId xmlns:a16="http://schemas.microsoft.com/office/drawing/2014/main" id="{364D1BAB-00B8-478A-8C6D-4D7712CC4AEB}"/>
               </a:ext>
             </a:extLst>
           </p:cNvPr>
@@ -18551,7 +19783,7 @@
           <p:cNvPr id="10" name="">
             <a:extLst xmlns:a="http://schemas.openxmlformats.org/drawingml/2006/main">
               <a:ext uri="{FF2B5EF4-FFF2-40B4-BE49-F238E27FC236}">
-                <a16:creationId xmlns:a16="http://schemas.microsoft.com/office/drawing/2014/main" id="{11C4D5F7-6FEB-401E-B532-04528679D521}"/>
+                <a16:creationId xmlns:a16="http://schemas.microsoft.com/office/drawing/2014/main" id="{FC466777-6297-45C6-8114-94F89D21A58B}"/>
               </a:ext>
             </a:extLst>
           </p:cNvPr>
@@ -18610,7 +19842,7 @@
           <p:cNvPr id="11" name="">
             <a:extLst xmlns:a="http://schemas.openxmlformats.org/drawingml/2006/main">
               <a:ext uri="{FF2B5EF4-FFF2-40B4-BE49-F238E27FC236}">
-                <a16:creationId xmlns:a16="http://schemas.microsoft.com/office/drawing/2014/main" id="{3E685602-4AC6-49EF-B99D-53AF6A970C4A}"/>
+                <a16:creationId xmlns:a16="http://schemas.microsoft.com/office/drawing/2014/main" id="{7169CEF6-141D-422F-B3BC-EA6E2EE77ADB}"/>
               </a:ext>
             </a:extLst>
           </p:cNvPr>
@@ -18669,7 +19901,7 @@
           <p:cNvPr id="12" name="">
             <a:extLst xmlns:a="http://schemas.openxmlformats.org/drawingml/2006/main">
               <a:ext uri="{FF2B5EF4-FFF2-40B4-BE49-F238E27FC236}">
-                <a16:creationId xmlns:a16="http://schemas.microsoft.com/office/drawing/2014/main" id="{5706B2EB-D254-4C66-8E63-D1725F9C66CC}"/>
+                <a16:creationId xmlns:a16="http://schemas.microsoft.com/office/drawing/2014/main" id="{506F86FB-6BF5-4CC2-9B07-EC5CE3376BC0}"/>
               </a:ext>
             </a:extLst>
           </p:cNvPr>
@@ -18703,7 +19935,7 @@
           <p:cNvPr id="13" name="">
             <a:extLst xmlns:a="http://schemas.openxmlformats.org/drawingml/2006/main">
               <a:ext uri="{FF2B5EF4-FFF2-40B4-BE49-F238E27FC236}">
-                <a16:creationId xmlns:a16="http://schemas.microsoft.com/office/drawing/2014/main" id="{35C56F05-2A8C-44FE-B135-6B822188B958}"/>
+                <a16:creationId xmlns:a16="http://schemas.microsoft.com/office/drawing/2014/main" id="{AD7AD0F2-A6D6-4CCD-8C85-E39EA6FD70F8}"/>
               </a:ext>
             </a:extLst>
           </p:cNvPr>
@@ -18735,7 +19967,7 @@
           <p:cNvPr id="14" name="">
             <a:extLst xmlns:a="http://schemas.openxmlformats.org/drawingml/2006/main">
               <a:ext uri="{FF2B5EF4-FFF2-40B4-BE49-F238E27FC236}">
-                <a16:creationId xmlns:a16="http://schemas.microsoft.com/office/drawing/2014/main" id="{642F4E1A-DB66-4871-959F-AE9A0E97AA49}"/>
+                <a16:creationId xmlns:a16="http://schemas.microsoft.com/office/drawing/2014/main" id="{A7DEE212-5AF3-4AA8-9AE4-078151216988}"/>
               </a:ext>
             </a:extLst>
           </p:cNvPr>
@@ -18794,7 +20026,7 @@
           <p:cNvPr id="15" name="">
             <a:extLst xmlns:a="http://schemas.openxmlformats.org/drawingml/2006/main">
               <a:ext uri="{FF2B5EF4-FFF2-40B4-BE49-F238E27FC236}">
-                <a16:creationId xmlns:a16="http://schemas.microsoft.com/office/drawing/2014/main" id="{65DD1D0B-40F7-4078-BC32-5A4F1B42A187}"/>
+                <a16:creationId xmlns:a16="http://schemas.microsoft.com/office/drawing/2014/main" id="{D558FD87-5309-4855-B3B9-97A895AAD2EB}"/>
               </a:ext>
             </a:extLst>
           </p:cNvPr>
@@ -18853,7 +20085,7 @@
           <p:cNvPr id="16" name="">
             <a:extLst xmlns:a="http://schemas.openxmlformats.org/drawingml/2006/main">
               <a:ext uri="{FF2B5EF4-FFF2-40B4-BE49-F238E27FC236}">
-                <a16:creationId xmlns:a16="http://schemas.microsoft.com/office/drawing/2014/main" id="{A29B76CD-B09E-459D-A272-65D15A1B17A0}"/>
+                <a16:creationId xmlns:a16="http://schemas.microsoft.com/office/drawing/2014/main" id="{A297BD2F-6248-4432-8019-07CD79DAA5A1}"/>
               </a:ext>
             </a:extLst>
           </p:cNvPr>
@@ -18887,7 +20119,7 @@
           <p:cNvPr id="17" name="">
             <a:extLst xmlns:a="http://schemas.openxmlformats.org/drawingml/2006/main">
               <a:ext uri="{FF2B5EF4-FFF2-40B4-BE49-F238E27FC236}">
-                <a16:creationId xmlns:a16="http://schemas.microsoft.com/office/drawing/2014/main" id="{F54B7957-8D6B-4804-8B0C-4167B7FC94E9}"/>
+                <a16:creationId xmlns:a16="http://schemas.microsoft.com/office/drawing/2014/main" id="{28A5C205-5662-4389-8734-B6A5C1660E19}"/>
               </a:ext>
             </a:extLst>
           </p:cNvPr>
@@ -18919,7 +20151,7 @@
           <p:cNvPr id="18" name="">
             <a:extLst xmlns:a="http://schemas.openxmlformats.org/drawingml/2006/main">
               <a:ext uri="{FF2B5EF4-FFF2-40B4-BE49-F238E27FC236}">
-                <a16:creationId xmlns:a16="http://schemas.microsoft.com/office/drawing/2014/main" id="{AAB219B1-1F70-460D-9188-EE15FEC78861}"/>
+                <a16:creationId xmlns:a16="http://schemas.microsoft.com/office/drawing/2014/main" id="{F5E84140-DE00-42DF-B765-2AB64010D356}"/>
               </a:ext>
             </a:extLst>
           </p:cNvPr>
@@ -18978,7 +20210,7 @@
           <p:cNvPr id="19" name="">
             <a:extLst xmlns:a="http://schemas.openxmlformats.org/drawingml/2006/main">
               <a:ext uri="{FF2B5EF4-FFF2-40B4-BE49-F238E27FC236}">
-                <a16:creationId xmlns:a16="http://schemas.microsoft.com/office/drawing/2014/main" id="{C82A8DC8-14E4-4D63-B3CA-C23F0C305370}"/>
+                <a16:creationId xmlns:a16="http://schemas.microsoft.com/office/drawing/2014/main" id="{AC4AE926-476F-4FDE-A7F2-F173B13180DA}"/>
               </a:ext>
             </a:extLst>
           </p:cNvPr>
@@ -19037,7 +20269,7 @@
           <p:cNvPr id="20" name="">
             <a:extLst xmlns:a="http://schemas.openxmlformats.org/drawingml/2006/main">
               <a:ext uri="{FF2B5EF4-FFF2-40B4-BE49-F238E27FC236}">
-                <a16:creationId xmlns:a16="http://schemas.microsoft.com/office/drawing/2014/main" id="{D24A9C15-B861-4CE2-AF7D-62F5D3CDA197}"/>
+                <a16:creationId xmlns:a16="http://schemas.microsoft.com/office/drawing/2014/main" id="{CFEA6541-9E02-4F49-BBAA-F8032C1D56CA}"/>
               </a:ext>
             </a:extLst>
           </p:cNvPr>
@@ -19069,7 +20301,7 @@
           <p:cNvPr id="21" name="">
             <a:extLst xmlns:a="http://schemas.openxmlformats.org/drawingml/2006/main">
               <a:ext uri="{FF2B5EF4-FFF2-40B4-BE49-F238E27FC236}">
-                <a16:creationId xmlns:a16="http://schemas.microsoft.com/office/drawing/2014/main" id="{8F7C9536-ACA5-4922-853B-A0C42A2F12D2}"/>
+                <a16:creationId xmlns:a16="http://schemas.microsoft.com/office/drawing/2014/main" id="{DD6BA67A-58AF-4AE7-BA3F-17F4AFA35068}"/>
               </a:ext>
             </a:extLst>
           </p:cNvPr>
@@ -19128,7 +20360,7 @@
           <p:cNvPr id="22" name="">
             <a:extLst xmlns:a="http://schemas.openxmlformats.org/drawingml/2006/main">
               <a:ext uri="{FF2B5EF4-FFF2-40B4-BE49-F238E27FC236}">
-                <a16:creationId xmlns:a16="http://schemas.microsoft.com/office/drawing/2014/main" id="{7D0478A8-8B17-47C9-9BE9-B7B65F0112DE}"/>
+                <a16:creationId xmlns:a16="http://schemas.microsoft.com/office/drawing/2014/main" id="{2EF9889E-E218-4D21-9356-8E3DACD639CE}"/>
               </a:ext>
             </a:extLst>
           </p:cNvPr>
@@ -19160,7 +20392,7 @@
           <p:cNvPr id="23" name="">
             <a:extLst xmlns:a="http://schemas.openxmlformats.org/drawingml/2006/main">
               <a:ext uri="{FF2B5EF4-FFF2-40B4-BE49-F238E27FC236}">
-                <a16:creationId xmlns:a16="http://schemas.microsoft.com/office/drawing/2014/main" id="{0E9E7E51-92E2-4A75-9E37-80793E165667}"/>
+                <a16:creationId xmlns:a16="http://schemas.microsoft.com/office/drawing/2014/main" id="{3DF503FA-7C08-4A56-A301-5032F0F36919}"/>
               </a:ext>
             </a:extLst>
           </p:cNvPr>
@@ -19219,7 +20451,7 @@
           <p:cNvPr id="24" name="">
             <a:extLst xmlns:a="http://schemas.openxmlformats.org/drawingml/2006/main">
               <a:ext uri="{FF2B5EF4-FFF2-40B4-BE49-F238E27FC236}">
-                <a16:creationId xmlns:a16="http://schemas.microsoft.com/office/drawing/2014/main" id="{FD276E93-1AC4-499E-B77B-B0F93BDD3875}"/>
+                <a16:creationId xmlns:a16="http://schemas.microsoft.com/office/drawing/2014/main" id="{EF961C6D-6693-4298-9581-2347F9FBEBEB}"/>
               </a:ext>
             </a:extLst>
           </p:cNvPr>
@@ -19251,7 +20483,7 @@
           <p:cNvPr id="25" name="">
             <a:extLst xmlns:a="http://schemas.openxmlformats.org/drawingml/2006/main">
               <a:ext uri="{FF2B5EF4-FFF2-40B4-BE49-F238E27FC236}">
-                <a16:creationId xmlns:a16="http://schemas.microsoft.com/office/drawing/2014/main" id="{CBA08ABB-0E0D-4FE0-9611-E620A470388F}"/>
+                <a16:creationId xmlns:a16="http://schemas.microsoft.com/office/drawing/2014/main" id="{CB5984A1-EF6A-4CDF-AAF4-862A1C54981C}"/>
               </a:ext>
             </a:extLst>
           </p:cNvPr>
@@ -19310,7 +20542,7 @@
           <p:cNvPr id="26" name="">
             <a:extLst xmlns:a="http://schemas.openxmlformats.org/drawingml/2006/main">
               <a:ext uri="{FF2B5EF4-FFF2-40B4-BE49-F238E27FC236}">
-                <a16:creationId xmlns:a16="http://schemas.microsoft.com/office/drawing/2014/main" id="{2674E581-D58A-4065-BA00-8C266FEB8A4F}"/>
+                <a16:creationId xmlns:a16="http://schemas.microsoft.com/office/drawing/2014/main" id="{95FDA8A3-2943-4D00-95FE-20BD2FC058A0}"/>
               </a:ext>
             </a:extLst>
           </p:cNvPr>
@@ -19342,7 +20574,7 @@
           <p:cNvPr id="27" name="">
             <a:extLst xmlns:a="http://schemas.openxmlformats.org/drawingml/2006/main">
               <a:ext uri="{FF2B5EF4-FFF2-40B4-BE49-F238E27FC236}">
-                <a16:creationId xmlns:a16="http://schemas.microsoft.com/office/drawing/2014/main" id="{6CC7A37A-441F-46CD-9292-A1AEF63FE996}"/>
+                <a16:creationId xmlns:a16="http://schemas.microsoft.com/office/drawing/2014/main" id="{0105E4D5-2786-443F-BA63-7A3AFE3C6990}"/>
               </a:ext>
             </a:extLst>
           </p:cNvPr>
@@ -19399,7 +20631,7 @@
     </p:spTree>
     <p:extLst>
       <p:ext uri="{BB962C8B-B14F-4D97-AF65-F5344CB8AC3E}">
-        <p14:creationId xmlns:p14="http://schemas.microsoft.com/office/powerpoint/2010/main" val="1640990592"/>
+        <p14:creationId xmlns:p14="http://schemas.microsoft.com/office/powerpoint/2010/main" val="1919986870"/>
       </p:ext>
     </p:extLst>
   </p:cSld>
@@ -19430,7 +20662,7 @@
           <p:cNvPr id="1" name="Slide Number Placeholder 5">
             <a:extLst xmlns:a="http://schemas.openxmlformats.org/drawingml/2006/main">
               <a:ext uri="{FF2B5EF4-FFF2-40B4-BE49-F238E27FC236}">
-                <a16:creationId xmlns:a16="http://schemas.microsoft.com/office/drawing/2014/main" id="{78525AE3-55D2-40B0-AF73-4A4A22CB3723}"/>
+                <a16:creationId xmlns:a16="http://schemas.microsoft.com/office/drawing/2014/main" id="{C918E388-860F-4F82-9374-E82070A9017C}"/>
               </a:ext>
             </a:extLst>
           </p:cNvPr>
@@ -19462,7 +20694,7 @@
           <p:cNvPr id="2" name="">
             <a:extLst xmlns:a="http://schemas.openxmlformats.org/drawingml/2006/main">
               <a:ext uri="{FF2B5EF4-FFF2-40B4-BE49-F238E27FC236}">
-                <a16:creationId xmlns:a16="http://schemas.microsoft.com/office/drawing/2014/main" id="{189F515B-466F-45B8-9326-415D1552DEF8}"/>
+                <a16:creationId xmlns:a16="http://schemas.microsoft.com/office/drawing/2014/main" id="{CA7E01CD-F8B7-4231-9001-B868D8187C67}"/>
               </a:ext>
             </a:extLst>
           </p:cNvPr>
@@ -19494,7 +20726,7 @@
           <p:cNvPr id="3" name="">
             <a:extLst xmlns:a="http://schemas.openxmlformats.org/drawingml/2006/main">
               <a:ext uri="{FF2B5EF4-FFF2-40B4-BE49-F238E27FC236}">
-                <a16:creationId xmlns:a16="http://schemas.microsoft.com/office/drawing/2014/main" id="{F0A65DDB-F5DC-44B4-866A-08570C1EDB13}"/>
+                <a16:creationId xmlns:a16="http://schemas.microsoft.com/office/drawing/2014/main" id="{14370CD6-D086-4732-A34A-049E2515D5DB}"/>
               </a:ext>
             </a:extLst>
           </p:cNvPr>
@@ -19526,7 +20758,7 @@
           <p:cNvPr id="4" name="">
             <a:extLst xmlns:a="http://schemas.openxmlformats.org/drawingml/2006/main">
               <a:ext uri="{FF2B5EF4-FFF2-40B4-BE49-F238E27FC236}">
-                <a16:creationId xmlns:a16="http://schemas.microsoft.com/office/drawing/2014/main" id="{345DC2E9-7FA3-45E3-80C8-AD9BE0BD2013}"/>
+                <a16:creationId xmlns:a16="http://schemas.microsoft.com/office/drawing/2014/main" id="{D8A72ABD-FAF5-4E05-A515-41E25FCD7BC2}"/>
               </a:ext>
             </a:extLst>
           </p:cNvPr>
@@ -19585,7 +20817,7 @@
           <p:cNvPr id="5" name="">
             <a:extLst xmlns:a="http://schemas.openxmlformats.org/drawingml/2006/main">
               <a:ext uri="{FF2B5EF4-FFF2-40B4-BE49-F238E27FC236}">
-                <a16:creationId xmlns:a16="http://schemas.microsoft.com/office/drawing/2014/main" id="{011F63E0-FAA8-4143-9F94-2B88A7D882C2}"/>
+                <a16:creationId xmlns:a16="http://schemas.microsoft.com/office/drawing/2014/main" id="{46FE4B34-D3EF-4538-A48E-4B61F5176E55}"/>
               </a:ext>
             </a:extLst>
           </p:cNvPr>
@@ -19644,7 +20876,7 @@
           <p:cNvPr id="6" name="">
             <a:extLst xmlns:a="http://schemas.openxmlformats.org/drawingml/2006/main">
               <a:ext uri="{FF2B5EF4-FFF2-40B4-BE49-F238E27FC236}">
-                <a16:creationId xmlns:a16="http://schemas.microsoft.com/office/drawing/2014/main" id="{6AE895CD-8B25-40F5-8314-BDCB0C349B9E}"/>
+                <a16:creationId xmlns:a16="http://schemas.microsoft.com/office/drawing/2014/main" id="{A2E7A5FE-2EB2-45FB-8977-97AF115504B2}"/>
               </a:ext>
             </a:extLst>
           </p:cNvPr>
@@ -19693,7 +20925,7 @@
                   <a:srgbClr val="E8F0EE"/>
                 </a:solidFill>
               </a:rPr>
-              <a:t>NOW: Predict Today at a New Site</a:t>
+              <a:t>NOW Prediction: New Locations, Not Random Rows</a:t>
             </a:r>
           </a:p>
         </p:txBody>
@@ -19703,7 +20935,7 @@
           <p:cNvPr id="7" name="">
             <a:extLst xmlns:a="http://schemas.openxmlformats.org/drawingml/2006/main">
               <a:ext uri="{FF2B5EF4-FFF2-40B4-BE49-F238E27FC236}">
-                <a16:creationId xmlns:a16="http://schemas.microsoft.com/office/drawing/2014/main" id="{15AC313F-73EB-4B81-AF50-7780D2640674}"/>
+                <a16:creationId xmlns:a16="http://schemas.microsoft.com/office/drawing/2014/main" id="{784C7CB2-02B5-4B7D-A90E-F2B6A3B13F29}"/>
               </a:ext>
             </a:extLst>
           </p:cNvPr>
@@ -19752,51 +20984,29 @@
                   <a:srgbClr val="9FB3BE"/>
                 </a:solidFill>
               </a:rPr>
-              <a:t>The honest test hides whole locations, because that is the real deployment problem.</a:t>
-            </a:r>
-          </a:p>
-        </p:txBody>
-      </p:sp>
-      <p:pic>
-        <p:nvPicPr>
-          <p:cNvPr id="8" name=""/>
-          <p:cNvPicPr>
-            <a:picLocks xmlns:a="http://schemas.openxmlformats.org/drawingml/2006/main" noChangeAspect="1"/>
-          </p:cNvPicPr>
-          <p:nvPr/>
-        </p:nvPicPr>
-        <p:blipFill>
-          <a:blip xmlns:r="http://schemas.openxmlformats.org/officeDocument/2006/relationships" xmlns:a="http://schemas.openxmlformats.org/drawingml/2006/main" r:embed="Rb85ef9934a744059"/>
-          <a:stretch xmlns:a="http://schemas.openxmlformats.org/drawingml/2006/main"/>
-        </p:blipFill>
-        <p:spPr>
-          <a:xfrm xmlns:a="http://schemas.openxmlformats.org/drawingml/2006/main">
-            <a:off x="666750" y="2263140"/>
-            <a:ext cx="6000750" cy="2760345"/>
-          </a:xfrm>
-          <a:prstGeom xmlns:a="http://schemas.openxmlformats.org/drawingml/2006/main" prst="rect">
-            <a:avLst/>
-          </a:prstGeom>
-        </p:spPr>
-      </p:pic>
-      <p:sp>
-        <p:nvSpPr>
-          <p:cNvPr id="9" name="">
-            <a:extLst xmlns:a="http://schemas.openxmlformats.org/drawingml/2006/main">
-              <a:ext uri="{FF2B5EF4-FFF2-40B4-BE49-F238E27FC236}">
-                <a16:creationId xmlns:a16="http://schemas.microsoft.com/office/drawing/2014/main" id="{7C432F6E-8C73-47F0-BE2C-1E2B46F91B71}"/>
-              </a:ext>
-            </a:extLst>
-          </p:cNvPr>
-          <p:cNvSpPr>
-            <a:spLocks xmlns:a="http://schemas.openxmlformats.org/drawingml/2006/main" noGrp="1"/>
-          </p:cNvSpPr>
-          <p:nvPr/>
-        </p:nvSpPr>
-        <p:spPr>
-          <a:xfrm xmlns:a="http://schemas.openxmlformats.org/drawingml/2006/main">
-            <a:off x="7143750" y="2095500"/>
-            <a:ext cx="1905000" cy="1028700"/>
+              <a:t>Estimate current PM2.5 where no air-quality sensor exists.</a:t>
+            </a:r>
+          </a:p>
+        </p:txBody>
+      </p:sp>
+      <p:sp>
+        <p:nvSpPr>
+          <p:cNvPr id="8" name="">
+            <a:extLst xmlns:a="http://schemas.openxmlformats.org/drawingml/2006/main">
+              <a:ext uri="{FF2B5EF4-FFF2-40B4-BE49-F238E27FC236}">
+                <a16:creationId xmlns:a16="http://schemas.microsoft.com/office/drawing/2014/main" id="{7A76C8E6-77A5-4590-9255-29749273F1F7}"/>
+              </a:ext>
+            </a:extLst>
+          </p:cNvPr>
+          <p:cNvSpPr>
+            <a:spLocks xmlns:a="http://schemas.openxmlformats.org/drawingml/2006/main" noGrp="1"/>
+          </p:cNvSpPr>
+          <p:nvPr/>
+        </p:nvSpPr>
+        <p:spPr>
+          <a:xfrm xmlns:a="http://schemas.openxmlformats.org/drawingml/2006/main">
+            <a:off x="762000" y="1952625"/>
+            <a:ext cx="3286125" cy="1381125"/>
           </a:xfrm>
           <a:prstGeom xmlns:a="http://schemas.openxmlformats.org/drawingml/2006/main" prst="roundRect">
             <a:avLst>
@@ -19815,22 +21025,54 @@
       </p:sp>
       <p:sp>
         <p:nvSpPr>
+          <p:cNvPr id="9" name="">
+            <a:extLst xmlns:a="http://schemas.openxmlformats.org/drawingml/2006/main">
+              <a:ext uri="{FF2B5EF4-FFF2-40B4-BE49-F238E27FC236}">
+                <a16:creationId xmlns:a16="http://schemas.microsoft.com/office/drawing/2014/main" id="{DC19BDFE-2774-44C1-8D1D-309090AA1EED}"/>
+              </a:ext>
+            </a:extLst>
+          </p:cNvPr>
+          <p:cNvSpPr>
+            <a:spLocks xmlns:a="http://schemas.openxmlformats.org/drawingml/2006/main" noGrp="1"/>
+          </p:cNvSpPr>
+          <p:nvPr/>
+        </p:nvSpPr>
+        <p:spPr>
+          <a:xfrm xmlns:a="http://schemas.openxmlformats.org/drawingml/2006/main">
+            <a:off x="762000" y="1952625"/>
+            <a:ext cx="47625" cy="1381125"/>
+          </a:xfrm>
+          <a:prstGeom xmlns:a="http://schemas.openxmlformats.org/drawingml/2006/main" prst="rect">
+            <a:avLst/>
+          </a:prstGeom>
+          <a:solidFill xmlns:a="http://schemas.openxmlformats.org/drawingml/2006/main">
+            <a:srgbClr val="14A38B"/>
+          </a:solidFill>
+          <a:ln xmlns:a="http://schemas.openxmlformats.org/drawingml/2006/main" w="0">
+            <a:solidFill>
+              <a:srgbClr val="14A38B"/>
+            </a:solidFill>
+          </a:ln>
+        </p:spPr>
+      </p:sp>
+      <p:sp>
+        <p:nvSpPr>
           <p:cNvPr id="10" name="">
             <a:extLst xmlns:a="http://schemas.openxmlformats.org/drawingml/2006/main">
               <a:ext uri="{FF2B5EF4-FFF2-40B4-BE49-F238E27FC236}">
-                <a16:creationId xmlns:a16="http://schemas.microsoft.com/office/drawing/2014/main" id="{DE752974-5986-4949-9979-55E1918922ED}"/>
-              </a:ext>
-            </a:extLst>
-          </p:cNvPr>
-          <p:cNvSpPr>
-            <a:spLocks xmlns:a="http://schemas.openxmlformats.org/drawingml/2006/main" noGrp="1"/>
-          </p:cNvSpPr>
-          <p:nvPr/>
-        </p:nvSpPr>
-        <p:spPr>
-          <a:xfrm xmlns:a="http://schemas.openxmlformats.org/drawingml/2006/main">
-            <a:off x="7258050" y="2238375"/>
-            <a:ext cx="1676400" cy="381000"/>
+                <a16:creationId xmlns:a16="http://schemas.microsoft.com/office/drawing/2014/main" id="{0505D26E-E7E6-482B-A1AE-5C8172263A7A}"/>
+              </a:ext>
+            </a:extLst>
+          </p:cNvPr>
+          <p:cNvSpPr>
+            <a:spLocks xmlns:a="http://schemas.openxmlformats.org/drawingml/2006/main" noGrp="1"/>
+          </p:cNvSpPr>
+          <p:nvPr/>
+        </p:nvSpPr>
+        <p:spPr>
+          <a:xfrm xmlns:a="http://schemas.openxmlformats.org/drawingml/2006/main">
+            <a:off x="971550" y="2085975"/>
+            <a:ext cx="2867025" cy="266700"/>
           </a:xfrm>
           <a:prstGeom xmlns:a="http://schemas.openxmlformats.org/drawingml/2006/main" prst="rect">
             <a:avLst/>
@@ -19854,20 +21096,20 @@
           </a:bodyPr>
           <a:lstStyle xmlns:a="http://schemas.openxmlformats.org/drawingml/2006/main"/>
           <a:p xmlns:a="http://schemas.openxmlformats.org/drawingml/2006/main">
-            <a:pPr algn="ctr">
-              <a:defRPr sz="2175" b="1">
-                <a:solidFill>
-                  <a:srgbClr val="EC5A4C"/>
-                </a:solidFill>
-              </a:defRPr>
-            </a:pPr>
-            <a:r>
-              <a:rPr sz="2175" b="1">
-                <a:solidFill>
-                  <a:srgbClr val="EC5A4C"/>
-                </a:solidFill>
-              </a:rPr>
-              <a:t>~0.32</a:t>
+            <a:pPr algn="l">
+              <a:defRPr sz="1350" b="1">
+                <a:solidFill>
+                  <a:srgbClr val="E8F0EE"/>
+                </a:solidFill>
+              </a:defRPr>
+            </a:pPr>
+            <a:r>
+              <a:rPr sz="1350" b="1">
+                <a:solidFill>
+                  <a:srgbClr val="E8F0EE"/>
+                </a:solidFill>
+              </a:rPr>
+              <a:t>Goal</a:t>
             </a:r>
           </a:p>
         </p:txBody>
@@ -19877,19 +21119,19 @@
           <p:cNvPr id="11" name="">
             <a:extLst xmlns:a="http://schemas.openxmlformats.org/drawingml/2006/main">
               <a:ext uri="{FF2B5EF4-FFF2-40B4-BE49-F238E27FC236}">
-                <a16:creationId xmlns:a16="http://schemas.microsoft.com/office/drawing/2014/main" id="{3C86503B-ADC3-4227-A84A-1A0D11267C5B}"/>
-              </a:ext>
-            </a:extLst>
-          </p:cNvPr>
-          <p:cNvSpPr>
-            <a:spLocks xmlns:a="http://schemas.openxmlformats.org/drawingml/2006/main" noGrp="1"/>
-          </p:cNvSpPr>
-          <p:nvPr/>
-        </p:nvSpPr>
-        <p:spPr>
-          <a:xfrm xmlns:a="http://schemas.openxmlformats.org/drawingml/2006/main">
-            <a:off x="7277100" y="2686050"/>
-            <a:ext cx="1638300" cy="304800"/>
+                <a16:creationId xmlns:a16="http://schemas.microsoft.com/office/drawing/2014/main" id="{08F59243-4A11-4850-98A5-8A14A496FD1F}"/>
+              </a:ext>
+            </a:extLst>
+          </p:cNvPr>
+          <p:cNvSpPr>
+            <a:spLocks xmlns:a="http://schemas.openxmlformats.org/drawingml/2006/main" noGrp="1"/>
+          </p:cNvSpPr>
+          <p:nvPr/>
+        </p:nvSpPr>
+        <p:spPr>
+          <a:xfrm xmlns:a="http://schemas.openxmlformats.org/drawingml/2006/main">
+            <a:off x="971550" y="2409825"/>
+            <a:ext cx="2867025" cy="847725"/>
           </a:xfrm>
           <a:prstGeom xmlns:a="http://schemas.openxmlformats.org/drawingml/2006/main" prst="rect">
             <a:avLst/>
@@ -19913,20 +21155,20 @@
           </a:bodyPr>
           <a:lstStyle xmlns:a="http://schemas.openxmlformats.org/drawingml/2006/main"/>
           <a:p xmlns:a="http://schemas.openxmlformats.org/drawingml/2006/main">
-            <a:pPr algn="ctr">
-              <a:defRPr sz="1050" b="0">
+            <a:pPr algn="l">
+              <a:defRPr sz="1200" b="0">
                 <a:solidFill>
                   <a:srgbClr val="9FB3BE"/>
                 </a:solidFill>
               </a:defRPr>
             </a:pPr>
             <a:r>
-              <a:rPr sz="1050" b="0">
+              <a:rPr sz="1200" b="0">
                 <a:solidFill>
                   <a:srgbClr val="9FB3BE"/>
                 </a:solidFill>
               </a:rPr>
-              <a:t>blind new-site R²</a:t>
+              <a:t>Predict today’s PM2.5 pollution level at a location without a sensor.</a:t>
             </a:r>
           </a:p>
         </p:txBody>
@@ -19936,19 +21178,19 @@
           <p:cNvPr id="12" name="">
             <a:extLst xmlns:a="http://schemas.openxmlformats.org/drawingml/2006/main">
               <a:ext uri="{FF2B5EF4-FFF2-40B4-BE49-F238E27FC236}">
-                <a16:creationId xmlns:a16="http://schemas.microsoft.com/office/drawing/2014/main" id="{DEC828F2-8EB1-4913-A9FC-0AA211331488}"/>
-              </a:ext>
-            </a:extLst>
-          </p:cNvPr>
-          <p:cNvSpPr>
-            <a:spLocks xmlns:a="http://schemas.openxmlformats.org/drawingml/2006/main" noGrp="1"/>
-          </p:cNvSpPr>
-          <p:nvPr/>
-        </p:nvSpPr>
-        <p:spPr>
-          <a:xfrm xmlns:a="http://schemas.openxmlformats.org/drawingml/2006/main">
-            <a:off x="9334500" y="2095500"/>
-            <a:ext cx="1905000" cy="1028700"/>
+                <a16:creationId xmlns:a16="http://schemas.microsoft.com/office/drawing/2014/main" id="{A8B193CE-B690-4517-9CFF-44D7FBB769D0}"/>
+              </a:ext>
+            </a:extLst>
+          </p:cNvPr>
+          <p:cNvSpPr>
+            <a:spLocks xmlns:a="http://schemas.openxmlformats.org/drawingml/2006/main" noGrp="1"/>
+          </p:cNvSpPr>
+          <p:nvPr/>
+        </p:nvSpPr>
+        <p:spPr>
+          <a:xfrm xmlns:a="http://schemas.openxmlformats.org/drawingml/2006/main">
+            <a:off x="4429125" y="1952625"/>
+            <a:ext cx="3286125" cy="1381125"/>
           </a:xfrm>
           <a:prstGeom xmlns:a="http://schemas.openxmlformats.org/drawingml/2006/main" prst="roundRect">
             <a:avLst>
@@ -19970,19 +21212,51 @@
           <p:cNvPr id="13" name="">
             <a:extLst xmlns:a="http://schemas.openxmlformats.org/drawingml/2006/main">
               <a:ext uri="{FF2B5EF4-FFF2-40B4-BE49-F238E27FC236}">
-                <a16:creationId xmlns:a16="http://schemas.microsoft.com/office/drawing/2014/main" id="{3F332C62-C5C5-4839-88D5-DF1AFDED37C8}"/>
-              </a:ext>
-            </a:extLst>
-          </p:cNvPr>
-          <p:cNvSpPr>
-            <a:spLocks xmlns:a="http://schemas.openxmlformats.org/drawingml/2006/main" noGrp="1"/>
-          </p:cNvSpPr>
-          <p:nvPr/>
-        </p:nvSpPr>
-        <p:spPr>
-          <a:xfrm xmlns:a="http://schemas.openxmlformats.org/drawingml/2006/main">
-            <a:off x="9448800" y="2238375"/>
-            <a:ext cx="1676400" cy="381000"/>
+                <a16:creationId xmlns:a16="http://schemas.microsoft.com/office/drawing/2014/main" id="{37C7647F-7599-4125-BCD6-8E8569C86E06}"/>
+              </a:ext>
+            </a:extLst>
+          </p:cNvPr>
+          <p:cNvSpPr>
+            <a:spLocks xmlns:a="http://schemas.openxmlformats.org/drawingml/2006/main" noGrp="1"/>
+          </p:cNvSpPr>
+          <p:nvPr/>
+        </p:nvSpPr>
+        <p:spPr>
+          <a:xfrm xmlns:a="http://schemas.openxmlformats.org/drawingml/2006/main">
+            <a:off x="4429125" y="1952625"/>
+            <a:ext cx="47625" cy="1381125"/>
+          </a:xfrm>
+          <a:prstGeom xmlns:a="http://schemas.openxmlformats.org/drawingml/2006/main" prst="rect">
+            <a:avLst/>
+          </a:prstGeom>
+          <a:solidFill xmlns:a="http://schemas.openxmlformats.org/drawingml/2006/main">
+            <a:srgbClr val="EC5A4C"/>
+          </a:solidFill>
+          <a:ln xmlns:a="http://schemas.openxmlformats.org/drawingml/2006/main" w="0">
+            <a:solidFill>
+              <a:srgbClr val="EC5A4C"/>
+            </a:solidFill>
+          </a:ln>
+        </p:spPr>
+      </p:sp>
+      <p:sp>
+        <p:nvSpPr>
+          <p:cNvPr id="14" name="">
+            <a:extLst xmlns:a="http://schemas.openxmlformats.org/drawingml/2006/main">
+              <a:ext uri="{FF2B5EF4-FFF2-40B4-BE49-F238E27FC236}">
+                <a16:creationId xmlns:a16="http://schemas.microsoft.com/office/drawing/2014/main" id="{AB9C76F3-317D-4F5C-99F7-84F6D029DFC8}"/>
+              </a:ext>
+            </a:extLst>
+          </p:cNvPr>
+          <p:cNvSpPr>
+            <a:spLocks xmlns:a="http://schemas.openxmlformats.org/drawingml/2006/main" noGrp="1"/>
+          </p:cNvSpPr>
+          <p:nvPr/>
+        </p:nvSpPr>
+        <p:spPr>
+          <a:xfrm xmlns:a="http://schemas.openxmlformats.org/drawingml/2006/main">
+            <a:off x="4638675" y="2085975"/>
+            <a:ext cx="2867025" cy="266700"/>
           </a:xfrm>
           <a:prstGeom xmlns:a="http://schemas.openxmlformats.org/drawingml/2006/main" prst="rect">
             <a:avLst/>
@@ -20006,42 +21280,42 @@
           </a:bodyPr>
           <a:lstStyle xmlns:a="http://schemas.openxmlformats.org/drawingml/2006/main"/>
           <a:p xmlns:a="http://schemas.openxmlformats.org/drawingml/2006/main">
-            <a:pPr algn="ctr">
-              <a:defRPr sz="2175" b="1">
-                <a:solidFill>
-                  <a:srgbClr val="E8A020"/>
-                </a:solidFill>
-              </a:defRPr>
-            </a:pPr>
-            <a:r>
-              <a:rPr sz="2175" b="1">
-                <a:solidFill>
-                  <a:srgbClr val="E8A020"/>
-                </a:solidFill>
-              </a:rPr>
-              <a:t>~0.48</a:t>
-            </a:r>
-          </a:p>
-        </p:txBody>
-      </p:sp>
-      <p:sp>
-        <p:nvSpPr>
-          <p:cNvPr id="14" name="">
-            <a:extLst xmlns:a="http://schemas.openxmlformats.org/drawingml/2006/main">
-              <a:ext uri="{FF2B5EF4-FFF2-40B4-BE49-F238E27FC236}">
-                <a16:creationId xmlns:a16="http://schemas.microsoft.com/office/drawing/2014/main" id="{08504589-16E1-4EE9-90D9-06558503912E}"/>
-              </a:ext>
-            </a:extLst>
-          </p:cNvPr>
-          <p:cNvSpPr>
-            <a:spLocks xmlns:a="http://schemas.openxmlformats.org/drawingml/2006/main" noGrp="1"/>
-          </p:cNvSpPr>
-          <p:nvPr/>
-        </p:nvSpPr>
-        <p:spPr>
-          <a:xfrm xmlns:a="http://schemas.openxmlformats.org/drawingml/2006/main">
-            <a:off x="9467850" y="2686050"/>
-            <a:ext cx="1638300" cy="304800"/>
+            <a:pPr algn="l">
+              <a:defRPr sz="1350" b="1">
+                <a:solidFill>
+                  <a:srgbClr val="E8F0EE"/>
+                </a:solidFill>
+              </a:defRPr>
+            </a:pPr>
+            <a:r>
+              <a:rPr sz="1350" b="1">
+                <a:solidFill>
+                  <a:srgbClr val="E8F0EE"/>
+                </a:solidFill>
+              </a:rPr>
+              <a:t>Why random split misleads</a:t>
+            </a:r>
+          </a:p>
+        </p:txBody>
+      </p:sp>
+      <p:sp>
+        <p:nvSpPr>
+          <p:cNvPr id="15" name="">
+            <a:extLst xmlns:a="http://schemas.openxmlformats.org/drawingml/2006/main">
+              <a:ext uri="{FF2B5EF4-FFF2-40B4-BE49-F238E27FC236}">
+                <a16:creationId xmlns:a16="http://schemas.microsoft.com/office/drawing/2014/main" id="{31AE0519-1A0D-45C5-B3F5-7AA64D1C0055}"/>
+              </a:ext>
+            </a:extLst>
+          </p:cNvPr>
+          <p:cNvSpPr>
+            <a:spLocks xmlns:a="http://schemas.openxmlformats.org/drawingml/2006/main" noGrp="1"/>
+          </p:cNvSpPr>
+          <p:nvPr/>
+        </p:nvSpPr>
+        <p:spPr>
+          <a:xfrm xmlns:a="http://schemas.openxmlformats.org/drawingml/2006/main">
+            <a:off x="4638675" y="2409825"/>
+            <a:ext cx="2867025" cy="847725"/>
           </a:xfrm>
           <a:prstGeom xmlns:a="http://schemas.openxmlformats.org/drawingml/2006/main" prst="rect">
             <a:avLst/>
@@ -20065,42 +21339,42 @@
           </a:bodyPr>
           <a:lstStyle xmlns:a="http://schemas.openxmlformats.org/drawingml/2006/main"/>
           <a:p xmlns:a="http://schemas.openxmlformats.org/drawingml/2006/main">
-            <a:pPr algn="ctr">
-              <a:defRPr sz="1050" b="0">
+            <a:pPr algn="l">
+              <a:defRPr sz="1200" b="0">
                 <a:solidFill>
                   <a:srgbClr val="9FB3BE"/>
                 </a:solidFill>
               </a:defRPr>
             </a:pPr>
             <a:r>
-              <a:rPr sz="1050" b="0">
+              <a:rPr sz="1200" b="0">
                 <a:solidFill>
                   <a:srgbClr val="9FB3BE"/>
                 </a:solidFill>
               </a:rPr>
-              <a:t>+category R²</a:t>
-            </a:r>
-          </a:p>
-        </p:txBody>
-      </p:sp>
-      <p:sp>
-        <p:nvSpPr>
-          <p:cNvPr id="15" name="">
-            <a:extLst xmlns:a="http://schemas.openxmlformats.org/drawingml/2006/main">
-              <a:ext uri="{FF2B5EF4-FFF2-40B4-BE49-F238E27FC236}">
-                <a16:creationId xmlns:a16="http://schemas.microsoft.com/office/drawing/2014/main" id="{35CE6ED3-DCB4-421E-8306-2E810108F028}"/>
-              </a:ext>
-            </a:extLst>
-          </p:cNvPr>
-          <p:cNvSpPr>
-            <a:spLocks xmlns:a="http://schemas.openxmlformats.org/drawingml/2006/main" noGrp="1"/>
-          </p:cNvSpPr>
-          <p:nvPr/>
-        </p:nvSpPr>
-        <p:spPr>
-          <a:xfrm xmlns:a="http://schemas.openxmlformats.org/drawingml/2006/main">
-            <a:off x="7143750" y="3524250"/>
-            <a:ext cx="4095750" cy="1028700"/>
+              <a:t>A random split trains and tests on rows from the same monitoring sites, so the model can look better than it will in deployment.</a:t>
+            </a:r>
+          </a:p>
+        </p:txBody>
+      </p:sp>
+      <p:sp>
+        <p:nvSpPr>
+          <p:cNvPr id="16" name="">
+            <a:extLst xmlns:a="http://schemas.openxmlformats.org/drawingml/2006/main">
+              <a:ext uri="{FF2B5EF4-FFF2-40B4-BE49-F238E27FC236}">
+                <a16:creationId xmlns:a16="http://schemas.microsoft.com/office/drawing/2014/main" id="{05E3D90F-3114-44CF-82CB-77602856BDDA}"/>
+              </a:ext>
+            </a:extLst>
+          </p:cNvPr>
+          <p:cNvSpPr>
+            <a:spLocks xmlns:a="http://schemas.openxmlformats.org/drawingml/2006/main" noGrp="1"/>
+          </p:cNvSpPr>
+          <p:nvPr/>
+        </p:nvSpPr>
+        <p:spPr>
+          <a:xfrm xmlns:a="http://schemas.openxmlformats.org/drawingml/2006/main">
+            <a:off x="8096250" y="1952625"/>
+            <a:ext cx="3286125" cy="1381125"/>
           </a:xfrm>
           <a:prstGeom xmlns:a="http://schemas.openxmlformats.org/drawingml/2006/main" prst="roundRect">
             <a:avLst>
@@ -20119,22 +21393,54 @@
       </p:sp>
       <p:sp>
         <p:nvSpPr>
-          <p:cNvPr id="16" name="">
-            <a:extLst xmlns:a="http://schemas.openxmlformats.org/drawingml/2006/main">
-              <a:ext uri="{FF2B5EF4-FFF2-40B4-BE49-F238E27FC236}">
-                <a16:creationId xmlns:a16="http://schemas.microsoft.com/office/drawing/2014/main" id="{114ACF64-EA3A-4E68-92FF-CD923FCAC238}"/>
-              </a:ext>
-            </a:extLst>
-          </p:cNvPr>
-          <p:cNvSpPr>
-            <a:spLocks xmlns:a="http://schemas.openxmlformats.org/drawingml/2006/main" noGrp="1"/>
-          </p:cNvSpPr>
-          <p:nvPr/>
-        </p:nvSpPr>
-        <p:spPr>
-          <a:xfrm xmlns:a="http://schemas.openxmlformats.org/drawingml/2006/main">
-            <a:off x="7258050" y="3667125"/>
-            <a:ext cx="3867150" cy="381000"/>
+          <p:cNvPr id="17" name="">
+            <a:extLst xmlns:a="http://schemas.openxmlformats.org/drawingml/2006/main">
+              <a:ext uri="{FF2B5EF4-FFF2-40B4-BE49-F238E27FC236}">
+                <a16:creationId xmlns:a16="http://schemas.microsoft.com/office/drawing/2014/main" id="{F5F2025F-C3AA-405C-8E99-8B3C8DDFE8B5}"/>
+              </a:ext>
+            </a:extLst>
+          </p:cNvPr>
+          <p:cNvSpPr>
+            <a:spLocks xmlns:a="http://schemas.openxmlformats.org/drawingml/2006/main" noGrp="1"/>
+          </p:cNvSpPr>
+          <p:nvPr/>
+        </p:nvSpPr>
+        <p:spPr>
+          <a:xfrm xmlns:a="http://schemas.openxmlformats.org/drawingml/2006/main">
+            <a:off x="8096250" y="1952625"/>
+            <a:ext cx="47625" cy="1381125"/>
+          </a:xfrm>
+          <a:prstGeom xmlns:a="http://schemas.openxmlformats.org/drawingml/2006/main" prst="rect">
+            <a:avLst/>
+          </a:prstGeom>
+          <a:solidFill xmlns:a="http://schemas.openxmlformats.org/drawingml/2006/main">
+            <a:srgbClr val="46C98A"/>
+          </a:solidFill>
+          <a:ln xmlns:a="http://schemas.openxmlformats.org/drawingml/2006/main" w="0">
+            <a:solidFill>
+              <a:srgbClr val="46C98A"/>
+            </a:solidFill>
+          </a:ln>
+        </p:spPr>
+      </p:sp>
+      <p:sp>
+        <p:nvSpPr>
+          <p:cNvPr id="18" name="">
+            <a:extLst xmlns:a="http://schemas.openxmlformats.org/drawingml/2006/main">
+              <a:ext uri="{FF2B5EF4-FFF2-40B4-BE49-F238E27FC236}">
+                <a16:creationId xmlns:a16="http://schemas.microsoft.com/office/drawing/2014/main" id="{F385B435-9B8E-4150-9843-3C390DBB19AF}"/>
+              </a:ext>
+            </a:extLst>
+          </p:cNvPr>
+          <p:cNvSpPr>
+            <a:spLocks xmlns:a="http://schemas.openxmlformats.org/drawingml/2006/main" noGrp="1"/>
+          </p:cNvSpPr>
+          <p:nvPr/>
+        </p:nvSpPr>
+        <p:spPr>
+          <a:xfrm xmlns:a="http://schemas.openxmlformats.org/drawingml/2006/main">
+            <a:off x="8305800" y="2085975"/>
+            <a:ext cx="2867025" cy="266700"/>
           </a:xfrm>
           <a:prstGeom xmlns:a="http://schemas.openxmlformats.org/drawingml/2006/main" prst="rect">
             <a:avLst/>
@@ -20158,42 +21464,42 @@
           </a:bodyPr>
           <a:lstStyle xmlns:a="http://schemas.openxmlformats.org/drawingml/2006/main"/>
           <a:p xmlns:a="http://schemas.openxmlformats.org/drawingml/2006/main">
-            <a:pPr algn="ctr">
-              <a:defRPr sz="2175" b="1">
-                <a:solidFill>
-                  <a:srgbClr val="46C98A"/>
-                </a:solidFill>
-              </a:defRPr>
-            </a:pPr>
-            <a:r>
-              <a:rPr sz="2175" b="1">
-                <a:solidFill>
-                  <a:srgbClr val="46C98A"/>
-                </a:solidFill>
-              </a:rPr>
-              <a:t>~0.55</a:t>
-            </a:r>
-          </a:p>
-        </p:txBody>
-      </p:sp>
-      <p:sp>
-        <p:nvSpPr>
-          <p:cNvPr id="17" name="">
-            <a:extLst xmlns:a="http://schemas.openxmlformats.org/drawingml/2006/main">
-              <a:ext uri="{FF2B5EF4-FFF2-40B4-BE49-F238E27FC236}">
-                <a16:creationId xmlns:a16="http://schemas.microsoft.com/office/drawing/2014/main" id="{B2981F1A-5814-44D3-A13E-550F3CD04AE6}"/>
-              </a:ext>
-            </a:extLst>
-          </p:cNvPr>
-          <p:cNvSpPr>
-            <a:spLocks xmlns:a="http://schemas.openxmlformats.org/drawingml/2006/main" noGrp="1"/>
-          </p:cNvSpPr>
-          <p:nvPr/>
-        </p:nvSpPr>
-        <p:spPr>
-          <a:xfrm xmlns:a="http://schemas.openxmlformats.org/drawingml/2006/main">
-            <a:off x="7277100" y="4114800"/>
-            <a:ext cx="3829050" cy="304800"/>
+            <a:pPr algn="l">
+              <a:defRPr sz="1350" b="1">
+                <a:solidFill>
+                  <a:srgbClr val="E8F0EE"/>
+                </a:solidFill>
+              </a:defRPr>
+            </a:pPr>
+            <a:r>
+              <a:rPr sz="1350" b="1">
+                <a:solidFill>
+                  <a:srgbClr val="E8F0EE"/>
+                </a:solidFill>
+              </a:rPr>
+              <a:t>Honest validation</a:t>
+            </a:r>
+          </a:p>
+        </p:txBody>
+      </p:sp>
+      <p:sp>
+        <p:nvSpPr>
+          <p:cNvPr id="19" name="">
+            <a:extLst xmlns:a="http://schemas.openxmlformats.org/drawingml/2006/main">
+              <a:ext uri="{FF2B5EF4-FFF2-40B4-BE49-F238E27FC236}">
+                <a16:creationId xmlns:a16="http://schemas.microsoft.com/office/drawing/2014/main" id="{E4382091-3DFB-47A9-8732-79AE92D6BEFE}"/>
+              </a:ext>
+            </a:extLst>
+          </p:cNvPr>
+          <p:cNvSpPr>
+            <a:spLocks xmlns:a="http://schemas.openxmlformats.org/drawingml/2006/main" noGrp="1"/>
+          </p:cNvSpPr>
+          <p:nvPr/>
+        </p:nvSpPr>
+        <p:spPr>
+          <a:xfrm xmlns:a="http://schemas.openxmlformats.org/drawingml/2006/main">
+            <a:off x="8305800" y="2409825"/>
+            <a:ext cx="2867025" cy="847725"/>
           </a:xfrm>
           <a:prstGeom xmlns:a="http://schemas.openxmlformats.org/drawingml/2006/main" prst="rect">
             <a:avLst/>
@@ -20217,42 +21523,64 @@
           </a:bodyPr>
           <a:lstStyle xmlns:a="http://schemas.openxmlformats.org/drawingml/2006/main"/>
           <a:p xmlns:a="http://schemas.openxmlformats.org/drawingml/2006/main">
-            <a:pPr algn="ctr">
-              <a:defRPr sz="1050" b="0">
+            <a:pPr algn="l">
+              <a:defRPr sz="1200" b="0">
                 <a:solidFill>
                   <a:srgbClr val="9FB3BE"/>
                 </a:solidFill>
               </a:defRPr>
             </a:pPr>
             <a:r>
-              <a:rPr sz="1050" b="0">
+              <a:rPr sz="1200" b="0">
                 <a:solidFill>
                   <a:srgbClr val="9FB3BE"/>
                 </a:solidFill>
               </a:rPr>
-              <a:t>+category + geodata R²</a:t>
-            </a:r>
-          </a:p>
-        </p:txBody>
-      </p:sp>
-      <p:sp>
-        <p:nvSpPr>
-          <p:cNvPr id="18" name="">
-            <a:extLst xmlns:a="http://schemas.openxmlformats.org/drawingml/2006/main">
-              <a:ext uri="{FF2B5EF4-FFF2-40B4-BE49-F238E27FC236}">
-                <a16:creationId xmlns:a16="http://schemas.microsoft.com/office/drawing/2014/main" id="{1FC49BF9-90FA-4E86-9F92-76F279C08EAD}"/>
-              </a:ext>
-            </a:extLst>
-          </p:cNvPr>
-          <p:cNvSpPr>
-            <a:spLocks xmlns:a="http://schemas.openxmlformats.org/drawingml/2006/main" noGrp="1"/>
-          </p:cNvSpPr>
-          <p:nvPr/>
-        </p:nvSpPr>
-        <p:spPr>
-          <a:xfrm xmlns:a="http://schemas.openxmlformats.org/drawingml/2006/main">
-            <a:off x="7143750" y="5095875"/>
-            <a:ext cx="4095750" cy="800100"/>
+              <a:t>Leave-Sites-Out removes entire monitoring sites from training and tests on those unseen locations.</a:t>
+            </a:r>
+          </a:p>
+        </p:txBody>
+      </p:sp>
+      <p:pic>
+        <p:nvPicPr>
+          <p:cNvPr id="20" name=""/>
+          <p:cNvPicPr>
+            <a:picLocks xmlns:a="http://schemas.openxmlformats.org/drawingml/2006/main" noChangeAspect="1"/>
+          </p:cNvPicPr>
+          <p:nvPr/>
+        </p:nvPicPr>
+        <p:blipFill>
+          <a:blip xmlns:r="http://schemas.openxmlformats.org/officeDocument/2006/relationships" xmlns:a="http://schemas.openxmlformats.org/drawingml/2006/main" r:embed="Rd914d434606449e4"/>
+          <a:stretch xmlns:a="http://schemas.openxmlformats.org/drawingml/2006/main"/>
+        </p:blipFill>
+        <p:spPr>
+          <a:xfrm xmlns:a="http://schemas.openxmlformats.org/drawingml/2006/main">
+            <a:off x="1255436" y="3857625"/>
+            <a:ext cx="4451902" cy="2047875"/>
+          </a:xfrm>
+          <a:prstGeom xmlns:a="http://schemas.openxmlformats.org/drawingml/2006/main" prst="rect">
+            <a:avLst/>
+          </a:prstGeom>
+        </p:spPr>
+      </p:pic>
+      <p:sp>
+        <p:nvSpPr>
+          <p:cNvPr id="21" name="">
+            <a:extLst xmlns:a="http://schemas.openxmlformats.org/drawingml/2006/main">
+              <a:ext uri="{FF2B5EF4-FFF2-40B4-BE49-F238E27FC236}">
+                <a16:creationId xmlns:a16="http://schemas.microsoft.com/office/drawing/2014/main" id="{F31BF548-17BB-4F3D-B8D8-3BAEA4E0C804}"/>
+              </a:ext>
+            </a:extLst>
+          </p:cNvPr>
+          <p:cNvSpPr>
+            <a:spLocks xmlns:a="http://schemas.openxmlformats.org/drawingml/2006/main" noGrp="1"/>
+          </p:cNvSpPr>
+          <p:nvPr/>
+        </p:nvSpPr>
+        <p:spPr>
+          <a:xfrm xmlns:a="http://schemas.openxmlformats.org/drawingml/2006/main">
+            <a:off x="6572250" y="3952875"/>
+            <a:ext cx="2095500" cy="1028700"/>
           </a:xfrm>
           <a:prstGeom xmlns:a="http://schemas.openxmlformats.org/drawingml/2006/main" prst="roundRect">
             <a:avLst>
@@ -20271,22 +21599,326 @@
       </p:sp>
       <p:sp>
         <p:nvSpPr>
-          <p:cNvPr id="19" name="">
-            <a:extLst xmlns:a="http://schemas.openxmlformats.org/drawingml/2006/main">
-              <a:ext uri="{FF2B5EF4-FFF2-40B4-BE49-F238E27FC236}">
-                <a16:creationId xmlns:a16="http://schemas.microsoft.com/office/drawing/2014/main" id="{16B11EEB-2934-4B49-A0C9-5F5F96800C44}"/>
-              </a:ext>
-            </a:extLst>
-          </p:cNvPr>
-          <p:cNvSpPr>
-            <a:spLocks xmlns:a="http://schemas.openxmlformats.org/drawingml/2006/main" noGrp="1"/>
-          </p:cNvSpPr>
-          <p:nvPr/>
-        </p:nvSpPr>
-        <p:spPr>
-          <a:xfrm xmlns:a="http://schemas.openxmlformats.org/drawingml/2006/main">
-            <a:off x="7143750" y="5095875"/>
-            <a:ext cx="47625" cy="800100"/>
+          <p:cNvPr id="22" name="">
+            <a:extLst xmlns:a="http://schemas.openxmlformats.org/drawingml/2006/main">
+              <a:ext uri="{FF2B5EF4-FFF2-40B4-BE49-F238E27FC236}">
+                <a16:creationId xmlns:a16="http://schemas.microsoft.com/office/drawing/2014/main" id="{372664BD-5E79-4E9B-9463-CE548E74C7DC}"/>
+              </a:ext>
+            </a:extLst>
+          </p:cNvPr>
+          <p:cNvSpPr>
+            <a:spLocks xmlns:a="http://schemas.openxmlformats.org/drawingml/2006/main" noGrp="1"/>
+          </p:cNvSpPr>
+          <p:nvPr/>
+        </p:nvSpPr>
+        <p:spPr>
+          <a:xfrm xmlns:a="http://schemas.openxmlformats.org/drawingml/2006/main">
+            <a:off x="6686550" y="4095750"/>
+            <a:ext cx="1866900" cy="381000"/>
+          </a:xfrm>
+          <a:prstGeom xmlns:a="http://schemas.openxmlformats.org/drawingml/2006/main" prst="rect">
+            <a:avLst/>
+          </a:prstGeom>
+          <a:solidFill xmlns:a="http://schemas.openxmlformats.org/drawingml/2006/main">
+            <a:srgbClr val="000000">
+              <a:alpha val="0"/>
+            </a:srgbClr>
+          </a:solidFill>
+          <a:ln xmlns:a="http://schemas.openxmlformats.org/drawingml/2006/main" w="0">
+            <a:solidFill>
+              <a:srgbClr val="000000">
+                <a:alpha val="0"/>
+              </a:srgbClr>
+            </a:solidFill>
+          </a:ln>
+        </p:spPr>
+        <p:txBody>
+          <a:bodyPr xmlns:a="http://schemas.openxmlformats.org/drawingml/2006/main" lIns="0" tIns="0" rIns="0" bIns="0" anchor="ctr">
+            <a:normAutofit fontScale="100000"/>
+          </a:bodyPr>
+          <a:lstStyle xmlns:a="http://schemas.openxmlformats.org/drawingml/2006/main"/>
+          <a:p xmlns:a="http://schemas.openxmlformats.org/drawingml/2006/main">
+            <a:pPr algn="ctr">
+              <a:defRPr sz="2175" b="1">
+                <a:solidFill>
+                  <a:srgbClr val="EC5A4C"/>
+                </a:solidFill>
+              </a:defRPr>
+            </a:pPr>
+            <a:r>
+              <a:rPr sz="2175" b="1">
+                <a:solidFill>
+                  <a:srgbClr val="EC5A4C"/>
+                </a:solidFill>
+              </a:rPr>
+              <a:t>~0.32</a:t>
+            </a:r>
+          </a:p>
+        </p:txBody>
+      </p:sp>
+      <p:sp>
+        <p:nvSpPr>
+          <p:cNvPr id="23" name="">
+            <a:extLst xmlns:a="http://schemas.openxmlformats.org/drawingml/2006/main">
+              <a:ext uri="{FF2B5EF4-FFF2-40B4-BE49-F238E27FC236}">
+                <a16:creationId xmlns:a16="http://schemas.microsoft.com/office/drawing/2014/main" id="{0C7C0A2B-3782-4B56-9B87-01D742738AA6}"/>
+              </a:ext>
+            </a:extLst>
+          </p:cNvPr>
+          <p:cNvSpPr>
+            <a:spLocks xmlns:a="http://schemas.openxmlformats.org/drawingml/2006/main" noGrp="1"/>
+          </p:cNvSpPr>
+          <p:nvPr/>
+        </p:nvSpPr>
+        <p:spPr>
+          <a:xfrm xmlns:a="http://schemas.openxmlformats.org/drawingml/2006/main">
+            <a:off x="6705600" y="4543425"/>
+            <a:ext cx="1828800" cy="304800"/>
+          </a:xfrm>
+          <a:prstGeom xmlns:a="http://schemas.openxmlformats.org/drawingml/2006/main" prst="rect">
+            <a:avLst/>
+          </a:prstGeom>
+          <a:solidFill xmlns:a="http://schemas.openxmlformats.org/drawingml/2006/main">
+            <a:srgbClr val="000000">
+              <a:alpha val="0"/>
+            </a:srgbClr>
+          </a:solidFill>
+          <a:ln xmlns:a="http://schemas.openxmlformats.org/drawingml/2006/main" w="0">
+            <a:solidFill>
+              <a:srgbClr val="000000">
+                <a:alpha val="0"/>
+              </a:srgbClr>
+            </a:solidFill>
+          </a:ln>
+        </p:spPr>
+        <p:txBody>
+          <a:bodyPr xmlns:a="http://schemas.openxmlformats.org/drawingml/2006/main" lIns="0" tIns="0" rIns="0" bIns="0" anchor="ctr">
+            <a:normAutofit fontScale="100000"/>
+          </a:bodyPr>
+          <a:lstStyle xmlns:a="http://schemas.openxmlformats.org/drawingml/2006/main"/>
+          <a:p xmlns:a="http://schemas.openxmlformats.org/drawingml/2006/main">
+            <a:pPr algn="ctr">
+              <a:defRPr sz="1050" b="0">
+                <a:solidFill>
+                  <a:srgbClr val="9FB3BE"/>
+                </a:solidFill>
+              </a:defRPr>
+            </a:pPr>
+            <a:r>
+              <a:rPr sz="1050" b="0">
+                <a:solidFill>
+                  <a:srgbClr val="9FB3BE"/>
+                </a:solidFill>
+              </a:rPr>
+              <a:t>blind leave-site-out R²</a:t>
+            </a:r>
+          </a:p>
+        </p:txBody>
+      </p:sp>
+      <p:sp>
+        <p:nvSpPr>
+          <p:cNvPr id="24" name="">
+            <a:extLst xmlns:a="http://schemas.openxmlformats.org/drawingml/2006/main">
+              <a:ext uri="{FF2B5EF4-FFF2-40B4-BE49-F238E27FC236}">
+                <a16:creationId xmlns:a16="http://schemas.microsoft.com/office/drawing/2014/main" id="{BA2C8887-C11C-4D55-ABB5-D5923120D1F5}"/>
+              </a:ext>
+            </a:extLst>
+          </p:cNvPr>
+          <p:cNvSpPr>
+            <a:spLocks xmlns:a="http://schemas.openxmlformats.org/drawingml/2006/main" noGrp="1"/>
+          </p:cNvSpPr>
+          <p:nvPr/>
+        </p:nvSpPr>
+        <p:spPr>
+          <a:xfrm xmlns:a="http://schemas.openxmlformats.org/drawingml/2006/main">
+            <a:off x="8953500" y="3952875"/>
+            <a:ext cx="2000250" cy="1028700"/>
+          </a:xfrm>
+          <a:prstGeom xmlns:a="http://schemas.openxmlformats.org/drawingml/2006/main" prst="roundRect">
+            <a:avLst>
+              <a:gd name="adj" fmla="val 9000"/>
+            </a:avLst>
+          </a:prstGeom>
+          <a:solidFill xmlns:a="http://schemas.openxmlformats.org/drawingml/2006/main">
+            <a:srgbClr val="122030"/>
+          </a:solidFill>
+          <a:ln xmlns:a="http://schemas.openxmlformats.org/drawingml/2006/main" w="9525">
+            <a:solidFill>
+              <a:srgbClr val="243244"/>
+            </a:solidFill>
+          </a:ln>
+        </p:spPr>
+      </p:sp>
+      <p:sp>
+        <p:nvSpPr>
+          <p:cNvPr id="25" name="">
+            <a:extLst xmlns:a="http://schemas.openxmlformats.org/drawingml/2006/main">
+              <a:ext uri="{FF2B5EF4-FFF2-40B4-BE49-F238E27FC236}">
+                <a16:creationId xmlns:a16="http://schemas.microsoft.com/office/drawing/2014/main" id="{0CB5DC27-7892-4841-BD28-7982D590B3FB}"/>
+              </a:ext>
+            </a:extLst>
+          </p:cNvPr>
+          <p:cNvSpPr>
+            <a:spLocks xmlns:a="http://schemas.openxmlformats.org/drawingml/2006/main" noGrp="1"/>
+          </p:cNvSpPr>
+          <p:nvPr/>
+        </p:nvSpPr>
+        <p:spPr>
+          <a:xfrm xmlns:a="http://schemas.openxmlformats.org/drawingml/2006/main">
+            <a:off x="9067800" y="4095750"/>
+            <a:ext cx="1771650" cy="381000"/>
+          </a:xfrm>
+          <a:prstGeom xmlns:a="http://schemas.openxmlformats.org/drawingml/2006/main" prst="rect">
+            <a:avLst/>
+          </a:prstGeom>
+          <a:solidFill xmlns:a="http://schemas.openxmlformats.org/drawingml/2006/main">
+            <a:srgbClr val="000000">
+              <a:alpha val="0"/>
+            </a:srgbClr>
+          </a:solidFill>
+          <a:ln xmlns:a="http://schemas.openxmlformats.org/drawingml/2006/main" w="0">
+            <a:solidFill>
+              <a:srgbClr val="000000">
+                <a:alpha val="0"/>
+              </a:srgbClr>
+            </a:solidFill>
+          </a:ln>
+        </p:spPr>
+        <p:txBody>
+          <a:bodyPr xmlns:a="http://schemas.openxmlformats.org/drawingml/2006/main" lIns="0" tIns="0" rIns="0" bIns="0" anchor="ctr">
+            <a:normAutofit fontScale="100000"/>
+          </a:bodyPr>
+          <a:lstStyle xmlns:a="http://schemas.openxmlformats.org/drawingml/2006/main"/>
+          <a:p xmlns:a="http://schemas.openxmlformats.org/drawingml/2006/main">
+            <a:pPr algn="ctr">
+              <a:defRPr sz="2175" b="1">
+                <a:solidFill>
+                  <a:srgbClr val="E8A020"/>
+                </a:solidFill>
+              </a:defRPr>
+            </a:pPr>
+            <a:r>
+              <a:rPr sz="2175" b="1">
+                <a:solidFill>
+                  <a:srgbClr val="E8A020"/>
+                </a:solidFill>
+              </a:rPr>
+              <a:t>~0.48</a:t>
+            </a:r>
+          </a:p>
+        </p:txBody>
+      </p:sp>
+      <p:sp>
+        <p:nvSpPr>
+          <p:cNvPr id="26" name="">
+            <a:extLst xmlns:a="http://schemas.openxmlformats.org/drawingml/2006/main">
+              <a:ext uri="{FF2B5EF4-FFF2-40B4-BE49-F238E27FC236}">
+                <a16:creationId xmlns:a16="http://schemas.microsoft.com/office/drawing/2014/main" id="{4980DF68-9E64-4A01-97EB-55C76D7D78D0}"/>
+              </a:ext>
+            </a:extLst>
+          </p:cNvPr>
+          <p:cNvSpPr>
+            <a:spLocks xmlns:a="http://schemas.openxmlformats.org/drawingml/2006/main" noGrp="1"/>
+          </p:cNvSpPr>
+          <p:nvPr/>
+        </p:nvSpPr>
+        <p:spPr>
+          <a:xfrm xmlns:a="http://schemas.openxmlformats.org/drawingml/2006/main">
+            <a:off x="9086850" y="4543425"/>
+            <a:ext cx="1733550" cy="304800"/>
+          </a:xfrm>
+          <a:prstGeom xmlns:a="http://schemas.openxmlformats.org/drawingml/2006/main" prst="rect">
+            <a:avLst/>
+          </a:prstGeom>
+          <a:solidFill xmlns:a="http://schemas.openxmlformats.org/drawingml/2006/main">
+            <a:srgbClr val="000000">
+              <a:alpha val="0"/>
+            </a:srgbClr>
+          </a:solidFill>
+          <a:ln xmlns:a="http://schemas.openxmlformats.org/drawingml/2006/main" w="0">
+            <a:solidFill>
+              <a:srgbClr val="000000">
+                <a:alpha val="0"/>
+              </a:srgbClr>
+            </a:solidFill>
+          </a:ln>
+        </p:spPr>
+        <p:txBody>
+          <a:bodyPr xmlns:a="http://schemas.openxmlformats.org/drawingml/2006/main" lIns="0" tIns="0" rIns="0" bIns="0" anchor="ctr">
+            <a:normAutofit fontScale="100000"/>
+          </a:bodyPr>
+          <a:lstStyle xmlns:a="http://schemas.openxmlformats.org/drawingml/2006/main"/>
+          <a:p xmlns:a="http://schemas.openxmlformats.org/drawingml/2006/main">
+            <a:pPr algn="ctr">
+              <a:defRPr sz="1050" b="0">
+                <a:solidFill>
+                  <a:srgbClr val="9FB3BE"/>
+                </a:solidFill>
+              </a:defRPr>
+            </a:pPr>
+            <a:r>
+              <a:rPr sz="1050" b="0">
+                <a:solidFill>
+                  <a:srgbClr val="9FB3BE"/>
+                </a:solidFill>
+              </a:rPr>
+              <a:t>+category R²</a:t>
+            </a:r>
+          </a:p>
+        </p:txBody>
+      </p:sp>
+      <p:sp>
+        <p:nvSpPr>
+          <p:cNvPr id="27" name="">
+            <a:extLst xmlns:a="http://schemas.openxmlformats.org/drawingml/2006/main">
+              <a:ext uri="{FF2B5EF4-FFF2-40B4-BE49-F238E27FC236}">
+                <a16:creationId xmlns:a16="http://schemas.microsoft.com/office/drawing/2014/main" id="{A26F0D7B-5C55-4029-84AD-6CC6B2E1BA75}"/>
+              </a:ext>
+            </a:extLst>
+          </p:cNvPr>
+          <p:cNvSpPr>
+            <a:spLocks xmlns:a="http://schemas.openxmlformats.org/drawingml/2006/main" noGrp="1"/>
+          </p:cNvSpPr>
+          <p:nvPr/>
+        </p:nvSpPr>
+        <p:spPr>
+          <a:xfrm xmlns:a="http://schemas.openxmlformats.org/drawingml/2006/main">
+            <a:off x="6572250" y="5286375"/>
+            <a:ext cx="4381500" cy="666750"/>
+          </a:xfrm>
+          <a:prstGeom xmlns:a="http://schemas.openxmlformats.org/drawingml/2006/main" prst="roundRect">
+            <a:avLst>
+              <a:gd name="adj" fmla="val 9000"/>
+            </a:avLst>
+          </a:prstGeom>
+          <a:solidFill xmlns:a="http://schemas.openxmlformats.org/drawingml/2006/main">
+            <a:srgbClr val="122030"/>
+          </a:solidFill>
+          <a:ln xmlns:a="http://schemas.openxmlformats.org/drawingml/2006/main" w="9525">
+            <a:solidFill>
+              <a:srgbClr val="243244"/>
+            </a:solidFill>
+          </a:ln>
+        </p:spPr>
+      </p:sp>
+      <p:sp>
+        <p:nvSpPr>
+          <p:cNvPr id="28" name="">
+            <a:extLst xmlns:a="http://schemas.openxmlformats.org/drawingml/2006/main">
+              <a:ext uri="{FF2B5EF4-FFF2-40B4-BE49-F238E27FC236}">
+                <a16:creationId xmlns:a16="http://schemas.microsoft.com/office/drawing/2014/main" id="{54533725-F669-43CC-9AE7-6CE159BCCBC0}"/>
+              </a:ext>
+            </a:extLst>
+          </p:cNvPr>
+          <p:cNvSpPr>
+            <a:spLocks xmlns:a="http://schemas.openxmlformats.org/drawingml/2006/main" noGrp="1"/>
+          </p:cNvSpPr>
+          <p:nvPr/>
+        </p:nvSpPr>
+        <p:spPr>
+          <a:xfrm xmlns:a="http://schemas.openxmlformats.org/drawingml/2006/main">
+            <a:off x="6572250" y="5286375"/>
+            <a:ext cx="47625" cy="666750"/>
           </a:xfrm>
           <a:prstGeom xmlns:a="http://schemas.openxmlformats.org/drawingml/2006/main" prst="rect">
             <a:avLst/>
@@ -20303,22 +21935,22 @@
       </p:sp>
       <p:sp>
         <p:nvSpPr>
-          <p:cNvPr id="20" name="">
-            <a:extLst xmlns:a="http://schemas.openxmlformats.org/drawingml/2006/main">
-              <a:ext uri="{FF2B5EF4-FFF2-40B4-BE49-F238E27FC236}">
-                <a16:creationId xmlns:a16="http://schemas.microsoft.com/office/drawing/2014/main" id="{DD3079BA-9CF8-4180-B5BA-ECF996D1B917}"/>
-              </a:ext>
-            </a:extLst>
-          </p:cNvPr>
-          <p:cNvSpPr>
-            <a:spLocks xmlns:a="http://schemas.openxmlformats.org/drawingml/2006/main" noGrp="1"/>
-          </p:cNvSpPr>
-          <p:nvPr/>
-        </p:nvSpPr>
-        <p:spPr>
-          <a:xfrm xmlns:a="http://schemas.openxmlformats.org/drawingml/2006/main">
-            <a:off x="7353300" y="5229225"/>
-            <a:ext cx="3676650" cy="266700"/>
+          <p:cNvPr id="29" name="">
+            <a:extLst xmlns:a="http://schemas.openxmlformats.org/drawingml/2006/main">
+              <a:ext uri="{FF2B5EF4-FFF2-40B4-BE49-F238E27FC236}">
+                <a16:creationId xmlns:a16="http://schemas.microsoft.com/office/drawing/2014/main" id="{7A242C0A-9803-417F-A9D6-D141F8DB346E}"/>
+              </a:ext>
+            </a:extLst>
+          </p:cNvPr>
+          <p:cNvSpPr>
+            <a:spLocks xmlns:a="http://schemas.openxmlformats.org/drawingml/2006/main" noGrp="1"/>
+          </p:cNvSpPr>
+          <p:nvPr/>
+        </p:nvSpPr>
+        <p:spPr>
+          <a:xfrm xmlns:a="http://schemas.openxmlformats.org/drawingml/2006/main">
+            <a:off x="6781800" y="5419725"/>
+            <a:ext cx="3962400" cy="266700"/>
           </a:xfrm>
           <a:prstGeom xmlns:a="http://schemas.openxmlformats.org/drawingml/2006/main" prst="rect">
             <a:avLst/>
@@ -20355,49 +21987,49 @@
                   <a:srgbClr val="E8F0EE"/>
                 </a:solidFill>
               </a:rPr>
-              <a:t>Key message</a:t>
-            </a:r>
-          </a:p>
-        </p:txBody>
-      </p:sp>
-      <p:sp>
-        <p:nvSpPr>
-          <p:cNvPr id="21" name="">
-            <a:extLst xmlns:a="http://schemas.openxmlformats.org/drawingml/2006/main">
-              <a:ext uri="{FF2B5EF4-FFF2-40B4-BE49-F238E27FC236}">
-                <a16:creationId xmlns:a16="http://schemas.microsoft.com/office/drawing/2014/main" id="{1612219E-6F2F-47F6-9721-298C43EAC9BD}"/>
-              </a:ext>
-            </a:extLst>
-          </p:cNvPr>
-          <p:cNvSpPr>
-            <a:spLocks xmlns:a="http://schemas.openxmlformats.org/drawingml/2006/main" noGrp="1"/>
-          </p:cNvSpPr>
-          <p:nvPr/>
-        </p:nvSpPr>
-        <p:spPr>
-          <a:xfrm xmlns:a="http://schemas.openxmlformats.org/drawingml/2006/main">
-            <a:off x="7353300" y="5553075"/>
-            <a:ext cx="3676650" cy="266700"/>
-          </a:xfrm>
-          <a:prstGeom xmlns:a="http://schemas.openxmlformats.org/drawingml/2006/main" prst="rect">
-            <a:avLst/>
-          </a:prstGeom>
-          <a:solidFill xmlns:a="http://schemas.openxmlformats.org/drawingml/2006/main">
-            <a:srgbClr val="000000">
-              <a:alpha val="0"/>
-            </a:srgbClr>
-          </a:solidFill>
-          <a:ln xmlns:a="http://schemas.openxmlformats.org/drawingml/2006/main" w="0">
-            <a:solidFill>
-              <a:srgbClr val="000000">
-                <a:alpha val="0"/>
-              </a:srgbClr>
-            </a:solidFill>
-          </a:ln>
-        </p:spPr>
-        <p:txBody>
-          <a:bodyPr xmlns:a="http://schemas.openxmlformats.org/drawingml/2006/main" lIns="0" tIns="0" rIns="0" bIns="0" anchor="ctr">
-            <a:normAutofit fontScale="73345"/>
+              <a:t>Transition</a:t>
+            </a:r>
+          </a:p>
+        </p:txBody>
+      </p:sp>
+      <p:sp>
+        <p:nvSpPr>
+          <p:cNvPr id="30" name="">
+            <a:extLst xmlns:a="http://schemas.openxmlformats.org/drawingml/2006/main">
+              <a:ext uri="{FF2B5EF4-FFF2-40B4-BE49-F238E27FC236}">
+                <a16:creationId xmlns:a16="http://schemas.microsoft.com/office/drawing/2014/main" id="{594A39DA-9ADC-4CA7-9281-93DA3F347F38}"/>
+              </a:ext>
+            </a:extLst>
+          </p:cNvPr>
+          <p:cNvSpPr>
+            <a:spLocks xmlns:a="http://schemas.openxmlformats.org/drawingml/2006/main" noGrp="1"/>
+          </p:cNvSpPr>
+          <p:nvPr/>
+        </p:nvSpPr>
+        <p:spPr>
+          <a:xfrm xmlns:a="http://schemas.openxmlformats.org/drawingml/2006/main">
+            <a:off x="6781800" y="5743575"/>
+            <a:ext cx="3962400" cy="133350"/>
+          </a:xfrm>
+          <a:prstGeom xmlns:a="http://schemas.openxmlformats.org/drawingml/2006/main" prst="rect">
+            <a:avLst/>
+          </a:prstGeom>
+          <a:solidFill xmlns:a="http://schemas.openxmlformats.org/drawingml/2006/main">
+            <a:srgbClr val="000000">
+              <a:alpha val="0"/>
+            </a:srgbClr>
+          </a:solidFill>
+          <a:ln xmlns:a="http://schemas.openxmlformats.org/drawingml/2006/main" w="0">
+            <a:solidFill>
+              <a:srgbClr val="000000">
+                <a:alpha val="0"/>
+              </a:srgbClr>
+            </a:solidFill>
+          </a:ln>
+        </p:spPr>
+        <p:txBody>
+          <a:bodyPr xmlns:a="http://schemas.openxmlformats.org/drawingml/2006/main" lIns="0" tIns="0" rIns="0" bIns="0" anchor="ctr">
+            <a:normAutofit fontScale="65853"/>
           </a:bodyPr>
           <a:lstStyle xmlns:a="http://schemas.openxmlformats.org/drawingml/2006/main"/>
           <a:p xmlns:a="http://schemas.openxmlformats.org/drawingml/2006/main">
@@ -20414,7 +22046,7 @@
                   <a:srgbClr val="9FB3BE"/>
                 </a:solidFill>
               </a:rPr>
-              <a:t>Categorizing sites into pollution regimes provides the largest new-site improvement.</a:t>
+              <a:t>The question becomes: how can the model understand what kind of place a new site is?</a:t>
             </a:r>
           </a:p>
         </p:txBody>
@@ -20422,7 +22054,7 @@
     </p:spTree>
     <p:extLst>
       <p:ext uri="{BB962C8B-B14F-4D97-AF65-F5344CB8AC3E}">
-        <p14:creationId xmlns:p14="http://schemas.microsoft.com/office/powerpoint/2010/main" val="1513556629"/>
+        <p14:creationId xmlns:p14="http://schemas.microsoft.com/office/powerpoint/2010/main" val="859508091"/>
       </p:ext>
     </p:extLst>
   </p:cSld>
